--- a/Programacion II/Clases/Clase 3 - Pilas y colas/Presentacion.pptx
+++ b/Programacion II/Clases/Clase 3 - Pilas y colas/Presentacion.pptx
@@ -18,6 +18,10 @@
     <p:sldId id="266" r:id="rId17"/>
     <p:sldId id="267" r:id="rId18"/>
     <p:sldId id="268" r:id="rId19"/>
+    <p:sldId id="269" r:id="rId20"/>
+    <p:sldId id="270" r:id="rId21"/>
+    <p:sldId id="271" r:id="rId22"/>
+    <p:sldId id="272" r:id="rId23"/>
   </p:sldIdLst>
   <p:sldSz cx="12191695" cy="6858000" type="screen4x3"/>
   <p:notesSz cx="6858000" cy="9144000"/>
@@ -3618,154 +3622,21 @@
                 </a:solidFill>
                 <a:latin typeface="Calibri"/>
               </a:rPr>
-              <a:t>Antes de entregar — autochequeo</a:t>
-            </a:r>
-          </a:p>
-        </p:txBody>
-      </p:sp>
-      <p:sp>
-        <p:nvSpPr>
-          <p:cNvPr id="5" name="Rounded Rectangle 4"/>
-          <p:cNvSpPr/>
-          <p:nvPr/>
-        </p:nvSpPr>
-        <p:spPr>
-          <a:xfrm>
-            <a:off x="457200" y="1261872"/>
-            <a:ext cx="11277295" cy="566928"/>
-          </a:xfrm>
-          <a:prstGeom prst="roundRect">
-            <a:avLst>
-              <a:gd name="adj" fmla="val 12000"/>
-            </a:avLst>
-          </a:prstGeom>
-          <a:solidFill>
-            <a:srgbClr val="F2F2F2"/>
-          </a:solidFill>
-          <a:ln>
-            <a:noFill/>
-          </a:ln>
-        </p:spPr>
-        <p:style>
-          <a:lnRef idx="1">
-            <a:schemeClr val="accent1"/>
-          </a:lnRef>
-          <a:fillRef idx="3">
-            <a:schemeClr val="accent1"/>
-          </a:fillRef>
-          <a:effectRef idx="2">
-            <a:schemeClr val="accent1"/>
-          </a:effectRef>
-          <a:fontRef idx="minor">
-            <a:schemeClr val="lt1"/>
-          </a:fontRef>
-        </p:style>
-        <p:txBody>
-          <a:bodyPr rtlCol="0" anchor="ctr"/>
-          <a:lstStyle/>
-          <a:p>
-            <a:pPr algn="ctr"/>
-          </a:p>
-        </p:txBody>
-      </p:sp>
-      <p:sp>
-        <p:nvSpPr>
-          <p:cNvPr id="6" name="Rectangle 5"/>
-          <p:cNvSpPr/>
-          <p:nvPr/>
-        </p:nvSpPr>
-        <p:spPr>
-          <a:xfrm>
-            <a:off x="640080" y="1408175"/>
-            <a:ext cx="274320" cy="274320"/>
-          </a:xfrm>
-          <a:prstGeom prst="rect">
-            <a:avLst/>
-          </a:prstGeom>
-          <a:solidFill>
-            <a:srgbClr val="FFFFFF"/>
-          </a:solidFill>
-          <a:ln>
-            <a:solidFill>
-              <a:srgbClr val="333333"/>
-            </a:solidFill>
-          </a:ln>
-        </p:spPr>
-        <p:style>
-          <a:lnRef idx="1">
-            <a:schemeClr val="accent1"/>
-          </a:lnRef>
-          <a:fillRef idx="3">
-            <a:schemeClr val="accent1"/>
-          </a:fillRef>
-          <a:effectRef idx="2">
-            <a:schemeClr val="accent1"/>
-          </a:effectRef>
-          <a:fontRef idx="minor">
-            <a:schemeClr val="lt1"/>
-          </a:fontRef>
-        </p:style>
-        <p:txBody>
-          <a:bodyPr rtlCol="0" anchor="ctr"/>
-          <a:lstStyle/>
-          <a:p>
-            <a:pPr algn="ctr"/>
-          </a:p>
-        </p:txBody>
-      </p:sp>
-      <p:sp>
-        <p:nvSpPr>
-          <p:cNvPr id="7" name="Rectangle 6"/>
-          <p:cNvSpPr/>
-          <p:nvPr/>
-        </p:nvSpPr>
-        <p:spPr>
-          <a:xfrm>
-            <a:off x="640080" y="1408175"/>
-            <a:ext cx="73152" cy="274320"/>
-          </a:xfrm>
-          <a:prstGeom prst="rect">
-            <a:avLst/>
-          </a:prstGeom>
-          <a:solidFill>
-            <a:srgbClr val="269CCB"/>
-          </a:solidFill>
-          <a:ln>
-            <a:noFill/>
-          </a:ln>
-        </p:spPr>
-        <p:style>
-          <a:lnRef idx="1">
-            <a:schemeClr val="accent1"/>
-          </a:lnRef>
-          <a:fillRef idx="3">
-            <a:schemeClr val="accent1"/>
-          </a:fillRef>
-          <a:effectRef idx="2">
-            <a:schemeClr val="accent1"/>
-          </a:effectRef>
-          <a:fontRef idx="minor">
-            <a:schemeClr val="lt1"/>
-          </a:fontRef>
-        </p:style>
-        <p:txBody>
-          <a:bodyPr rtlCol="0" anchor="ctr"/>
-          <a:lstStyle/>
-          <a:p>
-            <a:pPr algn="ctr"/>
-          </a:p>
-        </p:txBody>
-      </p:sp>
-      <p:sp>
-        <p:nvSpPr>
-          <p:cNvPr id="8" name="TextBox 7"/>
+              <a:t>Demo del dia</a:t>
+            </a:r>
+          </a:p>
+        </p:txBody>
+      </p:sp>
+      <p:sp>
+        <p:nvSpPr>
+          <p:cNvPr id="5" name="TextBox 4"/>
           <p:cNvSpPr txBox="1"/>
           <p:nvPr/>
         </p:nvSpPr>
         <p:spPr>
           <a:xfrm>
-            <a:off x="1097280" y="1353312"/>
-            <a:ext cx="10362895" cy="402336"/>
+            <a:off x="457200" y="1170432"/>
+            <a:ext cx="11277295" cy="5230368"/>
           </a:xfrm>
           <a:prstGeom prst="rect">
             <a:avLst/>
@@ -3773,354 +3644,99 @@
           <a:noFill/>
         </p:spPr>
         <p:txBody>
-          <a:bodyPr wrap="square" anchor="ctr"/>
-          <a:lstStyle/>
-          <a:p>
-            <a:r>
-              <a:rPr sz="1500" b="0" i="0">
+          <a:bodyPr wrap="square">
+            <a:spAutoFit/>
+          </a:bodyPr>
+          <a:lstStyle/>
+          <a:p>
+            <a:pPr>
+              <a:spcAft>
+                <a:spcPts val="800"/>
+              </a:spcAft>
+            </a:pPr>
+            <a:r>
+              <a:rPr sz="2000" b="0" i="0">
                 <a:solidFill>
                   <a:srgbClr val="333333"/>
                 </a:solidFill>
                 <a:latin typeface="Calibri"/>
               </a:rPr>
-              <a:t>Si su ciclo while nunca termina y la consola se llena con el mismo nombre, cual de los dos metodos esta usando dentro del ciclo: el que mira o el que saca?</a:t>
-            </a:r>
-          </a:p>
-        </p:txBody>
-      </p:sp>
-      <p:sp>
-        <p:nvSpPr>
-          <p:cNvPr id="9" name="Rounded Rectangle 8"/>
-          <p:cNvSpPr/>
-          <p:nvPr/>
-        </p:nvSpPr>
-        <p:spPr>
-          <a:xfrm>
-            <a:off x="457200" y="1938528"/>
-            <a:ext cx="11277295" cy="566928"/>
-          </a:xfrm>
-          <a:prstGeom prst="roundRect">
-            <a:avLst>
-              <a:gd name="adj" fmla="val 12000"/>
-            </a:avLst>
-          </a:prstGeom>
-          <a:solidFill>
-            <a:srgbClr val="F2F2F2"/>
-          </a:solidFill>
-          <a:ln>
-            <a:noFill/>
-          </a:ln>
-        </p:spPr>
-        <p:style>
-          <a:lnRef idx="1">
-            <a:schemeClr val="accent1"/>
-          </a:lnRef>
-          <a:fillRef idx="3">
-            <a:schemeClr val="accent1"/>
-          </a:fillRef>
-          <a:effectRef idx="2">
-            <a:schemeClr val="accent1"/>
-          </a:effectRef>
-          <a:fontRef idx="minor">
-            <a:schemeClr val="lt1"/>
-          </a:fontRef>
-        </p:style>
-        <p:txBody>
-          <a:bodyPr rtlCol="0" anchor="ctr"/>
-          <a:lstStyle/>
-          <a:p>
-            <a:pPr algn="ctr"/>
-          </a:p>
-        </p:txBody>
-      </p:sp>
-      <p:sp>
-        <p:nvSpPr>
-          <p:cNvPr id="10" name="Rectangle 9"/>
-          <p:cNvSpPr/>
-          <p:nvPr/>
-        </p:nvSpPr>
-        <p:spPr>
-          <a:xfrm>
-            <a:off x="640080" y="2084832"/>
-            <a:ext cx="274320" cy="274320"/>
-          </a:xfrm>
-          <a:prstGeom prst="rect">
-            <a:avLst/>
-          </a:prstGeom>
-          <a:solidFill>
-            <a:srgbClr val="FFFFFF"/>
-          </a:solidFill>
-          <a:ln>
-            <a:solidFill>
-              <a:srgbClr val="333333"/>
-            </a:solidFill>
-          </a:ln>
-        </p:spPr>
-        <p:style>
-          <a:lnRef idx="1">
-            <a:schemeClr val="accent1"/>
-          </a:lnRef>
-          <a:fillRef idx="3">
-            <a:schemeClr val="accent1"/>
-          </a:fillRef>
-          <a:effectRef idx="2">
-            <a:schemeClr val="accent1"/>
-          </a:effectRef>
-          <a:fontRef idx="minor">
-            <a:schemeClr val="lt1"/>
-          </a:fontRef>
-        </p:style>
-        <p:txBody>
-          <a:bodyPr rtlCol="0" anchor="ctr"/>
-          <a:lstStyle/>
-          <a:p>
-            <a:pPr algn="ctr"/>
-          </a:p>
-        </p:txBody>
-      </p:sp>
-      <p:sp>
-        <p:nvSpPr>
-          <p:cNvPr id="11" name="Rectangle 10"/>
-          <p:cNvSpPr/>
-          <p:nvPr/>
-        </p:nvSpPr>
-        <p:spPr>
-          <a:xfrm>
-            <a:off x="640080" y="2084832"/>
-            <a:ext cx="73152" cy="274320"/>
-          </a:xfrm>
-          <a:prstGeom prst="rect">
-            <a:avLst/>
-          </a:prstGeom>
-          <a:solidFill>
-            <a:srgbClr val="269CCB"/>
-          </a:solidFill>
-          <a:ln>
-            <a:noFill/>
-          </a:ln>
-        </p:spPr>
-        <p:style>
-          <a:lnRef idx="1">
-            <a:schemeClr val="accent1"/>
-          </a:lnRef>
-          <a:fillRef idx="3">
-            <a:schemeClr val="accent1"/>
-          </a:fillRef>
-          <a:effectRef idx="2">
-            <a:schemeClr val="accent1"/>
-          </a:effectRef>
-          <a:fontRef idx="minor">
-            <a:schemeClr val="lt1"/>
-          </a:fontRef>
-        </p:style>
-        <p:txBody>
-          <a:bodyPr rtlCol="0" anchor="ctr"/>
-          <a:lstStyle/>
-          <a:p>
-            <a:pPr algn="ctr"/>
-          </a:p>
-        </p:txBody>
-      </p:sp>
-      <p:sp>
-        <p:nvSpPr>
-          <p:cNvPr id="12" name="TextBox 11"/>
-          <p:cNvSpPr txBox="1"/>
-          <p:nvPr/>
-        </p:nvSpPr>
-        <p:spPr>
-          <a:xfrm>
-            <a:off x="1097280" y="2029968"/>
-            <a:ext cx="10362895" cy="402336"/>
-          </a:xfrm>
-          <a:prstGeom prst="rect">
-            <a:avLst/>
-          </a:prstGeom>
-          <a:noFill/>
-        </p:spPr>
-        <p:txBody>
-          <a:bodyPr wrap="square" anchor="ctr"/>
-          <a:lstStyle/>
-          <a:p>
-            <a:r>
-              <a:rPr sz="1500" b="0" i="0">
+              <a:t>–   </a:t>
+            </a:r>
+            <a:r>
+              <a:rPr sz="2000" b="1" i="0">
                 <a:solidFill>
                   <a:srgbClr val="333333"/>
                 </a:solidFill>
                 <a:latin typeface="Calibri"/>
               </a:rPr>
-              <a:t>Si necesita sacar a una mascota que esta en la mitad de la fila, la estructura que eligio sigue siendo la adecuada, o el requisito le esta pidiendo otra cosa?</a:t>
-            </a:r>
-          </a:p>
-        </p:txBody>
-      </p:sp>
-      <p:sp>
-        <p:nvSpPr>
-          <p:cNvPr id="13" name="Rounded Rectangle 12"/>
-          <p:cNvSpPr/>
-          <p:nvPr/>
-        </p:nvSpPr>
-        <p:spPr>
-          <a:xfrm>
-            <a:off x="457200" y="2615184"/>
-            <a:ext cx="11277295" cy="566928"/>
-          </a:xfrm>
-          <a:prstGeom prst="roundRect">
-            <a:avLst>
-              <a:gd name="adj" fmla="val 12000"/>
-            </a:avLst>
-          </a:prstGeom>
-          <a:solidFill>
-            <a:srgbClr val="F2F2F2"/>
-          </a:solidFill>
-          <a:ln>
-            <a:noFill/>
-          </a:ln>
-        </p:spPr>
-        <p:style>
-          <a:lnRef idx="1">
-            <a:schemeClr val="accent1"/>
-          </a:lnRef>
-          <a:fillRef idx="3">
-            <a:schemeClr val="accent1"/>
-          </a:fillRef>
-          <a:effectRef idx="2">
-            <a:schemeClr val="accent1"/>
-          </a:effectRef>
-          <a:fontRef idx="minor">
-            <a:schemeClr val="lt1"/>
-          </a:fontRef>
-        </p:style>
-        <p:txBody>
-          <a:bodyPr rtlCol="0" anchor="ctr"/>
-          <a:lstStyle/>
-          <a:p>
-            <a:pPr algn="ctr"/>
-          </a:p>
-        </p:txBody>
-      </p:sp>
-      <p:sp>
-        <p:nvSpPr>
-          <p:cNvPr id="14" name="Rectangle 13"/>
-          <p:cNvSpPr/>
-          <p:nvPr/>
-        </p:nvSpPr>
-        <p:spPr>
-          <a:xfrm>
-            <a:off x="640080" y="2761488"/>
-            <a:ext cx="274320" cy="274320"/>
-          </a:xfrm>
-          <a:prstGeom prst="rect">
-            <a:avLst/>
-          </a:prstGeom>
-          <a:solidFill>
-            <a:srgbClr val="FFFFFF"/>
-          </a:solidFill>
-          <a:ln>
-            <a:solidFill>
-              <a:srgbClr val="333333"/>
-            </a:solidFill>
-          </a:ln>
-        </p:spPr>
-        <p:style>
-          <a:lnRef idx="1">
-            <a:schemeClr val="accent1"/>
-          </a:lnRef>
-          <a:fillRef idx="3">
-            <a:schemeClr val="accent1"/>
-          </a:fillRef>
-          <a:effectRef idx="2">
-            <a:schemeClr val="accent1"/>
-          </a:effectRef>
-          <a:fontRef idx="minor">
-            <a:schemeClr val="lt1"/>
-          </a:fontRef>
-        </p:style>
-        <p:txBody>
-          <a:bodyPr rtlCol="0" anchor="ctr"/>
-          <a:lstStyle/>
-          <a:p>
-            <a:pPr algn="ctr"/>
-          </a:p>
-        </p:txBody>
-      </p:sp>
-      <p:sp>
-        <p:nvSpPr>
-          <p:cNvPr id="15" name="Rectangle 14"/>
-          <p:cNvSpPr/>
-          <p:nvPr/>
-        </p:nvSpPr>
-        <p:spPr>
-          <a:xfrm>
-            <a:off x="640080" y="2761488"/>
-            <a:ext cx="73152" cy="274320"/>
-          </a:xfrm>
-          <a:prstGeom prst="rect">
-            <a:avLst/>
-          </a:prstGeom>
-          <a:solidFill>
-            <a:srgbClr val="269CCB"/>
-          </a:solidFill>
-          <a:ln>
-            <a:noFill/>
-          </a:ln>
-        </p:spPr>
-        <p:style>
-          <a:lnRef idx="1">
-            <a:schemeClr val="accent1"/>
-          </a:lnRef>
-          <a:fillRef idx="3">
-            <a:schemeClr val="accent1"/>
-          </a:fillRef>
-          <a:effectRef idx="2">
-            <a:schemeClr val="accent1"/>
-          </a:effectRef>
-          <a:fontRef idx="minor">
-            <a:schemeClr val="lt1"/>
-          </a:fontRef>
-        </p:style>
-        <p:txBody>
-          <a:bodyPr rtlCol="0" anchor="ctr"/>
-          <a:lstStyle/>
-          <a:p>
-            <a:pPr algn="ctr"/>
-          </a:p>
-        </p:txBody>
-      </p:sp>
-      <p:sp>
-        <p:nvSpPr>
-          <p:cNvPr id="16" name="TextBox 15"/>
-          <p:cNvSpPr txBox="1"/>
-          <p:nvPr/>
-        </p:nvSpPr>
-        <p:spPr>
-          <a:xfrm>
-            <a:off x="1097280" y="2706624"/>
-            <a:ext cx="10362895" cy="402336"/>
-          </a:xfrm>
-          <a:prstGeom prst="rect">
-            <a:avLst/>
-          </a:prstGeom>
-          <a:noFill/>
-        </p:spPr>
-        <p:txBody>
-          <a:bodyPr wrap="square" anchor="ctr"/>
-          <a:lstStyle/>
-          <a:p>
-            <a:r>
-              <a:rPr sz="1500" b="0" i="0">
+              <a:t>Herramienta:</a:t>
+            </a:r>
+            <a:r>
+              <a:rPr sz="2000" b="0" i="0">
                 <a:solidFill>
                   <a:srgbClr val="333333"/>
                 </a:solidFill>
                 <a:latin typeface="Calibri"/>
               </a:rPr>
-              <a:t>Antes de llamar a pop(), que pregunta deberia hacerle a la pila para que el programa no lance NoSuchElementException?</a:t>
-            </a:r>
-          </a:p>
-        </p:txBody>
-      </p:sp>
-      <p:sp>
-        <p:nvSpPr>
-          <p:cNvPr id="17" name="TextBox 16"/>
+              <a:t> Visual Studio Code (Java)</a:t>
+            </a:r>
+          </a:p>
+          <a:p>
+            <a:pPr>
+              <a:spcAft>
+                <a:spcPts val="800"/>
+              </a:spcAft>
+            </a:pPr>
+            <a:r>
+              <a:rPr sz="2000" b="0" i="0">
+                <a:solidFill>
+                  <a:srgbClr val="333333"/>
+                </a:solidFill>
+                <a:latin typeface="Calibri"/>
+              </a:rPr>
+              <a:t>–   </a:t>
+            </a:r>
+            <a:r>
+              <a:rPr sz="2000" b="1" i="0">
+                <a:solidFill>
+                  <a:srgbClr val="333333"/>
+                </a:solidFill>
+                <a:latin typeface="Calibri"/>
+              </a:rPr>
+              <a:t>Demo:</a:t>
+            </a:r>
+            <a:r>
+              <a:rPr sz="2000" b="0" i="0">
+                <a:solidFill>
+                  <a:srgbClr val="333333"/>
+                </a:solidFill>
+                <a:latin typeface="Calibri"/>
+              </a:rPr>
+              <a:t> El docente encola cuatro mascotas, muestra en pantalla la diferencia entre peek() y poll() atendiendo en orden de llegada, y luego usa push/pop para deshacer la ultima atencion registrada.</a:t>
+            </a:r>
+          </a:p>
+          <a:p>
+            <a:pPr>
+              <a:spcAft>
+                <a:spcPts val="800"/>
+              </a:spcAft>
+            </a:pPr>
+            <a:r>
+              <a:rPr sz="2000" b="0" i="0">
+                <a:solidFill>
+                  <a:srgbClr val="333333"/>
+                </a:solidFill>
+                <a:latin typeface="Calibri"/>
+              </a:rPr>
+              <a:t>–   Mismo dominio VetCare — no otro ejemplo.</a:t>
+            </a:r>
+          </a:p>
+        </p:txBody>
+      </p:sp>
+      <p:sp>
+        <p:nvSpPr>
+          <p:cNvPr id="6" name="TextBox 5"/>
           <p:cNvSpPr txBox="1"/>
           <p:nvPr/>
         </p:nvSpPr>
@@ -4294,7 +3910,7 @@
                 </a:solidFill>
                 <a:latin typeface="Calibri"/>
               </a:rPr>
-              <a:t>Criterios de exito / entregable</a:t>
+              <a:t>Taller PI — por que importa</a:t>
             </a:r>
           </a:p>
         </p:txBody>
@@ -4342,7 +3958,7 @@
                 </a:solidFill>
                 <a:latin typeface="Calibri"/>
               </a:rPr>
-              <a:t>Entregable:</a:t>
+              <a:t>Por que importa al PI:</a:t>
             </a:r>
             <a:r>
               <a:rPr sz="2000" b="0" i="0">
@@ -4351,7 +3967,7 @@
                 </a:solidFill>
                 <a:latin typeface="Calibri"/>
               </a:rPr>
-              <a:t> Clases SalaDeEspera (Queue) e HistorialReciente (Deque como pila) integradas al proyecto VetCare, con una demo que atiende en orden de llegada las cuatro mascotas del escenario y deshace la ultima atencion registrada; comprimido y subido a la plataforma del curso.</a:t>
+              <a:t> VetCare debe agendar y atender en orden real de llegada, y esa regla queda garantizada por el tipo de dato y no por la buena memoria del programador.</a:t>
             </a:r>
           </a:p>
           <a:p>
@@ -4367,25 +3983,7 @@
                 </a:solidFill>
                 <a:latin typeface="Calibri"/>
               </a:rPr>
-              <a:t>–   </a:t>
-            </a:r>
-            <a:r>
-              <a:rPr sz="2000" b="1" i="0">
-                <a:solidFill>
-                  <a:srgbClr val="333333"/>
-                </a:solidFill>
-                <a:latin typeface="Calibri"/>
-              </a:rPr>
-              <a:t>Exito:</a:t>
-            </a:r>
-            <a:r>
-              <a:rPr sz="2000" b="0" i="0">
-                <a:solidFill>
-                  <a:srgbClr val="333333"/>
-                </a:solidFill>
-                <a:latin typeface="Calibri"/>
-              </a:rPr>
-              <a:t> Las mascotas se atienden exactamente en el orden en que llegaron, verificable en la salida de consola.</a:t>
+              <a:t>–   El historial de atenciones recientes en pila es la base del deshacer que despues protegera al usuario cuando la interfaz grafica permita registrar consultas por error.</a:t>
             </a:r>
           </a:p>
           <a:p>
@@ -4401,127 +3999,7 @@
                 </a:solidFill>
                 <a:latin typeface="Calibri"/>
               </a:rPr>
-              <a:t>–   </a:t>
-            </a:r>
-            <a:r>
-              <a:rPr sz="2000" b="1" i="0">
-                <a:solidFill>
-                  <a:srgbClr val="333333"/>
-                </a:solidFill>
-                <a:latin typeface="Calibri"/>
-              </a:rPr>
-              <a:t>Exito:</a:t>
-            </a:r>
-            <a:r>
-              <a:rPr sz="2000" b="0" i="0">
-                <a:solidFill>
-                  <a:srgbClr val="333333"/>
-                </a:solidFill>
-                <a:latin typeface="Calibri"/>
-              </a:rPr>
-              <a:t> peek/siguienteEnPantalla no altera el tamano de la cola, mientras que poll/atender lo reduce en uno por llamada.</a:t>
-            </a:r>
-          </a:p>
-          <a:p>
-            <a:pPr>
-              <a:spcAft>
-                <a:spcPts val="800"/>
-              </a:spcAft>
-            </a:pPr>
-            <a:r>
-              <a:rPr sz="2000" b="0" i="0">
-                <a:solidFill>
-                  <a:srgbClr val="333333"/>
-                </a:solidFill>
-                <a:latin typeface="Calibri"/>
-              </a:rPr>
-              <a:t>–   </a:t>
-            </a:r>
-            <a:r>
-              <a:rPr sz="2000" b="1" i="0">
-                <a:solidFill>
-                  <a:srgbClr val="333333"/>
-                </a:solidFill>
-                <a:latin typeface="Calibri"/>
-              </a:rPr>
-              <a:t>Exito:</a:t>
-            </a:r>
-            <a:r>
-              <a:rPr sz="2000" b="0" i="0">
-                <a:solidFill>
-                  <a:srgbClr val="333333"/>
-                </a:solidFill>
-                <a:latin typeface="Calibri"/>
-              </a:rPr>
-              <a:t> Atender con la sala vacia o deshacer con la pila vacia produce un mensaje controlado y nunca una excepcion sin capturar.</a:t>
-            </a:r>
-          </a:p>
-          <a:p>
-            <a:pPr>
-              <a:spcAft>
-                <a:spcPts val="800"/>
-              </a:spcAft>
-            </a:pPr>
-            <a:r>
-              <a:rPr sz="2000" b="0" i="0">
-                <a:solidFill>
-                  <a:srgbClr val="333333"/>
-                </a:solidFill>
-                <a:latin typeface="Calibri"/>
-              </a:rPr>
-              <a:t>–   </a:t>
-            </a:r>
-            <a:r>
-              <a:rPr sz="2000" b="1" i="0">
-                <a:solidFill>
-                  <a:srgbClr val="333333"/>
-                </a:solidFill>
-                <a:latin typeface="Calibri"/>
-              </a:rPr>
-              <a:t>Exito:</a:t>
-            </a:r>
-            <a:r>
-              <a:rPr sz="2000" b="0" i="0">
-                <a:solidFill>
-                  <a:srgbClr val="333333"/>
-                </a:solidFill>
-                <a:latin typeface="Calibri"/>
-              </a:rPr>
-              <a:t> Cada consulta atendida queda registrada automaticamente en la pila y deshacer retira siempre la mas reciente.</a:t>
-            </a:r>
-          </a:p>
-          <a:p>
-            <a:pPr>
-              <a:spcAft>
-                <a:spcPts val="800"/>
-              </a:spcAft>
-            </a:pPr>
-            <a:r>
-              <a:rPr sz="2000" b="0" i="0">
-                <a:solidFill>
-                  <a:srgbClr val="333333"/>
-                </a:solidFill>
-                <a:latin typeface="Calibri"/>
-              </a:rPr>
-              <a:t>–   </a:t>
-            </a:r>
-            <a:r>
-              <a:rPr sz="2000" b="1" i="0">
-                <a:solidFill>
-                  <a:srgbClr val="333333"/>
-                </a:solidFill>
-                <a:latin typeface="Calibri"/>
-              </a:rPr>
-              <a:t>Entrega en la plataforma del curso</a:t>
-            </a:r>
-            <a:r>
-              <a:rPr sz="2000" b="0" i="0">
-                <a:solidFill>
-                  <a:srgbClr val="333333"/>
-                </a:solidFill>
-                <a:latin typeface="Calibri"/>
-              </a:rPr>
-              <a:t> — en la fecha que indique el docente.</a:t>
+              <a:t>–   Cola y pila son las estructuras que se guardaran y recargaran desde archivo en las clases de persistencia, asi que hoy definimos el orden en que se escribiran las lineas del CSV.</a:t>
             </a:r>
           </a:p>
         </p:txBody>
@@ -4702,109 +4180,21 @@
                 </a:solidFill>
                 <a:latin typeface="Calibri"/>
               </a:rPr>
-              <a:t>Para el PI esta semana</a:t>
-            </a:r>
-          </a:p>
-        </p:txBody>
-      </p:sp>
-      <p:sp>
-        <p:nvSpPr>
-          <p:cNvPr id="5" name="Rounded Rectangle 4"/>
-          <p:cNvSpPr/>
-          <p:nvPr/>
-        </p:nvSpPr>
-        <p:spPr>
-          <a:xfrm>
-            <a:off x="457200" y="1261872"/>
-            <a:ext cx="11277295" cy="1051560"/>
-          </a:xfrm>
-          <a:prstGeom prst="roundRect">
-            <a:avLst>
-              <a:gd name="adj" fmla="val 12000"/>
-            </a:avLst>
-          </a:prstGeom>
-          <a:solidFill>
-            <a:srgbClr val="E8F4FA"/>
-          </a:solidFill>
-          <a:ln>
-            <a:noFill/>
-          </a:ln>
-        </p:spPr>
-        <p:style>
-          <a:lnRef idx="1">
-            <a:schemeClr val="accent1"/>
-          </a:lnRef>
-          <a:fillRef idx="3">
-            <a:schemeClr val="accent1"/>
-          </a:fillRef>
-          <a:effectRef idx="2">
-            <a:schemeClr val="accent1"/>
-          </a:effectRef>
-          <a:fontRef idx="minor">
-            <a:schemeClr val="lt1"/>
-          </a:fontRef>
-        </p:style>
-        <p:txBody>
-          <a:bodyPr rtlCol="0" anchor="ctr"/>
-          <a:lstStyle/>
-          <a:p>
-            <a:pPr algn="ctr"/>
-          </a:p>
-        </p:txBody>
-      </p:sp>
-      <p:sp>
-        <p:nvSpPr>
-          <p:cNvPr id="6" name="Rectangle 5"/>
-          <p:cNvSpPr/>
-          <p:nvPr/>
-        </p:nvSpPr>
-        <p:spPr>
-          <a:xfrm>
-            <a:off x="457200" y="1261872"/>
-            <a:ext cx="128016" cy="1051560"/>
-          </a:xfrm>
-          <a:prstGeom prst="rect">
-            <a:avLst/>
-          </a:prstGeom>
-          <a:solidFill>
-            <a:srgbClr val="269CCB"/>
-          </a:solidFill>
-          <a:ln>
-            <a:noFill/>
-          </a:ln>
-        </p:spPr>
-        <p:style>
-          <a:lnRef idx="1">
-            <a:schemeClr val="accent1"/>
-          </a:lnRef>
-          <a:fillRef idx="3">
-            <a:schemeClr val="accent1"/>
-          </a:fillRef>
-          <a:effectRef idx="2">
-            <a:schemeClr val="accent1"/>
-          </a:effectRef>
-          <a:fontRef idx="minor">
-            <a:schemeClr val="lt1"/>
-          </a:fontRef>
-        </p:style>
-        <p:txBody>
-          <a:bodyPr rtlCol="0" anchor="ctr"/>
-          <a:lstStyle/>
-          <a:p>
-            <a:pPr algn="ctr"/>
-          </a:p>
-        </p:txBody>
-      </p:sp>
-      <p:sp>
-        <p:nvSpPr>
-          <p:cNvPr id="7" name="TextBox 6"/>
+              <a:t>Taller PI — punto de partida</a:t>
+            </a:r>
+          </a:p>
+        </p:txBody>
+      </p:sp>
+      <p:sp>
+        <p:nvSpPr>
+          <p:cNvPr id="5" name="TextBox 4"/>
           <p:cNvSpPr txBox="1"/>
           <p:nvPr/>
         </p:nvSpPr>
         <p:spPr>
           <a:xfrm>
-            <a:off x="777240" y="1399031"/>
-            <a:ext cx="10774375" cy="822959"/>
+            <a:off x="457200" y="1170432"/>
+            <a:ext cx="11277295" cy="5230368"/>
           </a:xfrm>
           <a:prstGeom prst="rect">
             <a:avLst/>
@@ -4817,313 +4207,58 @@
           </a:bodyPr>
           <a:lstStyle/>
           <a:p>
-            <a:r>
-              <a:rPr sz="1200" b="1" i="0">
-                <a:solidFill>
-                  <a:srgbClr val="269CCB"/>
-                </a:solidFill>
-                <a:latin typeface="Calibri"/>
-              </a:rPr>
-              <a:t>Info</a:t>
-            </a:r>
-          </a:p>
-          <a:p>
             <a:pPr>
-              <a:spcBef>
-                <a:spcPts val="400"/>
-              </a:spcBef>
+              <a:spcAft>
+                <a:spcPts val="800"/>
+              </a:spcAft>
             </a:pPr>
             <a:r>
-              <a:rPr sz="1400" b="0" i="0">
+              <a:rPr sz="2000" b="0" i="0">
                 <a:solidFill>
                   <a:srgbClr val="333333"/>
                 </a:solidFill>
                 <a:latin typeface="Calibri"/>
               </a:rPr>
-              <a:t>Hito: VetCare queda con la sala de espera modelada como cola FIFO y el historial de atenciones recientes como pila LIFO, ambas conectadas al registro de mascotas de la clase anterior.</a:t>
-            </a:r>
-          </a:p>
-        </p:txBody>
-      </p:sp>
-      <p:sp>
-        <p:nvSpPr>
-          <p:cNvPr id="8" name="Rounded Rectangle 7"/>
-          <p:cNvSpPr/>
-          <p:nvPr/>
-        </p:nvSpPr>
-        <p:spPr>
-          <a:xfrm>
-            <a:off x="457200" y="2478024"/>
-            <a:ext cx="11277295" cy="1051560"/>
-          </a:xfrm>
-          <a:prstGeom prst="roundRect">
-            <a:avLst>
-              <a:gd name="adj" fmla="val 12000"/>
-            </a:avLst>
-          </a:prstGeom>
-          <a:solidFill>
-            <a:srgbClr val="FFF8E1"/>
-          </a:solidFill>
-          <a:ln>
-            <a:noFill/>
-          </a:ln>
-        </p:spPr>
-        <p:style>
-          <a:lnRef idx="1">
-            <a:schemeClr val="accent1"/>
-          </a:lnRef>
-          <a:fillRef idx="3">
-            <a:schemeClr val="accent1"/>
-          </a:fillRef>
-          <a:effectRef idx="2">
-            <a:schemeClr val="accent1"/>
-          </a:effectRef>
-          <a:fontRef idx="minor">
-            <a:schemeClr val="lt1"/>
-          </a:fontRef>
-        </p:style>
-        <p:txBody>
-          <a:bodyPr rtlCol="0" anchor="ctr"/>
-          <a:lstStyle/>
-          <a:p>
-            <a:pPr algn="ctr"/>
-          </a:p>
-        </p:txBody>
-      </p:sp>
-      <p:sp>
-        <p:nvSpPr>
-          <p:cNvPr id="9" name="Rectangle 8"/>
-          <p:cNvSpPr/>
-          <p:nvPr/>
-        </p:nvSpPr>
-        <p:spPr>
-          <a:xfrm>
-            <a:off x="457200" y="2478024"/>
-            <a:ext cx="128016" cy="1051560"/>
-          </a:xfrm>
-          <a:prstGeom prst="rect">
-            <a:avLst/>
-          </a:prstGeom>
-          <a:solidFill>
-            <a:srgbClr val="FFD000"/>
-          </a:solidFill>
-          <a:ln>
-            <a:noFill/>
-          </a:ln>
-        </p:spPr>
-        <p:style>
-          <a:lnRef idx="1">
-            <a:schemeClr val="accent1"/>
-          </a:lnRef>
-          <a:fillRef idx="3">
-            <a:schemeClr val="accent1"/>
-          </a:fillRef>
-          <a:effectRef idx="2">
-            <a:schemeClr val="accent1"/>
-          </a:effectRef>
-          <a:fontRef idx="minor">
-            <a:schemeClr val="lt1"/>
-          </a:fontRef>
-        </p:style>
-        <p:txBody>
-          <a:bodyPr rtlCol="0" anchor="ctr"/>
-          <a:lstStyle/>
-          <a:p>
-            <a:pPr algn="ctr"/>
-          </a:p>
-        </p:txBody>
-      </p:sp>
-      <p:sp>
-        <p:nvSpPr>
-          <p:cNvPr id="10" name="TextBox 9"/>
-          <p:cNvSpPr txBox="1"/>
-          <p:nvPr/>
-        </p:nvSpPr>
-        <p:spPr>
-          <a:xfrm>
-            <a:off x="777240" y="2615184"/>
-            <a:ext cx="10774375" cy="822959"/>
-          </a:xfrm>
-          <a:prstGeom prst="rect">
-            <a:avLst/>
-          </a:prstGeom>
-          <a:noFill/>
-        </p:spPr>
-        <p:txBody>
-          <a:bodyPr wrap="square">
-            <a:spAutoFit/>
-          </a:bodyPr>
-          <a:lstStyle/>
-          <a:p>
-            <a:r>
-              <a:rPr sz="1200" b="1" i="0">
-                <a:solidFill>
-                  <a:srgbClr val="FFD000"/>
-                </a:solidFill>
-                <a:latin typeface="Calibri"/>
-              </a:rPr>
-              <a:t>Aclaración</a:t>
+              <a:t>–   Es lunes 8:00 a.m. en Huellitas y llegan en este orden: Firulais (M-001, vacuna, dueno Ana Gomez), Michi (M-002, control, dueno Luis Perez), Rocky (M-003, revision de patas, dueno Ana Gomez) y Nieve (M-004, desparasitacion, duena Sara Diaz).</a:t>
             </a:r>
           </a:p>
           <a:p>
             <a:pPr>
-              <a:spcBef>
-                <a:spcPts val="400"/>
-              </a:spcBef>
+              <a:spcAft>
+                <a:spcPts val="800"/>
+              </a:spcAft>
             </a:pPr>
             <a:r>
-              <a:rPr sz="1400" b="0" i="0">
+              <a:rPr sz="2000" b="0" i="0">
                 <a:solidFill>
                   <a:srgbClr val="333333"/>
                 </a:solidFill>
                 <a:latin typeface="Calibri"/>
               </a:rPr>
-              <a:t>Enunciado completo: Clases/Proyecto Integrador/ (VetCare).</a:t>
-            </a:r>
-          </a:p>
-        </p:txBody>
-      </p:sp>
-      <p:sp>
-        <p:nvSpPr>
-          <p:cNvPr id="11" name="Rounded Rectangle 10"/>
-          <p:cNvSpPr/>
-          <p:nvPr/>
-        </p:nvSpPr>
-        <p:spPr>
-          <a:xfrm>
-            <a:off x="457200" y="3694176"/>
-            <a:ext cx="11277295" cy="1051560"/>
-          </a:xfrm>
-          <a:prstGeom prst="roundRect">
-            <a:avLst>
-              <a:gd name="adj" fmla="val 12000"/>
-            </a:avLst>
-          </a:prstGeom>
-          <a:solidFill>
-            <a:srgbClr val="FBE4E4"/>
-          </a:solidFill>
-          <a:ln>
-            <a:noFill/>
-          </a:ln>
-        </p:spPr>
-        <p:style>
-          <a:lnRef idx="1">
-            <a:schemeClr val="accent1"/>
-          </a:lnRef>
-          <a:fillRef idx="3">
-            <a:schemeClr val="accent1"/>
-          </a:fillRef>
-          <a:effectRef idx="2">
-            <a:schemeClr val="accent1"/>
-          </a:effectRef>
-          <a:fontRef idx="minor">
-            <a:schemeClr val="lt1"/>
-          </a:fontRef>
-        </p:style>
-        <p:txBody>
-          <a:bodyPr rtlCol="0" anchor="ctr"/>
-          <a:lstStyle/>
-          <a:p>
-            <a:pPr algn="ctr"/>
-          </a:p>
-        </p:txBody>
-      </p:sp>
-      <p:sp>
-        <p:nvSpPr>
-          <p:cNvPr id="12" name="Rectangle 11"/>
-          <p:cNvSpPr/>
-          <p:nvPr/>
-        </p:nvSpPr>
-        <p:spPr>
-          <a:xfrm>
-            <a:off x="457200" y="3694176"/>
-            <a:ext cx="128016" cy="1051560"/>
-          </a:xfrm>
-          <a:prstGeom prst="rect">
-            <a:avLst/>
-          </a:prstGeom>
-          <a:solidFill>
-            <a:srgbClr val="A02030"/>
-          </a:solidFill>
-          <a:ln>
-            <a:noFill/>
-          </a:ln>
-        </p:spPr>
-        <p:style>
-          <a:lnRef idx="1">
-            <a:schemeClr val="accent1"/>
-          </a:lnRef>
-          <a:fillRef idx="3">
-            <a:schemeClr val="accent1"/>
-          </a:fillRef>
-          <a:effectRef idx="2">
-            <a:schemeClr val="accent1"/>
-          </a:effectRef>
-          <a:fontRef idx="minor">
-            <a:schemeClr val="lt1"/>
-          </a:fontRef>
-        </p:style>
-        <p:txBody>
-          <a:bodyPr rtlCol="0" anchor="ctr"/>
-          <a:lstStyle/>
-          <a:p>
-            <a:pPr algn="ctr"/>
-          </a:p>
-        </p:txBody>
-      </p:sp>
-      <p:sp>
-        <p:nvSpPr>
-          <p:cNvPr id="13" name="TextBox 12"/>
-          <p:cNvSpPr txBox="1"/>
-          <p:nvPr/>
-        </p:nvSpPr>
-        <p:spPr>
-          <a:xfrm>
-            <a:off x="777240" y="3831336"/>
-            <a:ext cx="10774375" cy="822959"/>
-          </a:xfrm>
-          <a:prstGeom prst="rect">
-            <a:avLst/>
-          </a:prstGeom>
-          <a:noFill/>
-        </p:spPr>
-        <p:txBody>
-          <a:bodyPr wrap="square">
-            <a:spAutoFit/>
-          </a:bodyPr>
-          <a:lstStyle/>
-          <a:p>
-            <a:r>
-              <a:rPr sz="1200" b="1" i="0">
-                <a:solidFill>
-                  <a:srgbClr val="A02030"/>
-                </a:solidFill>
-                <a:latin typeface="Calibri"/>
-              </a:rPr>
-              <a:t>Atención</a:t>
+              <a:t>–   La sala de espera arranca vacia y el historial de atenciones recientes tambien; el registro de mascotas de la Clase 2 ya esta cargado y se reutiliza.</a:t>
             </a:r>
           </a:p>
           <a:p>
             <a:pPr>
-              <a:spcBef>
-                <a:spcPts val="400"/>
-              </a:spcBef>
+              <a:spcAft>
+                <a:spcPts val="800"/>
+              </a:spcAft>
             </a:pPr>
             <a:r>
-              <a:rPr sz="1400" b="0" i="0">
+              <a:rPr sz="2000" b="0" i="0">
                 <a:solidFill>
                   <a:srgbClr val="333333"/>
                 </a:solidFill>
                 <a:latin typeface="Calibri"/>
               </a:rPr>
-              <a:t>Entrega del taller, si el docente lo asigna · en la fecha que indique el docente.</a:t>
-            </a:r>
-          </a:p>
-        </p:txBody>
-      </p:sp>
-      <p:sp>
-        <p:nvSpPr>
-          <p:cNvPr id="14" name="TextBox 13"/>
+              <a:t>–   A las 8:20 entra Canela (M-009, duena Ana Gomez) con una urgencia real y debe pasar de primera sin destruir el orden de los demas.</a:t>
+            </a:r>
+          </a:p>
+        </p:txBody>
+      </p:sp>
+      <p:sp>
+        <p:nvSpPr>
+          <p:cNvPr id="6" name="TextBox 5"/>
           <p:cNvSpPr txBox="1"/>
           <p:nvPr/>
         </p:nvSpPr>
@@ -5191,6 +4326,2641 @@
         <p:spPr>
           <a:xfrm>
             <a:off x="0" y="0"/>
+            <a:ext cx="12191695" cy="960120"/>
+          </a:xfrm>
+          <a:prstGeom prst="rect">
+            <a:avLst/>
+          </a:prstGeom>
+          <a:solidFill>
+            <a:srgbClr val="095292"/>
+          </a:solidFill>
+          <a:ln>
+            <a:noFill/>
+          </a:ln>
+        </p:spPr>
+        <p:style>
+          <a:lnRef idx="1">
+            <a:schemeClr val="accent1"/>
+          </a:lnRef>
+          <a:fillRef idx="3">
+            <a:schemeClr val="accent1"/>
+          </a:fillRef>
+          <a:effectRef idx="2">
+            <a:schemeClr val="accent1"/>
+          </a:effectRef>
+          <a:fontRef idx="minor">
+            <a:schemeClr val="lt1"/>
+          </a:fontRef>
+        </p:style>
+        <p:txBody>
+          <a:bodyPr rtlCol="0" anchor="ctr"/>
+          <a:lstStyle/>
+          <a:p>
+            <a:pPr algn="ctr"/>
+          </a:p>
+        </p:txBody>
+      </p:sp>
+      <p:sp>
+        <p:nvSpPr>
+          <p:cNvPr id="3" name="Rectangle 2"/>
+          <p:cNvSpPr/>
+          <p:nvPr/>
+        </p:nvSpPr>
+        <p:spPr>
+          <a:xfrm>
+            <a:off x="0" y="960120"/>
+            <a:ext cx="12191695" cy="41148"/>
+          </a:xfrm>
+          <a:prstGeom prst="rect">
+            <a:avLst/>
+          </a:prstGeom>
+          <a:solidFill>
+            <a:srgbClr val="FFD000"/>
+          </a:solidFill>
+          <a:ln>
+            <a:noFill/>
+          </a:ln>
+        </p:spPr>
+        <p:style>
+          <a:lnRef idx="1">
+            <a:schemeClr val="accent1"/>
+          </a:lnRef>
+          <a:fillRef idx="3">
+            <a:schemeClr val="accent1"/>
+          </a:fillRef>
+          <a:effectRef idx="2">
+            <a:schemeClr val="accent1"/>
+          </a:effectRef>
+          <a:fontRef idx="minor">
+            <a:schemeClr val="lt1"/>
+          </a:fontRef>
+        </p:style>
+        <p:txBody>
+          <a:bodyPr rtlCol="0" anchor="ctr"/>
+          <a:lstStyle/>
+          <a:p>
+            <a:pPr algn="ctr"/>
+          </a:p>
+        </p:txBody>
+      </p:sp>
+      <p:sp>
+        <p:nvSpPr>
+          <p:cNvPr id="4" name="TextBox 3"/>
+          <p:cNvSpPr txBox="1"/>
+          <p:nvPr/>
+        </p:nvSpPr>
+        <p:spPr>
+          <a:xfrm>
+            <a:off x="457200" y="164592"/>
+            <a:ext cx="11277295" cy="502920"/>
+          </a:xfrm>
+          <a:prstGeom prst="rect">
+            <a:avLst/>
+          </a:prstGeom>
+          <a:noFill/>
+        </p:spPr>
+        <p:txBody>
+          <a:bodyPr wrap="square">
+            <a:spAutoFit/>
+          </a:bodyPr>
+          <a:lstStyle/>
+          <a:p>
+            <a:r>
+              <a:rPr sz="2600" b="1" i="0">
+                <a:solidFill>
+                  <a:srgbClr val="FFFFFF"/>
+                </a:solidFill>
+                <a:latin typeface="Calibri"/>
+              </a:rPr>
+              <a:t>Taller PI — pasos guiados</a:t>
+            </a:r>
+          </a:p>
+        </p:txBody>
+      </p:sp>
+      <p:sp>
+        <p:nvSpPr>
+          <p:cNvPr id="5" name="Rounded Rectangle 4"/>
+          <p:cNvSpPr/>
+          <p:nvPr/>
+        </p:nvSpPr>
+        <p:spPr>
+          <a:xfrm>
+            <a:off x="457200" y="1234440"/>
+            <a:ext cx="11277295" cy="950976"/>
+          </a:xfrm>
+          <a:prstGeom prst="roundRect">
+            <a:avLst>
+              <a:gd name="adj" fmla="val 12000"/>
+            </a:avLst>
+          </a:prstGeom>
+          <a:solidFill>
+            <a:srgbClr val="F2F2F2"/>
+          </a:solidFill>
+          <a:ln>
+            <a:noFill/>
+          </a:ln>
+        </p:spPr>
+        <p:style>
+          <a:lnRef idx="1">
+            <a:schemeClr val="accent1"/>
+          </a:lnRef>
+          <a:fillRef idx="3">
+            <a:schemeClr val="accent1"/>
+          </a:fillRef>
+          <a:effectRef idx="2">
+            <a:schemeClr val="accent1"/>
+          </a:effectRef>
+          <a:fontRef idx="minor">
+            <a:schemeClr val="lt1"/>
+          </a:fontRef>
+        </p:style>
+        <p:txBody>
+          <a:bodyPr rtlCol="0" anchor="ctr"/>
+          <a:lstStyle/>
+          <a:p>
+            <a:pPr algn="ctr"/>
+          </a:p>
+        </p:txBody>
+      </p:sp>
+      <p:sp>
+        <p:nvSpPr>
+          <p:cNvPr id="6" name="Rounded Rectangle 5"/>
+          <p:cNvSpPr/>
+          <p:nvPr/>
+        </p:nvSpPr>
+        <p:spPr>
+          <a:xfrm>
+            <a:off x="594360" y="1490472"/>
+            <a:ext cx="438912" cy="438912"/>
+          </a:xfrm>
+          <a:prstGeom prst="roundRect">
+            <a:avLst>
+              <a:gd name="adj" fmla="val 12000"/>
+            </a:avLst>
+          </a:prstGeom>
+          <a:solidFill>
+            <a:srgbClr val="095292"/>
+          </a:solidFill>
+          <a:ln>
+            <a:noFill/>
+          </a:ln>
+        </p:spPr>
+        <p:style>
+          <a:lnRef idx="1">
+            <a:schemeClr val="accent1"/>
+          </a:lnRef>
+          <a:fillRef idx="3">
+            <a:schemeClr val="accent1"/>
+          </a:fillRef>
+          <a:effectRef idx="2">
+            <a:schemeClr val="accent1"/>
+          </a:effectRef>
+          <a:fontRef idx="minor">
+            <a:schemeClr val="lt1"/>
+          </a:fontRef>
+        </p:style>
+        <p:txBody>
+          <a:bodyPr rtlCol="0" anchor="ctr"/>
+          <a:lstStyle/>
+          <a:p>
+            <a:pPr algn="ctr"/>
+          </a:p>
+        </p:txBody>
+      </p:sp>
+      <p:sp>
+        <p:nvSpPr>
+          <p:cNvPr id="7" name="TextBox 6"/>
+          <p:cNvSpPr txBox="1"/>
+          <p:nvPr/>
+        </p:nvSpPr>
+        <p:spPr>
+          <a:xfrm>
+            <a:off x="594360" y="1490472"/>
+            <a:ext cx="438912" cy="438912"/>
+          </a:xfrm>
+          <a:prstGeom prst="rect">
+            <a:avLst/>
+          </a:prstGeom>
+          <a:noFill/>
+        </p:spPr>
+        <p:txBody>
+          <a:bodyPr wrap="square" anchor="ctr"/>
+          <a:lstStyle/>
+          <a:p>
+            <a:pPr algn="ctr"/>
+            <a:r>
+              <a:rPr sz="1600" b="1" i="0">
+                <a:solidFill>
+                  <a:srgbClr val="FFFFFF"/>
+                </a:solidFill>
+                <a:latin typeface="Calibri"/>
+              </a:rPr>
+              <a:t>1</a:t>
+            </a:r>
+          </a:p>
+        </p:txBody>
+      </p:sp>
+      <p:sp>
+        <p:nvSpPr>
+          <p:cNvPr id="8" name="TextBox 7"/>
+          <p:cNvSpPr txBox="1"/>
+          <p:nvPr/>
+        </p:nvSpPr>
+        <p:spPr>
+          <a:xfrm>
+            <a:off x="1188720" y="1325880"/>
+            <a:ext cx="10271455" cy="786384"/>
+          </a:xfrm>
+          <a:prstGeom prst="rect">
+            <a:avLst/>
+          </a:prstGeom>
+          <a:noFill/>
+        </p:spPr>
+        <p:txBody>
+          <a:bodyPr wrap="square" anchor="ctr"/>
+          <a:lstStyle/>
+          <a:p>
+            <a:r>
+              <a:rPr sz="1500" b="1" i="0">
+                <a:solidFill>
+                  <a:srgbClr val="095292"/>
+                </a:solidFill>
+                <a:latin typeface="Calibri"/>
+              </a:rPr>
+              <a:t>Cree la clase Turno con id, nombre de la mascota, nombre del dueno y motivo de consulta, mas sus getters y su toString(); verifique imprimiendo un turno suelto en consola antes de meterlo en cualquier estructura.</a:t>
+            </a:r>
+          </a:p>
+        </p:txBody>
+      </p:sp>
+      <p:sp>
+        <p:nvSpPr>
+          <p:cNvPr id="9" name="Rounded Rectangle 8"/>
+          <p:cNvSpPr/>
+          <p:nvPr/>
+        </p:nvSpPr>
+        <p:spPr>
+          <a:xfrm>
+            <a:off x="457200" y="2276856"/>
+            <a:ext cx="11277295" cy="950976"/>
+          </a:xfrm>
+          <a:prstGeom prst="roundRect">
+            <a:avLst>
+              <a:gd name="adj" fmla="val 12000"/>
+            </a:avLst>
+          </a:prstGeom>
+          <a:solidFill>
+            <a:srgbClr val="E8F4FA"/>
+          </a:solidFill>
+          <a:ln>
+            <a:noFill/>
+          </a:ln>
+        </p:spPr>
+        <p:style>
+          <a:lnRef idx="1">
+            <a:schemeClr val="accent1"/>
+          </a:lnRef>
+          <a:fillRef idx="3">
+            <a:schemeClr val="accent1"/>
+          </a:fillRef>
+          <a:effectRef idx="2">
+            <a:schemeClr val="accent1"/>
+          </a:effectRef>
+          <a:fontRef idx="minor">
+            <a:schemeClr val="lt1"/>
+          </a:fontRef>
+        </p:style>
+        <p:txBody>
+          <a:bodyPr rtlCol="0" anchor="ctr"/>
+          <a:lstStyle/>
+          <a:p>
+            <a:pPr algn="ctr"/>
+          </a:p>
+        </p:txBody>
+      </p:sp>
+      <p:sp>
+        <p:nvSpPr>
+          <p:cNvPr id="10" name="Rounded Rectangle 9"/>
+          <p:cNvSpPr/>
+          <p:nvPr/>
+        </p:nvSpPr>
+        <p:spPr>
+          <a:xfrm>
+            <a:off x="594360" y="2532888"/>
+            <a:ext cx="438912" cy="438912"/>
+          </a:xfrm>
+          <a:prstGeom prst="roundRect">
+            <a:avLst>
+              <a:gd name="adj" fmla="val 12000"/>
+            </a:avLst>
+          </a:prstGeom>
+          <a:solidFill>
+            <a:srgbClr val="095292"/>
+          </a:solidFill>
+          <a:ln>
+            <a:noFill/>
+          </a:ln>
+        </p:spPr>
+        <p:style>
+          <a:lnRef idx="1">
+            <a:schemeClr val="accent1"/>
+          </a:lnRef>
+          <a:fillRef idx="3">
+            <a:schemeClr val="accent1"/>
+          </a:fillRef>
+          <a:effectRef idx="2">
+            <a:schemeClr val="accent1"/>
+          </a:effectRef>
+          <a:fontRef idx="minor">
+            <a:schemeClr val="lt1"/>
+          </a:fontRef>
+        </p:style>
+        <p:txBody>
+          <a:bodyPr rtlCol="0" anchor="ctr"/>
+          <a:lstStyle/>
+          <a:p>
+            <a:pPr algn="ctr"/>
+          </a:p>
+        </p:txBody>
+      </p:sp>
+      <p:sp>
+        <p:nvSpPr>
+          <p:cNvPr id="11" name="TextBox 10"/>
+          <p:cNvSpPr txBox="1"/>
+          <p:nvPr/>
+        </p:nvSpPr>
+        <p:spPr>
+          <a:xfrm>
+            <a:off x="594360" y="2532888"/>
+            <a:ext cx="438912" cy="438912"/>
+          </a:xfrm>
+          <a:prstGeom prst="rect">
+            <a:avLst/>
+          </a:prstGeom>
+          <a:noFill/>
+        </p:spPr>
+        <p:txBody>
+          <a:bodyPr wrap="square" anchor="ctr"/>
+          <a:lstStyle/>
+          <a:p>
+            <a:pPr algn="ctr"/>
+            <a:r>
+              <a:rPr sz="1600" b="1" i="0">
+                <a:solidFill>
+                  <a:srgbClr val="FFFFFF"/>
+                </a:solidFill>
+                <a:latin typeface="Calibri"/>
+              </a:rPr>
+              <a:t>2</a:t>
+            </a:r>
+          </a:p>
+        </p:txBody>
+      </p:sp>
+      <p:sp>
+        <p:nvSpPr>
+          <p:cNvPr id="12" name="TextBox 11"/>
+          <p:cNvSpPr txBox="1"/>
+          <p:nvPr/>
+        </p:nvSpPr>
+        <p:spPr>
+          <a:xfrm>
+            <a:off x="1188720" y="2368296"/>
+            <a:ext cx="10271455" cy="786384"/>
+          </a:xfrm>
+          <a:prstGeom prst="rect">
+            <a:avLst/>
+          </a:prstGeom>
+          <a:noFill/>
+        </p:spPr>
+        <p:txBody>
+          <a:bodyPr wrap="square" anchor="ctr"/>
+          <a:lstStyle/>
+          <a:p>
+            <a:r>
+              <a:rPr sz="1400" b="1" i="0">
+                <a:solidFill>
+                  <a:srgbClr val="095292"/>
+                </a:solidFill>
+                <a:latin typeface="Calibri"/>
+              </a:rPr>
+              <a:t>Cree la clase SalaDeEspera con el atributo private final Queue&lt;Turno&gt; cola = new LinkedList&lt;&gt;(); y los metodos registrarLlegada(Turno t) usando offer, siguienteEnPantalla() usando peek y atender() usando poll; verifique que despues de registrar cuatro llegadas y llamar dos veces a siguienteEnPantalla(), cantidad() sigue siendo 4.</a:t>
+            </a:r>
+          </a:p>
+        </p:txBody>
+      </p:sp>
+      <p:sp>
+        <p:nvSpPr>
+          <p:cNvPr id="13" name="Rounded Rectangle 12"/>
+          <p:cNvSpPr/>
+          <p:nvPr/>
+        </p:nvSpPr>
+        <p:spPr>
+          <a:xfrm>
+            <a:off x="457200" y="3319272"/>
+            <a:ext cx="11277295" cy="950976"/>
+          </a:xfrm>
+          <a:prstGeom prst="roundRect">
+            <a:avLst>
+              <a:gd name="adj" fmla="val 12000"/>
+            </a:avLst>
+          </a:prstGeom>
+          <a:solidFill>
+            <a:srgbClr val="F2F2F2"/>
+          </a:solidFill>
+          <a:ln>
+            <a:noFill/>
+          </a:ln>
+        </p:spPr>
+        <p:style>
+          <a:lnRef idx="1">
+            <a:schemeClr val="accent1"/>
+          </a:lnRef>
+          <a:fillRef idx="3">
+            <a:schemeClr val="accent1"/>
+          </a:fillRef>
+          <a:effectRef idx="2">
+            <a:schemeClr val="accent1"/>
+          </a:effectRef>
+          <a:fontRef idx="minor">
+            <a:schemeClr val="lt1"/>
+          </a:fontRef>
+        </p:style>
+        <p:txBody>
+          <a:bodyPr rtlCol="0" anchor="ctr"/>
+          <a:lstStyle/>
+          <a:p>
+            <a:pPr algn="ctr"/>
+          </a:p>
+        </p:txBody>
+      </p:sp>
+      <p:sp>
+        <p:nvSpPr>
+          <p:cNvPr id="14" name="Rounded Rectangle 13"/>
+          <p:cNvSpPr/>
+          <p:nvPr/>
+        </p:nvSpPr>
+        <p:spPr>
+          <a:xfrm>
+            <a:off x="594360" y="3575304"/>
+            <a:ext cx="438912" cy="438912"/>
+          </a:xfrm>
+          <a:prstGeom prst="roundRect">
+            <a:avLst>
+              <a:gd name="adj" fmla="val 12000"/>
+            </a:avLst>
+          </a:prstGeom>
+          <a:solidFill>
+            <a:srgbClr val="095292"/>
+          </a:solidFill>
+          <a:ln>
+            <a:noFill/>
+          </a:ln>
+        </p:spPr>
+        <p:style>
+          <a:lnRef idx="1">
+            <a:schemeClr val="accent1"/>
+          </a:lnRef>
+          <a:fillRef idx="3">
+            <a:schemeClr val="accent1"/>
+          </a:fillRef>
+          <a:effectRef idx="2">
+            <a:schemeClr val="accent1"/>
+          </a:effectRef>
+          <a:fontRef idx="minor">
+            <a:schemeClr val="lt1"/>
+          </a:fontRef>
+        </p:style>
+        <p:txBody>
+          <a:bodyPr rtlCol="0" anchor="ctr"/>
+          <a:lstStyle/>
+          <a:p>
+            <a:pPr algn="ctr"/>
+          </a:p>
+        </p:txBody>
+      </p:sp>
+      <p:sp>
+        <p:nvSpPr>
+          <p:cNvPr id="15" name="TextBox 14"/>
+          <p:cNvSpPr txBox="1"/>
+          <p:nvPr/>
+        </p:nvSpPr>
+        <p:spPr>
+          <a:xfrm>
+            <a:off x="594360" y="3575304"/>
+            <a:ext cx="438912" cy="438912"/>
+          </a:xfrm>
+          <a:prstGeom prst="rect">
+            <a:avLst/>
+          </a:prstGeom>
+          <a:noFill/>
+        </p:spPr>
+        <p:txBody>
+          <a:bodyPr wrap="square" anchor="ctr"/>
+          <a:lstStyle/>
+          <a:p>
+            <a:pPr algn="ctr"/>
+            <a:r>
+              <a:rPr sz="1600" b="1" i="0">
+                <a:solidFill>
+                  <a:srgbClr val="FFFFFF"/>
+                </a:solidFill>
+                <a:latin typeface="Calibri"/>
+              </a:rPr>
+              <a:t>3</a:t>
+            </a:r>
+          </a:p>
+        </p:txBody>
+      </p:sp>
+      <p:sp>
+        <p:nvSpPr>
+          <p:cNvPr id="16" name="TextBox 15"/>
+          <p:cNvSpPr txBox="1"/>
+          <p:nvPr/>
+        </p:nvSpPr>
+        <p:spPr>
+          <a:xfrm>
+            <a:off x="1188720" y="3410712"/>
+            <a:ext cx="10271455" cy="786384"/>
+          </a:xfrm>
+          <a:prstGeom prst="rect">
+            <a:avLst/>
+          </a:prstGeom>
+          <a:noFill/>
+        </p:spPr>
+        <p:txBody>
+          <a:bodyPr wrap="square" anchor="ctr"/>
+          <a:lstStyle/>
+          <a:p>
+            <a:r>
+              <a:rPr sz="1400" b="1" i="0">
+                <a:solidFill>
+                  <a:srgbClr val="095292"/>
+                </a:solidFill>
+                <a:latin typeface="Calibri"/>
+              </a:rPr>
+              <a:t>Haga que atender() valide la cola vacia con isEmpty() y devuelva un mensaje controlado en vez de un null suelto; verifique llamando a atender() cinco veces cuando solo hay cuatro turnos y confirmando que la quinta llamada imprime que la sala esta vacia y el programa no se cae.</a:t>
+            </a:r>
+          </a:p>
+        </p:txBody>
+      </p:sp>
+      <p:sp>
+        <p:nvSpPr>
+          <p:cNvPr id="17" name="Rounded Rectangle 16"/>
+          <p:cNvSpPr/>
+          <p:nvPr/>
+        </p:nvSpPr>
+        <p:spPr>
+          <a:xfrm>
+            <a:off x="457200" y="4361688"/>
+            <a:ext cx="11277295" cy="950976"/>
+          </a:xfrm>
+          <a:prstGeom prst="roundRect">
+            <a:avLst>
+              <a:gd name="adj" fmla="val 12000"/>
+            </a:avLst>
+          </a:prstGeom>
+          <a:solidFill>
+            <a:srgbClr val="E8F4FA"/>
+          </a:solidFill>
+          <a:ln>
+            <a:noFill/>
+          </a:ln>
+        </p:spPr>
+        <p:style>
+          <a:lnRef idx="1">
+            <a:schemeClr val="accent1"/>
+          </a:lnRef>
+          <a:fillRef idx="3">
+            <a:schemeClr val="accent1"/>
+          </a:fillRef>
+          <a:effectRef idx="2">
+            <a:schemeClr val="accent1"/>
+          </a:effectRef>
+          <a:fontRef idx="minor">
+            <a:schemeClr val="lt1"/>
+          </a:fontRef>
+        </p:style>
+        <p:txBody>
+          <a:bodyPr rtlCol="0" anchor="ctr"/>
+          <a:lstStyle/>
+          <a:p>
+            <a:pPr algn="ctr"/>
+          </a:p>
+        </p:txBody>
+      </p:sp>
+      <p:sp>
+        <p:nvSpPr>
+          <p:cNvPr id="18" name="Rounded Rectangle 17"/>
+          <p:cNvSpPr/>
+          <p:nvPr/>
+        </p:nvSpPr>
+        <p:spPr>
+          <a:xfrm>
+            <a:off x="594360" y="4617720"/>
+            <a:ext cx="438912" cy="438912"/>
+          </a:xfrm>
+          <a:prstGeom prst="roundRect">
+            <a:avLst>
+              <a:gd name="adj" fmla="val 12000"/>
+            </a:avLst>
+          </a:prstGeom>
+          <a:solidFill>
+            <a:srgbClr val="095292"/>
+          </a:solidFill>
+          <a:ln>
+            <a:noFill/>
+          </a:ln>
+        </p:spPr>
+        <p:style>
+          <a:lnRef idx="1">
+            <a:schemeClr val="accent1"/>
+          </a:lnRef>
+          <a:fillRef idx="3">
+            <a:schemeClr val="accent1"/>
+          </a:fillRef>
+          <a:effectRef idx="2">
+            <a:schemeClr val="accent1"/>
+          </a:effectRef>
+          <a:fontRef idx="minor">
+            <a:schemeClr val="lt1"/>
+          </a:fontRef>
+        </p:style>
+        <p:txBody>
+          <a:bodyPr rtlCol="0" anchor="ctr"/>
+          <a:lstStyle/>
+          <a:p>
+            <a:pPr algn="ctr"/>
+          </a:p>
+        </p:txBody>
+      </p:sp>
+      <p:sp>
+        <p:nvSpPr>
+          <p:cNvPr id="19" name="TextBox 18"/>
+          <p:cNvSpPr txBox="1"/>
+          <p:nvPr/>
+        </p:nvSpPr>
+        <p:spPr>
+          <a:xfrm>
+            <a:off x="594360" y="4617720"/>
+            <a:ext cx="438912" cy="438912"/>
+          </a:xfrm>
+          <a:prstGeom prst="rect">
+            <a:avLst/>
+          </a:prstGeom>
+          <a:noFill/>
+        </p:spPr>
+        <p:txBody>
+          <a:bodyPr wrap="square" anchor="ctr"/>
+          <a:lstStyle/>
+          <a:p>
+            <a:pPr algn="ctr"/>
+            <a:r>
+              <a:rPr sz="1600" b="1" i="0">
+                <a:solidFill>
+                  <a:srgbClr val="FFFFFF"/>
+                </a:solidFill>
+                <a:latin typeface="Calibri"/>
+              </a:rPr>
+              <a:t>4</a:t>
+            </a:r>
+          </a:p>
+        </p:txBody>
+      </p:sp>
+      <p:sp>
+        <p:nvSpPr>
+          <p:cNvPr id="20" name="TextBox 19"/>
+          <p:cNvSpPr txBox="1"/>
+          <p:nvPr/>
+        </p:nvSpPr>
+        <p:spPr>
+          <a:xfrm>
+            <a:off x="1188720" y="4453128"/>
+            <a:ext cx="10271455" cy="786384"/>
+          </a:xfrm>
+          <a:prstGeom prst="rect">
+            <a:avLst/>
+          </a:prstGeom>
+          <a:noFill/>
+        </p:spPr>
+        <p:txBody>
+          <a:bodyPr wrap="square" anchor="ctr"/>
+          <a:lstStyle/>
+          <a:p>
+            <a:r>
+              <a:rPr sz="1400" b="1" i="0">
+                <a:solidFill>
+                  <a:srgbClr val="095292"/>
+                </a:solidFill>
+                <a:latin typeface="Calibri"/>
+              </a:rPr>
+              <a:t>Cree la clase HistorialReciente con private final Deque&lt;String&gt; pila = new ArrayDeque&lt;&gt;(); y los metodos registrar(String), ultimaAtencion() con peek y deshacer() con pop protegido por isEmpty(); verifique que despues de atender a Firulais, Michi y Rocky, ultimaAtencion() muestra a Rocky y deshacer() lo retira dejando a Michi arriba.</a:t>
+            </a:r>
+          </a:p>
+        </p:txBody>
+      </p:sp>
+      <p:sp>
+        <p:nvSpPr>
+          <p:cNvPr id="21" name="Rounded Rectangle 20"/>
+          <p:cNvSpPr/>
+          <p:nvPr/>
+        </p:nvSpPr>
+        <p:spPr>
+          <a:xfrm>
+            <a:off x="457200" y="5404104"/>
+            <a:ext cx="11277295" cy="950976"/>
+          </a:xfrm>
+          <a:prstGeom prst="roundRect">
+            <a:avLst>
+              <a:gd name="adj" fmla="val 12000"/>
+            </a:avLst>
+          </a:prstGeom>
+          <a:solidFill>
+            <a:srgbClr val="F2F2F2"/>
+          </a:solidFill>
+          <a:ln>
+            <a:noFill/>
+          </a:ln>
+        </p:spPr>
+        <p:style>
+          <a:lnRef idx="1">
+            <a:schemeClr val="accent1"/>
+          </a:lnRef>
+          <a:fillRef idx="3">
+            <a:schemeClr val="accent1"/>
+          </a:fillRef>
+          <a:effectRef idx="2">
+            <a:schemeClr val="accent1"/>
+          </a:effectRef>
+          <a:fontRef idx="minor">
+            <a:schemeClr val="lt1"/>
+          </a:fontRef>
+        </p:style>
+        <p:txBody>
+          <a:bodyPr rtlCol="0" anchor="ctr"/>
+          <a:lstStyle/>
+          <a:p>
+            <a:pPr algn="ctr"/>
+          </a:p>
+        </p:txBody>
+      </p:sp>
+      <p:sp>
+        <p:nvSpPr>
+          <p:cNvPr id="22" name="Rounded Rectangle 21"/>
+          <p:cNvSpPr/>
+          <p:nvPr/>
+        </p:nvSpPr>
+        <p:spPr>
+          <a:xfrm>
+            <a:off x="594360" y="5660136"/>
+            <a:ext cx="438912" cy="438912"/>
+          </a:xfrm>
+          <a:prstGeom prst="roundRect">
+            <a:avLst>
+              <a:gd name="adj" fmla="val 12000"/>
+            </a:avLst>
+          </a:prstGeom>
+          <a:solidFill>
+            <a:srgbClr val="095292"/>
+          </a:solidFill>
+          <a:ln>
+            <a:noFill/>
+          </a:ln>
+        </p:spPr>
+        <p:style>
+          <a:lnRef idx="1">
+            <a:schemeClr val="accent1"/>
+          </a:lnRef>
+          <a:fillRef idx="3">
+            <a:schemeClr val="accent1"/>
+          </a:fillRef>
+          <a:effectRef idx="2">
+            <a:schemeClr val="accent1"/>
+          </a:effectRef>
+          <a:fontRef idx="minor">
+            <a:schemeClr val="lt1"/>
+          </a:fontRef>
+        </p:style>
+        <p:txBody>
+          <a:bodyPr rtlCol="0" anchor="ctr"/>
+          <a:lstStyle/>
+          <a:p>
+            <a:pPr algn="ctr"/>
+          </a:p>
+        </p:txBody>
+      </p:sp>
+      <p:sp>
+        <p:nvSpPr>
+          <p:cNvPr id="23" name="TextBox 22"/>
+          <p:cNvSpPr txBox="1"/>
+          <p:nvPr/>
+        </p:nvSpPr>
+        <p:spPr>
+          <a:xfrm>
+            <a:off x="594360" y="5660136"/>
+            <a:ext cx="438912" cy="438912"/>
+          </a:xfrm>
+          <a:prstGeom prst="rect">
+            <a:avLst/>
+          </a:prstGeom>
+          <a:noFill/>
+        </p:spPr>
+        <p:txBody>
+          <a:bodyPr wrap="square" anchor="ctr"/>
+          <a:lstStyle/>
+          <a:p>
+            <a:pPr algn="ctr"/>
+            <a:r>
+              <a:rPr sz="1600" b="1" i="0">
+                <a:solidFill>
+                  <a:srgbClr val="FFFFFF"/>
+                </a:solidFill>
+                <a:latin typeface="Calibri"/>
+              </a:rPr>
+              <a:t>5</a:t>
+            </a:r>
+          </a:p>
+        </p:txBody>
+      </p:sp>
+      <p:sp>
+        <p:nvSpPr>
+          <p:cNvPr id="24" name="TextBox 23"/>
+          <p:cNvSpPr txBox="1"/>
+          <p:nvPr/>
+        </p:nvSpPr>
+        <p:spPr>
+          <a:xfrm>
+            <a:off x="1188720" y="5495544"/>
+            <a:ext cx="10271455" cy="786384"/>
+          </a:xfrm>
+          <a:prstGeom prst="rect">
+            <a:avLst/>
+          </a:prstGeom>
+          <a:noFill/>
+        </p:spPr>
+        <p:txBody>
+          <a:bodyPr wrap="square" anchor="ctr"/>
+          <a:lstStyle/>
+          <a:p>
+            <a:r>
+              <a:rPr sz="1400" b="1" i="0">
+                <a:solidFill>
+                  <a:srgbClr val="095292"/>
+                </a:solidFill>
+                <a:latin typeface="Calibri"/>
+              </a:rPr>
+              <a:t>Conecte las dos estructuras en un main: cada vez que atender() saca un turno de la cola, registre automaticamente esa consulta en la pila; ejecute el flujo completo con las cuatro mascotas del escenario mas la urgencia de Canela agregada con addFirst sobre un Deque, capture la consola y suba el proyecto a la plataforma del curso.</a:t>
+            </a:r>
+          </a:p>
+        </p:txBody>
+      </p:sp>
+      <p:sp>
+        <p:nvSpPr>
+          <p:cNvPr id="25" name="TextBox 24"/>
+          <p:cNvSpPr txBox="1"/>
+          <p:nvPr/>
+        </p:nvSpPr>
+        <p:spPr>
+          <a:xfrm>
+            <a:off x="11185855" y="6473952"/>
+            <a:ext cx="640080" cy="274320"/>
+          </a:xfrm>
+          <a:prstGeom prst="rect">
+            <a:avLst/>
+          </a:prstGeom>
+          <a:noFill/>
+        </p:spPr>
+        <p:txBody>
+          <a:bodyPr wrap="square">
+            <a:spAutoFit/>
+          </a:bodyPr>
+          <a:lstStyle/>
+          <a:p>
+            <a:pPr algn="r"/>
+            <a:r>
+              <a:rPr sz="1100" b="0" i="0">
+                <a:solidFill>
+                  <a:srgbClr val="666666"/>
+                </a:solidFill>
+                <a:latin typeface="Calibri"/>
+              </a:rPr>
+              <a:t>13</a:t>
+            </a:r>
+          </a:p>
+        </p:txBody>
+      </p:sp>
+    </p:spTree>
+  </p:cSld>
+  <p:clrMapOvr>
+    <a:masterClrMapping/>
+  </p:clrMapOvr>
+</p:sld>
+</file>
+
+<file path=ppt/slides/slide14.xml><?xml version="1.0" encoding="utf-8"?>
+<p:sld xmlns:a="http://schemas.openxmlformats.org/drawingml/2006/main" xmlns:p="http://schemas.openxmlformats.org/presentationml/2006/main" xmlns:r="http://schemas.openxmlformats.org/officeDocument/2006/relationships">
+  <p:cSld>
+    <p:bg>
+      <p:bgPr>
+        <a:solidFill>
+          <a:srgbClr val="FFFFFF"/>
+        </a:solidFill>
+        <a:effectLst/>
+      </p:bgPr>
+    </p:bg>
+    <p:spTree>
+      <p:nvGrpSpPr>
+        <p:cNvPr id="1" name=""/>
+        <p:cNvGrpSpPr/>
+        <p:nvPr/>
+      </p:nvGrpSpPr>
+      <p:grpSpPr/>
+      <p:sp>
+        <p:nvSpPr>
+          <p:cNvPr id="2" name="Rectangle 1"/>
+          <p:cNvSpPr/>
+          <p:nvPr/>
+        </p:nvSpPr>
+        <p:spPr>
+          <a:xfrm>
+            <a:off x="0" y="0"/>
+            <a:ext cx="12191695" cy="960120"/>
+          </a:xfrm>
+          <a:prstGeom prst="rect">
+            <a:avLst/>
+          </a:prstGeom>
+          <a:solidFill>
+            <a:srgbClr val="095292"/>
+          </a:solidFill>
+          <a:ln>
+            <a:noFill/>
+          </a:ln>
+        </p:spPr>
+        <p:style>
+          <a:lnRef idx="1">
+            <a:schemeClr val="accent1"/>
+          </a:lnRef>
+          <a:fillRef idx="3">
+            <a:schemeClr val="accent1"/>
+          </a:fillRef>
+          <a:effectRef idx="2">
+            <a:schemeClr val="accent1"/>
+          </a:effectRef>
+          <a:fontRef idx="minor">
+            <a:schemeClr val="lt1"/>
+          </a:fontRef>
+        </p:style>
+        <p:txBody>
+          <a:bodyPr rtlCol="0" anchor="ctr"/>
+          <a:lstStyle/>
+          <a:p>
+            <a:pPr algn="ctr"/>
+          </a:p>
+        </p:txBody>
+      </p:sp>
+      <p:sp>
+        <p:nvSpPr>
+          <p:cNvPr id="3" name="Rectangle 2"/>
+          <p:cNvSpPr/>
+          <p:nvPr/>
+        </p:nvSpPr>
+        <p:spPr>
+          <a:xfrm>
+            <a:off x="0" y="960120"/>
+            <a:ext cx="12191695" cy="41148"/>
+          </a:xfrm>
+          <a:prstGeom prst="rect">
+            <a:avLst/>
+          </a:prstGeom>
+          <a:solidFill>
+            <a:srgbClr val="FFD000"/>
+          </a:solidFill>
+          <a:ln>
+            <a:noFill/>
+          </a:ln>
+        </p:spPr>
+        <p:style>
+          <a:lnRef idx="1">
+            <a:schemeClr val="accent1"/>
+          </a:lnRef>
+          <a:fillRef idx="3">
+            <a:schemeClr val="accent1"/>
+          </a:fillRef>
+          <a:effectRef idx="2">
+            <a:schemeClr val="accent1"/>
+          </a:effectRef>
+          <a:fontRef idx="minor">
+            <a:schemeClr val="lt1"/>
+          </a:fontRef>
+        </p:style>
+        <p:txBody>
+          <a:bodyPr rtlCol="0" anchor="ctr"/>
+          <a:lstStyle/>
+          <a:p>
+            <a:pPr algn="ctr"/>
+          </a:p>
+        </p:txBody>
+      </p:sp>
+      <p:sp>
+        <p:nvSpPr>
+          <p:cNvPr id="4" name="TextBox 3"/>
+          <p:cNvSpPr txBox="1"/>
+          <p:nvPr/>
+        </p:nvSpPr>
+        <p:spPr>
+          <a:xfrm>
+            <a:off x="457200" y="164592"/>
+            <a:ext cx="11277295" cy="502920"/>
+          </a:xfrm>
+          <a:prstGeom prst="rect">
+            <a:avLst/>
+          </a:prstGeom>
+          <a:noFill/>
+        </p:spPr>
+        <p:txBody>
+          <a:bodyPr wrap="square">
+            <a:spAutoFit/>
+          </a:bodyPr>
+          <a:lstStyle/>
+          <a:p>
+            <a:r>
+              <a:rPr sz="2600" b="1" i="0">
+                <a:solidFill>
+                  <a:srgbClr val="FFFFFF"/>
+                </a:solidFill>
+                <a:latin typeface="Calibri"/>
+              </a:rPr>
+              <a:t>Antes de entregar — autochequeo</a:t>
+            </a:r>
+          </a:p>
+        </p:txBody>
+      </p:sp>
+      <p:sp>
+        <p:nvSpPr>
+          <p:cNvPr id="5" name="Rounded Rectangle 4"/>
+          <p:cNvSpPr/>
+          <p:nvPr/>
+        </p:nvSpPr>
+        <p:spPr>
+          <a:xfrm>
+            <a:off x="457200" y="1261872"/>
+            <a:ext cx="11277295" cy="566928"/>
+          </a:xfrm>
+          <a:prstGeom prst="roundRect">
+            <a:avLst>
+              <a:gd name="adj" fmla="val 12000"/>
+            </a:avLst>
+          </a:prstGeom>
+          <a:solidFill>
+            <a:srgbClr val="F2F2F2"/>
+          </a:solidFill>
+          <a:ln>
+            <a:noFill/>
+          </a:ln>
+        </p:spPr>
+        <p:style>
+          <a:lnRef idx="1">
+            <a:schemeClr val="accent1"/>
+          </a:lnRef>
+          <a:fillRef idx="3">
+            <a:schemeClr val="accent1"/>
+          </a:fillRef>
+          <a:effectRef idx="2">
+            <a:schemeClr val="accent1"/>
+          </a:effectRef>
+          <a:fontRef idx="minor">
+            <a:schemeClr val="lt1"/>
+          </a:fontRef>
+        </p:style>
+        <p:txBody>
+          <a:bodyPr rtlCol="0" anchor="ctr"/>
+          <a:lstStyle/>
+          <a:p>
+            <a:pPr algn="ctr"/>
+          </a:p>
+        </p:txBody>
+      </p:sp>
+      <p:sp>
+        <p:nvSpPr>
+          <p:cNvPr id="6" name="Rectangle 5"/>
+          <p:cNvSpPr/>
+          <p:nvPr/>
+        </p:nvSpPr>
+        <p:spPr>
+          <a:xfrm>
+            <a:off x="640080" y="1408175"/>
+            <a:ext cx="274320" cy="274320"/>
+          </a:xfrm>
+          <a:prstGeom prst="rect">
+            <a:avLst/>
+          </a:prstGeom>
+          <a:solidFill>
+            <a:srgbClr val="FFFFFF"/>
+          </a:solidFill>
+          <a:ln>
+            <a:solidFill>
+              <a:srgbClr val="333333"/>
+            </a:solidFill>
+          </a:ln>
+        </p:spPr>
+        <p:style>
+          <a:lnRef idx="1">
+            <a:schemeClr val="accent1"/>
+          </a:lnRef>
+          <a:fillRef idx="3">
+            <a:schemeClr val="accent1"/>
+          </a:fillRef>
+          <a:effectRef idx="2">
+            <a:schemeClr val="accent1"/>
+          </a:effectRef>
+          <a:fontRef idx="minor">
+            <a:schemeClr val="lt1"/>
+          </a:fontRef>
+        </p:style>
+        <p:txBody>
+          <a:bodyPr rtlCol="0" anchor="ctr"/>
+          <a:lstStyle/>
+          <a:p>
+            <a:pPr algn="ctr"/>
+          </a:p>
+        </p:txBody>
+      </p:sp>
+      <p:sp>
+        <p:nvSpPr>
+          <p:cNvPr id="7" name="Rectangle 6"/>
+          <p:cNvSpPr/>
+          <p:nvPr/>
+        </p:nvSpPr>
+        <p:spPr>
+          <a:xfrm>
+            <a:off x="640080" y="1408175"/>
+            <a:ext cx="73152" cy="274320"/>
+          </a:xfrm>
+          <a:prstGeom prst="rect">
+            <a:avLst/>
+          </a:prstGeom>
+          <a:solidFill>
+            <a:srgbClr val="269CCB"/>
+          </a:solidFill>
+          <a:ln>
+            <a:noFill/>
+          </a:ln>
+        </p:spPr>
+        <p:style>
+          <a:lnRef idx="1">
+            <a:schemeClr val="accent1"/>
+          </a:lnRef>
+          <a:fillRef idx="3">
+            <a:schemeClr val="accent1"/>
+          </a:fillRef>
+          <a:effectRef idx="2">
+            <a:schemeClr val="accent1"/>
+          </a:effectRef>
+          <a:fontRef idx="minor">
+            <a:schemeClr val="lt1"/>
+          </a:fontRef>
+        </p:style>
+        <p:txBody>
+          <a:bodyPr rtlCol="0" anchor="ctr"/>
+          <a:lstStyle/>
+          <a:p>
+            <a:pPr algn="ctr"/>
+          </a:p>
+        </p:txBody>
+      </p:sp>
+      <p:sp>
+        <p:nvSpPr>
+          <p:cNvPr id="8" name="TextBox 7"/>
+          <p:cNvSpPr txBox="1"/>
+          <p:nvPr/>
+        </p:nvSpPr>
+        <p:spPr>
+          <a:xfrm>
+            <a:off x="1097280" y="1353312"/>
+            <a:ext cx="10362895" cy="402336"/>
+          </a:xfrm>
+          <a:prstGeom prst="rect">
+            <a:avLst/>
+          </a:prstGeom>
+          <a:noFill/>
+        </p:spPr>
+        <p:txBody>
+          <a:bodyPr wrap="square" anchor="ctr"/>
+          <a:lstStyle/>
+          <a:p>
+            <a:r>
+              <a:rPr sz="1500" b="0" i="0">
+                <a:solidFill>
+                  <a:srgbClr val="333333"/>
+                </a:solidFill>
+                <a:latin typeface="Calibri"/>
+              </a:rPr>
+              <a:t>Si su ciclo while nunca termina y la consola se llena con el mismo nombre, cual de los dos metodos esta usando dentro del ciclo: el que mira o el que saca?</a:t>
+            </a:r>
+          </a:p>
+        </p:txBody>
+      </p:sp>
+      <p:sp>
+        <p:nvSpPr>
+          <p:cNvPr id="9" name="Rounded Rectangle 8"/>
+          <p:cNvSpPr/>
+          <p:nvPr/>
+        </p:nvSpPr>
+        <p:spPr>
+          <a:xfrm>
+            <a:off x="457200" y="1938528"/>
+            <a:ext cx="11277295" cy="566928"/>
+          </a:xfrm>
+          <a:prstGeom prst="roundRect">
+            <a:avLst>
+              <a:gd name="adj" fmla="val 12000"/>
+            </a:avLst>
+          </a:prstGeom>
+          <a:solidFill>
+            <a:srgbClr val="F2F2F2"/>
+          </a:solidFill>
+          <a:ln>
+            <a:noFill/>
+          </a:ln>
+        </p:spPr>
+        <p:style>
+          <a:lnRef idx="1">
+            <a:schemeClr val="accent1"/>
+          </a:lnRef>
+          <a:fillRef idx="3">
+            <a:schemeClr val="accent1"/>
+          </a:fillRef>
+          <a:effectRef idx="2">
+            <a:schemeClr val="accent1"/>
+          </a:effectRef>
+          <a:fontRef idx="minor">
+            <a:schemeClr val="lt1"/>
+          </a:fontRef>
+        </p:style>
+        <p:txBody>
+          <a:bodyPr rtlCol="0" anchor="ctr"/>
+          <a:lstStyle/>
+          <a:p>
+            <a:pPr algn="ctr"/>
+          </a:p>
+        </p:txBody>
+      </p:sp>
+      <p:sp>
+        <p:nvSpPr>
+          <p:cNvPr id="10" name="Rectangle 9"/>
+          <p:cNvSpPr/>
+          <p:nvPr/>
+        </p:nvSpPr>
+        <p:spPr>
+          <a:xfrm>
+            <a:off x="640080" y="2084832"/>
+            <a:ext cx="274320" cy="274320"/>
+          </a:xfrm>
+          <a:prstGeom prst="rect">
+            <a:avLst/>
+          </a:prstGeom>
+          <a:solidFill>
+            <a:srgbClr val="FFFFFF"/>
+          </a:solidFill>
+          <a:ln>
+            <a:solidFill>
+              <a:srgbClr val="333333"/>
+            </a:solidFill>
+          </a:ln>
+        </p:spPr>
+        <p:style>
+          <a:lnRef idx="1">
+            <a:schemeClr val="accent1"/>
+          </a:lnRef>
+          <a:fillRef idx="3">
+            <a:schemeClr val="accent1"/>
+          </a:fillRef>
+          <a:effectRef idx="2">
+            <a:schemeClr val="accent1"/>
+          </a:effectRef>
+          <a:fontRef idx="minor">
+            <a:schemeClr val="lt1"/>
+          </a:fontRef>
+        </p:style>
+        <p:txBody>
+          <a:bodyPr rtlCol="0" anchor="ctr"/>
+          <a:lstStyle/>
+          <a:p>
+            <a:pPr algn="ctr"/>
+          </a:p>
+        </p:txBody>
+      </p:sp>
+      <p:sp>
+        <p:nvSpPr>
+          <p:cNvPr id="11" name="Rectangle 10"/>
+          <p:cNvSpPr/>
+          <p:nvPr/>
+        </p:nvSpPr>
+        <p:spPr>
+          <a:xfrm>
+            <a:off x="640080" y="2084832"/>
+            <a:ext cx="73152" cy="274320"/>
+          </a:xfrm>
+          <a:prstGeom prst="rect">
+            <a:avLst/>
+          </a:prstGeom>
+          <a:solidFill>
+            <a:srgbClr val="269CCB"/>
+          </a:solidFill>
+          <a:ln>
+            <a:noFill/>
+          </a:ln>
+        </p:spPr>
+        <p:style>
+          <a:lnRef idx="1">
+            <a:schemeClr val="accent1"/>
+          </a:lnRef>
+          <a:fillRef idx="3">
+            <a:schemeClr val="accent1"/>
+          </a:fillRef>
+          <a:effectRef idx="2">
+            <a:schemeClr val="accent1"/>
+          </a:effectRef>
+          <a:fontRef idx="minor">
+            <a:schemeClr val="lt1"/>
+          </a:fontRef>
+        </p:style>
+        <p:txBody>
+          <a:bodyPr rtlCol="0" anchor="ctr"/>
+          <a:lstStyle/>
+          <a:p>
+            <a:pPr algn="ctr"/>
+          </a:p>
+        </p:txBody>
+      </p:sp>
+      <p:sp>
+        <p:nvSpPr>
+          <p:cNvPr id="12" name="TextBox 11"/>
+          <p:cNvSpPr txBox="1"/>
+          <p:nvPr/>
+        </p:nvSpPr>
+        <p:spPr>
+          <a:xfrm>
+            <a:off x="1097280" y="2029968"/>
+            <a:ext cx="10362895" cy="402336"/>
+          </a:xfrm>
+          <a:prstGeom prst="rect">
+            <a:avLst/>
+          </a:prstGeom>
+          <a:noFill/>
+        </p:spPr>
+        <p:txBody>
+          <a:bodyPr wrap="square" anchor="ctr"/>
+          <a:lstStyle/>
+          <a:p>
+            <a:r>
+              <a:rPr sz="1500" b="0" i="0">
+                <a:solidFill>
+                  <a:srgbClr val="333333"/>
+                </a:solidFill>
+                <a:latin typeface="Calibri"/>
+              </a:rPr>
+              <a:t>Si necesita sacar a una mascota que esta en la mitad de la fila, la estructura que eligio sigue siendo la adecuada, o el requisito le esta pidiendo otra cosa?</a:t>
+            </a:r>
+          </a:p>
+        </p:txBody>
+      </p:sp>
+      <p:sp>
+        <p:nvSpPr>
+          <p:cNvPr id="13" name="Rounded Rectangle 12"/>
+          <p:cNvSpPr/>
+          <p:nvPr/>
+        </p:nvSpPr>
+        <p:spPr>
+          <a:xfrm>
+            <a:off x="457200" y="2615184"/>
+            <a:ext cx="11277295" cy="566928"/>
+          </a:xfrm>
+          <a:prstGeom prst="roundRect">
+            <a:avLst>
+              <a:gd name="adj" fmla="val 12000"/>
+            </a:avLst>
+          </a:prstGeom>
+          <a:solidFill>
+            <a:srgbClr val="F2F2F2"/>
+          </a:solidFill>
+          <a:ln>
+            <a:noFill/>
+          </a:ln>
+        </p:spPr>
+        <p:style>
+          <a:lnRef idx="1">
+            <a:schemeClr val="accent1"/>
+          </a:lnRef>
+          <a:fillRef idx="3">
+            <a:schemeClr val="accent1"/>
+          </a:fillRef>
+          <a:effectRef idx="2">
+            <a:schemeClr val="accent1"/>
+          </a:effectRef>
+          <a:fontRef idx="minor">
+            <a:schemeClr val="lt1"/>
+          </a:fontRef>
+        </p:style>
+        <p:txBody>
+          <a:bodyPr rtlCol="0" anchor="ctr"/>
+          <a:lstStyle/>
+          <a:p>
+            <a:pPr algn="ctr"/>
+          </a:p>
+        </p:txBody>
+      </p:sp>
+      <p:sp>
+        <p:nvSpPr>
+          <p:cNvPr id="14" name="Rectangle 13"/>
+          <p:cNvSpPr/>
+          <p:nvPr/>
+        </p:nvSpPr>
+        <p:spPr>
+          <a:xfrm>
+            <a:off x="640080" y="2761488"/>
+            <a:ext cx="274320" cy="274320"/>
+          </a:xfrm>
+          <a:prstGeom prst="rect">
+            <a:avLst/>
+          </a:prstGeom>
+          <a:solidFill>
+            <a:srgbClr val="FFFFFF"/>
+          </a:solidFill>
+          <a:ln>
+            <a:solidFill>
+              <a:srgbClr val="333333"/>
+            </a:solidFill>
+          </a:ln>
+        </p:spPr>
+        <p:style>
+          <a:lnRef idx="1">
+            <a:schemeClr val="accent1"/>
+          </a:lnRef>
+          <a:fillRef idx="3">
+            <a:schemeClr val="accent1"/>
+          </a:fillRef>
+          <a:effectRef idx="2">
+            <a:schemeClr val="accent1"/>
+          </a:effectRef>
+          <a:fontRef idx="minor">
+            <a:schemeClr val="lt1"/>
+          </a:fontRef>
+        </p:style>
+        <p:txBody>
+          <a:bodyPr rtlCol="0" anchor="ctr"/>
+          <a:lstStyle/>
+          <a:p>
+            <a:pPr algn="ctr"/>
+          </a:p>
+        </p:txBody>
+      </p:sp>
+      <p:sp>
+        <p:nvSpPr>
+          <p:cNvPr id="15" name="Rectangle 14"/>
+          <p:cNvSpPr/>
+          <p:nvPr/>
+        </p:nvSpPr>
+        <p:spPr>
+          <a:xfrm>
+            <a:off x="640080" y="2761488"/>
+            <a:ext cx="73152" cy="274320"/>
+          </a:xfrm>
+          <a:prstGeom prst="rect">
+            <a:avLst/>
+          </a:prstGeom>
+          <a:solidFill>
+            <a:srgbClr val="269CCB"/>
+          </a:solidFill>
+          <a:ln>
+            <a:noFill/>
+          </a:ln>
+        </p:spPr>
+        <p:style>
+          <a:lnRef idx="1">
+            <a:schemeClr val="accent1"/>
+          </a:lnRef>
+          <a:fillRef idx="3">
+            <a:schemeClr val="accent1"/>
+          </a:fillRef>
+          <a:effectRef idx="2">
+            <a:schemeClr val="accent1"/>
+          </a:effectRef>
+          <a:fontRef idx="minor">
+            <a:schemeClr val="lt1"/>
+          </a:fontRef>
+        </p:style>
+        <p:txBody>
+          <a:bodyPr rtlCol="0" anchor="ctr"/>
+          <a:lstStyle/>
+          <a:p>
+            <a:pPr algn="ctr"/>
+          </a:p>
+        </p:txBody>
+      </p:sp>
+      <p:sp>
+        <p:nvSpPr>
+          <p:cNvPr id="16" name="TextBox 15"/>
+          <p:cNvSpPr txBox="1"/>
+          <p:nvPr/>
+        </p:nvSpPr>
+        <p:spPr>
+          <a:xfrm>
+            <a:off x="1097280" y="2706624"/>
+            <a:ext cx="10362895" cy="402336"/>
+          </a:xfrm>
+          <a:prstGeom prst="rect">
+            <a:avLst/>
+          </a:prstGeom>
+          <a:noFill/>
+        </p:spPr>
+        <p:txBody>
+          <a:bodyPr wrap="square" anchor="ctr"/>
+          <a:lstStyle/>
+          <a:p>
+            <a:r>
+              <a:rPr sz="1500" b="0" i="0">
+                <a:solidFill>
+                  <a:srgbClr val="333333"/>
+                </a:solidFill>
+                <a:latin typeface="Calibri"/>
+              </a:rPr>
+              <a:t>Antes de llamar a pop(), que pregunta deberia hacerle a la pila para que el programa no lance NoSuchElementException?</a:t>
+            </a:r>
+          </a:p>
+        </p:txBody>
+      </p:sp>
+      <p:sp>
+        <p:nvSpPr>
+          <p:cNvPr id="17" name="TextBox 16"/>
+          <p:cNvSpPr txBox="1"/>
+          <p:nvPr/>
+        </p:nvSpPr>
+        <p:spPr>
+          <a:xfrm>
+            <a:off x="11185855" y="6473952"/>
+            <a:ext cx="640080" cy="274320"/>
+          </a:xfrm>
+          <a:prstGeom prst="rect">
+            <a:avLst/>
+          </a:prstGeom>
+          <a:noFill/>
+        </p:spPr>
+        <p:txBody>
+          <a:bodyPr wrap="square">
+            <a:spAutoFit/>
+          </a:bodyPr>
+          <a:lstStyle/>
+          <a:p>
+            <a:pPr algn="r"/>
+            <a:r>
+              <a:rPr sz="1100" b="0" i="0">
+                <a:solidFill>
+                  <a:srgbClr val="666666"/>
+                </a:solidFill>
+                <a:latin typeface="Calibri"/>
+              </a:rPr>
+              <a:t>14</a:t>
+            </a:r>
+          </a:p>
+        </p:txBody>
+      </p:sp>
+    </p:spTree>
+  </p:cSld>
+  <p:clrMapOvr>
+    <a:masterClrMapping/>
+  </p:clrMapOvr>
+</p:sld>
+</file>
+
+<file path=ppt/slides/slide15.xml><?xml version="1.0" encoding="utf-8"?>
+<p:sld xmlns:a="http://schemas.openxmlformats.org/drawingml/2006/main" xmlns:p="http://schemas.openxmlformats.org/presentationml/2006/main" xmlns:r="http://schemas.openxmlformats.org/officeDocument/2006/relationships">
+  <p:cSld>
+    <p:bg>
+      <p:bgPr>
+        <a:solidFill>
+          <a:srgbClr val="FFFFFF"/>
+        </a:solidFill>
+        <a:effectLst/>
+      </p:bgPr>
+    </p:bg>
+    <p:spTree>
+      <p:nvGrpSpPr>
+        <p:cNvPr id="1" name=""/>
+        <p:cNvGrpSpPr/>
+        <p:nvPr/>
+      </p:nvGrpSpPr>
+      <p:grpSpPr/>
+      <p:sp>
+        <p:nvSpPr>
+          <p:cNvPr id="2" name="Rectangle 1"/>
+          <p:cNvSpPr/>
+          <p:nvPr/>
+        </p:nvSpPr>
+        <p:spPr>
+          <a:xfrm>
+            <a:off x="0" y="0"/>
+            <a:ext cx="12191695" cy="960120"/>
+          </a:xfrm>
+          <a:prstGeom prst="rect">
+            <a:avLst/>
+          </a:prstGeom>
+          <a:solidFill>
+            <a:srgbClr val="095292"/>
+          </a:solidFill>
+          <a:ln>
+            <a:noFill/>
+          </a:ln>
+        </p:spPr>
+        <p:style>
+          <a:lnRef idx="1">
+            <a:schemeClr val="accent1"/>
+          </a:lnRef>
+          <a:fillRef idx="3">
+            <a:schemeClr val="accent1"/>
+          </a:fillRef>
+          <a:effectRef idx="2">
+            <a:schemeClr val="accent1"/>
+          </a:effectRef>
+          <a:fontRef idx="minor">
+            <a:schemeClr val="lt1"/>
+          </a:fontRef>
+        </p:style>
+        <p:txBody>
+          <a:bodyPr rtlCol="0" anchor="ctr"/>
+          <a:lstStyle/>
+          <a:p>
+            <a:pPr algn="ctr"/>
+          </a:p>
+        </p:txBody>
+      </p:sp>
+      <p:sp>
+        <p:nvSpPr>
+          <p:cNvPr id="3" name="Rectangle 2"/>
+          <p:cNvSpPr/>
+          <p:nvPr/>
+        </p:nvSpPr>
+        <p:spPr>
+          <a:xfrm>
+            <a:off x="0" y="960120"/>
+            <a:ext cx="12191695" cy="41148"/>
+          </a:xfrm>
+          <a:prstGeom prst="rect">
+            <a:avLst/>
+          </a:prstGeom>
+          <a:solidFill>
+            <a:srgbClr val="FFD000"/>
+          </a:solidFill>
+          <a:ln>
+            <a:noFill/>
+          </a:ln>
+        </p:spPr>
+        <p:style>
+          <a:lnRef idx="1">
+            <a:schemeClr val="accent1"/>
+          </a:lnRef>
+          <a:fillRef idx="3">
+            <a:schemeClr val="accent1"/>
+          </a:fillRef>
+          <a:effectRef idx="2">
+            <a:schemeClr val="accent1"/>
+          </a:effectRef>
+          <a:fontRef idx="minor">
+            <a:schemeClr val="lt1"/>
+          </a:fontRef>
+        </p:style>
+        <p:txBody>
+          <a:bodyPr rtlCol="0" anchor="ctr"/>
+          <a:lstStyle/>
+          <a:p>
+            <a:pPr algn="ctr"/>
+          </a:p>
+        </p:txBody>
+      </p:sp>
+      <p:sp>
+        <p:nvSpPr>
+          <p:cNvPr id="4" name="TextBox 3"/>
+          <p:cNvSpPr txBox="1"/>
+          <p:nvPr/>
+        </p:nvSpPr>
+        <p:spPr>
+          <a:xfrm>
+            <a:off x="457200" y="164592"/>
+            <a:ext cx="11277295" cy="502920"/>
+          </a:xfrm>
+          <a:prstGeom prst="rect">
+            <a:avLst/>
+          </a:prstGeom>
+          <a:noFill/>
+        </p:spPr>
+        <p:txBody>
+          <a:bodyPr wrap="square">
+            <a:spAutoFit/>
+          </a:bodyPr>
+          <a:lstStyle/>
+          <a:p>
+            <a:r>
+              <a:rPr sz="2600" b="1" i="0">
+                <a:solidFill>
+                  <a:srgbClr val="FFFFFF"/>
+                </a:solidFill>
+                <a:latin typeface="Calibri"/>
+              </a:rPr>
+              <a:t>Criterios de exito / entregable</a:t>
+            </a:r>
+          </a:p>
+        </p:txBody>
+      </p:sp>
+      <p:sp>
+        <p:nvSpPr>
+          <p:cNvPr id="5" name="TextBox 4"/>
+          <p:cNvSpPr txBox="1"/>
+          <p:nvPr/>
+        </p:nvSpPr>
+        <p:spPr>
+          <a:xfrm>
+            <a:off x="457200" y="1170432"/>
+            <a:ext cx="11277295" cy="5230368"/>
+          </a:xfrm>
+          <a:prstGeom prst="rect">
+            <a:avLst/>
+          </a:prstGeom>
+          <a:noFill/>
+        </p:spPr>
+        <p:txBody>
+          <a:bodyPr wrap="square">
+            <a:spAutoFit/>
+          </a:bodyPr>
+          <a:lstStyle/>
+          <a:p>
+            <a:pPr>
+              <a:spcAft>
+                <a:spcPts val="800"/>
+              </a:spcAft>
+            </a:pPr>
+            <a:r>
+              <a:rPr sz="2000" b="0" i="0">
+                <a:solidFill>
+                  <a:srgbClr val="333333"/>
+                </a:solidFill>
+                <a:latin typeface="Calibri"/>
+              </a:rPr>
+              <a:t>–   </a:t>
+            </a:r>
+            <a:r>
+              <a:rPr sz="2000" b="1" i="0">
+                <a:solidFill>
+                  <a:srgbClr val="333333"/>
+                </a:solidFill>
+                <a:latin typeface="Calibri"/>
+              </a:rPr>
+              <a:t>Entregable:</a:t>
+            </a:r>
+            <a:r>
+              <a:rPr sz="2000" b="0" i="0">
+                <a:solidFill>
+                  <a:srgbClr val="333333"/>
+                </a:solidFill>
+                <a:latin typeface="Calibri"/>
+              </a:rPr>
+              <a:t> Clases SalaDeEspera (Queue) e HistorialReciente (Deque como pila) integradas al proyecto VetCare, con una demo que atiende en orden de llegada las cuatro mascotas del escenario y deshace la ultima atencion registrada; comprimido y subido a la plataforma del curso.</a:t>
+            </a:r>
+          </a:p>
+          <a:p>
+            <a:pPr>
+              <a:spcAft>
+                <a:spcPts val="800"/>
+              </a:spcAft>
+            </a:pPr>
+            <a:r>
+              <a:rPr sz="2000" b="0" i="0">
+                <a:solidFill>
+                  <a:srgbClr val="333333"/>
+                </a:solidFill>
+                <a:latin typeface="Calibri"/>
+              </a:rPr>
+              <a:t>–   </a:t>
+            </a:r>
+            <a:r>
+              <a:rPr sz="2000" b="1" i="0">
+                <a:solidFill>
+                  <a:srgbClr val="333333"/>
+                </a:solidFill>
+                <a:latin typeface="Calibri"/>
+              </a:rPr>
+              <a:t>Exito:</a:t>
+            </a:r>
+            <a:r>
+              <a:rPr sz="2000" b="0" i="0">
+                <a:solidFill>
+                  <a:srgbClr val="333333"/>
+                </a:solidFill>
+                <a:latin typeface="Calibri"/>
+              </a:rPr>
+              <a:t> Las mascotas se atienden exactamente en el orden en que llegaron, verificable en la salida de consola.</a:t>
+            </a:r>
+          </a:p>
+          <a:p>
+            <a:pPr>
+              <a:spcAft>
+                <a:spcPts val="800"/>
+              </a:spcAft>
+            </a:pPr>
+            <a:r>
+              <a:rPr sz="2000" b="0" i="0">
+                <a:solidFill>
+                  <a:srgbClr val="333333"/>
+                </a:solidFill>
+                <a:latin typeface="Calibri"/>
+              </a:rPr>
+              <a:t>–   </a:t>
+            </a:r>
+            <a:r>
+              <a:rPr sz="2000" b="1" i="0">
+                <a:solidFill>
+                  <a:srgbClr val="333333"/>
+                </a:solidFill>
+                <a:latin typeface="Calibri"/>
+              </a:rPr>
+              <a:t>Exito:</a:t>
+            </a:r>
+            <a:r>
+              <a:rPr sz="2000" b="0" i="0">
+                <a:solidFill>
+                  <a:srgbClr val="333333"/>
+                </a:solidFill>
+                <a:latin typeface="Calibri"/>
+              </a:rPr>
+              <a:t> peek/siguienteEnPantalla no altera el tamano de la cola, mientras que poll/atender lo reduce en uno por llamada.</a:t>
+            </a:r>
+          </a:p>
+          <a:p>
+            <a:pPr>
+              <a:spcAft>
+                <a:spcPts val="800"/>
+              </a:spcAft>
+            </a:pPr>
+            <a:r>
+              <a:rPr sz="2000" b="0" i="0">
+                <a:solidFill>
+                  <a:srgbClr val="333333"/>
+                </a:solidFill>
+                <a:latin typeface="Calibri"/>
+              </a:rPr>
+              <a:t>–   </a:t>
+            </a:r>
+            <a:r>
+              <a:rPr sz="2000" b="1" i="0">
+                <a:solidFill>
+                  <a:srgbClr val="333333"/>
+                </a:solidFill>
+                <a:latin typeface="Calibri"/>
+              </a:rPr>
+              <a:t>Exito:</a:t>
+            </a:r>
+            <a:r>
+              <a:rPr sz="2000" b="0" i="0">
+                <a:solidFill>
+                  <a:srgbClr val="333333"/>
+                </a:solidFill>
+                <a:latin typeface="Calibri"/>
+              </a:rPr>
+              <a:t> Atender con la sala vacia o deshacer con la pila vacia produce un mensaje controlado y nunca una excepcion sin capturar.</a:t>
+            </a:r>
+          </a:p>
+          <a:p>
+            <a:pPr>
+              <a:spcAft>
+                <a:spcPts val="800"/>
+              </a:spcAft>
+            </a:pPr>
+            <a:r>
+              <a:rPr sz="2000" b="0" i="0">
+                <a:solidFill>
+                  <a:srgbClr val="333333"/>
+                </a:solidFill>
+                <a:latin typeface="Calibri"/>
+              </a:rPr>
+              <a:t>–   </a:t>
+            </a:r>
+            <a:r>
+              <a:rPr sz="2000" b="1" i="0">
+                <a:solidFill>
+                  <a:srgbClr val="333333"/>
+                </a:solidFill>
+                <a:latin typeface="Calibri"/>
+              </a:rPr>
+              <a:t>Exito:</a:t>
+            </a:r>
+            <a:r>
+              <a:rPr sz="2000" b="0" i="0">
+                <a:solidFill>
+                  <a:srgbClr val="333333"/>
+                </a:solidFill>
+                <a:latin typeface="Calibri"/>
+              </a:rPr>
+              <a:t> Cada consulta atendida queda registrada automaticamente en la pila y deshacer retira siempre la mas reciente.</a:t>
+            </a:r>
+          </a:p>
+          <a:p>
+            <a:pPr>
+              <a:spcAft>
+                <a:spcPts val="800"/>
+              </a:spcAft>
+            </a:pPr>
+            <a:r>
+              <a:rPr sz="2000" b="0" i="0">
+                <a:solidFill>
+                  <a:srgbClr val="333333"/>
+                </a:solidFill>
+                <a:latin typeface="Calibri"/>
+              </a:rPr>
+              <a:t>–   </a:t>
+            </a:r>
+            <a:r>
+              <a:rPr sz="2000" b="1" i="0">
+                <a:solidFill>
+                  <a:srgbClr val="333333"/>
+                </a:solidFill>
+                <a:latin typeface="Calibri"/>
+              </a:rPr>
+              <a:t>Entrega en la plataforma del curso</a:t>
+            </a:r>
+            <a:r>
+              <a:rPr sz="2000" b="0" i="0">
+                <a:solidFill>
+                  <a:srgbClr val="333333"/>
+                </a:solidFill>
+                <a:latin typeface="Calibri"/>
+              </a:rPr>
+              <a:t> — en la fecha que indique el docente.</a:t>
+            </a:r>
+          </a:p>
+        </p:txBody>
+      </p:sp>
+      <p:sp>
+        <p:nvSpPr>
+          <p:cNvPr id="6" name="TextBox 5"/>
+          <p:cNvSpPr txBox="1"/>
+          <p:nvPr/>
+        </p:nvSpPr>
+        <p:spPr>
+          <a:xfrm>
+            <a:off x="11185855" y="6473952"/>
+            <a:ext cx="640080" cy="274320"/>
+          </a:xfrm>
+          <a:prstGeom prst="rect">
+            <a:avLst/>
+          </a:prstGeom>
+          <a:noFill/>
+        </p:spPr>
+        <p:txBody>
+          <a:bodyPr wrap="square">
+            <a:spAutoFit/>
+          </a:bodyPr>
+          <a:lstStyle/>
+          <a:p>
+            <a:pPr algn="r"/>
+            <a:r>
+              <a:rPr sz="1100" b="0" i="0">
+                <a:solidFill>
+                  <a:srgbClr val="666666"/>
+                </a:solidFill>
+                <a:latin typeface="Calibri"/>
+              </a:rPr>
+              <a:t>15</a:t>
+            </a:r>
+          </a:p>
+        </p:txBody>
+      </p:sp>
+    </p:spTree>
+  </p:cSld>
+  <p:clrMapOvr>
+    <a:masterClrMapping/>
+  </p:clrMapOvr>
+</p:sld>
+</file>
+
+<file path=ppt/slides/slide16.xml><?xml version="1.0" encoding="utf-8"?>
+<p:sld xmlns:a="http://schemas.openxmlformats.org/drawingml/2006/main" xmlns:p="http://schemas.openxmlformats.org/presentationml/2006/main" xmlns:r="http://schemas.openxmlformats.org/officeDocument/2006/relationships">
+  <p:cSld>
+    <p:bg>
+      <p:bgPr>
+        <a:solidFill>
+          <a:srgbClr val="FFFFFF"/>
+        </a:solidFill>
+        <a:effectLst/>
+      </p:bgPr>
+    </p:bg>
+    <p:spTree>
+      <p:nvGrpSpPr>
+        <p:cNvPr id="1" name=""/>
+        <p:cNvGrpSpPr/>
+        <p:nvPr/>
+      </p:nvGrpSpPr>
+      <p:grpSpPr/>
+      <p:sp>
+        <p:nvSpPr>
+          <p:cNvPr id="2" name="Rectangle 1"/>
+          <p:cNvSpPr/>
+          <p:nvPr/>
+        </p:nvSpPr>
+        <p:spPr>
+          <a:xfrm>
+            <a:off x="0" y="0"/>
+            <a:ext cx="12191695" cy="960120"/>
+          </a:xfrm>
+          <a:prstGeom prst="rect">
+            <a:avLst/>
+          </a:prstGeom>
+          <a:solidFill>
+            <a:srgbClr val="095292"/>
+          </a:solidFill>
+          <a:ln>
+            <a:noFill/>
+          </a:ln>
+        </p:spPr>
+        <p:style>
+          <a:lnRef idx="1">
+            <a:schemeClr val="accent1"/>
+          </a:lnRef>
+          <a:fillRef idx="3">
+            <a:schemeClr val="accent1"/>
+          </a:fillRef>
+          <a:effectRef idx="2">
+            <a:schemeClr val="accent1"/>
+          </a:effectRef>
+          <a:fontRef idx="minor">
+            <a:schemeClr val="lt1"/>
+          </a:fontRef>
+        </p:style>
+        <p:txBody>
+          <a:bodyPr rtlCol="0" anchor="ctr"/>
+          <a:lstStyle/>
+          <a:p>
+            <a:pPr algn="ctr"/>
+          </a:p>
+        </p:txBody>
+      </p:sp>
+      <p:sp>
+        <p:nvSpPr>
+          <p:cNvPr id="3" name="Rectangle 2"/>
+          <p:cNvSpPr/>
+          <p:nvPr/>
+        </p:nvSpPr>
+        <p:spPr>
+          <a:xfrm>
+            <a:off x="0" y="960120"/>
+            <a:ext cx="12191695" cy="41148"/>
+          </a:xfrm>
+          <a:prstGeom prst="rect">
+            <a:avLst/>
+          </a:prstGeom>
+          <a:solidFill>
+            <a:srgbClr val="FFD000"/>
+          </a:solidFill>
+          <a:ln>
+            <a:noFill/>
+          </a:ln>
+        </p:spPr>
+        <p:style>
+          <a:lnRef idx="1">
+            <a:schemeClr val="accent1"/>
+          </a:lnRef>
+          <a:fillRef idx="3">
+            <a:schemeClr val="accent1"/>
+          </a:fillRef>
+          <a:effectRef idx="2">
+            <a:schemeClr val="accent1"/>
+          </a:effectRef>
+          <a:fontRef idx="minor">
+            <a:schemeClr val="lt1"/>
+          </a:fontRef>
+        </p:style>
+        <p:txBody>
+          <a:bodyPr rtlCol="0" anchor="ctr"/>
+          <a:lstStyle/>
+          <a:p>
+            <a:pPr algn="ctr"/>
+          </a:p>
+        </p:txBody>
+      </p:sp>
+      <p:sp>
+        <p:nvSpPr>
+          <p:cNvPr id="4" name="TextBox 3"/>
+          <p:cNvSpPr txBox="1"/>
+          <p:nvPr/>
+        </p:nvSpPr>
+        <p:spPr>
+          <a:xfrm>
+            <a:off x="457200" y="164592"/>
+            <a:ext cx="11277295" cy="502920"/>
+          </a:xfrm>
+          <a:prstGeom prst="rect">
+            <a:avLst/>
+          </a:prstGeom>
+          <a:noFill/>
+        </p:spPr>
+        <p:txBody>
+          <a:bodyPr wrap="square">
+            <a:spAutoFit/>
+          </a:bodyPr>
+          <a:lstStyle/>
+          <a:p>
+            <a:r>
+              <a:rPr sz="2600" b="1" i="0">
+                <a:solidFill>
+                  <a:srgbClr val="FFFFFF"/>
+                </a:solidFill>
+                <a:latin typeface="Calibri"/>
+              </a:rPr>
+              <a:t>Para el PI esta semana</a:t>
+            </a:r>
+          </a:p>
+        </p:txBody>
+      </p:sp>
+      <p:sp>
+        <p:nvSpPr>
+          <p:cNvPr id="5" name="Rounded Rectangle 4"/>
+          <p:cNvSpPr/>
+          <p:nvPr/>
+        </p:nvSpPr>
+        <p:spPr>
+          <a:xfrm>
+            <a:off x="457200" y="1261872"/>
+            <a:ext cx="11277295" cy="1051560"/>
+          </a:xfrm>
+          <a:prstGeom prst="roundRect">
+            <a:avLst>
+              <a:gd name="adj" fmla="val 12000"/>
+            </a:avLst>
+          </a:prstGeom>
+          <a:solidFill>
+            <a:srgbClr val="E8F4FA"/>
+          </a:solidFill>
+          <a:ln>
+            <a:noFill/>
+          </a:ln>
+        </p:spPr>
+        <p:style>
+          <a:lnRef idx="1">
+            <a:schemeClr val="accent1"/>
+          </a:lnRef>
+          <a:fillRef idx="3">
+            <a:schemeClr val="accent1"/>
+          </a:fillRef>
+          <a:effectRef idx="2">
+            <a:schemeClr val="accent1"/>
+          </a:effectRef>
+          <a:fontRef idx="minor">
+            <a:schemeClr val="lt1"/>
+          </a:fontRef>
+        </p:style>
+        <p:txBody>
+          <a:bodyPr rtlCol="0" anchor="ctr"/>
+          <a:lstStyle/>
+          <a:p>
+            <a:pPr algn="ctr"/>
+          </a:p>
+        </p:txBody>
+      </p:sp>
+      <p:sp>
+        <p:nvSpPr>
+          <p:cNvPr id="6" name="Rectangle 5"/>
+          <p:cNvSpPr/>
+          <p:nvPr/>
+        </p:nvSpPr>
+        <p:spPr>
+          <a:xfrm>
+            <a:off x="457200" y="1261872"/>
+            <a:ext cx="128016" cy="1051560"/>
+          </a:xfrm>
+          <a:prstGeom prst="rect">
+            <a:avLst/>
+          </a:prstGeom>
+          <a:solidFill>
+            <a:srgbClr val="269CCB"/>
+          </a:solidFill>
+          <a:ln>
+            <a:noFill/>
+          </a:ln>
+        </p:spPr>
+        <p:style>
+          <a:lnRef idx="1">
+            <a:schemeClr val="accent1"/>
+          </a:lnRef>
+          <a:fillRef idx="3">
+            <a:schemeClr val="accent1"/>
+          </a:fillRef>
+          <a:effectRef idx="2">
+            <a:schemeClr val="accent1"/>
+          </a:effectRef>
+          <a:fontRef idx="minor">
+            <a:schemeClr val="lt1"/>
+          </a:fontRef>
+        </p:style>
+        <p:txBody>
+          <a:bodyPr rtlCol="0" anchor="ctr"/>
+          <a:lstStyle/>
+          <a:p>
+            <a:pPr algn="ctr"/>
+          </a:p>
+        </p:txBody>
+      </p:sp>
+      <p:sp>
+        <p:nvSpPr>
+          <p:cNvPr id="7" name="TextBox 6"/>
+          <p:cNvSpPr txBox="1"/>
+          <p:nvPr/>
+        </p:nvSpPr>
+        <p:spPr>
+          <a:xfrm>
+            <a:off x="777240" y="1399031"/>
+            <a:ext cx="10774375" cy="822959"/>
+          </a:xfrm>
+          <a:prstGeom prst="rect">
+            <a:avLst/>
+          </a:prstGeom>
+          <a:noFill/>
+        </p:spPr>
+        <p:txBody>
+          <a:bodyPr wrap="square">
+            <a:spAutoFit/>
+          </a:bodyPr>
+          <a:lstStyle/>
+          <a:p>
+            <a:r>
+              <a:rPr sz="1200" b="1" i="0">
+                <a:solidFill>
+                  <a:srgbClr val="269CCB"/>
+                </a:solidFill>
+                <a:latin typeface="Calibri"/>
+              </a:rPr>
+              <a:t>Info</a:t>
+            </a:r>
+          </a:p>
+          <a:p>
+            <a:pPr>
+              <a:spcBef>
+                <a:spcPts val="400"/>
+              </a:spcBef>
+            </a:pPr>
+            <a:r>
+              <a:rPr sz="1400" b="0" i="0">
+                <a:solidFill>
+                  <a:srgbClr val="333333"/>
+                </a:solidFill>
+                <a:latin typeface="Calibri"/>
+              </a:rPr>
+              <a:t>Hito: VetCare queda con la sala de espera modelada como cola FIFO y el historial de atenciones recientes como pila LIFO, ambas conectadas al registro de mascotas de la clase anterior.</a:t>
+            </a:r>
+          </a:p>
+        </p:txBody>
+      </p:sp>
+      <p:sp>
+        <p:nvSpPr>
+          <p:cNvPr id="8" name="Rounded Rectangle 7"/>
+          <p:cNvSpPr/>
+          <p:nvPr/>
+        </p:nvSpPr>
+        <p:spPr>
+          <a:xfrm>
+            <a:off x="457200" y="2478024"/>
+            <a:ext cx="11277295" cy="1051560"/>
+          </a:xfrm>
+          <a:prstGeom prst="roundRect">
+            <a:avLst>
+              <a:gd name="adj" fmla="val 12000"/>
+            </a:avLst>
+          </a:prstGeom>
+          <a:solidFill>
+            <a:srgbClr val="FFF8E1"/>
+          </a:solidFill>
+          <a:ln>
+            <a:noFill/>
+          </a:ln>
+        </p:spPr>
+        <p:style>
+          <a:lnRef idx="1">
+            <a:schemeClr val="accent1"/>
+          </a:lnRef>
+          <a:fillRef idx="3">
+            <a:schemeClr val="accent1"/>
+          </a:fillRef>
+          <a:effectRef idx="2">
+            <a:schemeClr val="accent1"/>
+          </a:effectRef>
+          <a:fontRef idx="minor">
+            <a:schemeClr val="lt1"/>
+          </a:fontRef>
+        </p:style>
+        <p:txBody>
+          <a:bodyPr rtlCol="0" anchor="ctr"/>
+          <a:lstStyle/>
+          <a:p>
+            <a:pPr algn="ctr"/>
+          </a:p>
+        </p:txBody>
+      </p:sp>
+      <p:sp>
+        <p:nvSpPr>
+          <p:cNvPr id="9" name="Rectangle 8"/>
+          <p:cNvSpPr/>
+          <p:nvPr/>
+        </p:nvSpPr>
+        <p:spPr>
+          <a:xfrm>
+            <a:off x="457200" y="2478024"/>
+            <a:ext cx="128016" cy="1051560"/>
+          </a:xfrm>
+          <a:prstGeom prst="rect">
+            <a:avLst/>
+          </a:prstGeom>
+          <a:solidFill>
+            <a:srgbClr val="FFD000"/>
+          </a:solidFill>
+          <a:ln>
+            <a:noFill/>
+          </a:ln>
+        </p:spPr>
+        <p:style>
+          <a:lnRef idx="1">
+            <a:schemeClr val="accent1"/>
+          </a:lnRef>
+          <a:fillRef idx="3">
+            <a:schemeClr val="accent1"/>
+          </a:fillRef>
+          <a:effectRef idx="2">
+            <a:schemeClr val="accent1"/>
+          </a:effectRef>
+          <a:fontRef idx="minor">
+            <a:schemeClr val="lt1"/>
+          </a:fontRef>
+        </p:style>
+        <p:txBody>
+          <a:bodyPr rtlCol="0" anchor="ctr"/>
+          <a:lstStyle/>
+          <a:p>
+            <a:pPr algn="ctr"/>
+          </a:p>
+        </p:txBody>
+      </p:sp>
+      <p:sp>
+        <p:nvSpPr>
+          <p:cNvPr id="10" name="TextBox 9"/>
+          <p:cNvSpPr txBox="1"/>
+          <p:nvPr/>
+        </p:nvSpPr>
+        <p:spPr>
+          <a:xfrm>
+            <a:off x="777240" y="2615184"/>
+            <a:ext cx="10774375" cy="822959"/>
+          </a:xfrm>
+          <a:prstGeom prst="rect">
+            <a:avLst/>
+          </a:prstGeom>
+          <a:noFill/>
+        </p:spPr>
+        <p:txBody>
+          <a:bodyPr wrap="square">
+            <a:spAutoFit/>
+          </a:bodyPr>
+          <a:lstStyle/>
+          <a:p>
+            <a:r>
+              <a:rPr sz="1200" b="1" i="0">
+                <a:solidFill>
+                  <a:srgbClr val="FFD000"/>
+                </a:solidFill>
+                <a:latin typeface="Calibri"/>
+              </a:rPr>
+              <a:t>Aclaración</a:t>
+            </a:r>
+          </a:p>
+          <a:p>
+            <a:pPr>
+              <a:spcBef>
+                <a:spcPts val="400"/>
+              </a:spcBef>
+            </a:pPr>
+            <a:r>
+              <a:rPr sz="1400" b="0" i="0">
+                <a:solidFill>
+                  <a:srgbClr val="333333"/>
+                </a:solidFill>
+                <a:latin typeface="Calibri"/>
+              </a:rPr>
+              <a:t>Enunciado completo: Clases/Proyecto Integrador/ (VetCare).</a:t>
+            </a:r>
+          </a:p>
+        </p:txBody>
+      </p:sp>
+      <p:sp>
+        <p:nvSpPr>
+          <p:cNvPr id="11" name="Rounded Rectangle 10"/>
+          <p:cNvSpPr/>
+          <p:nvPr/>
+        </p:nvSpPr>
+        <p:spPr>
+          <a:xfrm>
+            <a:off x="457200" y="3694176"/>
+            <a:ext cx="11277295" cy="1051560"/>
+          </a:xfrm>
+          <a:prstGeom prst="roundRect">
+            <a:avLst>
+              <a:gd name="adj" fmla="val 12000"/>
+            </a:avLst>
+          </a:prstGeom>
+          <a:solidFill>
+            <a:srgbClr val="FBE4E4"/>
+          </a:solidFill>
+          <a:ln>
+            <a:noFill/>
+          </a:ln>
+        </p:spPr>
+        <p:style>
+          <a:lnRef idx="1">
+            <a:schemeClr val="accent1"/>
+          </a:lnRef>
+          <a:fillRef idx="3">
+            <a:schemeClr val="accent1"/>
+          </a:fillRef>
+          <a:effectRef idx="2">
+            <a:schemeClr val="accent1"/>
+          </a:effectRef>
+          <a:fontRef idx="minor">
+            <a:schemeClr val="lt1"/>
+          </a:fontRef>
+        </p:style>
+        <p:txBody>
+          <a:bodyPr rtlCol="0" anchor="ctr"/>
+          <a:lstStyle/>
+          <a:p>
+            <a:pPr algn="ctr"/>
+          </a:p>
+        </p:txBody>
+      </p:sp>
+      <p:sp>
+        <p:nvSpPr>
+          <p:cNvPr id="12" name="Rectangle 11"/>
+          <p:cNvSpPr/>
+          <p:nvPr/>
+        </p:nvSpPr>
+        <p:spPr>
+          <a:xfrm>
+            <a:off x="457200" y="3694176"/>
+            <a:ext cx="128016" cy="1051560"/>
+          </a:xfrm>
+          <a:prstGeom prst="rect">
+            <a:avLst/>
+          </a:prstGeom>
+          <a:solidFill>
+            <a:srgbClr val="A02030"/>
+          </a:solidFill>
+          <a:ln>
+            <a:noFill/>
+          </a:ln>
+        </p:spPr>
+        <p:style>
+          <a:lnRef idx="1">
+            <a:schemeClr val="accent1"/>
+          </a:lnRef>
+          <a:fillRef idx="3">
+            <a:schemeClr val="accent1"/>
+          </a:fillRef>
+          <a:effectRef idx="2">
+            <a:schemeClr val="accent1"/>
+          </a:effectRef>
+          <a:fontRef idx="minor">
+            <a:schemeClr val="lt1"/>
+          </a:fontRef>
+        </p:style>
+        <p:txBody>
+          <a:bodyPr rtlCol="0" anchor="ctr"/>
+          <a:lstStyle/>
+          <a:p>
+            <a:pPr algn="ctr"/>
+          </a:p>
+        </p:txBody>
+      </p:sp>
+      <p:sp>
+        <p:nvSpPr>
+          <p:cNvPr id="13" name="TextBox 12"/>
+          <p:cNvSpPr txBox="1"/>
+          <p:nvPr/>
+        </p:nvSpPr>
+        <p:spPr>
+          <a:xfrm>
+            <a:off x="777240" y="3831336"/>
+            <a:ext cx="10774375" cy="822959"/>
+          </a:xfrm>
+          <a:prstGeom prst="rect">
+            <a:avLst/>
+          </a:prstGeom>
+          <a:noFill/>
+        </p:spPr>
+        <p:txBody>
+          <a:bodyPr wrap="square">
+            <a:spAutoFit/>
+          </a:bodyPr>
+          <a:lstStyle/>
+          <a:p>
+            <a:r>
+              <a:rPr sz="1200" b="1" i="0">
+                <a:solidFill>
+                  <a:srgbClr val="A02030"/>
+                </a:solidFill>
+                <a:latin typeface="Calibri"/>
+              </a:rPr>
+              <a:t>Atención</a:t>
+            </a:r>
+          </a:p>
+          <a:p>
+            <a:pPr>
+              <a:spcBef>
+                <a:spcPts val="400"/>
+              </a:spcBef>
+            </a:pPr>
+            <a:r>
+              <a:rPr sz="1400" b="0" i="0">
+                <a:solidFill>
+                  <a:srgbClr val="333333"/>
+                </a:solidFill>
+                <a:latin typeface="Calibri"/>
+              </a:rPr>
+              <a:t>Entrega del taller, si el docente lo asigna · en la fecha que indique el docente.</a:t>
+            </a:r>
+          </a:p>
+        </p:txBody>
+      </p:sp>
+      <p:sp>
+        <p:nvSpPr>
+          <p:cNvPr id="14" name="TextBox 13"/>
+          <p:cNvSpPr txBox="1"/>
+          <p:nvPr/>
+        </p:nvSpPr>
+        <p:spPr>
+          <a:xfrm>
+            <a:off x="11185855" y="6473952"/>
+            <a:ext cx="640080" cy="274320"/>
+          </a:xfrm>
+          <a:prstGeom prst="rect">
+            <a:avLst/>
+          </a:prstGeom>
+          <a:noFill/>
+        </p:spPr>
+        <p:txBody>
+          <a:bodyPr wrap="square">
+            <a:spAutoFit/>
+          </a:bodyPr>
+          <a:lstStyle/>
+          <a:p>
+            <a:pPr algn="r"/>
+            <a:r>
+              <a:rPr sz="1100" b="0" i="0">
+                <a:solidFill>
+                  <a:srgbClr val="666666"/>
+                </a:solidFill>
+                <a:latin typeface="Calibri"/>
+              </a:rPr>
+              <a:t>16</a:t>
+            </a:r>
+          </a:p>
+        </p:txBody>
+      </p:sp>
+    </p:spTree>
+  </p:cSld>
+  <p:clrMapOvr>
+    <a:masterClrMapping/>
+  </p:clrMapOvr>
+</p:sld>
+</file>
+
+<file path=ppt/slides/slide17.xml><?xml version="1.0" encoding="utf-8"?>
+<p:sld xmlns:a="http://schemas.openxmlformats.org/drawingml/2006/main" xmlns:p="http://schemas.openxmlformats.org/presentationml/2006/main" xmlns:r="http://schemas.openxmlformats.org/officeDocument/2006/relationships">
+  <p:cSld>
+    <p:bg>
+      <p:bgPr>
+        <a:solidFill>
+          <a:srgbClr val="FFFFFF"/>
+        </a:solidFill>
+        <a:effectLst/>
+      </p:bgPr>
+    </p:bg>
+    <p:spTree>
+      <p:nvGrpSpPr>
+        <p:cNvPr id="1" name=""/>
+        <p:cNvGrpSpPr/>
+        <p:nvPr/>
+      </p:nvGrpSpPr>
+      <p:grpSpPr/>
+      <p:sp>
+        <p:nvSpPr>
+          <p:cNvPr id="2" name="Rectangle 1"/>
+          <p:cNvSpPr/>
+          <p:nvPr/>
+        </p:nvSpPr>
+        <p:spPr>
+          <a:xfrm>
+            <a:off x="0" y="0"/>
             <a:ext cx="12191695" cy="164592"/>
           </a:xfrm>
           <a:prstGeom prst="rect">
@@ -6712,7 +8482,7 @@
                 </a:solidFill>
                 <a:latin typeface="Calibri"/>
               </a:rPr>
-              <a:t>Teoria Core</a:t>
+              <a:t>La clase pasada nos dio un ArrayList, que es una herramienta poderosa...</a:t>
             </a:r>
           </a:p>
         </p:txBody>
@@ -6751,7 +8521,7 @@
                 </a:solidFill>
                 <a:latin typeface="Calibri"/>
               </a:rPr>
-              <a:t>–   La clase pasada nos dio un ArrayList, que es una herramienta poderosa justamente porque permite todo: agregar al…</a:t>
+              <a:t>–   La clase pasada nos dio un ArrayList, que es una herramienta poderosa justamente porque permite todo: agregar al final, insertar en la mitad, sacar de cualquier posicion, reordenar.</a:t>
             </a:r>
           </a:p>
           <a:p>
@@ -6767,7 +8537,7 @@
                 </a:solidFill>
                 <a:latin typeface="Calibri"/>
               </a:rPr>
-              <a:t>–   La cola, o Queue, funciona con disciplina FIFO: First In, First Out, el primero que entra es el primero que sale…</a:t>
+              <a:t>–   Ese poder es un problema cuando lo que usted esta modelando tiene reglas.</a:t>
             </a:r>
           </a:p>
           <a:p>
@@ -6783,7 +8553,7 @@
                 </a:solidFill>
                 <a:latin typeface="Calibri"/>
               </a:rPr>
-              <a:t>–   La pila, o Stack, funciona al reves: LIFO, Last In, First Out, como la pila de historias clinicas sobre el…</a:t>
+              <a:t>–   La sala de espera de Huellitas tiene una regla sagrada: el que llega primero pasa primero.</a:t>
             </a:r>
           </a:p>
           <a:p>
@@ -6799,7 +8569,7 @@
                 </a:solidFill>
                 <a:latin typeface="Calibri"/>
               </a:rPr>
-              <a:t>–   Vale la pena entender por que estas estructuras son rapidas, porque ahi esta el argumento tecnico y no solo el…</a:t>
+              <a:t>–   Si la sala de espera es un ArrayList, cualquier programador del equipo (o usted mismo a las once de la noche) puede escribir salaEspera.add(0</a:t>
             </a:r>
           </a:p>
           <a:p>
@@ -6815,7 +8585,39 @@
                 </a:solidFill>
                 <a:latin typeface="Calibri"/>
               </a:rPr>
-              <a:t>–   Un punto que confunde mucho: una cola no se recorre para buscar</a:t>
+              <a:t>–   MascotaDelAmigo) y colar a alguien sin que nada falle: compila, corre y la clinica pierde la confianza de sus clientes.</a:t>
+            </a:r>
+          </a:p>
+          <a:p>
+            <a:pPr>
+              <a:spcAft>
+                <a:spcPts val="800"/>
+              </a:spcAft>
+            </a:pPr>
+            <a:r>
+              <a:rPr sz="2000" b="0" i="0">
+                <a:solidFill>
+                  <a:srgbClr val="333333"/>
+                </a:solidFill>
+                <a:latin typeface="Calibri"/>
+              </a:rPr>
+              <a:t>–   Una estructura restrictiva como Queue no ofrece ese metodo; simplemente no existe en su contrato, entonces el error se vuelve imposible de escribir.</a:t>
+            </a:r>
+          </a:p>
+          <a:p>
+            <a:pPr>
+              <a:spcAft>
+                <a:spcPts val="800"/>
+              </a:spcAft>
+            </a:pPr>
+            <a:r>
+              <a:rPr sz="2000" b="0" i="0">
+                <a:solidFill>
+                  <a:srgbClr val="333333"/>
+                </a:solidFill>
+                <a:latin typeface="Calibri"/>
+              </a:rPr>
+              <a:t>–   Esa es la idea grande de hoy: elegir la estructura mas limitada que resuelva el problema no es una limitacion tecnica, es una forma de blindar la regla del negocio dentro del tipo de dato.</a:t>
             </a:r>
           </a:p>
         </p:txBody>
@@ -6996,141 +8798,21 @@
                 </a:solidFill>
                 <a:latin typeface="Calibri"/>
               </a:rPr>
-              <a:t>FIFO para la sala, LIFO para el historial</a:t>
-            </a:r>
-          </a:p>
-        </p:txBody>
-      </p:sp>
-      <p:sp>
-        <p:nvSpPr>
-          <p:cNvPr id="5" name="Rounded Rectangle 4"/>
-          <p:cNvSpPr/>
-          <p:nvPr/>
-        </p:nvSpPr>
-        <p:spPr>
-          <a:xfrm>
-            <a:off x="457200" y="1261872"/>
-            <a:ext cx="11277295" cy="4773168"/>
-          </a:xfrm>
-          <a:prstGeom prst="roundRect">
-            <a:avLst>
-              <a:gd name="adj" fmla="val 12000"/>
-            </a:avLst>
-          </a:prstGeom>
-          <a:solidFill>
-            <a:srgbClr val="1E2A38"/>
-          </a:solidFill>
-          <a:ln>
-            <a:noFill/>
-          </a:ln>
-        </p:spPr>
-        <p:style>
-          <a:lnRef idx="1">
-            <a:schemeClr val="accent1"/>
-          </a:lnRef>
-          <a:fillRef idx="3">
-            <a:schemeClr val="accent1"/>
-          </a:fillRef>
-          <a:effectRef idx="2">
-            <a:schemeClr val="accent1"/>
-          </a:effectRef>
-          <a:fontRef idx="minor">
-            <a:schemeClr val="lt1"/>
-          </a:fontRef>
-        </p:style>
-        <p:txBody>
-          <a:bodyPr rtlCol="0" anchor="ctr"/>
-          <a:lstStyle/>
-          <a:p>
-            <a:pPr algn="ctr"/>
-          </a:p>
-        </p:txBody>
-      </p:sp>
-      <p:sp>
-        <p:nvSpPr>
-          <p:cNvPr id="6" name="Rectangle 5"/>
-          <p:cNvSpPr/>
-          <p:nvPr/>
-        </p:nvSpPr>
-        <p:spPr>
-          <a:xfrm>
-            <a:off x="457200" y="1261872"/>
-            <a:ext cx="11277295" cy="320040"/>
-          </a:xfrm>
-          <a:prstGeom prst="rect">
-            <a:avLst/>
-          </a:prstGeom>
-          <a:solidFill>
-            <a:srgbClr val="095292"/>
-          </a:solidFill>
-          <a:ln>
-            <a:noFill/>
-          </a:ln>
-        </p:spPr>
-        <p:style>
-          <a:lnRef idx="1">
-            <a:schemeClr val="accent1"/>
-          </a:lnRef>
-          <a:fillRef idx="3">
-            <a:schemeClr val="accent1"/>
-          </a:fillRef>
-          <a:effectRef idx="2">
-            <a:schemeClr val="accent1"/>
-          </a:effectRef>
-          <a:fontRef idx="minor">
-            <a:schemeClr val="lt1"/>
-          </a:fontRef>
-        </p:style>
-        <p:txBody>
-          <a:bodyPr rtlCol="0" anchor="ctr"/>
-          <a:lstStyle/>
-          <a:p>
-            <a:pPr algn="ctr"/>
-          </a:p>
-        </p:txBody>
-      </p:sp>
-      <p:sp>
-        <p:nvSpPr>
-          <p:cNvPr id="7" name="TextBox 6"/>
+              <a:t>La cola, o Queue, funciona con disciplina FIFO: First In, First Out, el...</a:t>
+            </a:r>
+          </a:p>
+        </p:txBody>
+      </p:sp>
+      <p:sp>
+        <p:nvSpPr>
+          <p:cNvPr id="5" name="TextBox 4"/>
           <p:cNvSpPr txBox="1"/>
           <p:nvPr/>
         </p:nvSpPr>
         <p:spPr>
           <a:xfrm>
-            <a:off x="685800" y="1307592"/>
-            <a:ext cx="10820095" cy="256032"/>
-          </a:xfrm>
-          <a:prstGeom prst="rect">
-            <a:avLst/>
-          </a:prstGeom>
-          <a:noFill/>
-        </p:spPr>
-        <p:txBody>
-          <a:bodyPr wrap="square" anchor="ctr"/>
-          <a:lstStyle/>
-          <a:p>
-            <a:r>
-              <a:rPr sz="1000" b="1" i="0">
-                <a:solidFill>
-                  <a:srgbClr val="269CCB"/>
-                </a:solidFill>
-                <a:latin typeface="Calibri"/>
-              </a:rPr>
-              <a:t>● ● ●</a:t>
-            </a:r>
-          </a:p>
-        </p:txBody>
-      </p:sp>
-      <p:sp>
-        <p:nvSpPr>
-          <p:cNvPr id="8" name="TextBox 7"/>
-          <p:cNvSpPr txBox="1"/>
-          <p:nvPr/>
-        </p:nvSpPr>
-        <p:spPr>
-          <a:xfrm>
-            <a:off x="777240" y="1719072"/>
-            <a:ext cx="10637215" cy="4133087"/>
+            <a:off x="457200" y="1170432"/>
+            <a:ext cx="11277295" cy="5230368"/>
           </a:xfrm>
           <a:prstGeom prst="rect">
             <a:avLst/>
@@ -7145,315 +8827,120 @@
           <a:p>
             <a:pPr>
               <a:spcAft>
-                <a:spcPts val="342"/>
+                <a:spcPts val="800"/>
               </a:spcAft>
             </a:pPr>
             <a:r>
-              <a:rPr sz="1200" b="0" i="0">
-                <a:solidFill>
-                  <a:srgbClr val="FFFFFF"/>
-                </a:solidFill>
-                <a:latin typeface="Calibri"/>
-              </a:rPr>
-              <a:t>// Turno firulais, michi, nieve y canela ya fueron creados con new Turno(...)</a:t>
+              <a:rPr sz="2000" b="0" i="0">
+                <a:solidFill>
+                  <a:srgbClr val="333333"/>
+                </a:solidFill>
+                <a:latin typeface="Calibri"/>
+              </a:rPr>
+              <a:t>–   La cola, o Queue, funciona con disciplina FIFO: First In, First Out, el primero que entra es el primero que sale, igual que la fila del banco.</a:t>
             </a:r>
           </a:p>
           <a:p>
             <a:pPr>
               <a:spcAft>
-                <a:spcPts val="342"/>
+                <a:spcPts val="800"/>
               </a:spcAft>
             </a:pPr>
             <a:r>
-              <a:rPr sz="1200" b="0" i="0">
-                <a:solidFill>
-                  <a:srgbClr val="FFFFFF"/>
-                </a:solidFill>
-                <a:latin typeface="Calibri"/>
-              </a:rPr>
-              <a:t>Queue&lt;Turno&gt; sala = new LinkedList&lt;&gt;();      // Queue es INTERFAZ, no se instancia sola</a:t>
+              <a:rPr sz="2000" b="0" i="0">
+                <a:solidFill>
+                  <a:srgbClr val="333333"/>
+                </a:solidFill>
+                <a:latin typeface="Calibri"/>
+              </a:rPr>
+              <a:t>–   En Java, Queue es una interfaz, no una clase, asi que se declara Queue&lt;Turno&gt; salaEspera = new LinkedList&lt;&gt;(); o new ArrayDeque&lt;&gt;(); intentar new Queue&lt;&gt;() no compila y ese es el primer error que veremos en pantalla.</a:t>
             </a:r>
           </a:p>
           <a:p>
             <a:pPr>
               <a:spcAft>
-                <a:spcPts val="342"/>
+                <a:spcPts val="800"/>
               </a:spcAft>
             </a:pPr>
             <a:r>
-              <a:rPr sz="1200" b="0" i="0">
-                <a:solidFill>
-                  <a:srgbClr val="FFFFFF"/>
-                </a:solidFill>
-                <a:latin typeface="Calibri"/>
-              </a:rPr>
-              <a:t>sala.offer(firulais);                        // offer = encolar al final (FIFO)</a:t>
+              <a:rPr sz="2000" b="0" i="0">
+                <a:solidFill>
+                  <a:srgbClr val="333333"/>
+                </a:solidFill>
+                <a:latin typeface="Calibri"/>
+              </a:rPr>
+              <a:t>–   La cola tiene tres operaciones utiles y cada una viene en dos sabores: offer(x) agrega al final y devuelve false si no cabe (la version add lanza IllegalStateException en ese caso)</a:t>
             </a:r>
           </a:p>
           <a:p>
             <a:pPr>
               <a:spcAft>
-                <a:spcPts val="342"/>
+                <a:spcPts val="800"/>
               </a:spcAft>
             </a:pPr>
             <a:r>
-              <a:rPr sz="1200" b="0" i="0">
-                <a:solidFill>
-                  <a:srgbClr val="FFFFFF"/>
-                </a:solidFill>
-                <a:latin typeface="Calibri"/>
-              </a:rPr>
-              <a:t>sala.offer(michi);</a:t>
+              <a:rPr sz="2000" b="0" i="0">
+                <a:solidFill>
+                  <a:srgbClr val="333333"/>
+                </a:solidFill>
+                <a:latin typeface="Calibri"/>
+              </a:rPr>
+              <a:t>–   Poll() saca y devuelve el primero o null si esta vacia (la version remove lanza NoSuchElementException)</a:t>
             </a:r>
           </a:p>
           <a:p>
             <a:pPr>
               <a:spcAft>
-                <a:spcPts val="342"/>
+                <a:spcPts val="800"/>
               </a:spcAft>
             </a:pPr>
             <a:r>
-              <a:rPr sz="1200" b="0" i="0">
-                <a:solidFill>
-                  <a:srgbClr val="FFFFFF"/>
-                </a:solidFill>
-                <a:latin typeface="Calibri"/>
-              </a:rPr>
-              <a:t>Turno enPantalla = sala.peek();              // MIRA el primero, size() NO cambia</a:t>
+              <a:rPr sz="2000" b="0" i="0">
+                <a:solidFill>
+                  <a:srgbClr val="333333"/>
+                </a:solidFill>
+                <a:latin typeface="Calibri"/>
+              </a:rPr>
+              <a:t>–   Y peek() mira el primero sin sacarlo o devuelve null (la version element tambien lanza excepcion).</a:t>
             </a:r>
           </a:p>
           <a:p>
             <a:pPr>
               <a:spcAft>
-                <a:spcPts val="342"/>
+                <a:spcPts val="800"/>
               </a:spcAft>
             </a:pPr>
             <a:r>
-              <a:rPr sz="1200" b="0" i="0">
-                <a:solidFill>
-                  <a:srgbClr val="FFFFFF"/>
-                </a:solidFill>
-                <a:latin typeface="Calibri"/>
-              </a:rPr>
-              <a:t>Turno atendido   = sala.poll();              // SACA el primero, size() baja en 1</a:t>
+              <a:rPr sz="2000" b="0" i="0">
+                <a:solidFill>
+                  <a:srgbClr val="333333"/>
+                </a:solidFill>
+                <a:latin typeface="Calibri"/>
+              </a:rPr>
+              <a:t>–   En VetCare usamos siempre offer/poll/peek porque avisan con false o con null en vez de reventar</a:t>
             </a:r>
           </a:p>
           <a:p>
             <a:pPr>
               <a:spcAft>
-                <a:spcPts val="342"/>
+                <a:spcPts val="800"/>
               </a:spcAft>
             </a:pPr>
             <a:r>
-              <a:rPr sz="1200" b="0" i="0">
-                <a:solidFill>
-                  <a:srgbClr val="FFFFFF"/>
-                </a:solidFill>
-                <a:latin typeface="Calibri"/>
-              </a:rPr>
-              <a:t>System.out.println(sala.poll());             // cola vacia -&gt; null, no explota</a:t>
-            </a:r>
-          </a:p>
-          <a:p>
-            <a:pPr>
-              <a:spcAft>
-                <a:spcPts val="342"/>
-              </a:spcAft>
-            </a:pPr>
-            <a:r>
-              <a:rPr sz="1200" b="0" i="0">
-                <a:solidFill>
-                  <a:srgbClr val="FFFFFF"/>
-                </a:solidFill>
-                <a:latin typeface="Calibri"/>
-              </a:rPr>
-              <a:t/>
-            </a:r>
-          </a:p>
-          <a:p>
-            <a:pPr>
-              <a:spcAft>
-                <a:spcPts val="342"/>
-              </a:spcAft>
-            </a:pPr>
-            <a:r>
-              <a:rPr sz="1200" b="0" i="0">
-                <a:solidFill>
-                  <a:srgbClr val="FFFFFF"/>
-                </a:solidFill>
-                <a:latin typeface="Calibri"/>
-              </a:rPr>
-              <a:t>Deque&lt;String&gt; historial = new ArrayDeque&lt;&gt;(); // pila moderna, mejor que Stack</a:t>
-            </a:r>
-          </a:p>
-          <a:p>
-            <a:pPr>
-              <a:spcAft>
-                <a:spcPts val="342"/>
-              </a:spcAft>
-            </a:pPr>
-            <a:r>
-              <a:rPr sz="1200" b="0" i="0">
-                <a:solidFill>
-                  <a:srgbClr val="FFFFFF"/>
-                </a:solidFill>
-                <a:latin typeface="Calibri"/>
-              </a:rPr>
-              <a:t>historial.push("Consulta de Firulais");      // push = poner encima (LIFO)</a:t>
-            </a:r>
-          </a:p>
-          <a:p>
-            <a:pPr>
-              <a:spcAft>
-                <a:spcPts val="342"/>
-              </a:spcAft>
-            </a:pPr>
-            <a:r>
-              <a:rPr sz="1200" b="0" i="0">
-                <a:solidFill>
-                  <a:srgbClr val="FFFFFF"/>
-                </a:solidFill>
-                <a:latin typeface="Calibri"/>
-              </a:rPr>
-              <a:t>historial.push("Consulta de Michi");</a:t>
-            </a:r>
-          </a:p>
-          <a:p>
-            <a:pPr>
-              <a:spcAft>
-                <a:spcPts val="342"/>
-              </a:spcAft>
-            </a:pPr>
-            <a:r>
-              <a:rPr sz="1200" b="0" i="0">
-                <a:solidFill>
-                  <a:srgbClr val="FFFFFF"/>
-                </a:solidFill>
-                <a:latin typeface="Calibri"/>
-              </a:rPr>
-              <a:t>System.out.println(historial.peek());        // Michi: el ultimo que entro</a:t>
-            </a:r>
-          </a:p>
-          <a:p>
-            <a:pPr>
-              <a:spcAft>
-                <a:spcPts val="342"/>
-              </a:spcAft>
-            </a:pPr>
-            <a:r>
-              <a:rPr sz="1200" b="0" i="0">
-                <a:solidFill>
-                  <a:srgbClr val="FFFFFF"/>
-                </a:solidFill>
-                <a:latin typeface="Calibri"/>
-              </a:rPr>
-              <a:t>if (!historial.isEmpty()) historial.pop();   // deshacer, siempre validando primero</a:t>
-            </a:r>
-          </a:p>
-          <a:p>
-            <a:pPr>
-              <a:spcAft>
-                <a:spcPts val="342"/>
-              </a:spcAft>
-            </a:pPr>
-            <a:r>
-              <a:rPr sz="1200" b="0" i="0">
-                <a:solidFill>
-                  <a:srgbClr val="FFFFFF"/>
-                </a:solidFill>
-                <a:latin typeface="Calibri"/>
-              </a:rPr>
-              <a:t/>
-            </a:r>
-          </a:p>
-          <a:p>
-            <a:pPr>
-              <a:spcAft>
-                <a:spcPts val="342"/>
-              </a:spcAft>
-            </a:pPr>
-            <a:r>
-              <a:rPr sz="1200" b="0" i="0">
-                <a:solidFill>
-                  <a:srgbClr val="FFFFFF"/>
-                </a:solidFill>
-                <a:latin typeface="Calibri"/>
-              </a:rPr>
-              <a:t>Deque&lt;Turno&gt; fila = new ArrayDeque&lt;&gt;();      // urgencia sin colarse a escondidas</a:t>
-            </a:r>
-          </a:p>
-          <a:p>
-            <a:pPr>
-              <a:spcAft>
-                <a:spcPts val="342"/>
-              </a:spcAft>
-            </a:pPr>
-            <a:r>
-              <a:rPr sz="1200" b="0" i="0">
-                <a:solidFill>
-                  <a:srgbClr val="FFFFFF"/>
-                </a:solidFill>
-                <a:latin typeface="Calibri"/>
-              </a:rPr>
-              <a:t>fila.addLast(nieve);                         // llegada normal: al final</a:t>
-            </a:r>
-          </a:p>
-          <a:p>
-            <a:pPr>
-              <a:spcAft>
-                <a:spcPts val="342"/>
-              </a:spcAft>
-            </a:pPr>
-            <a:r>
-              <a:rPr sz="1200" b="0" i="0">
-                <a:solidFill>
-                  <a:srgbClr val="FFFFFF"/>
-                </a:solidFill>
-                <a:latin typeface="Calibri"/>
-              </a:rPr>
-              <a:t>fila.addFirst(canela);                       // URGENCIA: al frente, con nombre propio</a:t>
-            </a:r>
-          </a:p>
-        </p:txBody>
-      </p:sp>
-      <p:sp>
-        <p:nvSpPr>
-          <p:cNvPr id="9" name="TextBox 8"/>
-          <p:cNvSpPr txBox="1"/>
-          <p:nvPr/>
-        </p:nvSpPr>
-        <p:spPr>
-          <a:xfrm>
-            <a:off x="457200" y="6080760"/>
-            <a:ext cx="11277295" cy="320040"/>
-          </a:xfrm>
-          <a:prstGeom prst="rect">
-            <a:avLst/>
-          </a:prstGeom>
-          <a:noFill/>
-        </p:spPr>
-        <p:txBody>
-          <a:bodyPr wrap="square">
-            <a:spAutoFit/>
-          </a:bodyPr>
-          <a:lstStyle/>
-          <a:p>
-            <a:pPr algn="ctr"/>
-            <a:r>
-              <a:rPr sz="1200" b="0" i="1">
-                <a:solidFill>
-                  <a:srgbClr val="666666"/>
-                </a:solidFill>
-                <a:latin typeface="Calibri"/>
-              </a:rPr>
-              <a:t>La estructura restrictiva no le quita poder: le quita la posibilidad de romper la regla del negocio sin darse cuenta.</a:t>
-            </a:r>
-          </a:p>
-        </p:txBody>
-      </p:sp>
-      <p:sp>
-        <p:nvSpPr>
-          <p:cNvPr id="10" name="TextBox 9"/>
+              <a:rPr sz="2000" b="0" i="0">
+                <a:solidFill>
+                  <a:srgbClr val="333333"/>
+                </a:solidFill>
+                <a:latin typeface="Calibri"/>
+              </a:rPr>
+              <a:t>–   Y en una recepcion que puede quedar vacia a media manana eso es exactamente lo que queremos. peek es lo que alimenta la pantalla de turnos que ve el publico; poll es lo que hace el medico cuando abre la puerta del consultorio.</a:t>
+            </a:r>
+          </a:p>
+        </p:txBody>
+      </p:sp>
+      <p:sp>
+        <p:nvSpPr>
+          <p:cNvPr id="6" name="TextBox 5"/>
           <p:cNvSpPr txBox="1"/>
           <p:nvPr/>
         </p:nvSpPr>
@@ -7627,7 +9114,7 @@
                 </a:solidFill>
                 <a:latin typeface="Calibri"/>
               </a:rPr>
-              <a:t>Demo del dia</a:t>
+              <a:t>La pila, o Stack, funciona al reves: LIFO, Last In, First Out, como la...</a:t>
             </a:r>
           </a:p>
         </p:txBody>
@@ -7666,25 +9153,7 @@
                 </a:solidFill>
                 <a:latin typeface="Calibri"/>
               </a:rPr>
-              <a:t>–   </a:t>
-            </a:r>
-            <a:r>
-              <a:rPr sz="2000" b="1" i="0">
-                <a:solidFill>
-                  <a:srgbClr val="333333"/>
-                </a:solidFill>
-                <a:latin typeface="Calibri"/>
-              </a:rPr>
-              <a:t>Herramienta:</a:t>
-            </a:r>
-            <a:r>
-              <a:rPr sz="2000" b="0" i="0">
-                <a:solidFill>
-                  <a:srgbClr val="333333"/>
-                </a:solidFill>
-                <a:latin typeface="Calibri"/>
-              </a:rPr>
-              <a:t> Visual Studio Code (Java)</a:t>
+              <a:t>–   La pila, o Stack, funciona al reves: LIFO, Last In, First Out, como la pila de historias clinicas sobre el escritorio, donde uno siempre coge la de encima.</a:t>
             </a:r>
           </a:p>
           <a:p>
@@ -7700,25 +9169,7 @@
                 </a:solidFill>
                 <a:latin typeface="Calibri"/>
               </a:rPr>
-              <a:t>–   </a:t>
-            </a:r>
-            <a:r>
-              <a:rPr sz="2000" b="1" i="0">
-                <a:solidFill>
-                  <a:srgbClr val="333333"/>
-                </a:solidFill>
-                <a:latin typeface="Calibri"/>
-              </a:rPr>
-              <a:t>Demo:</a:t>
-            </a:r>
-            <a:r>
-              <a:rPr sz="2000" b="0" i="0">
-                <a:solidFill>
-                  <a:srgbClr val="333333"/>
-                </a:solidFill>
-                <a:latin typeface="Calibri"/>
-              </a:rPr>
-              <a:t> El docente encola cuatro mascotas, muestra en pantalla la diferencia entre peek() y poll() atendiendo en orden de llegada, y luego usa push/pop para deshacer la ultima atencion registrada.</a:t>
+              <a:t>–   Sus operaciones son push(x) para poner encima, pop() para sacar el de encima y peek() para mirarlo sin sacarlo.</a:t>
             </a:r>
           </a:p>
           <a:p>
@@ -7734,7 +9185,55 @@
                 </a:solidFill>
                 <a:latin typeface="Calibri"/>
               </a:rPr>
-              <a:t>–   Mismo dominio VetCare — no otro ejemplo.</a:t>
+              <a:t>–   Java trae una clase llamada Stack, pero es codigo de 1995: hereda de Vector, esta sincronizada (lo que la hace mas lenta sin necesidad) y permite acceder por indice, con lo cual rompe la propia restriccion que dice defender.</a:t>
+            </a:r>
+          </a:p>
+          <a:p>
+            <a:pPr>
+              <a:spcAft>
+                <a:spcPts val="800"/>
+              </a:spcAft>
+            </a:pPr>
+            <a:r>
+              <a:rPr sz="2000" b="0" i="0">
+                <a:solidFill>
+                  <a:srgbClr val="333333"/>
+                </a:solidFill>
+                <a:latin typeface="Calibri"/>
+              </a:rPr>
+              <a:t>–   La practica actual es usar Deque&lt;String&gt; historial = new ArrayDeque&lt;&gt;(); y llamarle push/pop/peek, que es exactamente la misma API pero sobre una implementacion moderna.</a:t>
+            </a:r>
+          </a:p>
+          <a:p>
+            <a:pPr>
+              <a:spcAft>
+                <a:spcPts val="800"/>
+              </a:spcAft>
+            </a:pPr>
+            <a:r>
+              <a:rPr sz="2000" b="0" i="0">
+                <a:solidFill>
+                  <a:srgbClr val="333333"/>
+                </a:solidFill>
+                <a:latin typeface="Calibri"/>
+              </a:rPr>
+              <a:t>–   En VetCare la pila guarda el historial de atenciones recientes: cada consulta terminada se apila, la pantalla del medico muestra siempre la de encima con peek, y si registro una atencion por equivocacion, pop la deshace.</a:t>
+            </a:r>
+          </a:p>
+          <a:p>
+            <a:pPr>
+              <a:spcAft>
+                <a:spcPts val="800"/>
+              </a:spcAft>
+            </a:pPr>
+            <a:r>
+              <a:rPr sz="2000" b="0" i="0">
+                <a:solidFill>
+                  <a:srgbClr val="333333"/>
+                </a:solidFill>
+                <a:latin typeface="Calibri"/>
+              </a:rPr>
+              <a:t>–   Eso es literalmente como funciona el Ctrl+Z de cualquier programa.</a:t>
             </a:r>
           </a:p>
         </p:txBody>
@@ -7915,7 +9414,7 @@
                 </a:solidFill>
                 <a:latin typeface="Calibri"/>
               </a:rPr>
-              <a:t>Taller PI — por que importa</a:t>
+              <a:t>Vale la pena entender por que estas estructuras son rapidas, porque ahi...</a:t>
             </a:r>
           </a:p>
         </p:txBody>
@@ -7954,25 +9453,7 @@
                 </a:solidFill>
                 <a:latin typeface="Calibri"/>
               </a:rPr>
-              <a:t>–   </a:t>
-            </a:r>
-            <a:r>
-              <a:rPr sz="2000" b="1" i="0">
-                <a:solidFill>
-                  <a:srgbClr val="333333"/>
-                </a:solidFill>
-                <a:latin typeface="Calibri"/>
-              </a:rPr>
-              <a:t>Por que importa al PI:</a:t>
-            </a:r>
-            <a:r>
-              <a:rPr sz="2000" b="0" i="0">
-                <a:solidFill>
-                  <a:srgbClr val="333333"/>
-                </a:solidFill>
-                <a:latin typeface="Calibri"/>
-              </a:rPr>
-              <a:t> VetCare debe agendar y atender en orden real de llegada, y esa regla queda garantizada por el tipo de dato y no por la buena memoria del programador.</a:t>
+              <a:t>–   Vale la pena entender por que estas estructuras son rapidas, porque ahi esta el argumento tecnico y no solo el pedagogico.</a:t>
             </a:r>
           </a:p>
           <a:p>
@@ -7988,7 +9469,7 @@
                 </a:solidFill>
                 <a:latin typeface="Calibri"/>
               </a:rPr>
-              <a:t>–   El historial de atenciones recientes en pila es la base del deshacer que despues protegera al usuario cuando la interfaz grafica permita registrar consultas por error.</a:t>
+              <a:t>–   ArrayDeque es un arreglo circular con dos punteros, uno al frente y otro al final: cuando usted saca del frente no mueve ni un elemento, solo corre el puntero, y cuando el puntero llega al final del arreglo da la vuelta al inicio.</a:t>
             </a:r>
           </a:p>
           <a:p>
@@ -8004,7 +9485,55 @@
                 </a:solidFill>
                 <a:latin typeface="Calibri"/>
               </a:rPr>
-              <a:t>–   Cola y pila son las estructuras que se guardaran y recargaran desde archivo en las clases de persistencia, asi que hoy definimos el orden en que se escribiran las lineas del CSV.</a:t>
+              <a:t>–   Por eso agregar y sacar por cualquiera de los dos extremos cuesta tiempo constante.</a:t>
+            </a:r>
+          </a:p>
+          <a:p>
+            <a:pPr>
+              <a:spcAft>
+                <a:spcPts val="800"/>
+              </a:spcAft>
+            </a:pPr>
+            <a:r>
+              <a:rPr sz="2000" b="0" i="0">
+                <a:solidFill>
+                  <a:srgbClr val="333333"/>
+                </a:solidFill>
+                <a:latin typeface="Calibri"/>
+              </a:rPr>
+              <a:t>–   LinkedList, en cambio, es una cadena de nodos donde cada nodo apunta al siguiente y al anterior, asi que sacar el primero es simplemente mover la cabeza de la cadena.</a:t>
+            </a:r>
+          </a:p>
+          <a:p>
+            <a:pPr>
+              <a:spcAft>
+                <a:spcPts val="800"/>
+              </a:spcAft>
+            </a:pPr>
+            <a:r>
+              <a:rPr sz="2000" b="0" i="0">
+                <a:solidFill>
+                  <a:srgbClr val="333333"/>
+                </a:solidFill>
+                <a:latin typeface="Calibri"/>
+              </a:rPr>
+              <a:t>–   Compare eso con usar un ArrayList como cola: mascotas.remove(0) obliga a desplazar todos los elementos restantes un puesto hacia la izquierda, lo que en una jornada de 300 turnos significa decenas de miles de movimientos innecesarios.</a:t>
+            </a:r>
+          </a:p>
+          <a:p>
+            <a:pPr>
+              <a:spcAft>
+                <a:spcPts val="800"/>
+              </a:spcAft>
+            </a:pPr>
+            <a:r>
+              <a:rPr sz="2000" b="0" i="0">
+                <a:solidFill>
+                  <a:srgbClr val="333333"/>
+                </a:solidFill>
+                <a:latin typeface="Calibri"/>
+              </a:rPr>
+              <a:t>–   La estructura correcta no solo previene errores de negocio, tambien evita que el programa se arrastre.</a:t>
             </a:r>
           </a:p>
         </p:txBody>
@@ -8185,7 +9714,7 @@
                 </a:solidFill>
                 <a:latin typeface="Calibri"/>
               </a:rPr>
-              <a:t>Taller PI — punto de partida</a:t>
+              <a:t>Un punto que confunde mucho: una cola no se recorre para buscar</a:t>
             </a:r>
           </a:p>
         </p:txBody>
@@ -8224,7 +9753,7 @@
                 </a:solidFill>
                 <a:latin typeface="Calibri"/>
               </a:rPr>
-              <a:t>–   Es lunes 8:00 a.m. en Huellitas y llegan en este orden: Firulais (M-001, vacuna, dueno Ana Gomez), Michi (M-002, control, dueno Luis Perez), Rocky (M-003, revision de patas, dueno Ana Gomez) y Nieve (M-004, desparasitacion, duena Sara Diaz).</a:t>
+              <a:t>–   Un punto que confunde mucho: una cola no se recorre para buscar.</a:t>
             </a:r>
           </a:p>
           <a:p>
@@ -8240,7 +9769,7 @@
                 </a:solidFill>
                 <a:latin typeface="Calibri"/>
               </a:rPr>
-              <a:t>–   La sala de espera arranca vacia y el historial de atenciones recientes tambien; el registro de mascotas de la Clase 2 ya esta cargado y se reutiliza.</a:t>
+              <a:t>–   Si usted se descubre iterando la sala de espera para encontrar a Firulais y sacarlo del medio, la senal es que ese caso de uso no es una cola pura</a:t>
             </a:r>
           </a:p>
           <a:p>
@@ -8256,7 +9785,71 @@
                 </a:solidFill>
                 <a:latin typeface="Calibri"/>
               </a:rPr>
-              <a:t>–   A las 8:20 entra Canela (M-009, duena Ana Gomez) con una urgencia real y debe pasar de primera sin destruir el orden de los demas.</a:t>
+              <a:t>–   Y que necesita otra estructura al lado (por ejemplo un Deque que permita addFirst para urgencias, o un HashMap que veremos la proxima clase).</a:t>
+            </a:r>
+          </a:p>
+          <a:p>
+            <a:pPr>
+              <a:spcAft>
+                <a:spcPts val="800"/>
+              </a:spcAft>
+            </a:pPr>
+            <a:r>
+              <a:rPr sz="2000" b="0" i="0">
+                <a:solidFill>
+                  <a:srgbClr val="333333"/>
+                </a:solidFill>
+                <a:latin typeface="Calibri"/>
+              </a:rPr>
+              <a:t>–   En VetCare resolvemos la urgencia sin traicionar el modelo: usamos Deque&lt;Turno&gt; y decimos addLast para el que llega normal y addFirst para el caso critico</a:t>
+            </a:r>
+          </a:p>
+          <a:p>
+            <a:pPr>
+              <a:spcAft>
+                <a:spcPts val="800"/>
+              </a:spcAft>
+            </a:pPr>
+            <a:r>
+              <a:rPr sz="2000" b="0" i="0">
+                <a:solidFill>
+                  <a:srgbClr val="333333"/>
+                </a:solidFill>
+                <a:latin typeface="Calibri"/>
+              </a:rPr>
+              <a:t>–   Dejando explicito en el codigo que colarse es una operacion excepcional y con nombre propio, no un accidente.</a:t>
+            </a:r>
+          </a:p>
+          <a:p>
+            <a:pPr>
+              <a:spcAft>
+                <a:spcPts val="800"/>
+              </a:spcAft>
+            </a:pPr>
+            <a:r>
+              <a:rPr sz="2000" b="0" i="0">
+                <a:solidFill>
+                  <a:srgbClr val="333333"/>
+                </a:solidFill>
+                <a:latin typeface="Calibri"/>
+              </a:rPr>
+              <a:t>–   Ademas, recorrer una cola con for-each la muestra pero no la consume; muchos estudiantes imprimen la cola con un for-each, ven todos los turnos y creen que ya los atendieron, cuando en realidad size() sigue igual.</a:t>
+            </a:r>
+          </a:p>
+          <a:p>
+            <a:pPr>
+              <a:spcAft>
+                <a:spcPts val="800"/>
+              </a:spcAft>
+            </a:pPr>
+            <a:r>
+              <a:rPr sz="2000" b="0" i="0">
+                <a:solidFill>
+                  <a:srgbClr val="333333"/>
+                </a:solidFill>
+                <a:latin typeface="Calibri"/>
+              </a:rPr>
+              <a:t>–   Consumir es poll; mirar es peek o for-each.</a:t>
             </a:r>
           </a:p>
         </p:txBody>
@@ -8437,7 +10030,7 @@
                 </a:solidFill>
                 <a:latin typeface="Calibri"/>
               </a:rPr>
-              <a:t>Taller PI — pasos guiados</a:t>
+              <a:t>FIFO para la sala, LIFO para el historial</a:t>
             </a:r>
           </a:p>
         </p:txBody>
@@ -8450,8 +10043,8 @@
         </p:nvSpPr>
         <p:spPr>
           <a:xfrm>
-            <a:off x="457200" y="1234440"/>
-            <a:ext cx="11277295" cy="950976"/>
+            <a:off x="457200" y="1261872"/>
+            <a:ext cx="11277295" cy="4773168"/>
           </a:xfrm>
           <a:prstGeom prst="roundRect">
             <a:avLst>
@@ -8459,7 +10052,7 @@
             </a:avLst>
           </a:prstGeom>
           <a:solidFill>
-            <a:srgbClr val="F2F2F2"/>
+            <a:srgbClr val="1E2A38"/>
           </a:solidFill>
           <a:ln>
             <a:noFill/>
@@ -8489,19 +10082,17 @@
       </p:sp>
       <p:sp>
         <p:nvSpPr>
-          <p:cNvPr id="6" name="Rounded Rectangle 5"/>
+          <p:cNvPr id="6" name="Rectangle 5"/>
           <p:cNvSpPr/>
           <p:nvPr/>
         </p:nvSpPr>
         <p:spPr>
           <a:xfrm>
-            <a:off x="594360" y="1490472"/>
-            <a:ext cx="438912" cy="438912"/>
-          </a:xfrm>
-          <a:prstGeom prst="roundRect">
-            <a:avLst>
-              <a:gd name="adj" fmla="val 12000"/>
-            </a:avLst>
+            <a:off x="457200" y="1261872"/>
+            <a:ext cx="11277295" cy="320040"/>
+          </a:xfrm>
+          <a:prstGeom prst="rect">
+            <a:avLst/>
           </a:prstGeom>
           <a:solidFill>
             <a:srgbClr val="095292"/>
@@ -8540,8 +10131,8 @@
         </p:nvSpPr>
         <p:spPr>
           <a:xfrm>
-            <a:off x="594360" y="1490472"/>
-            <a:ext cx="438912" cy="438912"/>
+            <a:off x="685800" y="1307592"/>
+            <a:ext cx="10820095" cy="256032"/>
           </a:xfrm>
           <a:prstGeom prst="rect">
             <a:avLst/>
@@ -8552,15 +10143,14 @@
           <a:bodyPr wrap="square" anchor="ctr"/>
           <a:lstStyle/>
           <a:p>
-            <a:pPr algn="ctr"/>
-            <a:r>
-              <a:rPr sz="1600" b="1" i="0">
-                <a:solidFill>
-                  <a:srgbClr val="FFFFFF"/>
-                </a:solidFill>
-                <a:latin typeface="Calibri"/>
-              </a:rPr>
-              <a:t>1</a:t>
+            <a:r>
+              <a:rPr sz="1000" b="1" i="0">
+                <a:solidFill>
+                  <a:srgbClr val="269CCB"/>
+                </a:solidFill>
+                <a:latin typeface="Calibri"/>
+              </a:rPr>
+              <a:t>● ● ●</a:t>
             </a:r>
           </a:p>
         </p:txBody>
@@ -8573,8 +10163,8 @@
         </p:nvSpPr>
         <p:spPr>
           <a:xfrm>
-            <a:off x="1188720" y="1325880"/>
-            <a:ext cx="10271455" cy="786384"/>
+            <a:off x="777240" y="1719072"/>
+            <a:ext cx="10637215" cy="4133087"/>
           </a:xfrm>
           <a:prstGeom prst="rect">
             <a:avLst/>
@@ -8582,644 +10172,322 @@
           <a:noFill/>
         </p:spPr>
         <p:txBody>
-          <a:bodyPr wrap="square" anchor="ctr"/>
-          <a:lstStyle/>
-          <a:p>
-            <a:r>
-              <a:rPr sz="1500" b="1" i="0">
-                <a:solidFill>
-                  <a:srgbClr val="095292"/>
-                </a:solidFill>
-                <a:latin typeface="Calibri"/>
-              </a:rPr>
-              <a:t>Cree la clase Turno con id, nombre de la mascota, nombre del dueno y motivo de consulta, mas sus getters y su toString(); verifique imprimiendo un turno suelto en consola antes de meterlo en cualquier estructura.</a:t>
-            </a:r>
-          </a:p>
-        </p:txBody>
-      </p:sp>
-      <p:sp>
-        <p:nvSpPr>
-          <p:cNvPr id="9" name="Rounded Rectangle 8"/>
-          <p:cNvSpPr/>
-          <p:nvPr/>
-        </p:nvSpPr>
-        <p:spPr>
-          <a:xfrm>
-            <a:off x="457200" y="2276856"/>
-            <a:ext cx="11277295" cy="950976"/>
-          </a:xfrm>
-          <a:prstGeom prst="roundRect">
-            <a:avLst>
-              <a:gd name="adj" fmla="val 12000"/>
-            </a:avLst>
-          </a:prstGeom>
-          <a:solidFill>
-            <a:srgbClr val="E8F4FA"/>
-          </a:solidFill>
-          <a:ln>
-            <a:noFill/>
-          </a:ln>
-        </p:spPr>
-        <p:style>
-          <a:lnRef idx="1">
-            <a:schemeClr val="accent1"/>
-          </a:lnRef>
-          <a:fillRef idx="3">
-            <a:schemeClr val="accent1"/>
-          </a:fillRef>
-          <a:effectRef idx="2">
-            <a:schemeClr val="accent1"/>
-          </a:effectRef>
-          <a:fontRef idx="minor">
-            <a:schemeClr val="lt1"/>
-          </a:fontRef>
-        </p:style>
-        <p:txBody>
-          <a:bodyPr rtlCol="0" anchor="ctr"/>
+          <a:bodyPr wrap="square">
+            <a:spAutoFit/>
+          </a:bodyPr>
+          <a:lstStyle/>
+          <a:p>
+            <a:pPr>
+              <a:spcAft>
+                <a:spcPts val="342"/>
+              </a:spcAft>
+            </a:pPr>
+            <a:r>
+              <a:rPr sz="1200" b="0" i="0">
+                <a:solidFill>
+                  <a:srgbClr val="FFFFFF"/>
+                </a:solidFill>
+                <a:latin typeface="Calibri"/>
+              </a:rPr>
+              <a:t>// Turno firulais, michi, nieve y canela ya fueron creados con new Turno(...)</a:t>
+            </a:r>
+          </a:p>
+          <a:p>
+            <a:pPr>
+              <a:spcAft>
+                <a:spcPts val="342"/>
+              </a:spcAft>
+            </a:pPr>
+            <a:r>
+              <a:rPr sz="1200" b="0" i="0">
+                <a:solidFill>
+                  <a:srgbClr val="FFFFFF"/>
+                </a:solidFill>
+                <a:latin typeface="Calibri"/>
+              </a:rPr>
+              <a:t>Queue&lt;Turno&gt; sala = new LinkedList&lt;&gt;();      // Queue es INTERFAZ, no se instancia sola</a:t>
+            </a:r>
+          </a:p>
+          <a:p>
+            <a:pPr>
+              <a:spcAft>
+                <a:spcPts val="342"/>
+              </a:spcAft>
+            </a:pPr>
+            <a:r>
+              <a:rPr sz="1200" b="0" i="0">
+                <a:solidFill>
+                  <a:srgbClr val="FFFFFF"/>
+                </a:solidFill>
+                <a:latin typeface="Calibri"/>
+              </a:rPr>
+              <a:t>sala.offer(firulais);                        // offer = encolar al final (FIFO)</a:t>
+            </a:r>
+          </a:p>
+          <a:p>
+            <a:pPr>
+              <a:spcAft>
+                <a:spcPts val="342"/>
+              </a:spcAft>
+            </a:pPr>
+            <a:r>
+              <a:rPr sz="1200" b="0" i="0">
+                <a:solidFill>
+                  <a:srgbClr val="FFFFFF"/>
+                </a:solidFill>
+                <a:latin typeface="Calibri"/>
+              </a:rPr>
+              <a:t>sala.offer(michi);</a:t>
+            </a:r>
+          </a:p>
+          <a:p>
+            <a:pPr>
+              <a:spcAft>
+                <a:spcPts val="342"/>
+              </a:spcAft>
+            </a:pPr>
+            <a:r>
+              <a:rPr sz="1200" b="0" i="0">
+                <a:solidFill>
+                  <a:srgbClr val="FFFFFF"/>
+                </a:solidFill>
+                <a:latin typeface="Calibri"/>
+              </a:rPr>
+              <a:t>Turno enPantalla = sala.peek();              // MIRA el primero, size() NO cambia</a:t>
+            </a:r>
+          </a:p>
+          <a:p>
+            <a:pPr>
+              <a:spcAft>
+                <a:spcPts val="342"/>
+              </a:spcAft>
+            </a:pPr>
+            <a:r>
+              <a:rPr sz="1200" b="0" i="0">
+                <a:solidFill>
+                  <a:srgbClr val="FFFFFF"/>
+                </a:solidFill>
+                <a:latin typeface="Calibri"/>
+              </a:rPr>
+              <a:t>Turno atendido   = sala.poll();              // SACA el primero, size() baja en 1</a:t>
+            </a:r>
+          </a:p>
+          <a:p>
+            <a:pPr>
+              <a:spcAft>
+                <a:spcPts val="342"/>
+              </a:spcAft>
+            </a:pPr>
+            <a:r>
+              <a:rPr sz="1200" b="0" i="0">
+                <a:solidFill>
+                  <a:srgbClr val="FFFFFF"/>
+                </a:solidFill>
+                <a:latin typeface="Calibri"/>
+              </a:rPr>
+              <a:t>System.out.println(sala.poll());             // cola vacia -&gt; null, no explota</a:t>
+            </a:r>
+          </a:p>
+          <a:p>
+            <a:pPr>
+              <a:spcAft>
+                <a:spcPts val="342"/>
+              </a:spcAft>
+            </a:pPr>
+            <a:r>
+              <a:rPr sz="1200" b="0" i="0">
+                <a:solidFill>
+                  <a:srgbClr val="FFFFFF"/>
+                </a:solidFill>
+                <a:latin typeface="Calibri"/>
+              </a:rPr>
+              <a:t/>
+            </a:r>
+          </a:p>
+          <a:p>
+            <a:pPr>
+              <a:spcAft>
+                <a:spcPts val="342"/>
+              </a:spcAft>
+            </a:pPr>
+            <a:r>
+              <a:rPr sz="1200" b="0" i="0">
+                <a:solidFill>
+                  <a:srgbClr val="FFFFFF"/>
+                </a:solidFill>
+                <a:latin typeface="Calibri"/>
+              </a:rPr>
+              <a:t>Deque&lt;String&gt; historial = new ArrayDeque&lt;&gt;(); // pila moderna, mejor que Stack</a:t>
+            </a:r>
+          </a:p>
+          <a:p>
+            <a:pPr>
+              <a:spcAft>
+                <a:spcPts val="342"/>
+              </a:spcAft>
+            </a:pPr>
+            <a:r>
+              <a:rPr sz="1200" b="0" i="0">
+                <a:solidFill>
+                  <a:srgbClr val="FFFFFF"/>
+                </a:solidFill>
+                <a:latin typeface="Calibri"/>
+              </a:rPr>
+              <a:t>historial.push("Consulta de Firulais");      // push = poner encima (LIFO)</a:t>
+            </a:r>
+          </a:p>
+          <a:p>
+            <a:pPr>
+              <a:spcAft>
+                <a:spcPts val="342"/>
+              </a:spcAft>
+            </a:pPr>
+            <a:r>
+              <a:rPr sz="1200" b="0" i="0">
+                <a:solidFill>
+                  <a:srgbClr val="FFFFFF"/>
+                </a:solidFill>
+                <a:latin typeface="Calibri"/>
+              </a:rPr>
+              <a:t>historial.push("Consulta de Michi");</a:t>
+            </a:r>
+          </a:p>
+          <a:p>
+            <a:pPr>
+              <a:spcAft>
+                <a:spcPts val="342"/>
+              </a:spcAft>
+            </a:pPr>
+            <a:r>
+              <a:rPr sz="1200" b="0" i="0">
+                <a:solidFill>
+                  <a:srgbClr val="FFFFFF"/>
+                </a:solidFill>
+                <a:latin typeface="Calibri"/>
+              </a:rPr>
+              <a:t>System.out.println(historial.peek());        // Michi: el ultimo que entro</a:t>
+            </a:r>
+          </a:p>
+          <a:p>
+            <a:pPr>
+              <a:spcAft>
+                <a:spcPts val="342"/>
+              </a:spcAft>
+            </a:pPr>
+            <a:r>
+              <a:rPr sz="1200" b="0" i="0">
+                <a:solidFill>
+                  <a:srgbClr val="FFFFFF"/>
+                </a:solidFill>
+                <a:latin typeface="Calibri"/>
+              </a:rPr>
+              <a:t>if (!historial.isEmpty()) historial.pop();   // deshacer, siempre validando primero</a:t>
+            </a:r>
+          </a:p>
+          <a:p>
+            <a:pPr>
+              <a:spcAft>
+                <a:spcPts val="342"/>
+              </a:spcAft>
+            </a:pPr>
+            <a:r>
+              <a:rPr sz="1200" b="0" i="0">
+                <a:solidFill>
+                  <a:srgbClr val="FFFFFF"/>
+                </a:solidFill>
+                <a:latin typeface="Calibri"/>
+              </a:rPr>
+              <a:t/>
+            </a:r>
+          </a:p>
+          <a:p>
+            <a:pPr>
+              <a:spcAft>
+                <a:spcPts val="342"/>
+              </a:spcAft>
+            </a:pPr>
+            <a:r>
+              <a:rPr sz="1200" b="0" i="0">
+                <a:solidFill>
+                  <a:srgbClr val="FFFFFF"/>
+                </a:solidFill>
+                <a:latin typeface="Calibri"/>
+              </a:rPr>
+              <a:t>Deque&lt;Turno&gt; fila = new ArrayDeque&lt;&gt;();      // urgencia sin colarse a escondidas</a:t>
+            </a:r>
+          </a:p>
+          <a:p>
+            <a:pPr>
+              <a:spcAft>
+                <a:spcPts val="342"/>
+              </a:spcAft>
+            </a:pPr>
+            <a:r>
+              <a:rPr sz="1200" b="0" i="0">
+                <a:solidFill>
+                  <a:srgbClr val="FFFFFF"/>
+                </a:solidFill>
+                <a:latin typeface="Calibri"/>
+              </a:rPr>
+              <a:t>fila.addLast(nieve);                         // llegada normal: al final</a:t>
+            </a:r>
+          </a:p>
+          <a:p>
+            <a:pPr>
+              <a:spcAft>
+                <a:spcPts val="342"/>
+              </a:spcAft>
+            </a:pPr>
+            <a:r>
+              <a:rPr sz="1200" b="0" i="0">
+                <a:solidFill>
+                  <a:srgbClr val="FFFFFF"/>
+                </a:solidFill>
+                <a:latin typeface="Calibri"/>
+              </a:rPr>
+              <a:t>fila.addFirst(canela);                       // URGENCIA: al frente, con nombre propio</a:t>
+            </a:r>
+          </a:p>
+        </p:txBody>
+      </p:sp>
+      <p:sp>
+        <p:nvSpPr>
+          <p:cNvPr id="9" name="TextBox 8"/>
+          <p:cNvSpPr txBox="1"/>
+          <p:nvPr/>
+        </p:nvSpPr>
+        <p:spPr>
+          <a:xfrm>
+            <a:off x="457200" y="6080760"/>
+            <a:ext cx="11277295" cy="320040"/>
+          </a:xfrm>
+          <a:prstGeom prst="rect">
+            <a:avLst/>
+          </a:prstGeom>
+          <a:noFill/>
+        </p:spPr>
+        <p:txBody>
+          <a:bodyPr wrap="square">
+            <a:spAutoFit/>
+          </a:bodyPr>
           <a:lstStyle/>
           <a:p>
             <a:pPr algn="ctr"/>
-          </a:p>
-        </p:txBody>
-      </p:sp>
-      <p:sp>
-        <p:nvSpPr>
-          <p:cNvPr id="10" name="Rounded Rectangle 9"/>
-          <p:cNvSpPr/>
-          <p:nvPr/>
-        </p:nvSpPr>
-        <p:spPr>
-          <a:xfrm>
-            <a:off x="594360" y="2532888"/>
-            <a:ext cx="438912" cy="438912"/>
-          </a:xfrm>
-          <a:prstGeom prst="roundRect">
-            <a:avLst>
-              <a:gd name="adj" fmla="val 12000"/>
-            </a:avLst>
-          </a:prstGeom>
-          <a:solidFill>
-            <a:srgbClr val="095292"/>
-          </a:solidFill>
-          <a:ln>
-            <a:noFill/>
-          </a:ln>
-        </p:spPr>
-        <p:style>
-          <a:lnRef idx="1">
-            <a:schemeClr val="accent1"/>
-          </a:lnRef>
-          <a:fillRef idx="3">
-            <a:schemeClr val="accent1"/>
-          </a:fillRef>
-          <a:effectRef idx="2">
-            <a:schemeClr val="accent1"/>
-          </a:effectRef>
-          <a:fontRef idx="minor">
-            <a:schemeClr val="lt1"/>
-          </a:fontRef>
-        </p:style>
-        <p:txBody>
-          <a:bodyPr rtlCol="0" anchor="ctr"/>
-          <a:lstStyle/>
-          <a:p>
-            <a:pPr algn="ctr"/>
-          </a:p>
-        </p:txBody>
-      </p:sp>
-      <p:sp>
-        <p:nvSpPr>
-          <p:cNvPr id="11" name="TextBox 10"/>
-          <p:cNvSpPr txBox="1"/>
-          <p:nvPr/>
-        </p:nvSpPr>
-        <p:spPr>
-          <a:xfrm>
-            <a:off x="594360" y="2532888"/>
-            <a:ext cx="438912" cy="438912"/>
-          </a:xfrm>
-          <a:prstGeom prst="rect">
-            <a:avLst/>
-          </a:prstGeom>
-          <a:noFill/>
-        </p:spPr>
-        <p:txBody>
-          <a:bodyPr wrap="square" anchor="ctr"/>
-          <a:lstStyle/>
-          <a:p>
-            <a:pPr algn="ctr"/>
-            <a:r>
-              <a:rPr sz="1600" b="1" i="0">
-                <a:solidFill>
-                  <a:srgbClr val="FFFFFF"/>
-                </a:solidFill>
-                <a:latin typeface="Calibri"/>
-              </a:rPr>
-              <a:t>2</a:t>
-            </a:r>
-          </a:p>
-        </p:txBody>
-      </p:sp>
-      <p:sp>
-        <p:nvSpPr>
-          <p:cNvPr id="12" name="TextBox 11"/>
-          <p:cNvSpPr txBox="1"/>
-          <p:nvPr/>
-        </p:nvSpPr>
-        <p:spPr>
-          <a:xfrm>
-            <a:off x="1188720" y="2368296"/>
-            <a:ext cx="10271455" cy="786384"/>
-          </a:xfrm>
-          <a:prstGeom prst="rect">
-            <a:avLst/>
-          </a:prstGeom>
-          <a:noFill/>
-        </p:spPr>
-        <p:txBody>
-          <a:bodyPr wrap="square" anchor="ctr"/>
-          <a:lstStyle/>
-          <a:p>
-            <a:r>
-              <a:rPr sz="1400" b="1" i="0">
-                <a:solidFill>
-                  <a:srgbClr val="095292"/>
-                </a:solidFill>
-                <a:latin typeface="Calibri"/>
-              </a:rPr>
-              <a:t>Cree la clase SalaDeEspera con el atributo private final Queue&lt;Turno&gt; cola = new LinkedList&lt;&gt;(); y los metodos registrarLlegada(Turno t) usando offer, siguienteEnPantalla() usando peek y atender() usando poll; verifique que despues de registrar cuatro llegadas y llamar dos veces a siguienteEnPantalla(), cantidad() sigue siendo 4.</a:t>
-            </a:r>
-          </a:p>
-        </p:txBody>
-      </p:sp>
-      <p:sp>
-        <p:nvSpPr>
-          <p:cNvPr id="13" name="Rounded Rectangle 12"/>
-          <p:cNvSpPr/>
-          <p:nvPr/>
-        </p:nvSpPr>
-        <p:spPr>
-          <a:xfrm>
-            <a:off x="457200" y="3319272"/>
-            <a:ext cx="11277295" cy="950976"/>
-          </a:xfrm>
-          <a:prstGeom prst="roundRect">
-            <a:avLst>
-              <a:gd name="adj" fmla="val 12000"/>
-            </a:avLst>
-          </a:prstGeom>
-          <a:solidFill>
-            <a:srgbClr val="F2F2F2"/>
-          </a:solidFill>
-          <a:ln>
-            <a:noFill/>
-          </a:ln>
-        </p:spPr>
-        <p:style>
-          <a:lnRef idx="1">
-            <a:schemeClr val="accent1"/>
-          </a:lnRef>
-          <a:fillRef idx="3">
-            <a:schemeClr val="accent1"/>
-          </a:fillRef>
-          <a:effectRef idx="2">
-            <a:schemeClr val="accent1"/>
-          </a:effectRef>
-          <a:fontRef idx="minor">
-            <a:schemeClr val="lt1"/>
-          </a:fontRef>
-        </p:style>
-        <p:txBody>
-          <a:bodyPr rtlCol="0" anchor="ctr"/>
-          <a:lstStyle/>
-          <a:p>
-            <a:pPr algn="ctr"/>
-          </a:p>
-        </p:txBody>
-      </p:sp>
-      <p:sp>
-        <p:nvSpPr>
-          <p:cNvPr id="14" name="Rounded Rectangle 13"/>
-          <p:cNvSpPr/>
-          <p:nvPr/>
-        </p:nvSpPr>
-        <p:spPr>
-          <a:xfrm>
-            <a:off x="594360" y="3575304"/>
-            <a:ext cx="438912" cy="438912"/>
-          </a:xfrm>
-          <a:prstGeom prst="roundRect">
-            <a:avLst>
-              <a:gd name="adj" fmla="val 12000"/>
-            </a:avLst>
-          </a:prstGeom>
-          <a:solidFill>
-            <a:srgbClr val="095292"/>
-          </a:solidFill>
-          <a:ln>
-            <a:noFill/>
-          </a:ln>
-        </p:spPr>
-        <p:style>
-          <a:lnRef idx="1">
-            <a:schemeClr val="accent1"/>
-          </a:lnRef>
-          <a:fillRef idx="3">
-            <a:schemeClr val="accent1"/>
-          </a:fillRef>
-          <a:effectRef idx="2">
-            <a:schemeClr val="accent1"/>
-          </a:effectRef>
-          <a:fontRef idx="minor">
-            <a:schemeClr val="lt1"/>
-          </a:fontRef>
-        </p:style>
-        <p:txBody>
-          <a:bodyPr rtlCol="0" anchor="ctr"/>
-          <a:lstStyle/>
-          <a:p>
-            <a:pPr algn="ctr"/>
-          </a:p>
-        </p:txBody>
-      </p:sp>
-      <p:sp>
-        <p:nvSpPr>
-          <p:cNvPr id="15" name="TextBox 14"/>
-          <p:cNvSpPr txBox="1"/>
-          <p:nvPr/>
-        </p:nvSpPr>
-        <p:spPr>
-          <a:xfrm>
-            <a:off x="594360" y="3575304"/>
-            <a:ext cx="438912" cy="438912"/>
-          </a:xfrm>
-          <a:prstGeom prst="rect">
-            <a:avLst/>
-          </a:prstGeom>
-          <a:noFill/>
-        </p:spPr>
-        <p:txBody>
-          <a:bodyPr wrap="square" anchor="ctr"/>
-          <a:lstStyle/>
-          <a:p>
-            <a:pPr algn="ctr"/>
-            <a:r>
-              <a:rPr sz="1600" b="1" i="0">
-                <a:solidFill>
-                  <a:srgbClr val="FFFFFF"/>
-                </a:solidFill>
-                <a:latin typeface="Calibri"/>
-              </a:rPr>
-              <a:t>3</a:t>
-            </a:r>
-          </a:p>
-        </p:txBody>
-      </p:sp>
-      <p:sp>
-        <p:nvSpPr>
-          <p:cNvPr id="16" name="TextBox 15"/>
-          <p:cNvSpPr txBox="1"/>
-          <p:nvPr/>
-        </p:nvSpPr>
-        <p:spPr>
-          <a:xfrm>
-            <a:off x="1188720" y="3410712"/>
-            <a:ext cx="10271455" cy="786384"/>
-          </a:xfrm>
-          <a:prstGeom prst="rect">
-            <a:avLst/>
-          </a:prstGeom>
-          <a:noFill/>
-        </p:spPr>
-        <p:txBody>
-          <a:bodyPr wrap="square" anchor="ctr"/>
-          <a:lstStyle/>
-          <a:p>
-            <a:r>
-              <a:rPr sz="1400" b="1" i="0">
-                <a:solidFill>
-                  <a:srgbClr val="095292"/>
-                </a:solidFill>
-                <a:latin typeface="Calibri"/>
-              </a:rPr>
-              <a:t>Haga que atender() valide la cola vacia con isEmpty() y devuelva un mensaje controlado en vez de un null suelto; verifique llamando a atender() cinco veces cuando solo hay cuatro turnos y confirmando que la quinta llamada imprime que la sala esta vacia y el programa no se cae.</a:t>
-            </a:r>
-          </a:p>
-        </p:txBody>
-      </p:sp>
-      <p:sp>
-        <p:nvSpPr>
-          <p:cNvPr id="17" name="Rounded Rectangle 16"/>
-          <p:cNvSpPr/>
-          <p:nvPr/>
-        </p:nvSpPr>
-        <p:spPr>
-          <a:xfrm>
-            <a:off x="457200" y="4361688"/>
-            <a:ext cx="11277295" cy="950976"/>
-          </a:xfrm>
-          <a:prstGeom prst="roundRect">
-            <a:avLst>
-              <a:gd name="adj" fmla="val 12000"/>
-            </a:avLst>
-          </a:prstGeom>
-          <a:solidFill>
-            <a:srgbClr val="E8F4FA"/>
-          </a:solidFill>
-          <a:ln>
-            <a:noFill/>
-          </a:ln>
-        </p:spPr>
-        <p:style>
-          <a:lnRef idx="1">
-            <a:schemeClr val="accent1"/>
-          </a:lnRef>
-          <a:fillRef idx="3">
-            <a:schemeClr val="accent1"/>
-          </a:fillRef>
-          <a:effectRef idx="2">
-            <a:schemeClr val="accent1"/>
-          </a:effectRef>
-          <a:fontRef idx="minor">
-            <a:schemeClr val="lt1"/>
-          </a:fontRef>
-        </p:style>
-        <p:txBody>
-          <a:bodyPr rtlCol="0" anchor="ctr"/>
-          <a:lstStyle/>
-          <a:p>
-            <a:pPr algn="ctr"/>
-          </a:p>
-        </p:txBody>
-      </p:sp>
-      <p:sp>
-        <p:nvSpPr>
-          <p:cNvPr id="18" name="Rounded Rectangle 17"/>
-          <p:cNvSpPr/>
-          <p:nvPr/>
-        </p:nvSpPr>
-        <p:spPr>
-          <a:xfrm>
-            <a:off x="594360" y="4617720"/>
-            <a:ext cx="438912" cy="438912"/>
-          </a:xfrm>
-          <a:prstGeom prst="roundRect">
-            <a:avLst>
-              <a:gd name="adj" fmla="val 12000"/>
-            </a:avLst>
-          </a:prstGeom>
-          <a:solidFill>
-            <a:srgbClr val="095292"/>
-          </a:solidFill>
-          <a:ln>
-            <a:noFill/>
-          </a:ln>
-        </p:spPr>
-        <p:style>
-          <a:lnRef idx="1">
-            <a:schemeClr val="accent1"/>
-          </a:lnRef>
-          <a:fillRef idx="3">
-            <a:schemeClr val="accent1"/>
-          </a:fillRef>
-          <a:effectRef idx="2">
-            <a:schemeClr val="accent1"/>
-          </a:effectRef>
-          <a:fontRef idx="minor">
-            <a:schemeClr val="lt1"/>
-          </a:fontRef>
-        </p:style>
-        <p:txBody>
-          <a:bodyPr rtlCol="0" anchor="ctr"/>
-          <a:lstStyle/>
-          <a:p>
-            <a:pPr algn="ctr"/>
-          </a:p>
-        </p:txBody>
-      </p:sp>
-      <p:sp>
-        <p:nvSpPr>
-          <p:cNvPr id="19" name="TextBox 18"/>
-          <p:cNvSpPr txBox="1"/>
-          <p:nvPr/>
-        </p:nvSpPr>
-        <p:spPr>
-          <a:xfrm>
-            <a:off x="594360" y="4617720"/>
-            <a:ext cx="438912" cy="438912"/>
-          </a:xfrm>
-          <a:prstGeom prst="rect">
-            <a:avLst/>
-          </a:prstGeom>
-          <a:noFill/>
-        </p:spPr>
-        <p:txBody>
-          <a:bodyPr wrap="square" anchor="ctr"/>
-          <a:lstStyle/>
-          <a:p>
-            <a:pPr algn="ctr"/>
-            <a:r>
-              <a:rPr sz="1600" b="1" i="0">
-                <a:solidFill>
-                  <a:srgbClr val="FFFFFF"/>
-                </a:solidFill>
-                <a:latin typeface="Calibri"/>
-              </a:rPr>
-              <a:t>4</a:t>
-            </a:r>
-          </a:p>
-        </p:txBody>
-      </p:sp>
-      <p:sp>
-        <p:nvSpPr>
-          <p:cNvPr id="20" name="TextBox 19"/>
-          <p:cNvSpPr txBox="1"/>
-          <p:nvPr/>
-        </p:nvSpPr>
-        <p:spPr>
-          <a:xfrm>
-            <a:off x="1188720" y="4453128"/>
-            <a:ext cx="10271455" cy="786384"/>
-          </a:xfrm>
-          <a:prstGeom prst="rect">
-            <a:avLst/>
-          </a:prstGeom>
-          <a:noFill/>
-        </p:spPr>
-        <p:txBody>
-          <a:bodyPr wrap="square" anchor="ctr"/>
-          <a:lstStyle/>
-          <a:p>
-            <a:r>
-              <a:rPr sz="1400" b="1" i="0">
-                <a:solidFill>
-                  <a:srgbClr val="095292"/>
-                </a:solidFill>
-                <a:latin typeface="Calibri"/>
-              </a:rPr>
-              <a:t>Cree la clase HistorialReciente con private final Deque&lt;String&gt; pila = new ArrayDeque&lt;&gt;(); y los metodos registrar(String), ultimaAtencion() con peek y deshacer() con pop protegido por isEmpty(); verifique que despues de atender a Firulais, Michi y Rocky, ultimaAtencion() muestra a Rocky y deshacer() lo retira dejando a Michi arriba.</a:t>
-            </a:r>
-          </a:p>
-        </p:txBody>
-      </p:sp>
-      <p:sp>
-        <p:nvSpPr>
-          <p:cNvPr id="21" name="Rounded Rectangle 20"/>
-          <p:cNvSpPr/>
-          <p:nvPr/>
-        </p:nvSpPr>
-        <p:spPr>
-          <a:xfrm>
-            <a:off x="457200" y="5404104"/>
-            <a:ext cx="11277295" cy="950976"/>
-          </a:xfrm>
-          <a:prstGeom prst="roundRect">
-            <a:avLst>
-              <a:gd name="adj" fmla="val 12000"/>
-            </a:avLst>
-          </a:prstGeom>
-          <a:solidFill>
-            <a:srgbClr val="F2F2F2"/>
-          </a:solidFill>
-          <a:ln>
-            <a:noFill/>
-          </a:ln>
-        </p:spPr>
-        <p:style>
-          <a:lnRef idx="1">
-            <a:schemeClr val="accent1"/>
-          </a:lnRef>
-          <a:fillRef idx="3">
-            <a:schemeClr val="accent1"/>
-          </a:fillRef>
-          <a:effectRef idx="2">
-            <a:schemeClr val="accent1"/>
-          </a:effectRef>
-          <a:fontRef idx="minor">
-            <a:schemeClr val="lt1"/>
-          </a:fontRef>
-        </p:style>
-        <p:txBody>
-          <a:bodyPr rtlCol="0" anchor="ctr"/>
-          <a:lstStyle/>
-          <a:p>
-            <a:pPr algn="ctr"/>
-          </a:p>
-        </p:txBody>
-      </p:sp>
-      <p:sp>
-        <p:nvSpPr>
-          <p:cNvPr id="22" name="Rounded Rectangle 21"/>
-          <p:cNvSpPr/>
-          <p:nvPr/>
-        </p:nvSpPr>
-        <p:spPr>
-          <a:xfrm>
-            <a:off x="594360" y="5660136"/>
-            <a:ext cx="438912" cy="438912"/>
-          </a:xfrm>
-          <a:prstGeom prst="roundRect">
-            <a:avLst>
-              <a:gd name="adj" fmla="val 12000"/>
-            </a:avLst>
-          </a:prstGeom>
-          <a:solidFill>
-            <a:srgbClr val="095292"/>
-          </a:solidFill>
-          <a:ln>
-            <a:noFill/>
-          </a:ln>
-        </p:spPr>
-        <p:style>
-          <a:lnRef idx="1">
-            <a:schemeClr val="accent1"/>
-          </a:lnRef>
-          <a:fillRef idx="3">
-            <a:schemeClr val="accent1"/>
-          </a:fillRef>
-          <a:effectRef idx="2">
-            <a:schemeClr val="accent1"/>
-          </a:effectRef>
-          <a:fontRef idx="minor">
-            <a:schemeClr val="lt1"/>
-          </a:fontRef>
-        </p:style>
-        <p:txBody>
-          <a:bodyPr rtlCol="0" anchor="ctr"/>
-          <a:lstStyle/>
-          <a:p>
-            <a:pPr algn="ctr"/>
-          </a:p>
-        </p:txBody>
-      </p:sp>
-      <p:sp>
-        <p:nvSpPr>
-          <p:cNvPr id="23" name="TextBox 22"/>
-          <p:cNvSpPr txBox="1"/>
-          <p:nvPr/>
-        </p:nvSpPr>
-        <p:spPr>
-          <a:xfrm>
-            <a:off x="594360" y="5660136"/>
-            <a:ext cx="438912" cy="438912"/>
-          </a:xfrm>
-          <a:prstGeom prst="rect">
-            <a:avLst/>
-          </a:prstGeom>
-          <a:noFill/>
-        </p:spPr>
-        <p:txBody>
-          <a:bodyPr wrap="square" anchor="ctr"/>
-          <a:lstStyle/>
-          <a:p>
-            <a:pPr algn="ctr"/>
-            <a:r>
-              <a:rPr sz="1600" b="1" i="0">
-                <a:solidFill>
-                  <a:srgbClr val="FFFFFF"/>
-                </a:solidFill>
-                <a:latin typeface="Calibri"/>
-              </a:rPr>
-              <a:t>5</a:t>
-            </a:r>
-          </a:p>
-        </p:txBody>
-      </p:sp>
-      <p:sp>
-        <p:nvSpPr>
-          <p:cNvPr id="24" name="TextBox 23"/>
-          <p:cNvSpPr txBox="1"/>
-          <p:nvPr/>
-        </p:nvSpPr>
-        <p:spPr>
-          <a:xfrm>
-            <a:off x="1188720" y="5495544"/>
-            <a:ext cx="10271455" cy="786384"/>
-          </a:xfrm>
-          <a:prstGeom prst="rect">
-            <a:avLst/>
-          </a:prstGeom>
-          <a:noFill/>
-        </p:spPr>
-        <p:txBody>
-          <a:bodyPr wrap="square" anchor="ctr"/>
-          <a:lstStyle/>
-          <a:p>
-            <a:r>
-              <a:rPr sz="1400" b="1" i="0">
-                <a:solidFill>
-                  <a:srgbClr val="095292"/>
-                </a:solidFill>
-                <a:latin typeface="Calibri"/>
-              </a:rPr>
-              <a:t>Conecte las dos estructuras en un main: cada vez que atender() saca un turno de la cola, registre automaticamente esa consulta en la pila; ejecute el flujo completo con las cuatro mascotas del escenario mas la urgencia de Canela agregada con addFirst sobre un Deque, capture la consola y suba el proyecto a la plataforma del curso.</a:t>
-            </a:r>
-          </a:p>
-        </p:txBody>
-      </p:sp>
-      <p:sp>
-        <p:nvSpPr>
-          <p:cNvPr id="25" name="TextBox 24"/>
+            <a:r>
+              <a:rPr sz="1200" b="0" i="1">
+                <a:solidFill>
+                  <a:srgbClr val="666666"/>
+                </a:solidFill>
+                <a:latin typeface="Calibri"/>
+              </a:rPr>
+              <a:t>La estructura restrictiva no le quita poder: le quita la posibilidad de romper la regla del negocio sin darse cuenta.</a:t>
+            </a:r>
+          </a:p>
+        </p:txBody>
+      </p:sp>
+      <p:sp>
+        <p:nvSpPr>
+          <p:cNvPr id="10" name="TextBox 9"/>
           <p:cNvSpPr txBox="1"/>
           <p:nvPr/>
         </p:nvSpPr>

--- a/Programacion II/Clases/Clase 3 - Pilas y colas/Presentacion.pptx
+++ b/Programacion II/Clases/Clase 3 - Pilas y colas/Presentacion.pptx
@@ -9,37 +9,31 @@
     <p:sldId id="257" r:id="rId8"/>
     <p:sldId id="258" r:id="rId9"/>
     <p:sldId id="259" r:id="rId10"/>
-    <p:sldId id="260" r:id="rId11"/>
-    <p:sldId id="261" r:id="rId12"/>
-    <p:sldId id="262" r:id="rId13"/>
-    <p:sldId id="263" r:id="rId14"/>
-    <p:sldId id="264" r:id="rId15"/>
-    <p:sldId id="265" r:id="rId16"/>
-    <p:sldId id="266" r:id="rId17"/>
-    <p:sldId id="267" r:id="rId18"/>
-    <p:sldId id="268" r:id="rId19"/>
-    <p:sldId id="269" r:id="rId20"/>
-    <p:sldId id="270" r:id="rId21"/>
-    <p:sldId id="271" r:id="rId22"/>
-    <p:sldId id="272" r:id="rId23"/>
-    <p:sldId id="273" r:id="rId24"/>
-    <p:sldId id="274" r:id="rId25"/>
-    <p:sldId id="275" r:id="rId26"/>
-    <p:sldId id="276" r:id="rId27"/>
-    <p:sldId id="277" r:id="rId28"/>
-    <p:sldId id="278" r:id="rId29"/>
-    <p:sldId id="279" r:id="rId30"/>
-    <p:sldId id="280" r:id="rId31"/>
-    <p:sldId id="281" r:id="rId32"/>
-    <p:sldId id="282" r:id="rId33"/>
-    <p:sldId id="283" r:id="rId34"/>
-    <p:sldId id="284" r:id="rId35"/>
-    <p:sldId id="285" r:id="rId36"/>
-    <p:sldId id="286" r:id="rId37"/>
-    <p:sldId id="287" r:id="rId38"/>
-    <p:sldId id="288" r:id="rId39"/>
-    <p:sldId id="289" r:id="rId40"/>
-    <p:sldId id="290" r:id="rId41"/>
+    <p:sldId id="260" r:id="rId12"/>
+    <p:sldId id="261" r:id="rId13"/>
+    <p:sldId id="262" r:id="rId14"/>
+    <p:sldId id="263" r:id="rId15"/>
+    <p:sldId id="264" r:id="rId16"/>
+    <p:sldId id="265" r:id="rId17"/>
+    <p:sldId id="266" r:id="rId18"/>
+    <p:sldId id="267" r:id="rId19"/>
+    <p:sldId id="268" r:id="rId20"/>
+    <p:sldId id="269" r:id="rId21"/>
+    <p:sldId id="270" r:id="rId22"/>
+    <p:sldId id="271" r:id="rId23"/>
+    <p:sldId id="272" r:id="rId24"/>
+    <p:sldId id="273" r:id="rId25"/>
+    <p:sldId id="274" r:id="rId26"/>
+    <p:sldId id="275" r:id="rId27"/>
+    <p:sldId id="276" r:id="rId28"/>
+    <p:sldId id="277" r:id="rId29"/>
+    <p:sldId id="278" r:id="rId30"/>
+    <p:sldId id="279" r:id="rId31"/>
+    <p:sldId id="280" r:id="rId32"/>
+    <p:sldId id="281" r:id="rId33"/>
+    <p:sldId id="282" r:id="rId34"/>
+    <p:sldId id="283" r:id="rId35"/>
+    <p:sldId id="284" r:id="rId36"/>
   </p:sldIdLst>
   <p:sldSz cx="12191695" cy="6858000" type="screen4x3"/>
   <p:notesSz cx="6858000" cy="9144000"/>
@@ -139,6 +133,724 @@
     </a:lvl9pPr>
   </p:defaultTextStyle>
 </p:presentation>
+</file>
+
+<file path=ppt/notesMasters/notesMaster1.xml><?xml version="1.0" encoding="utf-8"?>
+<p:notesMaster xmlns:a="http://schemas.openxmlformats.org/drawingml/2006/main" xmlns:p="http://schemas.openxmlformats.org/presentationml/2006/main" xmlns:r="http://schemas.openxmlformats.org/officeDocument/2006/relationships">
+  <p:cSld>
+    <p:bg>
+      <p:bgRef idx="1001">
+        <a:schemeClr val="bg1"/>
+      </p:bgRef>
+    </p:bg>
+    <p:spTree>
+      <p:nvGrpSpPr>
+        <p:cNvPr id="1" name=""/>
+        <p:cNvGrpSpPr/>
+        <p:nvPr/>
+      </p:nvGrpSpPr>
+      <p:grpSpPr>
+        <a:xfrm>
+          <a:off x="0" y="0"/>
+          <a:ext cx="0" cy="0"/>
+          <a:chOff x="0" y="0"/>
+          <a:chExt cx="0" cy="0"/>
+        </a:xfrm>
+      </p:grpSpPr>
+      <p:sp>
+        <p:nvSpPr>
+          <p:cNvPr id="2" name="Header Placeholder 1"/>
+          <p:cNvSpPr>
+            <a:spLocks noGrp="1"/>
+          </p:cNvSpPr>
+          <p:nvPr>
+            <p:ph type="hdr" sz="quarter"/>
+          </p:nvPr>
+        </p:nvSpPr>
+        <p:spPr>
+          <a:xfrm>
+            <a:off x="0" y="0"/>
+            <a:ext cx="2971800" cy="457200"/>
+          </a:xfrm>
+          <a:prstGeom prst="rect">
+            <a:avLst/>
+          </a:prstGeom>
+        </p:spPr>
+        <p:txBody>
+          <a:bodyPr vert="horz" lIns="91440" tIns="45720" rIns="91440" bIns="45720" rtlCol="0"/>
+          <a:lstStyle>
+            <a:lvl1pPr algn="l">
+              <a:defRPr sz="1200"/>
+            </a:lvl1pPr>
+          </a:lstStyle>
+          <a:p>
+            <a:endParaRPr lang="en-US"/>
+          </a:p>
+        </p:txBody>
+      </p:sp>
+      <p:sp>
+        <p:nvSpPr>
+          <p:cNvPr id="3" name="Date Placeholder 2"/>
+          <p:cNvSpPr>
+            <a:spLocks noGrp="1"/>
+          </p:cNvSpPr>
+          <p:nvPr>
+            <p:ph type="dt" idx="1"/>
+          </p:nvPr>
+        </p:nvSpPr>
+        <p:spPr>
+          <a:xfrm>
+            <a:off x="3884613" y="0"/>
+            <a:ext cx="2971800" cy="457200"/>
+          </a:xfrm>
+          <a:prstGeom prst="rect">
+            <a:avLst/>
+          </a:prstGeom>
+        </p:spPr>
+        <p:txBody>
+          <a:bodyPr vert="horz" lIns="91440" tIns="45720" rIns="91440" bIns="45720" rtlCol="0"/>
+          <a:lstStyle>
+            <a:lvl1pPr algn="r">
+              <a:defRPr sz="1200"/>
+            </a:lvl1pPr>
+          </a:lstStyle>
+          <a:p>
+            <a:fld id="{0F89C1C7-3DCD-1040-A9CF-14679D8B5DDD}" type="datetimeFigureOut">
+              <a:rPr lang="en-US" smtClean="0"/>
+              <a:t>10/17/16</a:t>
+            </a:fld>
+            <a:endParaRPr lang="en-US"/>
+          </a:p>
+        </p:txBody>
+      </p:sp>
+      <p:sp>
+        <p:nvSpPr>
+          <p:cNvPr id="4" name="Slide Image Placeholder 3"/>
+          <p:cNvSpPr>
+            <a:spLocks noGrp="1" noRot="1" noChangeAspect="1"/>
+          </p:cNvSpPr>
+          <p:nvPr>
+            <p:ph type="sldImg" idx="2"/>
+          </p:nvPr>
+        </p:nvSpPr>
+        <p:spPr>
+          <a:xfrm>
+            <a:off x="1143000" y="685800"/>
+            <a:ext cx="4572000" cy="3429000"/>
+          </a:xfrm>
+          <a:prstGeom prst="rect">
+            <a:avLst/>
+          </a:prstGeom>
+          <a:noFill/>
+          <a:ln w="12700">
+            <a:solidFill>
+              <a:prstClr val="black"/>
+            </a:solidFill>
+          </a:ln>
+        </p:spPr>
+        <p:txBody>
+          <a:bodyPr vert="horz" lIns="91440" tIns="45720" rIns="91440" bIns="45720" rtlCol="0" anchor="ctr"/>
+          <a:lstStyle/>
+          <a:p>
+            <a:endParaRPr lang="en-US"/>
+          </a:p>
+        </p:txBody>
+      </p:sp>
+      <p:sp>
+        <p:nvSpPr>
+          <p:cNvPr id="5" name="Notes Placeholder 4"/>
+          <p:cNvSpPr>
+            <a:spLocks noGrp="1"/>
+          </p:cNvSpPr>
+          <p:nvPr>
+            <p:ph type="body" sz="quarter" idx="3"/>
+          </p:nvPr>
+        </p:nvSpPr>
+        <p:spPr>
+          <a:xfrm>
+            <a:off x="685800" y="4343400"/>
+            <a:ext cx="5486400" cy="4114800"/>
+          </a:xfrm>
+          <a:prstGeom prst="rect">
+            <a:avLst/>
+          </a:prstGeom>
+        </p:spPr>
+        <p:txBody>
+          <a:bodyPr vert="horz" lIns="91440" tIns="45720" rIns="91440" bIns="45720" rtlCol="0"/>
+          <a:lstStyle/>
+          <a:p>
+            <a:pPr lvl="0"/>
+            <a:r>
+              <a:rPr lang="en-US" smtClean="0"/>
+              <a:t>Click to edit Master text styles</a:t>
+            </a:r>
+          </a:p>
+          <a:p>
+            <a:pPr lvl="1"/>
+            <a:r>
+              <a:rPr lang="en-US" smtClean="0"/>
+              <a:t>Second level</a:t>
+            </a:r>
+          </a:p>
+          <a:p>
+            <a:pPr lvl="2"/>
+            <a:r>
+              <a:rPr lang="en-US" smtClean="0"/>
+              <a:t>Third level</a:t>
+            </a:r>
+          </a:p>
+          <a:p>
+            <a:pPr lvl="3"/>
+            <a:r>
+              <a:rPr lang="en-US" smtClean="0"/>
+              <a:t>Fourth level</a:t>
+            </a:r>
+          </a:p>
+          <a:p>
+            <a:pPr lvl="4"/>
+            <a:r>
+              <a:rPr lang="en-US" smtClean="0"/>
+              <a:t>Fifth level</a:t>
+            </a:r>
+            <a:endParaRPr lang="en-US"/>
+          </a:p>
+        </p:txBody>
+      </p:sp>
+      <p:sp>
+        <p:nvSpPr>
+          <p:cNvPr id="6" name="Footer Placeholder 5"/>
+          <p:cNvSpPr>
+            <a:spLocks noGrp="1"/>
+          </p:cNvSpPr>
+          <p:nvPr>
+            <p:ph type="ftr" sz="quarter" idx="4"/>
+          </p:nvPr>
+        </p:nvSpPr>
+        <p:spPr>
+          <a:xfrm>
+            <a:off x="0" y="8685213"/>
+            <a:ext cx="2971800" cy="457200"/>
+          </a:xfrm>
+          <a:prstGeom prst="rect">
+            <a:avLst/>
+          </a:prstGeom>
+        </p:spPr>
+        <p:txBody>
+          <a:bodyPr vert="horz" lIns="91440" tIns="45720" rIns="91440" bIns="45720" rtlCol="0" anchor="b"/>
+          <a:lstStyle>
+            <a:lvl1pPr algn="l">
+              <a:defRPr sz="1200"/>
+            </a:lvl1pPr>
+          </a:lstStyle>
+          <a:p>
+            <a:endParaRPr lang="en-US"/>
+          </a:p>
+        </p:txBody>
+      </p:sp>
+      <p:sp>
+        <p:nvSpPr>
+          <p:cNvPr id="7" name="Slide Number Placeholder 6"/>
+          <p:cNvSpPr>
+            <a:spLocks noGrp="1"/>
+          </p:cNvSpPr>
+          <p:nvPr>
+            <p:ph type="sldNum" sz="quarter" idx="5"/>
+          </p:nvPr>
+        </p:nvSpPr>
+        <p:spPr>
+          <a:xfrm>
+            <a:off x="3884613" y="8685213"/>
+            <a:ext cx="2971800" cy="457200"/>
+          </a:xfrm>
+          <a:prstGeom prst="rect">
+            <a:avLst/>
+          </a:prstGeom>
+        </p:spPr>
+        <p:txBody>
+          <a:bodyPr vert="horz" lIns="91440" tIns="45720" rIns="91440" bIns="45720" rtlCol="0" anchor="b"/>
+          <a:lstStyle>
+            <a:lvl1pPr algn="r">
+              <a:defRPr sz="1200"/>
+            </a:lvl1pPr>
+          </a:lstStyle>
+          <a:p>
+            <a:fld id="{BB5E49A5-4136-284D-997B-48E1D791AD67}" type="slidenum">
+              <a:rPr lang="en-US" smtClean="0"/>
+              <a:t>‹#›</a:t>
+            </a:fld>
+            <a:endParaRPr lang="en-US"/>
+          </a:p>
+        </p:txBody>
+      </p:sp>
+    </p:spTree>
+    <p:extLst>
+      <p:ext uri="{BB962C8B-B14F-4D97-AF65-F5344CB8AC3E}">
+        <p14:creationId xmlns:p14="http://schemas.microsoft.com/office/powerpoint/2010/main" val="2623252185"/>
+      </p:ext>
+    </p:extLst>
+  </p:cSld>
+  <p:clrMap bg1="lt1" tx1="dk1" bg2="lt2" tx2="dk2" accent1="accent1" accent2="accent2" accent3="accent3" accent4="accent4" accent5="accent5" accent6="accent6" hlink="hlink" folHlink="folHlink"/>
+  <p:notesStyle>
+    <a:lvl1pPr marL="0" algn="l" defTabSz="457200" rtl="0" eaLnBrk="1" latinLnBrk="0" hangingPunct="1">
+      <a:defRPr sz="1200" kern="1200">
+        <a:solidFill>
+          <a:schemeClr val="tx1"/>
+        </a:solidFill>
+        <a:latin typeface="+mn-lt"/>
+        <a:ea typeface="+mn-ea"/>
+        <a:cs typeface="+mn-cs"/>
+      </a:defRPr>
+    </a:lvl1pPr>
+    <a:lvl2pPr marL="457200" algn="l" defTabSz="457200" rtl="0" eaLnBrk="1" latinLnBrk="0" hangingPunct="1">
+      <a:defRPr sz="1200" kern="1200">
+        <a:solidFill>
+          <a:schemeClr val="tx1"/>
+        </a:solidFill>
+        <a:latin typeface="+mn-lt"/>
+        <a:ea typeface="+mn-ea"/>
+        <a:cs typeface="+mn-cs"/>
+      </a:defRPr>
+    </a:lvl2pPr>
+    <a:lvl3pPr marL="914400" algn="l" defTabSz="457200" rtl="0" eaLnBrk="1" latinLnBrk="0" hangingPunct="1">
+      <a:defRPr sz="1200" kern="1200">
+        <a:solidFill>
+          <a:schemeClr val="tx1"/>
+        </a:solidFill>
+        <a:latin typeface="+mn-lt"/>
+        <a:ea typeface="+mn-ea"/>
+        <a:cs typeface="+mn-cs"/>
+      </a:defRPr>
+    </a:lvl3pPr>
+    <a:lvl4pPr marL="1371600" algn="l" defTabSz="457200" rtl="0" eaLnBrk="1" latinLnBrk="0" hangingPunct="1">
+      <a:defRPr sz="1200" kern="1200">
+        <a:solidFill>
+          <a:schemeClr val="tx1"/>
+        </a:solidFill>
+        <a:latin typeface="+mn-lt"/>
+        <a:ea typeface="+mn-ea"/>
+        <a:cs typeface="+mn-cs"/>
+      </a:defRPr>
+    </a:lvl4pPr>
+    <a:lvl5pPr marL="1828800" algn="l" defTabSz="457200" rtl="0" eaLnBrk="1" latinLnBrk="0" hangingPunct="1">
+      <a:defRPr sz="1200" kern="1200">
+        <a:solidFill>
+          <a:schemeClr val="tx1"/>
+        </a:solidFill>
+        <a:latin typeface="+mn-lt"/>
+        <a:ea typeface="+mn-ea"/>
+        <a:cs typeface="+mn-cs"/>
+      </a:defRPr>
+    </a:lvl5pPr>
+    <a:lvl6pPr marL="2286000" algn="l" defTabSz="457200" rtl="0" eaLnBrk="1" latinLnBrk="0" hangingPunct="1">
+      <a:defRPr sz="1200" kern="1200">
+        <a:solidFill>
+          <a:schemeClr val="tx1"/>
+        </a:solidFill>
+        <a:latin typeface="+mn-lt"/>
+        <a:ea typeface="+mn-ea"/>
+        <a:cs typeface="+mn-cs"/>
+      </a:defRPr>
+    </a:lvl6pPr>
+    <a:lvl7pPr marL="2743200" algn="l" defTabSz="457200" rtl="0" eaLnBrk="1" latinLnBrk="0" hangingPunct="1">
+      <a:defRPr sz="1200" kern="1200">
+        <a:solidFill>
+          <a:schemeClr val="tx1"/>
+        </a:solidFill>
+        <a:latin typeface="+mn-lt"/>
+        <a:ea typeface="+mn-ea"/>
+        <a:cs typeface="+mn-cs"/>
+      </a:defRPr>
+    </a:lvl7pPr>
+    <a:lvl8pPr marL="3200400" algn="l" defTabSz="457200" rtl="0" eaLnBrk="1" latinLnBrk="0" hangingPunct="1">
+      <a:defRPr sz="1200" kern="1200">
+        <a:solidFill>
+          <a:schemeClr val="tx1"/>
+        </a:solidFill>
+        <a:latin typeface="+mn-lt"/>
+        <a:ea typeface="+mn-ea"/>
+        <a:cs typeface="+mn-cs"/>
+      </a:defRPr>
+    </a:lvl8pPr>
+    <a:lvl9pPr marL="3657600" algn="l" defTabSz="457200" rtl="0" eaLnBrk="1" latinLnBrk="0" hangingPunct="1">
+      <a:defRPr sz="1200" kern="1200">
+        <a:solidFill>
+          <a:schemeClr val="tx1"/>
+        </a:solidFill>
+        <a:latin typeface="+mn-lt"/>
+        <a:ea typeface="+mn-ea"/>
+        <a:cs typeface="+mn-cs"/>
+      </a:defRPr>
+    </a:lvl9pPr>
+  </p:notesStyle>
+</p:notesMaster>
+</file>
+
+<file path=ppt/notesSlides/notesSlide1.xml><?xml version="1.0" encoding="utf-8"?>
+<p:notes xmlns:a="http://schemas.openxmlformats.org/drawingml/2006/main" xmlns:p="http://schemas.openxmlformats.org/presentationml/2006/main" xmlns:r="http://schemas.openxmlformats.org/officeDocument/2006/relationships">
+  <p:cSld>
+    <p:spTree>
+      <p:nvGrpSpPr>
+        <p:cNvPr id="1" name=""/>
+        <p:cNvGrpSpPr/>
+        <p:nvPr/>
+      </p:nvGrpSpPr>
+      <p:grpSpPr>
+        <a:xfrm>
+          <a:off x="0" y="0"/>
+          <a:ext cx="0" cy="0"/>
+          <a:chOff x="0" y="0"/>
+          <a:chExt cx="0" cy="0"/>
+        </a:xfrm>
+      </p:grpSpPr>
+      <p:sp>
+        <p:nvSpPr>
+          <p:cNvPr id="2" name="Slide Image Placeholder 1"/>
+          <p:cNvSpPr>
+            <a:spLocks noGrp="1"/>
+          </p:cNvSpPr>
+          <p:nvPr>
+            <p:ph type="sldImg" idx="2"/>
+          </p:nvPr>
+        </p:nvSpPr>
+        <p:spPr/>
+      </p:sp>
+      <p:sp>
+        <p:nvSpPr>
+          <p:cNvPr id="3" name="Notes Placeholder 2"/>
+          <p:cNvSpPr>
+            <a:spLocks noGrp="1"/>
+          </p:cNvSpPr>
+          <p:nvPr>
+            <p:ph type="body" idx="3" sz="quarter"/>
+          </p:nvPr>
+        </p:nvSpPr>
+        <p:spPr/>
+        <p:txBody>
+          <a:bodyPr/>
+          <a:lstStyle/>
+          <a:p>
+            <a:r>
+              <a:t>Una estructura restrictiva como Queue no ofrece ese metodo; simplemente no existe en su contrato, entonces el error se vuelve imposible de escribir.</a:t>
+            </a:r>
+          </a:p>
+          <a:p/>
+          <a:p>
+            <a:r>
+              <a:t>Esa es la idea grande de hoy: elegir la estructura mas limitada que resuelva el problema no es una limitacion tecnica, es una forma de blindar la regla del negocio dentro del tipo de dato.</a:t>
+            </a:r>
+          </a:p>
+        </p:txBody>
+      </p:sp>
+      <p:sp>
+        <p:nvSpPr>
+          <p:cNvPr id="4" name="Slide Number Placeholder 3"/>
+          <p:cNvSpPr>
+            <a:spLocks noGrp="1"/>
+          </p:cNvSpPr>
+          <p:nvPr>
+            <p:ph type="sldNum" idx="5" sz="quarter"/>
+          </p:nvPr>
+        </p:nvSpPr>
+        <p:spPr/>
+      </p:sp>
+    </p:spTree>
+  </p:cSld>
+  <p:clrMapOvr>
+    <a:masterClrMapping/>
+  </p:clrMapOvr>
+</p:notes>
+</file>
+
+<file path=ppt/notesSlides/notesSlide2.xml><?xml version="1.0" encoding="utf-8"?>
+<p:notes xmlns:a="http://schemas.openxmlformats.org/drawingml/2006/main" xmlns:p="http://schemas.openxmlformats.org/presentationml/2006/main" xmlns:r="http://schemas.openxmlformats.org/officeDocument/2006/relationships">
+  <p:cSld>
+    <p:spTree>
+      <p:nvGrpSpPr>
+        <p:cNvPr id="1" name=""/>
+        <p:cNvGrpSpPr/>
+        <p:nvPr/>
+      </p:nvGrpSpPr>
+      <p:grpSpPr>
+        <a:xfrm>
+          <a:off x="0" y="0"/>
+          <a:ext cx="0" cy="0"/>
+          <a:chOff x="0" y="0"/>
+          <a:chExt cx="0" cy="0"/>
+        </a:xfrm>
+      </p:grpSpPr>
+      <p:sp>
+        <p:nvSpPr>
+          <p:cNvPr id="2" name="Slide Image Placeholder 1"/>
+          <p:cNvSpPr>
+            <a:spLocks noGrp="1"/>
+          </p:cNvSpPr>
+          <p:nvPr>
+            <p:ph type="sldImg" idx="2"/>
+          </p:nvPr>
+        </p:nvSpPr>
+        <p:spPr/>
+      </p:sp>
+      <p:sp>
+        <p:nvSpPr>
+          <p:cNvPr id="3" name="Notes Placeholder 2"/>
+          <p:cNvSpPr>
+            <a:spLocks noGrp="1"/>
+          </p:cNvSpPr>
+          <p:nvPr>
+            <p:ph type="body" idx="3" sz="quarter"/>
+          </p:nvPr>
+        </p:nvSpPr>
+        <p:spPr/>
+        <p:txBody>
+          <a:bodyPr/>
+          <a:lstStyle/>
+          <a:p>
+            <a:r>
+              <a:t>En VetCare usamos siempre offer/poll/peek porque avisan con false o con null en vez de reventar, y en una recepcion que puede quedar vacia a media manana eso es exactamente lo que queremos. peek es lo que alimenta la pantalla de turnos que ve el publico; poll es lo que hace el medico cuando abre la puerta del consultorio.</a:t>
+            </a:r>
+          </a:p>
+        </p:txBody>
+      </p:sp>
+      <p:sp>
+        <p:nvSpPr>
+          <p:cNvPr id="4" name="Slide Number Placeholder 3"/>
+          <p:cNvSpPr>
+            <a:spLocks noGrp="1"/>
+          </p:cNvSpPr>
+          <p:nvPr>
+            <p:ph type="sldNum" idx="5" sz="quarter"/>
+          </p:nvPr>
+        </p:nvSpPr>
+        <p:spPr/>
+      </p:sp>
+    </p:spTree>
+  </p:cSld>
+  <p:clrMapOvr>
+    <a:masterClrMapping/>
+  </p:clrMapOvr>
+</p:notes>
+</file>
+
+<file path=ppt/notesSlides/notesSlide3.xml><?xml version="1.0" encoding="utf-8"?>
+<p:notes xmlns:a="http://schemas.openxmlformats.org/drawingml/2006/main" xmlns:p="http://schemas.openxmlformats.org/presentationml/2006/main" xmlns:r="http://schemas.openxmlformats.org/officeDocument/2006/relationships">
+  <p:cSld>
+    <p:spTree>
+      <p:nvGrpSpPr>
+        <p:cNvPr id="1" name=""/>
+        <p:cNvGrpSpPr/>
+        <p:nvPr/>
+      </p:nvGrpSpPr>
+      <p:grpSpPr>
+        <a:xfrm>
+          <a:off x="0" y="0"/>
+          <a:ext cx="0" cy="0"/>
+          <a:chOff x="0" y="0"/>
+          <a:chExt cx="0" cy="0"/>
+        </a:xfrm>
+      </p:grpSpPr>
+      <p:sp>
+        <p:nvSpPr>
+          <p:cNvPr id="2" name="Slide Image Placeholder 1"/>
+          <p:cNvSpPr>
+            <a:spLocks noGrp="1"/>
+          </p:cNvSpPr>
+          <p:nvPr>
+            <p:ph type="sldImg" idx="2"/>
+          </p:nvPr>
+        </p:nvSpPr>
+        <p:spPr/>
+      </p:sp>
+      <p:sp>
+        <p:nvSpPr>
+          <p:cNvPr id="3" name="Notes Placeholder 2"/>
+          <p:cNvSpPr>
+            <a:spLocks noGrp="1"/>
+          </p:cNvSpPr>
+          <p:nvPr>
+            <p:ph type="body" idx="3" sz="quarter"/>
+          </p:nvPr>
+        </p:nvSpPr>
+        <p:spPr/>
+        <p:txBody>
+          <a:bodyPr/>
+          <a:lstStyle/>
+          <a:p>
+            <a:r>
+              <a:t>Eso es literalmente como funciona el Ctrl+Z de cualquier programa.</a:t>
+            </a:r>
+          </a:p>
+        </p:txBody>
+      </p:sp>
+      <p:sp>
+        <p:nvSpPr>
+          <p:cNvPr id="4" name="Slide Number Placeholder 3"/>
+          <p:cNvSpPr>
+            <a:spLocks noGrp="1"/>
+          </p:cNvSpPr>
+          <p:nvPr>
+            <p:ph type="sldNum" idx="5" sz="quarter"/>
+          </p:nvPr>
+        </p:nvSpPr>
+        <p:spPr/>
+      </p:sp>
+    </p:spTree>
+  </p:cSld>
+  <p:clrMapOvr>
+    <a:masterClrMapping/>
+  </p:clrMapOvr>
+</p:notes>
+</file>
+
+<file path=ppt/notesSlides/notesSlide4.xml><?xml version="1.0" encoding="utf-8"?>
+<p:notes xmlns:a="http://schemas.openxmlformats.org/drawingml/2006/main" xmlns:p="http://schemas.openxmlformats.org/presentationml/2006/main" xmlns:r="http://schemas.openxmlformats.org/officeDocument/2006/relationships">
+  <p:cSld>
+    <p:spTree>
+      <p:nvGrpSpPr>
+        <p:cNvPr id="1" name=""/>
+        <p:cNvGrpSpPr/>
+        <p:nvPr/>
+      </p:nvGrpSpPr>
+      <p:grpSpPr>
+        <a:xfrm>
+          <a:off x="0" y="0"/>
+          <a:ext cx="0" cy="0"/>
+          <a:chOff x="0" y="0"/>
+          <a:chExt cx="0" cy="0"/>
+        </a:xfrm>
+      </p:grpSpPr>
+      <p:sp>
+        <p:nvSpPr>
+          <p:cNvPr id="2" name="Slide Image Placeholder 1"/>
+          <p:cNvSpPr>
+            <a:spLocks noGrp="1"/>
+          </p:cNvSpPr>
+          <p:nvPr>
+            <p:ph type="sldImg" idx="2"/>
+          </p:nvPr>
+        </p:nvSpPr>
+        <p:spPr/>
+      </p:sp>
+      <p:sp>
+        <p:nvSpPr>
+          <p:cNvPr id="3" name="Notes Placeholder 2"/>
+          <p:cNvSpPr>
+            <a:spLocks noGrp="1"/>
+          </p:cNvSpPr>
+          <p:nvPr>
+            <p:ph type="body" idx="3" sz="quarter"/>
+          </p:nvPr>
+        </p:nvSpPr>
+        <p:spPr/>
+        <p:txBody>
+          <a:bodyPr/>
+          <a:lstStyle/>
+          <a:p>
+            <a:r>
+              <a:t>Vale la pena entender por que estas estructuras son rapidas, porque ahi esta el argumento tecnico y no solo el pedagogico.</a:t>
+            </a:r>
+          </a:p>
+          <a:p/>
+          <a:p>
+            <a:r>
+              <a:t>Por eso agregar y sacar por cualquiera de los dos extremos cuesta tiempo constante.</a:t>
+            </a:r>
+          </a:p>
+          <a:p/>
+          <a:p>
+            <a:r>
+              <a:t>La estructura correcta no solo previene errores de negocio, tambien evita que el programa se arrastre.</a:t>
+            </a:r>
+          </a:p>
+        </p:txBody>
+      </p:sp>
+      <p:sp>
+        <p:nvSpPr>
+          <p:cNvPr id="4" name="Slide Number Placeholder 3"/>
+          <p:cNvSpPr>
+            <a:spLocks noGrp="1"/>
+          </p:cNvSpPr>
+          <p:nvPr>
+            <p:ph type="sldNum" idx="5" sz="quarter"/>
+          </p:nvPr>
+        </p:nvSpPr>
+        <p:spPr/>
+      </p:sp>
+    </p:spTree>
+  </p:cSld>
+  <p:clrMapOvr>
+    <a:masterClrMapping/>
+  </p:clrMapOvr>
+</p:notes>
+</file>
+
+<file path=ppt/notesSlides/notesSlide5.xml><?xml version="1.0" encoding="utf-8"?>
+<p:notes xmlns:a="http://schemas.openxmlformats.org/drawingml/2006/main" xmlns:p="http://schemas.openxmlformats.org/presentationml/2006/main" xmlns:r="http://schemas.openxmlformats.org/officeDocument/2006/relationships">
+  <p:cSld>
+    <p:spTree>
+      <p:nvGrpSpPr>
+        <p:cNvPr id="1" name=""/>
+        <p:cNvGrpSpPr/>
+        <p:nvPr/>
+      </p:nvGrpSpPr>
+      <p:grpSpPr>
+        <a:xfrm>
+          <a:off x="0" y="0"/>
+          <a:ext cx="0" cy="0"/>
+          <a:chOff x="0" y="0"/>
+          <a:chExt cx="0" cy="0"/>
+        </a:xfrm>
+      </p:grpSpPr>
+      <p:sp>
+        <p:nvSpPr>
+          <p:cNvPr id="2" name="Slide Image Placeholder 1"/>
+          <p:cNvSpPr>
+            <a:spLocks noGrp="1"/>
+          </p:cNvSpPr>
+          <p:nvPr>
+            <p:ph type="sldImg" idx="2"/>
+          </p:nvPr>
+        </p:nvSpPr>
+        <p:spPr/>
+      </p:sp>
+      <p:sp>
+        <p:nvSpPr>
+          <p:cNvPr id="3" name="Notes Placeholder 2"/>
+          <p:cNvSpPr>
+            <a:spLocks noGrp="1"/>
+          </p:cNvSpPr>
+          <p:nvPr>
+            <p:ph type="body" idx="3" sz="quarter"/>
+          </p:nvPr>
+        </p:nvSpPr>
+        <p:spPr/>
+        <p:txBody>
+          <a:bodyPr/>
+          <a:lstStyle/>
+          <a:p>
+            <a:r>
+              <a:t>Ademas, recorrer una cola con for-each la muestra pero no la consume; muchos estudiantes imprimen la cola con un for-each, ven todos los turnos y creen que ya los atendieron, cuando en realidad size() sigue igual.</a:t>
+            </a:r>
+          </a:p>
+        </p:txBody>
+      </p:sp>
+      <p:sp>
+        <p:nvSpPr>
+          <p:cNvPr id="4" name="Slide Number Placeholder 3"/>
+          <p:cNvSpPr>
+            <a:spLocks noGrp="1"/>
+          </p:cNvSpPr>
+          <p:nvPr>
+            <p:ph type="sldNum" idx="5" sz="quarter"/>
+          </p:nvPr>
+        </p:nvSpPr>
+        <p:spPr/>
+      </p:sp>
+    </p:spTree>
+  </p:cSld>
+  <p:clrMapOvr>
+    <a:masterClrMapping/>
+  </p:clrMapOvr>
+</p:notes>
 </file>
 
 <file path=ppt/slideLayouts/slideLayout1.xml><?xml version="1.0" encoding="utf-8"?>
@@ -8430,7 +9142,7 @@
                 </a:solidFill>
                 <a:latin typeface="Calibri"/>
               </a:rPr>
-              <a:t>Encuadre de hoy · Objetivo del PI</a:t>
+              <a:t>Encuadre de hoy</a:t>
             </a:r>
           </a:p>
         </p:txBody>
@@ -8478,7 +9190,7 @@
                 </a:solidFill>
                 <a:latin typeface="Calibri"/>
               </a:rPr>
-              <a:t>Hoy avanzamos VetCare en:</a:t>
+              <a:t>Tema de hoy:</a:t>
             </a:r>
             <a:r>
               <a:rPr sz="2000" b="0" i="0">
@@ -8487,7 +9199,7 @@
                 </a:solidFill>
                 <a:latin typeface="Calibri"/>
               </a:rPr>
-              <a:t> VetCare queda con la sala de espera modelada como cola FIFO y el historial de atenciones recientes como pila LIFO, ambas conectadas al registro de mascotas de la clase anterior.</a:t>
+              <a:t> Pilas y colas · Stack y Queue — Cuando restringir el acceso hace el software mas seguro</a:t>
             </a:r>
           </a:p>
           <a:p>
@@ -8546,41 +9258,23 @@
                 </a:solidFill>
                 <a:latin typeface="Calibri"/>
               </a:rPr>
-              <a:t>–   </a:t>
-            </a:r>
-            <a:r>
-              <a:rPr sz="2000" b="1" i="0">
+              <a:t>–   Primero el concepto, despues el codigo que lo muestra y la demo en vivo.</a:t>
+            </a:r>
+          </a:p>
+          <a:p>
+            <a:pPr>
+              <a:spcAft>
+                <a:spcPts val="800"/>
+              </a:spcAft>
+            </a:pPr>
+            <a:r>
+              <a:rPr sz="2000" b="0" i="0">
                 <a:solidFill>
                   <a:srgbClr val="333333"/>
                 </a:solidFill>
                 <a:latin typeface="Calibri"/>
               </a:rPr>
-              <a:t>Entregable de hoy:</a:t>
-            </a:r>
-            <a:r>
-              <a:rPr sz="2000" b="0" i="0">
-                <a:solidFill>
-                  <a:srgbClr val="333333"/>
-                </a:solidFill>
-                <a:latin typeface="Calibri"/>
-              </a:rPr>
-              <a:t> Clases SalaDeEspera (Queue) e HistorialReciente (Deque como pila) integradas al proyecto VetCare, con una demo que atiende en orden de llegada las cuatro mascotas del escenario y deshace la ultima atencion registrada; comprimido y subido a la plataforma del curso.</a:t>
-            </a:r>
-          </a:p>
-          <a:p>
-            <a:pPr>
-              <a:spcAft>
-                <a:spcPts val="800"/>
-              </a:spcAft>
-            </a:pPr>
-            <a:r>
-              <a:rPr sz="2000" b="0" i="0">
-                <a:solidFill>
-                  <a:srgbClr val="333333"/>
-                </a:solidFill>
-                <a:latin typeface="Calibri"/>
-              </a:rPr>
-              <a:t>–   La teoria esta al servicio del producto: al salir, VetCare avanzo.</a:t>
+              <a:t>–   Todo con el mismo dominio: la clinica veterinaria Huellitas (VetCare).</a:t>
             </a:r>
           </a:p>
         </p:txBody>
@@ -12402,13 +13096,13 @@
         <p:spPr>
           <a:xfrm>
             <a:off x="0" y="0"/>
-            <a:ext cx="12191695" cy="960120"/>
+            <a:ext cx="12191695" cy="164592"/>
           </a:xfrm>
           <a:prstGeom prst="rect">
             <a:avLst/>
           </a:prstGeom>
           <a:solidFill>
-            <a:srgbClr val="095292"/>
+            <a:srgbClr val="269CCB"/>
           </a:solidFill>
           <a:ln>
             <a:noFill/>
@@ -12436,49 +13130,30 @@
           </a:p>
         </p:txBody>
       </p:sp>
-      <p:sp>
-        <p:nvSpPr>
-          <p:cNvPr id="3" name="Rectangle 2"/>
-          <p:cNvSpPr/>
-          <p:nvPr/>
-        </p:nvSpPr>
-        <p:spPr>
-          <a:xfrm>
-            <a:off x="0" y="960120"/>
-            <a:ext cx="12191695" cy="41148"/>
-          </a:xfrm>
-          <a:prstGeom prst="rect">
-            <a:avLst/>
-          </a:prstGeom>
-          <a:solidFill>
-            <a:srgbClr val="FFD000"/>
-          </a:solidFill>
-          <a:ln>
-            <a:noFill/>
-          </a:ln>
-        </p:spPr>
-        <p:style>
-          <a:lnRef idx="1">
-            <a:schemeClr val="accent1"/>
-          </a:lnRef>
-          <a:fillRef idx="3">
-            <a:schemeClr val="accent1"/>
-          </a:fillRef>
-          <a:effectRef idx="2">
-            <a:schemeClr val="accent1"/>
-          </a:effectRef>
-          <a:fontRef idx="minor">
-            <a:schemeClr val="lt1"/>
-          </a:fontRef>
-        </p:style>
-        <p:txBody>
-          <a:bodyPr rtlCol="0" anchor="ctr"/>
-          <a:lstStyle/>
-          <a:p>
-            <a:pPr algn="ctr"/>
-          </a:p>
-        </p:txBody>
-      </p:sp>
+      <p:pic>
+        <p:nvPicPr>
+          <p:cNvPr id="3" name="Picture 2" descr="logo_uniajc_color.png"/>
+          <p:cNvPicPr>
+            <a:picLocks noChangeAspect="1"/>
+          </p:cNvPicPr>
+          <p:nvPr/>
+        </p:nvPicPr>
+        <p:blipFill>
+          <a:blip r:embed="rId2"/>
+          <a:stretch>
+            <a:fillRect/>
+          </a:stretch>
+        </p:blipFill>
+        <p:spPr>
+          <a:xfrm>
+            <a:off x="10271455" y="5998464"/>
+            <a:ext cx="1463040" cy="643233"/>
+          </a:xfrm>
+          <a:prstGeom prst="rect">
+            <a:avLst/>
+          </a:prstGeom>
+        </p:spPr>
+      </p:pic>
       <p:sp>
         <p:nvSpPr>
           <p:cNvPr id="4" name="TextBox 3"/>
@@ -12487,8 +13162,41 @@
         </p:nvSpPr>
         <p:spPr>
           <a:xfrm>
-            <a:off x="457200" y="164592"/>
-            <a:ext cx="11277295" cy="502920"/>
+            <a:off x="457200" y="1737360"/>
+            <a:ext cx="11277295" cy="1097280"/>
+          </a:xfrm>
+          <a:prstGeom prst="rect">
+            <a:avLst/>
+          </a:prstGeom>
+          <a:noFill/>
+        </p:spPr>
+        <p:txBody>
+          <a:bodyPr wrap="square" anchor="ctr"/>
+          <a:lstStyle/>
+          <a:p>
+            <a:pPr algn="ctr"/>
+            <a:r>
+              <a:rPr sz="3400" b="1" i="0">
+                <a:solidFill>
+                  <a:srgbClr val="095292"/>
+                </a:solidFill>
+                <a:latin typeface="Calibri"/>
+              </a:rPr>
+              <a:t>Clase 3 · Pilas y colas · Stack y Queue</a:t>
+            </a:r>
+          </a:p>
+        </p:txBody>
+      </p:sp>
+      <p:sp>
+        <p:nvSpPr>
+          <p:cNvPr id="5" name="TextBox 4"/>
+          <p:cNvSpPr txBox="1"/>
+          <p:nvPr/>
+        </p:nvSpPr>
+        <p:spPr>
+          <a:xfrm>
+            <a:off x="457200" y="3017520"/>
+            <a:ext cx="11277295" cy="1645920"/>
           </a:xfrm>
           <a:prstGeom prst="rect">
             <a:avLst/>
@@ -12501,28 +13209,65 @@
           </a:bodyPr>
           <a:lstStyle/>
           <a:p>
-            <a:r>
-              <a:rPr sz="2600" b="1" i="0">
-                <a:solidFill>
-                  <a:srgbClr val="FFFFFF"/>
-                </a:solidFill>
-                <a:latin typeface="Calibri"/>
-              </a:rPr>
-              <a:t>Taller PI — por que importa</a:t>
-            </a:r>
-          </a:p>
-        </p:txBody>
-      </p:sp>
-      <p:sp>
-        <p:nvSpPr>
-          <p:cNvPr id="5" name="TextBox 4"/>
+            <a:pPr algn="ctr">
+              <a:spcAft>
+                <a:spcPts val="600"/>
+              </a:spcAft>
+            </a:pPr>
+            <a:r>
+              <a:rPr sz="1600" b="0" i="0">
+                <a:solidFill>
+                  <a:srgbClr val="333333"/>
+                </a:solidFill>
+                <a:latin typeface="Calibri"/>
+              </a:rPr>
+              <a:t>Cuando restringir el acceso hace el software mas seguro</a:t>
+            </a:r>
+          </a:p>
+          <a:p>
+            <a:pPr algn="ctr">
+              <a:spcAft>
+                <a:spcPts val="600"/>
+              </a:spcAft>
+            </a:pPr>
+            <a:r>
+              <a:rPr sz="1600" b="0" i="0">
+                <a:solidFill>
+                  <a:srgbClr val="333333"/>
+                </a:solidFill>
+                <a:latin typeface="Calibri"/>
+              </a:rPr>
+              <a:t>Repasa las laminas de concepto y el codigo de la demo</a:t>
+            </a:r>
+          </a:p>
+          <a:p>
+            <a:pPr algn="ctr">
+              <a:spcAft>
+                <a:spcPts val="600"/>
+              </a:spcAft>
+            </a:pPr>
+            <a:r>
+              <a:rPr sz="1600" b="0" i="0">
+                <a:solidFill>
+                  <a:srgbClr val="333333"/>
+                </a:solidFill>
+                <a:latin typeface="Calibri"/>
+              </a:rPr>
+              <a:t>Siguiente clase: continuamos el hilo del tema</a:t>
+            </a:r>
+          </a:p>
+        </p:txBody>
+      </p:sp>
+      <p:sp>
+        <p:nvSpPr>
+          <p:cNvPr id="6" name="TextBox 5"/>
           <p:cNvSpPr txBox="1"/>
           <p:nvPr/>
         </p:nvSpPr>
         <p:spPr>
           <a:xfrm>
-            <a:off x="457200" y="1170432"/>
-            <a:ext cx="11277295" cy="5230368"/>
+            <a:off x="457200" y="4754880"/>
+            <a:ext cx="11277295" cy="640080"/>
           </a:xfrm>
           <a:prstGeom prst="rect">
             <a:avLst/>
@@ -12535,104 +13280,15 @@
           </a:bodyPr>
           <a:lstStyle/>
           <a:p>
-            <a:pPr>
-              <a:spcAft>
-                <a:spcPts val="800"/>
-              </a:spcAft>
-            </a:pPr>
-            <a:r>
-              <a:rPr sz="2000" b="0" i="0">
-                <a:solidFill>
-                  <a:srgbClr val="333333"/>
-                </a:solidFill>
-                <a:latin typeface="Calibri"/>
-              </a:rPr>
-              <a:t>–   </a:t>
-            </a:r>
+            <a:pPr algn="ctr"/>
             <a:r>
               <a:rPr sz="2000" b="1" i="0">
                 <a:solidFill>
-                  <a:srgbClr val="333333"/>
-                </a:solidFill>
-                <a:latin typeface="Calibri"/>
-              </a:rPr>
-              <a:t>Por que importa al PI:</a:t>
-            </a:r>
-            <a:r>
-              <a:rPr sz="2000" b="0" i="0">
-                <a:solidFill>
-                  <a:srgbClr val="333333"/>
-                </a:solidFill>
-                <a:latin typeface="Calibri"/>
-              </a:rPr>
-              <a:t> VetCare debe agendar y atender en orden real de llegada, y esa regla queda garantizada por el tipo de dato y no por la buena memoria del programador.</a:t>
-            </a:r>
-          </a:p>
-          <a:p>
-            <a:pPr>
-              <a:spcAft>
-                <a:spcPts val="800"/>
-              </a:spcAft>
-            </a:pPr>
-            <a:r>
-              <a:rPr sz="2000" b="0" i="0">
-                <a:solidFill>
-                  <a:srgbClr val="333333"/>
-                </a:solidFill>
-                <a:latin typeface="Calibri"/>
-              </a:rPr>
-              <a:t>–   El historial de atenciones recientes en pila es la base del deshacer que despues protegera al usuario cuando la interfaz grafica permita registrar consultas por error.</a:t>
-            </a:r>
-          </a:p>
-          <a:p>
-            <a:pPr>
-              <a:spcAft>
-                <a:spcPts val="800"/>
-              </a:spcAft>
-            </a:pPr>
-            <a:r>
-              <a:rPr sz="2000" b="0" i="0">
-                <a:solidFill>
-                  <a:srgbClr val="333333"/>
-                </a:solidFill>
-                <a:latin typeface="Calibri"/>
-              </a:rPr>
-              <a:t>–   Cola y pila son las estructuras que se guardaran y recargaran desde archivo en las clases de persistencia, asi que hoy definimos el orden en que se escribiran las lineas del CSV.</a:t>
-            </a:r>
-          </a:p>
-        </p:txBody>
-      </p:sp>
-      <p:sp>
-        <p:nvSpPr>
-          <p:cNvPr id="6" name="TextBox 5"/>
-          <p:cNvSpPr txBox="1"/>
-          <p:nvPr/>
-        </p:nvSpPr>
-        <p:spPr>
-          <a:xfrm>
-            <a:off x="11185855" y="6473952"/>
-            <a:ext cx="640080" cy="274320"/>
-          </a:xfrm>
-          <a:prstGeom prst="rect">
-            <a:avLst/>
-          </a:prstGeom>
-          <a:noFill/>
-        </p:spPr>
-        <p:txBody>
-          <a:bodyPr wrap="square">
-            <a:spAutoFit/>
-          </a:bodyPr>
-          <a:lstStyle/>
-          <a:p>
-            <a:pPr algn="r"/>
-            <a:r>
-              <a:rPr sz="1100" b="0" i="0">
-                <a:solidFill>
-                  <a:srgbClr val="666666"/>
-                </a:solidFill>
-                <a:latin typeface="Calibri"/>
-              </a:rPr>
-              <a:t>29</a:t>
+                  <a:srgbClr val="269CCB"/>
+                </a:solidFill>
+                <a:latin typeface="Calibri"/>
+              </a:rPr>
+              <a:t>Teoria al servicio del proyecto</a:t>
             </a:r>
           </a:p>
         </p:txBody>
@@ -12936,7 +13592,7 @@
                 </a:solidFill>
                 <a:latin typeface="Calibri"/>
               </a:rPr>
-              <a:t>Encuadre y repaso del avance</a:t>
+              <a:t>Encuadre y repaso de la clase anterior</a:t>
             </a:r>
           </a:p>
         </p:txBody>
@@ -13281,7 +13937,7 @@
                 </a:solidFill>
                 <a:latin typeface="Calibri"/>
               </a:rPr>
-              <a:t>Taller guiado = avance del PI</a:t>
+              <a:t>Practica (opcional, guia en la carpeta)</a:t>
             </a:r>
           </a:p>
         </p:txBody>
@@ -13396,7 +14052,7 @@
                 </a:solidFill>
                 <a:latin typeface="Calibri"/>
               </a:rPr>
-              <a:t>Criterios de exito y cierre</a:t>
+              <a:t>Repaso de conceptos y cierre</a:t>
             </a:r>
           </a:p>
         </p:txBody>
@@ -13485,3125 +14141,6 @@
                 <a:latin typeface="Calibri"/>
               </a:rPr>
               <a:t>3</a:t>
-            </a:r>
-          </a:p>
-        </p:txBody>
-      </p:sp>
-    </p:spTree>
-  </p:cSld>
-  <p:clrMapOvr>
-    <a:masterClrMapping/>
-  </p:clrMapOvr>
-</p:sld>
-</file>
-
-<file path=ppt/slides/slide30.xml><?xml version="1.0" encoding="utf-8"?>
-<p:sld xmlns:a="http://schemas.openxmlformats.org/drawingml/2006/main" xmlns:p="http://schemas.openxmlformats.org/presentationml/2006/main" xmlns:r="http://schemas.openxmlformats.org/officeDocument/2006/relationships">
-  <p:cSld>
-    <p:bg>
-      <p:bgPr>
-        <a:solidFill>
-          <a:srgbClr val="FFFFFF"/>
-        </a:solidFill>
-        <a:effectLst/>
-      </p:bgPr>
-    </p:bg>
-    <p:spTree>
-      <p:nvGrpSpPr>
-        <p:cNvPr id="1" name=""/>
-        <p:cNvGrpSpPr/>
-        <p:nvPr/>
-      </p:nvGrpSpPr>
-      <p:grpSpPr/>
-      <p:sp>
-        <p:nvSpPr>
-          <p:cNvPr id="2" name="Rectangle 1"/>
-          <p:cNvSpPr/>
-          <p:nvPr/>
-        </p:nvSpPr>
-        <p:spPr>
-          <a:xfrm>
-            <a:off x="0" y="0"/>
-            <a:ext cx="12191695" cy="960120"/>
-          </a:xfrm>
-          <a:prstGeom prst="rect">
-            <a:avLst/>
-          </a:prstGeom>
-          <a:solidFill>
-            <a:srgbClr val="095292"/>
-          </a:solidFill>
-          <a:ln>
-            <a:noFill/>
-          </a:ln>
-        </p:spPr>
-        <p:style>
-          <a:lnRef idx="1">
-            <a:schemeClr val="accent1"/>
-          </a:lnRef>
-          <a:fillRef idx="3">
-            <a:schemeClr val="accent1"/>
-          </a:fillRef>
-          <a:effectRef idx="2">
-            <a:schemeClr val="accent1"/>
-          </a:effectRef>
-          <a:fontRef idx="minor">
-            <a:schemeClr val="lt1"/>
-          </a:fontRef>
-        </p:style>
-        <p:txBody>
-          <a:bodyPr rtlCol="0" anchor="ctr"/>
-          <a:lstStyle/>
-          <a:p>
-            <a:pPr algn="ctr"/>
-          </a:p>
-        </p:txBody>
-      </p:sp>
-      <p:sp>
-        <p:nvSpPr>
-          <p:cNvPr id="3" name="Rectangle 2"/>
-          <p:cNvSpPr/>
-          <p:nvPr/>
-        </p:nvSpPr>
-        <p:spPr>
-          <a:xfrm>
-            <a:off x="0" y="960120"/>
-            <a:ext cx="12191695" cy="41148"/>
-          </a:xfrm>
-          <a:prstGeom prst="rect">
-            <a:avLst/>
-          </a:prstGeom>
-          <a:solidFill>
-            <a:srgbClr val="FFD000"/>
-          </a:solidFill>
-          <a:ln>
-            <a:noFill/>
-          </a:ln>
-        </p:spPr>
-        <p:style>
-          <a:lnRef idx="1">
-            <a:schemeClr val="accent1"/>
-          </a:lnRef>
-          <a:fillRef idx="3">
-            <a:schemeClr val="accent1"/>
-          </a:fillRef>
-          <a:effectRef idx="2">
-            <a:schemeClr val="accent1"/>
-          </a:effectRef>
-          <a:fontRef idx="minor">
-            <a:schemeClr val="lt1"/>
-          </a:fontRef>
-        </p:style>
-        <p:txBody>
-          <a:bodyPr rtlCol="0" anchor="ctr"/>
-          <a:lstStyle/>
-          <a:p>
-            <a:pPr algn="ctr"/>
-          </a:p>
-        </p:txBody>
-      </p:sp>
-      <p:sp>
-        <p:nvSpPr>
-          <p:cNvPr id="4" name="TextBox 3"/>
-          <p:cNvSpPr txBox="1"/>
-          <p:nvPr/>
-        </p:nvSpPr>
-        <p:spPr>
-          <a:xfrm>
-            <a:off x="457200" y="164592"/>
-            <a:ext cx="11277295" cy="502920"/>
-          </a:xfrm>
-          <a:prstGeom prst="rect">
-            <a:avLst/>
-          </a:prstGeom>
-          <a:noFill/>
-        </p:spPr>
-        <p:txBody>
-          <a:bodyPr wrap="square">
-            <a:spAutoFit/>
-          </a:bodyPr>
-          <a:lstStyle/>
-          <a:p>
-            <a:r>
-              <a:rPr sz="2600" b="1" i="0">
-                <a:solidFill>
-                  <a:srgbClr val="FFFFFF"/>
-                </a:solidFill>
-                <a:latin typeface="Calibri"/>
-              </a:rPr>
-              <a:t>Taller PI — punto de partida</a:t>
-            </a:r>
-          </a:p>
-        </p:txBody>
-      </p:sp>
-      <p:sp>
-        <p:nvSpPr>
-          <p:cNvPr id="5" name="TextBox 4"/>
-          <p:cNvSpPr txBox="1"/>
-          <p:nvPr/>
-        </p:nvSpPr>
-        <p:spPr>
-          <a:xfrm>
-            <a:off x="457200" y="1170432"/>
-            <a:ext cx="11277295" cy="5230368"/>
-          </a:xfrm>
-          <a:prstGeom prst="rect">
-            <a:avLst/>
-          </a:prstGeom>
-          <a:noFill/>
-        </p:spPr>
-        <p:txBody>
-          <a:bodyPr wrap="square">
-            <a:spAutoFit/>
-          </a:bodyPr>
-          <a:lstStyle/>
-          <a:p>
-            <a:pPr>
-              <a:spcAft>
-                <a:spcPts val="800"/>
-              </a:spcAft>
-            </a:pPr>
-            <a:r>
-              <a:rPr sz="2000" b="0" i="0">
-                <a:solidFill>
-                  <a:srgbClr val="333333"/>
-                </a:solidFill>
-                <a:latin typeface="Calibri"/>
-              </a:rPr>
-              <a:t>–   Es lunes 8:00 a.m. en Huellitas y llegan en este orden: Firulais (M-001, vacuna, dueno Ana Gomez), Michi (M-002, control, dueno Luis Perez), Rocky (M-003, revision de patas, dueno Ana Gomez) y Nieve (M-004, desparasitacion, duena Sara Diaz).</a:t>
-            </a:r>
-          </a:p>
-          <a:p>
-            <a:pPr>
-              <a:spcAft>
-                <a:spcPts val="800"/>
-              </a:spcAft>
-            </a:pPr>
-            <a:r>
-              <a:rPr sz="2000" b="0" i="0">
-                <a:solidFill>
-                  <a:srgbClr val="333333"/>
-                </a:solidFill>
-                <a:latin typeface="Calibri"/>
-              </a:rPr>
-              <a:t>–   La sala de espera arranca vacia y el historial de atenciones recientes tambien; el registro de mascotas de la Clase 2 ya esta cargado y se reutiliza.</a:t>
-            </a:r>
-          </a:p>
-          <a:p>
-            <a:pPr>
-              <a:spcAft>
-                <a:spcPts val="800"/>
-              </a:spcAft>
-            </a:pPr>
-            <a:r>
-              <a:rPr sz="2000" b="0" i="0">
-                <a:solidFill>
-                  <a:srgbClr val="333333"/>
-                </a:solidFill>
-                <a:latin typeface="Calibri"/>
-              </a:rPr>
-              <a:t>–   A las 8:20 entra Canela (M-009, duena Ana Gomez) con una urgencia real y debe pasar de primera sin destruir el orden de los demas.</a:t>
-            </a:r>
-          </a:p>
-        </p:txBody>
-      </p:sp>
-      <p:sp>
-        <p:nvSpPr>
-          <p:cNvPr id="6" name="TextBox 5"/>
-          <p:cNvSpPr txBox="1"/>
-          <p:nvPr/>
-        </p:nvSpPr>
-        <p:spPr>
-          <a:xfrm>
-            <a:off x="11185855" y="6473952"/>
-            <a:ext cx="640080" cy="274320"/>
-          </a:xfrm>
-          <a:prstGeom prst="rect">
-            <a:avLst/>
-          </a:prstGeom>
-          <a:noFill/>
-        </p:spPr>
-        <p:txBody>
-          <a:bodyPr wrap="square">
-            <a:spAutoFit/>
-          </a:bodyPr>
-          <a:lstStyle/>
-          <a:p>
-            <a:pPr algn="r"/>
-            <a:r>
-              <a:rPr sz="1100" b="0" i="0">
-                <a:solidFill>
-                  <a:srgbClr val="666666"/>
-                </a:solidFill>
-                <a:latin typeface="Calibri"/>
-              </a:rPr>
-              <a:t>30</a:t>
-            </a:r>
-          </a:p>
-        </p:txBody>
-      </p:sp>
-    </p:spTree>
-  </p:cSld>
-  <p:clrMapOvr>
-    <a:masterClrMapping/>
-  </p:clrMapOvr>
-</p:sld>
-</file>
-
-<file path=ppt/slides/slide31.xml><?xml version="1.0" encoding="utf-8"?>
-<p:sld xmlns:a="http://schemas.openxmlformats.org/drawingml/2006/main" xmlns:p="http://schemas.openxmlformats.org/presentationml/2006/main" xmlns:r="http://schemas.openxmlformats.org/officeDocument/2006/relationships">
-  <p:cSld>
-    <p:bg>
-      <p:bgPr>
-        <a:solidFill>
-          <a:srgbClr val="FFFFFF"/>
-        </a:solidFill>
-        <a:effectLst/>
-      </p:bgPr>
-    </p:bg>
-    <p:spTree>
-      <p:nvGrpSpPr>
-        <p:cNvPr id="1" name=""/>
-        <p:cNvGrpSpPr/>
-        <p:nvPr/>
-      </p:nvGrpSpPr>
-      <p:grpSpPr/>
-      <p:sp>
-        <p:nvSpPr>
-          <p:cNvPr id="2" name="Rectangle 1"/>
-          <p:cNvSpPr/>
-          <p:nvPr/>
-        </p:nvSpPr>
-        <p:spPr>
-          <a:xfrm>
-            <a:off x="0" y="0"/>
-            <a:ext cx="12191695" cy="960120"/>
-          </a:xfrm>
-          <a:prstGeom prst="rect">
-            <a:avLst/>
-          </a:prstGeom>
-          <a:solidFill>
-            <a:srgbClr val="095292"/>
-          </a:solidFill>
-          <a:ln>
-            <a:noFill/>
-          </a:ln>
-        </p:spPr>
-        <p:style>
-          <a:lnRef idx="1">
-            <a:schemeClr val="accent1"/>
-          </a:lnRef>
-          <a:fillRef idx="3">
-            <a:schemeClr val="accent1"/>
-          </a:fillRef>
-          <a:effectRef idx="2">
-            <a:schemeClr val="accent1"/>
-          </a:effectRef>
-          <a:fontRef idx="minor">
-            <a:schemeClr val="lt1"/>
-          </a:fontRef>
-        </p:style>
-        <p:txBody>
-          <a:bodyPr rtlCol="0" anchor="ctr"/>
-          <a:lstStyle/>
-          <a:p>
-            <a:pPr algn="ctr"/>
-          </a:p>
-        </p:txBody>
-      </p:sp>
-      <p:sp>
-        <p:nvSpPr>
-          <p:cNvPr id="3" name="Rectangle 2"/>
-          <p:cNvSpPr/>
-          <p:nvPr/>
-        </p:nvSpPr>
-        <p:spPr>
-          <a:xfrm>
-            <a:off x="0" y="960120"/>
-            <a:ext cx="12191695" cy="41148"/>
-          </a:xfrm>
-          <a:prstGeom prst="rect">
-            <a:avLst/>
-          </a:prstGeom>
-          <a:solidFill>
-            <a:srgbClr val="FFD000"/>
-          </a:solidFill>
-          <a:ln>
-            <a:noFill/>
-          </a:ln>
-        </p:spPr>
-        <p:style>
-          <a:lnRef idx="1">
-            <a:schemeClr val="accent1"/>
-          </a:lnRef>
-          <a:fillRef idx="3">
-            <a:schemeClr val="accent1"/>
-          </a:fillRef>
-          <a:effectRef idx="2">
-            <a:schemeClr val="accent1"/>
-          </a:effectRef>
-          <a:fontRef idx="minor">
-            <a:schemeClr val="lt1"/>
-          </a:fontRef>
-        </p:style>
-        <p:txBody>
-          <a:bodyPr rtlCol="0" anchor="ctr"/>
-          <a:lstStyle/>
-          <a:p>
-            <a:pPr algn="ctr"/>
-          </a:p>
-        </p:txBody>
-      </p:sp>
-      <p:sp>
-        <p:nvSpPr>
-          <p:cNvPr id="4" name="TextBox 3"/>
-          <p:cNvSpPr txBox="1"/>
-          <p:nvPr/>
-        </p:nvSpPr>
-        <p:spPr>
-          <a:xfrm>
-            <a:off x="457200" y="164592"/>
-            <a:ext cx="11277295" cy="502920"/>
-          </a:xfrm>
-          <a:prstGeom prst="rect">
-            <a:avLst/>
-          </a:prstGeom>
-          <a:noFill/>
-        </p:spPr>
-        <p:txBody>
-          <a:bodyPr wrap="square">
-            <a:spAutoFit/>
-          </a:bodyPr>
-          <a:lstStyle/>
-          <a:p>
-            <a:r>
-              <a:rPr sz="2600" b="1" i="0">
-                <a:solidFill>
-                  <a:srgbClr val="FFFFFF"/>
-                </a:solidFill>
-                <a:latin typeface="Calibri"/>
-              </a:rPr>
-              <a:t>Taller PI — pasos guiados</a:t>
-            </a:r>
-          </a:p>
-        </p:txBody>
-      </p:sp>
-      <p:sp>
-        <p:nvSpPr>
-          <p:cNvPr id="5" name="Rounded Rectangle 4"/>
-          <p:cNvSpPr/>
-          <p:nvPr/>
-        </p:nvSpPr>
-        <p:spPr>
-          <a:xfrm>
-            <a:off x="457200" y="1234440"/>
-            <a:ext cx="11277295" cy="950976"/>
-          </a:xfrm>
-          <a:prstGeom prst="roundRect">
-            <a:avLst>
-              <a:gd name="adj" fmla="val 12000"/>
-            </a:avLst>
-          </a:prstGeom>
-          <a:solidFill>
-            <a:srgbClr val="F2F2F2"/>
-          </a:solidFill>
-          <a:ln>
-            <a:noFill/>
-          </a:ln>
-        </p:spPr>
-        <p:style>
-          <a:lnRef idx="1">
-            <a:schemeClr val="accent1"/>
-          </a:lnRef>
-          <a:fillRef idx="3">
-            <a:schemeClr val="accent1"/>
-          </a:fillRef>
-          <a:effectRef idx="2">
-            <a:schemeClr val="accent1"/>
-          </a:effectRef>
-          <a:fontRef idx="minor">
-            <a:schemeClr val="lt1"/>
-          </a:fontRef>
-        </p:style>
-        <p:txBody>
-          <a:bodyPr rtlCol="0" anchor="ctr"/>
-          <a:lstStyle/>
-          <a:p>
-            <a:pPr algn="ctr"/>
-          </a:p>
-        </p:txBody>
-      </p:sp>
-      <p:sp>
-        <p:nvSpPr>
-          <p:cNvPr id="6" name="Rounded Rectangle 5"/>
-          <p:cNvSpPr/>
-          <p:nvPr/>
-        </p:nvSpPr>
-        <p:spPr>
-          <a:xfrm>
-            <a:off x="594360" y="1490472"/>
-            <a:ext cx="438912" cy="438912"/>
-          </a:xfrm>
-          <a:prstGeom prst="roundRect">
-            <a:avLst>
-              <a:gd name="adj" fmla="val 12000"/>
-            </a:avLst>
-          </a:prstGeom>
-          <a:solidFill>
-            <a:srgbClr val="095292"/>
-          </a:solidFill>
-          <a:ln>
-            <a:noFill/>
-          </a:ln>
-        </p:spPr>
-        <p:style>
-          <a:lnRef idx="1">
-            <a:schemeClr val="accent1"/>
-          </a:lnRef>
-          <a:fillRef idx="3">
-            <a:schemeClr val="accent1"/>
-          </a:fillRef>
-          <a:effectRef idx="2">
-            <a:schemeClr val="accent1"/>
-          </a:effectRef>
-          <a:fontRef idx="minor">
-            <a:schemeClr val="lt1"/>
-          </a:fontRef>
-        </p:style>
-        <p:txBody>
-          <a:bodyPr rtlCol="0" anchor="ctr"/>
-          <a:lstStyle/>
-          <a:p>
-            <a:pPr algn="ctr"/>
-          </a:p>
-        </p:txBody>
-      </p:sp>
-      <p:sp>
-        <p:nvSpPr>
-          <p:cNvPr id="7" name="TextBox 6"/>
-          <p:cNvSpPr txBox="1"/>
-          <p:nvPr/>
-        </p:nvSpPr>
-        <p:spPr>
-          <a:xfrm>
-            <a:off x="594360" y="1490472"/>
-            <a:ext cx="438912" cy="438912"/>
-          </a:xfrm>
-          <a:prstGeom prst="rect">
-            <a:avLst/>
-          </a:prstGeom>
-          <a:noFill/>
-        </p:spPr>
-        <p:txBody>
-          <a:bodyPr wrap="square" anchor="ctr"/>
-          <a:lstStyle/>
-          <a:p>
-            <a:pPr algn="ctr"/>
-            <a:r>
-              <a:rPr sz="1600" b="1" i="0">
-                <a:solidFill>
-                  <a:srgbClr val="FFFFFF"/>
-                </a:solidFill>
-                <a:latin typeface="Calibri"/>
-              </a:rPr>
-              <a:t>1</a:t>
-            </a:r>
-          </a:p>
-        </p:txBody>
-      </p:sp>
-      <p:sp>
-        <p:nvSpPr>
-          <p:cNvPr id="8" name="TextBox 7"/>
-          <p:cNvSpPr txBox="1"/>
-          <p:nvPr/>
-        </p:nvSpPr>
-        <p:spPr>
-          <a:xfrm>
-            <a:off x="1188720" y="1325880"/>
-            <a:ext cx="10271455" cy="786384"/>
-          </a:xfrm>
-          <a:prstGeom prst="rect">
-            <a:avLst/>
-          </a:prstGeom>
-          <a:noFill/>
-        </p:spPr>
-        <p:txBody>
-          <a:bodyPr wrap="square" anchor="ctr"/>
-          <a:lstStyle/>
-          <a:p>
-            <a:r>
-              <a:rPr sz="1500" b="1" i="0">
-                <a:solidFill>
-                  <a:srgbClr val="095292"/>
-                </a:solidFill>
-                <a:latin typeface="Calibri"/>
-              </a:rPr>
-              <a:t>Cree la clase Turno con id, nombre de la mascota, nombre del dueno y motivo de consulta, mas sus getters y su toString(); verifique imprimiendo un turno suelto en consola antes de meterlo en cualquier estructura.</a:t>
-            </a:r>
-          </a:p>
-        </p:txBody>
-      </p:sp>
-      <p:sp>
-        <p:nvSpPr>
-          <p:cNvPr id="9" name="Rounded Rectangle 8"/>
-          <p:cNvSpPr/>
-          <p:nvPr/>
-        </p:nvSpPr>
-        <p:spPr>
-          <a:xfrm>
-            <a:off x="457200" y="2276856"/>
-            <a:ext cx="11277295" cy="950976"/>
-          </a:xfrm>
-          <a:prstGeom prst="roundRect">
-            <a:avLst>
-              <a:gd name="adj" fmla="val 12000"/>
-            </a:avLst>
-          </a:prstGeom>
-          <a:solidFill>
-            <a:srgbClr val="E8F4FA"/>
-          </a:solidFill>
-          <a:ln>
-            <a:noFill/>
-          </a:ln>
-        </p:spPr>
-        <p:style>
-          <a:lnRef idx="1">
-            <a:schemeClr val="accent1"/>
-          </a:lnRef>
-          <a:fillRef idx="3">
-            <a:schemeClr val="accent1"/>
-          </a:fillRef>
-          <a:effectRef idx="2">
-            <a:schemeClr val="accent1"/>
-          </a:effectRef>
-          <a:fontRef idx="minor">
-            <a:schemeClr val="lt1"/>
-          </a:fontRef>
-        </p:style>
-        <p:txBody>
-          <a:bodyPr rtlCol="0" anchor="ctr"/>
-          <a:lstStyle/>
-          <a:p>
-            <a:pPr algn="ctr"/>
-          </a:p>
-        </p:txBody>
-      </p:sp>
-      <p:sp>
-        <p:nvSpPr>
-          <p:cNvPr id="10" name="Rounded Rectangle 9"/>
-          <p:cNvSpPr/>
-          <p:nvPr/>
-        </p:nvSpPr>
-        <p:spPr>
-          <a:xfrm>
-            <a:off x="594360" y="2532888"/>
-            <a:ext cx="438912" cy="438912"/>
-          </a:xfrm>
-          <a:prstGeom prst="roundRect">
-            <a:avLst>
-              <a:gd name="adj" fmla="val 12000"/>
-            </a:avLst>
-          </a:prstGeom>
-          <a:solidFill>
-            <a:srgbClr val="095292"/>
-          </a:solidFill>
-          <a:ln>
-            <a:noFill/>
-          </a:ln>
-        </p:spPr>
-        <p:style>
-          <a:lnRef idx="1">
-            <a:schemeClr val="accent1"/>
-          </a:lnRef>
-          <a:fillRef idx="3">
-            <a:schemeClr val="accent1"/>
-          </a:fillRef>
-          <a:effectRef idx="2">
-            <a:schemeClr val="accent1"/>
-          </a:effectRef>
-          <a:fontRef idx="minor">
-            <a:schemeClr val="lt1"/>
-          </a:fontRef>
-        </p:style>
-        <p:txBody>
-          <a:bodyPr rtlCol="0" anchor="ctr"/>
-          <a:lstStyle/>
-          <a:p>
-            <a:pPr algn="ctr"/>
-          </a:p>
-        </p:txBody>
-      </p:sp>
-      <p:sp>
-        <p:nvSpPr>
-          <p:cNvPr id="11" name="TextBox 10"/>
-          <p:cNvSpPr txBox="1"/>
-          <p:nvPr/>
-        </p:nvSpPr>
-        <p:spPr>
-          <a:xfrm>
-            <a:off x="594360" y="2532888"/>
-            <a:ext cx="438912" cy="438912"/>
-          </a:xfrm>
-          <a:prstGeom prst="rect">
-            <a:avLst/>
-          </a:prstGeom>
-          <a:noFill/>
-        </p:spPr>
-        <p:txBody>
-          <a:bodyPr wrap="square" anchor="ctr"/>
-          <a:lstStyle/>
-          <a:p>
-            <a:pPr algn="ctr"/>
-            <a:r>
-              <a:rPr sz="1600" b="1" i="0">
-                <a:solidFill>
-                  <a:srgbClr val="FFFFFF"/>
-                </a:solidFill>
-                <a:latin typeface="Calibri"/>
-              </a:rPr>
-              <a:t>2</a:t>
-            </a:r>
-          </a:p>
-        </p:txBody>
-      </p:sp>
-      <p:sp>
-        <p:nvSpPr>
-          <p:cNvPr id="12" name="TextBox 11"/>
-          <p:cNvSpPr txBox="1"/>
-          <p:nvPr/>
-        </p:nvSpPr>
-        <p:spPr>
-          <a:xfrm>
-            <a:off x="1188720" y="2368296"/>
-            <a:ext cx="10271455" cy="786384"/>
-          </a:xfrm>
-          <a:prstGeom prst="rect">
-            <a:avLst/>
-          </a:prstGeom>
-          <a:noFill/>
-        </p:spPr>
-        <p:txBody>
-          <a:bodyPr wrap="square" anchor="ctr"/>
-          <a:lstStyle/>
-          <a:p>
-            <a:r>
-              <a:rPr sz="1400" b="1" i="0">
-                <a:solidFill>
-                  <a:srgbClr val="095292"/>
-                </a:solidFill>
-                <a:latin typeface="Calibri"/>
-              </a:rPr>
-              <a:t>Cree la clase SalaDeEspera con el atributo private final Queue&lt;Turno&gt; cola = new LinkedList&lt;&gt;(); y los metodos registrarLlegada(Turno t) usando offer, siguienteEnPantalla() usando peek y atender() usando poll; verifique que despues de registrar cuatro llegadas y llamar dos veces a siguienteEnPantalla(), cantidad() sigue siendo 4.</a:t>
-            </a:r>
-          </a:p>
-        </p:txBody>
-      </p:sp>
-      <p:sp>
-        <p:nvSpPr>
-          <p:cNvPr id="13" name="Rounded Rectangle 12"/>
-          <p:cNvSpPr/>
-          <p:nvPr/>
-        </p:nvSpPr>
-        <p:spPr>
-          <a:xfrm>
-            <a:off x="457200" y="3319272"/>
-            <a:ext cx="11277295" cy="950976"/>
-          </a:xfrm>
-          <a:prstGeom prst="roundRect">
-            <a:avLst>
-              <a:gd name="adj" fmla="val 12000"/>
-            </a:avLst>
-          </a:prstGeom>
-          <a:solidFill>
-            <a:srgbClr val="F2F2F2"/>
-          </a:solidFill>
-          <a:ln>
-            <a:noFill/>
-          </a:ln>
-        </p:spPr>
-        <p:style>
-          <a:lnRef idx="1">
-            <a:schemeClr val="accent1"/>
-          </a:lnRef>
-          <a:fillRef idx="3">
-            <a:schemeClr val="accent1"/>
-          </a:fillRef>
-          <a:effectRef idx="2">
-            <a:schemeClr val="accent1"/>
-          </a:effectRef>
-          <a:fontRef idx="minor">
-            <a:schemeClr val="lt1"/>
-          </a:fontRef>
-        </p:style>
-        <p:txBody>
-          <a:bodyPr rtlCol="0" anchor="ctr"/>
-          <a:lstStyle/>
-          <a:p>
-            <a:pPr algn="ctr"/>
-          </a:p>
-        </p:txBody>
-      </p:sp>
-      <p:sp>
-        <p:nvSpPr>
-          <p:cNvPr id="14" name="Rounded Rectangle 13"/>
-          <p:cNvSpPr/>
-          <p:nvPr/>
-        </p:nvSpPr>
-        <p:spPr>
-          <a:xfrm>
-            <a:off x="594360" y="3575304"/>
-            <a:ext cx="438912" cy="438912"/>
-          </a:xfrm>
-          <a:prstGeom prst="roundRect">
-            <a:avLst>
-              <a:gd name="adj" fmla="val 12000"/>
-            </a:avLst>
-          </a:prstGeom>
-          <a:solidFill>
-            <a:srgbClr val="095292"/>
-          </a:solidFill>
-          <a:ln>
-            <a:noFill/>
-          </a:ln>
-        </p:spPr>
-        <p:style>
-          <a:lnRef idx="1">
-            <a:schemeClr val="accent1"/>
-          </a:lnRef>
-          <a:fillRef idx="3">
-            <a:schemeClr val="accent1"/>
-          </a:fillRef>
-          <a:effectRef idx="2">
-            <a:schemeClr val="accent1"/>
-          </a:effectRef>
-          <a:fontRef idx="minor">
-            <a:schemeClr val="lt1"/>
-          </a:fontRef>
-        </p:style>
-        <p:txBody>
-          <a:bodyPr rtlCol="0" anchor="ctr"/>
-          <a:lstStyle/>
-          <a:p>
-            <a:pPr algn="ctr"/>
-          </a:p>
-        </p:txBody>
-      </p:sp>
-      <p:sp>
-        <p:nvSpPr>
-          <p:cNvPr id="15" name="TextBox 14"/>
-          <p:cNvSpPr txBox="1"/>
-          <p:nvPr/>
-        </p:nvSpPr>
-        <p:spPr>
-          <a:xfrm>
-            <a:off x="594360" y="3575304"/>
-            <a:ext cx="438912" cy="438912"/>
-          </a:xfrm>
-          <a:prstGeom prst="rect">
-            <a:avLst/>
-          </a:prstGeom>
-          <a:noFill/>
-        </p:spPr>
-        <p:txBody>
-          <a:bodyPr wrap="square" anchor="ctr"/>
-          <a:lstStyle/>
-          <a:p>
-            <a:pPr algn="ctr"/>
-            <a:r>
-              <a:rPr sz="1600" b="1" i="0">
-                <a:solidFill>
-                  <a:srgbClr val="FFFFFF"/>
-                </a:solidFill>
-                <a:latin typeface="Calibri"/>
-              </a:rPr>
-              <a:t>3</a:t>
-            </a:r>
-          </a:p>
-        </p:txBody>
-      </p:sp>
-      <p:sp>
-        <p:nvSpPr>
-          <p:cNvPr id="16" name="TextBox 15"/>
-          <p:cNvSpPr txBox="1"/>
-          <p:nvPr/>
-        </p:nvSpPr>
-        <p:spPr>
-          <a:xfrm>
-            <a:off x="1188720" y="3410712"/>
-            <a:ext cx="10271455" cy="786384"/>
-          </a:xfrm>
-          <a:prstGeom prst="rect">
-            <a:avLst/>
-          </a:prstGeom>
-          <a:noFill/>
-        </p:spPr>
-        <p:txBody>
-          <a:bodyPr wrap="square" anchor="ctr"/>
-          <a:lstStyle/>
-          <a:p>
-            <a:r>
-              <a:rPr sz="1400" b="1" i="0">
-                <a:solidFill>
-                  <a:srgbClr val="095292"/>
-                </a:solidFill>
-                <a:latin typeface="Calibri"/>
-              </a:rPr>
-              <a:t>Haga que atender() valide la cola vacia con isEmpty() y devuelva un mensaje controlado en vez de un null suelto; verifique llamando a atender() cinco veces cuando solo hay cuatro turnos y confirmando que la quinta llamada imprime que la sala esta vacia y el programa no se cae.</a:t>
-            </a:r>
-          </a:p>
-        </p:txBody>
-      </p:sp>
-      <p:sp>
-        <p:nvSpPr>
-          <p:cNvPr id="17" name="Rounded Rectangle 16"/>
-          <p:cNvSpPr/>
-          <p:nvPr/>
-        </p:nvSpPr>
-        <p:spPr>
-          <a:xfrm>
-            <a:off x="457200" y="4361688"/>
-            <a:ext cx="11277295" cy="950976"/>
-          </a:xfrm>
-          <a:prstGeom prst="roundRect">
-            <a:avLst>
-              <a:gd name="adj" fmla="val 12000"/>
-            </a:avLst>
-          </a:prstGeom>
-          <a:solidFill>
-            <a:srgbClr val="E8F4FA"/>
-          </a:solidFill>
-          <a:ln>
-            <a:noFill/>
-          </a:ln>
-        </p:spPr>
-        <p:style>
-          <a:lnRef idx="1">
-            <a:schemeClr val="accent1"/>
-          </a:lnRef>
-          <a:fillRef idx="3">
-            <a:schemeClr val="accent1"/>
-          </a:fillRef>
-          <a:effectRef idx="2">
-            <a:schemeClr val="accent1"/>
-          </a:effectRef>
-          <a:fontRef idx="minor">
-            <a:schemeClr val="lt1"/>
-          </a:fontRef>
-        </p:style>
-        <p:txBody>
-          <a:bodyPr rtlCol="0" anchor="ctr"/>
-          <a:lstStyle/>
-          <a:p>
-            <a:pPr algn="ctr"/>
-          </a:p>
-        </p:txBody>
-      </p:sp>
-      <p:sp>
-        <p:nvSpPr>
-          <p:cNvPr id="18" name="Rounded Rectangle 17"/>
-          <p:cNvSpPr/>
-          <p:nvPr/>
-        </p:nvSpPr>
-        <p:spPr>
-          <a:xfrm>
-            <a:off x="594360" y="4617720"/>
-            <a:ext cx="438912" cy="438912"/>
-          </a:xfrm>
-          <a:prstGeom prst="roundRect">
-            <a:avLst>
-              <a:gd name="adj" fmla="val 12000"/>
-            </a:avLst>
-          </a:prstGeom>
-          <a:solidFill>
-            <a:srgbClr val="095292"/>
-          </a:solidFill>
-          <a:ln>
-            <a:noFill/>
-          </a:ln>
-        </p:spPr>
-        <p:style>
-          <a:lnRef idx="1">
-            <a:schemeClr val="accent1"/>
-          </a:lnRef>
-          <a:fillRef idx="3">
-            <a:schemeClr val="accent1"/>
-          </a:fillRef>
-          <a:effectRef idx="2">
-            <a:schemeClr val="accent1"/>
-          </a:effectRef>
-          <a:fontRef idx="minor">
-            <a:schemeClr val="lt1"/>
-          </a:fontRef>
-        </p:style>
-        <p:txBody>
-          <a:bodyPr rtlCol="0" anchor="ctr"/>
-          <a:lstStyle/>
-          <a:p>
-            <a:pPr algn="ctr"/>
-          </a:p>
-        </p:txBody>
-      </p:sp>
-      <p:sp>
-        <p:nvSpPr>
-          <p:cNvPr id="19" name="TextBox 18"/>
-          <p:cNvSpPr txBox="1"/>
-          <p:nvPr/>
-        </p:nvSpPr>
-        <p:spPr>
-          <a:xfrm>
-            <a:off x="594360" y="4617720"/>
-            <a:ext cx="438912" cy="438912"/>
-          </a:xfrm>
-          <a:prstGeom prst="rect">
-            <a:avLst/>
-          </a:prstGeom>
-          <a:noFill/>
-        </p:spPr>
-        <p:txBody>
-          <a:bodyPr wrap="square" anchor="ctr"/>
-          <a:lstStyle/>
-          <a:p>
-            <a:pPr algn="ctr"/>
-            <a:r>
-              <a:rPr sz="1600" b="1" i="0">
-                <a:solidFill>
-                  <a:srgbClr val="FFFFFF"/>
-                </a:solidFill>
-                <a:latin typeface="Calibri"/>
-              </a:rPr>
-              <a:t>4</a:t>
-            </a:r>
-          </a:p>
-        </p:txBody>
-      </p:sp>
-      <p:sp>
-        <p:nvSpPr>
-          <p:cNvPr id="20" name="TextBox 19"/>
-          <p:cNvSpPr txBox="1"/>
-          <p:nvPr/>
-        </p:nvSpPr>
-        <p:spPr>
-          <a:xfrm>
-            <a:off x="1188720" y="4453128"/>
-            <a:ext cx="10271455" cy="786384"/>
-          </a:xfrm>
-          <a:prstGeom prst="rect">
-            <a:avLst/>
-          </a:prstGeom>
-          <a:noFill/>
-        </p:spPr>
-        <p:txBody>
-          <a:bodyPr wrap="square" anchor="ctr"/>
-          <a:lstStyle/>
-          <a:p>
-            <a:r>
-              <a:rPr sz="1400" b="1" i="0">
-                <a:solidFill>
-                  <a:srgbClr val="095292"/>
-                </a:solidFill>
-                <a:latin typeface="Calibri"/>
-              </a:rPr>
-              <a:t>Cree la clase HistorialReciente con private final Deque&lt;String&gt; pila = new ArrayDeque&lt;&gt;(); y los metodos registrar(String), ultimaAtencion() con peek y deshacer() con pop protegido por isEmpty(); verifique que despues de atender a Firulais, Michi y Rocky, ultimaAtencion() muestra a Rocky y deshacer() lo retira dejando a Michi arriba.</a:t>
-            </a:r>
-          </a:p>
-        </p:txBody>
-      </p:sp>
-      <p:sp>
-        <p:nvSpPr>
-          <p:cNvPr id="21" name="Rounded Rectangle 20"/>
-          <p:cNvSpPr/>
-          <p:nvPr/>
-        </p:nvSpPr>
-        <p:spPr>
-          <a:xfrm>
-            <a:off x="457200" y="5404104"/>
-            <a:ext cx="11277295" cy="950976"/>
-          </a:xfrm>
-          <a:prstGeom prst="roundRect">
-            <a:avLst>
-              <a:gd name="adj" fmla="val 12000"/>
-            </a:avLst>
-          </a:prstGeom>
-          <a:solidFill>
-            <a:srgbClr val="F2F2F2"/>
-          </a:solidFill>
-          <a:ln>
-            <a:noFill/>
-          </a:ln>
-        </p:spPr>
-        <p:style>
-          <a:lnRef idx="1">
-            <a:schemeClr val="accent1"/>
-          </a:lnRef>
-          <a:fillRef idx="3">
-            <a:schemeClr val="accent1"/>
-          </a:fillRef>
-          <a:effectRef idx="2">
-            <a:schemeClr val="accent1"/>
-          </a:effectRef>
-          <a:fontRef idx="minor">
-            <a:schemeClr val="lt1"/>
-          </a:fontRef>
-        </p:style>
-        <p:txBody>
-          <a:bodyPr rtlCol="0" anchor="ctr"/>
-          <a:lstStyle/>
-          <a:p>
-            <a:pPr algn="ctr"/>
-          </a:p>
-        </p:txBody>
-      </p:sp>
-      <p:sp>
-        <p:nvSpPr>
-          <p:cNvPr id="22" name="Rounded Rectangle 21"/>
-          <p:cNvSpPr/>
-          <p:nvPr/>
-        </p:nvSpPr>
-        <p:spPr>
-          <a:xfrm>
-            <a:off x="594360" y="5660136"/>
-            <a:ext cx="438912" cy="438912"/>
-          </a:xfrm>
-          <a:prstGeom prst="roundRect">
-            <a:avLst>
-              <a:gd name="adj" fmla="val 12000"/>
-            </a:avLst>
-          </a:prstGeom>
-          <a:solidFill>
-            <a:srgbClr val="095292"/>
-          </a:solidFill>
-          <a:ln>
-            <a:noFill/>
-          </a:ln>
-        </p:spPr>
-        <p:style>
-          <a:lnRef idx="1">
-            <a:schemeClr val="accent1"/>
-          </a:lnRef>
-          <a:fillRef idx="3">
-            <a:schemeClr val="accent1"/>
-          </a:fillRef>
-          <a:effectRef idx="2">
-            <a:schemeClr val="accent1"/>
-          </a:effectRef>
-          <a:fontRef idx="minor">
-            <a:schemeClr val="lt1"/>
-          </a:fontRef>
-        </p:style>
-        <p:txBody>
-          <a:bodyPr rtlCol="0" anchor="ctr"/>
-          <a:lstStyle/>
-          <a:p>
-            <a:pPr algn="ctr"/>
-          </a:p>
-        </p:txBody>
-      </p:sp>
-      <p:sp>
-        <p:nvSpPr>
-          <p:cNvPr id="23" name="TextBox 22"/>
-          <p:cNvSpPr txBox="1"/>
-          <p:nvPr/>
-        </p:nvSpPr>
-        <p:spPr>
-          <a:xfrm>
-            <a:off x="594360" y="5660136"/>
-            <a:ext cx="438912" cy="438912"/>
-          </a:xfrm>
-          <a:prstGeom prst="rect">
-            <a:avLst/>
-          </a:prstGeom>
-          <a:noFill/>
-        </p:spPr>
-        <p:txBody>
-          <a:bodyPr wrap="square" anchor="ctr"/>
-          <a:lstStyle/>
-          <a:p>
-            <a:pPr algn="ctr"/>
-            <a:r>
-              <a:rPr sz="1600" b="1" i="0">
-                <a:solidFill>
-                  <a:srgbClr val="FFFFFF"/>
-                </a:solidFill>
-                <a:latin typeface="Calibri"/>
-              </a:rPr>
-              <a:t>5</a:t>
-            </a:r>
-          </a:p>
-        </p:txBody>
-      </p:sp>
-      <p:sp>
-        <p:nvSpPr>
-          <p:cNvPr id="24" name="TextBox 23"/>
-          <p:cNvSpPr txBox="1"/>
-          <p:nvPr/>
-        </p:nvSpPr>
-        <p:spPr>
-          <a:xfrm>
-            <a:off x="1188720" y="5495544"/>
-            <a:ext cx="10271455" cy="786384"/>
-          </a:xfrm>
-          <a:prstGeom prst="rect">
-            <a:avLst/>
-          </a:prstGeom>
-          <a:noFill/>
-        </p:spPr>
-        <p:txBody>
-          <a:bodyPr wrap="square" anchor="ctr"/>
-          <a:lstStyle/>
-          <a:p>
-            <a:r>
-              <a:rPr sz="1400" b="1" i="0">
-                <a:solidFill>
-                  <a:srgbClr val="095292"/>
-                </a:solidFill>
-                <a:latin typeface="Calibri"/>
-              </a:rPr>
-              <a:t>Conecte las dos estructuras en un main: cada vez que atender() saca un turno de la cola, registre automaticamente esa consulta en la pila; ejecute el flujo completo con las cuatro mascotas del escenario mas la urgencia de Canela agregada con addFirst sobre un Deque, capture la consola y suba el proyecto a la plataforma del curso.</a:t>
-            </a:r>
-          </a:p>
-        </p:txBody>
-      </p:sp>
-      <p:sp>
-        <p:nvSpPr>
-          <p:cNvPr id="25" name="TextBox 24"/>
-          <p:cNvSpPr txBox="1"/>
-          <p:nvPr/>
-        </p:nvSpPr>
-        <p:spPr>
-          <a:xfrm>
-            <a:off x="11185855" y="6473952"/>
-            <a:ext cx="640080" cy="274320"/>
-          </a:xfrm>
-          <a:prstGeom prst="rect">
-            <a:avLst/>
-          </a:prstGeom>
-          <a:noFill/>
-        </p:spPr>
-        <p:txBody>
-          <a:bodyPr wrap="square">
-            <a:spAutoFit/>
-          </a:bodyPr>
-          <a:lstStyle/>
-          <a:p>
-            <a:pPr algn="r"/>
-            <a:r>
-              <a:rPr sz="1100" b="0" i="0">
-                <a:solidFill>
-                  <a:srgbClr val="666666"/>
-                </a:solidFill>
-                <a:latin typeface="Calibri"/>
-              </a:rPr>
-              <a:t>31</a:t>
-            </a:r>
-          </a:p>
-        </p:txBody>
-      </p:sp>
-    </p:spTree>
-  </p:cSld>
-  <p:clrMapOvr>
-    <a:masterClrMapping/>
-  </p:clrMapOvr>
-</p:sld>
-</file>
-
-<file path=ppt/slides/slide32.xml><?xml version="1.0" encoding="utf-8"?>
-<p:sld xmlns:a="http://schemas.openxmlformats.org/drawingml/2006/main" xmlns:p="http://schemas.openxmlformats.org/presentationml/2006/main" xmlns:r="http://schemas.openxmlformats.org/officeDocument/2006/relationships">
-  <p:cSld>
-    <p:bg>
-      <p:bgPr>
-        <a:solidFill>
-          <a:srgbClr val="FFFFFF"/>
-        </a:solidFill>
-        <a:effectLst/>
-      </p:bgPr>
-    </p:bg>
-    <p:spTree>
-      <p:nvGrpSpPr>
-        <p:cNvPr id="1" name=""/>
-        <p:cNvGrpSpPr/>
-        <p:nvPr/>
-      </p:nvGrpSpPr>
-      <p:grpSpPr/>
-      <p:sp>
-        <p:nvSpPr>
-          <p:cNvPr id="2" name="Rectangle 1"/>
-          <p:cNvSpPr/>
-          <p:nvPr/>
-        </p:nvSpPr>
-        <p:spPr>
-          <a:xfrm>
-            <a:off x="0" y="0"/>
-            <a:ext cx="12191695" cy="960120"/>
-          </a:xfrm>
-          <a:prstGeom prst="rect">
-            <a:avLst/>
-          </a:prstGeom>
-          <a:solidFill>
-            <a:srgbClr val="095292"/>
-          </a:solidFill>
-          <a:ln>
-            <a:noFill/>
-          </a:ln>
-        </p:spPr>
-        <p:style>
-          <a:lnRef idx="1">
-            <a:schemeClr val="accent1"/>
-          </a:lnRef>
-          <a:fillRef idx="3">
-            <a:schemeClr val="accent1"/>
-          </a:fillRef>
-          <a:effectRef idx="2">
-            <a:schemeClr val="accent1"/>
-          </a:effectRef>
-          <a:fontRef idx="minor">
-            <a:schemeClr val="lt1"/>
-          </a:fontRef>
-        </p:style>
-        <p:txBody>
-          <a:bodyPr rtlCol="0" anchor="ctr"/>
-          <a:lstStyle/>
-          <a:p>
-            <a:pPr algn="ctr"/>
-          </a:p>
-        </p:txBody>
-      </p:sp>
-      <p:sp>
-        <p:nvSpPr>
-          <p:cNvPr id="3" name="Rectangle 2"/>
-          <p:cNvSpPr/>
-          <p:nvPr/>
-        </p:nvSpPr>
-        <p:spPr>
-          <a:xfrm>
-            <a:off x="0" y="960120"/>
-            <a:ext cx="12191695" cy="41148"/>
-          </a:xfrm>
-          <a:prstGeom prst="rect">
-            <a:avLst/>
-          </a:prstGeom>
-          <a:solidFill>
-            <a:srgbClr val="FFD000"/>
-          </a:solidFill>
-          <a:ln>
-            <a:noFill/>
-          </a:ln>
-        </p:spPr>
-        <p:style>
-          <a:lnRef idx="1">
-            <a:schemeClr val="accent1"/>
-          </a:lnRef>
-          <a:fillRef idx="3">
-            <a:schemeClr val="accent1"/>
-          </a:fillRef>
-          <a:effectRef idx="2">
-            <a:schemeClr val="accent1"/>
-          </a:effectRef>
-          <a:fontRef idx="minor">
-            <a:schemeClr val="lt1"/>
-          </a:fontRef>
-        </p:style>
-        <p:txBody>
-          <a:bodyPr rtlCol="0" anchor="ctr"/>
-          <a:lstStyle/>
-          <a:p>
-            <a:pPr algn="ctr"/>
-          </a:p>
-        </p:txBody>
-      </p:sp>
-      <p:sp>
-        <p:nvSpPr>
-          <p:cNvPr id="4" name="TextBox 3"/>
-          <p:cNvSpPr txBox="1"/>
-          <p:nvPr/>
-        </p:nvSpPr>
-        <p:spPr>
-          <a:xfrm>
-            <a:off x="457200" y="164592"/>
-            <a:ext cx="11277295" cy="502920"/>
-          </a:xfrm>
-          <a:prstGeom prst="rect">
-            <a:avLst/>
-          </a:prstGeom>
-          <a:noFill/>
-        </p:spPr>
-        <p:txBody>
-          <a:bodyPr wrap="square">
-            <a:spAutoFit/>
-          </a:bodyPr>
-          <a:lstStyle/>
-          <a:p>
-            <a:r>
-              <a:rPr sz="2600" b="1" i="0">
-                <a:solidFill>
-                  <a:srgbClr val="FFFFFF"/>
-                </a:solidFill>
-                <a:latin typeface="Calibri"/>
-              </a:rPr>
-              <a:t>Antes de entregar — autochequeo</a:t>
-            </a:r>
-          </a:p>
-        </p:txBody>
-      </p:sp>
-      <p:sp>
-        <p:nvSpPr>
-          <p:cNvPr id="5" name="Rounded Rectangle 4"/>
-          <p:cNvSpPr/>
-          <p:nvPr/>
-        </p:nvSpPr>
-        <p:spPr>
-          <a:xfrm>
-            <a:off x="457200" y="1261872"/>
-            <a:ext cx="11277295" cy="566928"/>
-          </a:xfrm>
-          <a:prstGeom prst="roundRect">
-            <a:avLst>
-              <a:gd name="adj" fmla="val 12000"/>
-            </a:avLst>
-          </a:prstGeom>
-          <a:solidFill>
-            <a:srgbClr val="F2F2F2"/>
-          </a:solidFill>
-          <a:ln>
-            <a:noFill/>
-          </a:ln>
-        </p:spPr>
-        <p:style>
-          <a:lnRef idx="1">
-            <a:schemeClr val="accent1"/>
-          </a:lnRef>
-          <a:fillRef idx="3">
-            <a:schemeClr val="accent1"/>
-          </a:fillRef>
-          <a:effectRef idx="2">
-            <a:schemeClr val="accent1"/>
-          </a:effectRef>
-          <a:fontRef idx="minor">
-            <a:schemeClr val="lt1"/>
-          </a:fontRef>
-        </p:style>
-        <p:txBody>
-          <a:bodyPr rtlCol="0" anchor="ctr"/>
-          <a:lstStyle/>
-          <a:p>
-            <a:pPr algn="ctr"/>
-          </a:p>
-        </p:txBody>
-      </p:sp>
-      <p:sp>
-        <p:nvSpPr>
-          <p:cNvPr id="6" name="Rectangle 5"/>
-          <p:cNvSpPr/>
-          <p:nvPr/>
-        </p:nvSpPr>
-        <p:spPr>
-          <a:xfrm>
-            <a:off x="640080" y="1408175"/>
-            <a:ext cx="274320" cy="274320"/>
-          </a:xfrm>
-          <a:prstGeom prst="rect">
-            <a:avLst/>
-          </a:prstGeom>
-          <a:solidFill>
-            <a:srgbClr val="FFFFFF"/>
-          </a:solidFill>
-          <a:ln>
-            <a:solidFill>
-              <a:srgbClr val="333333"/>
-            </a:solidFill>
-          </a:ln>
-        </p:spPr>
-        <p:style>
-          <a:lnRef idx="1">
-            <a:schemeClr val="accent1"/>
-          </a:lnRef>
-          <a:fillRef idx="3">
-            <a:schemeClr val="accent1"/>
-          </a:fillRef>
-          <a:effectRef idx="2">
-            <a:schemeClr val="accent1"/>
-          </a:effectRef>
-          <a:fontRef idx="minor">
-            <a:schemeClr val="lt1"/>
-          </a:fontRef>
-        </p:style>
-        <p:txBody>
-          <a:bodyPr rtlCol="0" anchor="ctr"/>
-          <a:lstStyle/>
-          <a:p>
-            <a:pPr algn="ctr"/>
-          </a:p>
-        </p:txBody>
-      </p:sp>
-      <p:sp>
-        <p:nvSpPr>
-          <p:cNvPr id="7" name="Rectangle 6"/>
-          <p:cNvSpPr/>
-          <p:nvPr/>
-        </p:nvSpPr>
-        <p:spPr>
-          <a:xfrm>
-            <a:off x="640080" y="1408175"/>
-            <a:ext cx="73152" cy="274320"/>
-          </a:xfrm>
-          <a:prstGeom prst="rect">
-            <a:avLst/>
-          </a:prstGeom>
-          <a:solidFill>
-            <a:srgbClr val="269CCB"/>
-          </a:solidFill>
-          <a:ln>
-            <a:noFill/>
-          </a:ln>
-        </p:spPr>
-        <p:style>
-          <a:lnRef idx="1">
-            <a:schemeClr val="accent1"/>
-          </a:lnRef>
-          <a:fillRef idx="3">
-            <a:schemeClr val="accent1"/>
-          </a:fillRef>
-          <a:effectRef idx="2">
-            <a:schemeClr val="accent1"/>
-          </a:effectRef>
-          <a:fontRef idx="minor">
-            <a:schemeClr val="lt1"/>
-          </a:fontRef>
-        </p:style>
-        <p:txBody>
-          <a:bodyPr rtlCol="0" anchor="ctr"/>
-          <a:lstStyle/>
-          <a:p>
-            <a:pPr algn="ctr"/>
-          </a:p>
-        </p:txBody>
-      </p:sp>
-      <p:sp>
-        <p:nvSpPr>
-          <p:cNvPr id="8" name="TextBox 7"/>
-          <p:cNvSpPr txBox="1"/>
-          <p:nvPr/>
-        </p:nvSpPr>
-        <p:spPr>
-          <a:xfrm>
-            <a:off x="1097280" y="1353312"/>
-            <a:ext cx="10362895" cy="402336"/>
-          </a:xfrm>
-          <a:prstGeom prst="rect">
-            <a:avLst/>
-          </a:prstGeom>
-          <a:noFill/>
-        </p:spPr>
-        <p:txBody>
-          <a:bodyPr wrap="square" anchor="ctr"/>
-          <a:lstStyle/>
-          <a:p>
-            <a:r>
-              <a:rPr sz="1500" b="0" i="0">
-                <a:solidFill>
-                  <a:srgbClr val="333333"/>
-                </a:solidFill>
-                <a:latin typeface="Calibri"/>
-              </a:rPr>
-              <a:t>Si su ciclo while nunca termina y la consola se llena con el mismo nombre, cual de los dos metodos esta usando dentro del ciclo: el que mira o el que saca?</a:t>
-            </a:r>
-          </a:p>
-        </p:txBody>
-      </p:sp>
-      <p:sp>
-        <p:nvSpPr>
-          <p:cNvPr id="9" name="Rounded Rectangle 8"/>
-          <p:cNvSpPr/>
-          <p:nvPr/>
-        </p:nvSpPr>
-        <p:spPr>
-          <a:xfrm>
-            <a:off x="457200" y="1938528"/>
-            <a:ext cx="11277295" cy="566928"/>
-          </a:xfrm>
-          <a:prstGeom prst="roundRect">
-            <a:avLst>
-              <a:gd name="adj" fmla="val 12000"/>
-            </a:avLst>
-          </a:prstGeom>
-          <a:solidFill>
-            <a:srgbClr val="F2F2F2"/>
-          </a:solidFill>
-          <a:ln>
-            <a:noFill/>
-          </a:ln>
-        </p:spPr>
-        <p:style>
-          <a:lnRef idx="1">
-            <a:schemeClr val="accent1"/>
-          </a:lnRef>
-          <a:fillRef idx="3">
-            <a:schemeClr val="accent1"/>
-          </a:fillRef>
-          <a:effectRef idx="2">
-            <a:schemeClr val="accent1"/>
-          </a:effectRef>
-          <a:fontRef idx="minor">
-            <a:schemeClr val="lt1"/>
-          </a:fontRef>
-        </p:style>
-        <p:txBody>
-          <a:bodyPr rtlCol="0" anchor="ctr"/>
-          <a:lstStyle/>
-          <a:p>
-            <a:pPr algn="ctr"/>
-          </a:p>
-        </p:txBody>
-      </p:sp>
-      <p:sp>
-        <p:nvSpPr>
-          <p:cNvPr id="10" name="Rectangle 9"/>
-          <p:cNvSpPr/>
-          <p:nvPr/>
-        </p:nvSpPr>
-        <p:spPr>
-          <a:xfrm>
-            <a:off x="640080" y="2084832"/>
-            <a:ext cx="274320" cy="274320"/>
-          </a:xfrm>
-          <a:prstGeom prst="rect">
-            <a:avLst/>
-          </a:prstGeom>
-          <a:solidFill>
-            <a:srgbClr val="FFFFFF"/>
-          </a:solidFill>
-          <a:ln>
-            <a:solidFill>
-              <a:srgbClr val="333333"/>
-            </a:solidFill>
-          </a:ln>
-        </p:spPr>
-        <p:style>
-          <a:lnRef idx="1">
-            <a:schemeClr val="accent1"/>
-          </a:lnRef>
-          <a:fillRef idx="3">
-            <a:schemeClr val="accent1"/>
-          </a:fillRef>
-          <a:effectRef idx="2">
-            <a:schemeClr val="accent1"/>
-          </a:effectRef>
-          <a:fontRef idx="minor">
-            <a:schemeClr val="lt1"/>
-          </a:fontRef>
-        </p:style>
-        <p:txBody>
-          <a:bodyPr rtlCol="0" anchor="ctr"/>
-          <a:lstStyle/>
-          <a:p>
-            <a:pPr algn="ctr"/>
-          </a:p>
-        </p:txBody>
-      </p:sp>
-      <p:sp>
-        <p:nvSpPr>
-          <p:cNvPr id="11" name="Rectangle 10"/>
-          <p:cNvSpPr/>
-          <p:nvPr/>
-        </p:nvSpPr>
-        <p:spPr>
-          <a:xfrm>
-            <a:off x="640080" y="2084832"/>
-            <a:ext cx="73152" cy="274320"/>
-          </a:xfrm>
-          <a:prstGeom prst="rect">
-            <a:avLst/>
-          </a:prstGeom>
-          <a:solidFill>
-            <a:srgbClr val="269CCB"/>
-          </a:solidFill>
-          <a:ln>
-            <a:noFill/>
-          </a:ln>
-        </p:spPr>
-        <p:style>
-          <a:lnRef idx="1">
-            <a:schemeClr val="accent1"/>
-          </a:lnRef>
-          <a:fillRef idx="3">
-            <a:schemeClr val="accent1"/>
-          </a:fillRef>
-          <a:effectRef idx="2">
-            <a:schemeClr val="accent1"/>
-          </a:effectRef>
-          <a:fontRef idx="minor">
-            <a:schemeClr val="lt1"/>
-          </a:fontRef>
-        </p:style>
-        <p:txBody>
-          <a:bodyPr rtlCol="0" anchor="ctr"/>
-          <a:lstStyle/>
-          <a:p>
-            <a:pPr algn="ctr"/>
-          </a:p>
-        </p:txBody>
-      </p:sp>
-      <p:sp>
-        <p:nvSpPr>
-          <p:cNvPr id="12" name="TextBox 11"/>
-          <p:cNvSpPr txBox="1"/>
-          <p:nvPr/>
-        </p:nvSpPr>
-        <p:spPr>
-          <a:xfrm>
-            <a:off x="1097280" y="2029968"/>
-            <a:ext cx="10362895" cy="402336"/>
-          </a:xfrm>
-          <a:prstGeom prst="rect">
-            <a:avLst/>
-          </a:prstGeom>
-          <a:noFill/>
-        </p:spPr>
-        <p:txBody>
-          <a:bodyPr wrap="square" anchor="ctr"/>
-          <a:lstStyle/>
-          <a:p>
-            <a:r>
-              <a:rPr sz="1500" b="0" i="0">
-                <a:solidFill>
-                  <a:srgbClr val="333333"/>
-                </a:solidFill>
-                <a:latin typeface="Calibri"/>
-              </a:rPr>
-              <a:t>Si necesita sacar a una mascota que esta en la mitad de la fila, la estructura que eligio sigue siendo la adecuada, o el requisito le esta pidiendo otra cosa?</a:t>
-            </a:r>
-          </a:p>
-        </p:txBody>
-      </p:sp>
-      <p:sp>
-        <p:nvSpPr>
-          <p:cNvPr id="13" name="Rounded Rectangle 12"/>
-          <p:cNvSpPr/>
-          <p:nvPr/>
-        </p:nvSpPr>
-        <p:spPr>
-          <a:xfrm>
-            <a:off x="457200" y="2615184"/>
-            <a:ext cx="11277295" cy="566928"/>
-          </a:xfrm>
-          <a:prstGeom prst="roundRect">
-            <a:avLst>
-              <a:gd name="adj" fmla="val 12000"/>
-            </a:avLst>
-          </a:prstGeom>
-          <a:solidFill>
-            <a:srgbClr val="F2F2F2"/>
-          </a:solidFill>
-          <a:ln>
-            <a:noFill/>
-          </a:ln>
-        </p:spPr>
-        <p:style>
-          <a:lnRef idx="1">
-            <a:schemeClr val="accent1"/>
-          </a:lnRef>
-          <a:fillRef idx="3">
-            <a:schemeClr val="accent1"/>
-          </a:fillRef>
-          <a:effectRef idx="2">
-            <a:schemeClr val="accent1"/>
-          </a:effectRef>
-          <a:fontRef idx="minor">
-            <a:schemeClr val="lt1"/>
-          </a:fontRef>
-        </p:style>
-        <p:txBody>
-          <a:bodyPr rtlCol="0" anchor="ctr"/>
-          <a:lstStyle/>
-          <a:p>
-            <a:pPr algn="ctr"/>
-          </a:p>
-        </p:txBody>
-      </p:sp>
-      <p:sp>
-        <p:nvSpPr>
-          <p:cNvPr id="14" name="Rectangle 13"/>
-          <p:cNvSpPr/>
-          <p:nvPr/>
-        </p:nvSpPr>
-        <p:spPr>
-          <a:xfrm>
-            <a:off x="640080" y="2761488"/>
-            <a:ext cx="274320" cy="274320"/>
-          </a:xfrm>
-          <a:prstGeom prst="rect">
-            <a:avLst/>
-          </a:prstGeom>
-          <a:solidFill>
-            <a:srgbClr val="FFFFFF"/>
-          </a:solidFill>
-          <a:ln>
-            <a:solidFill>
-              <a:srgbClr val="333333"/>
-            </a:solidFill>
-          </a:ln>
-        </p:spPr>
-        <p:style>
-          <a:lnRef idx="1">
-            <a:schemeClr val="accent1"/>
-          </a:lnRef>
-          <a:fillRef idx="3">
-            <a:schemeClr val="accent1"/>
-          </a:fillRef>
-          <a:effectRef idx="2">
-            <a:schemeClr val="accent1"/>
-          </a:effectRef>
-          <a:fontRef idx="minor">
-            <a:schemeClr val="lt1"/>
-          </a:fontRef>
-        </p:style>
-        <p:txBody>
-          <a:bodyPr rtlCol="0" anchor="ctr"/>
-          <a:lstStyle/>
-          <a:p>
-            <a:pPr algn="ctr"/>
-          </a:p>
-        </p:txBody>
-      </p:sp>
-      <p:sp>
-        <p:nvSpPr>
-          <p:cNvPr id="15" name="Rectangle 14"/>
-          <p:cNvSpPr/>
-          <p:nvPr/>
-        </p:nvSpPr>
-        <p:spPr>
-          <a:xfrm>
-            <a:off x="640080" y="2761488"/>
-            <a:ext cx="73152" cy="274320"/>
-          </a:xfrm>
-          <a:prstGeom prst="rect">
-            <a:avLst/>
-          </a:prstGeom>
-          <a:solidFill>
-            <a:srgbClr val="269CCB"/>
-          </a:solidFill>
-          <a:ln>
-            <a:noFill/>
-          </a:ln>
-        </p:spPr>
-        <p:style>
-          <a:lnRef idx="1">
-            <a:schemeClr val="accent1"/>
-          </a:lnRef>
-          <a:fillRef idx="3">
-            <a:schemeClr val="accent1"/>
-          </a:fillRef>
-          <a:effectRef idx="2">
-            <a:schemeClr val="accent1"/>
-          </a:effectRef>
-          <a:fontRef idx="minor">
-            <a:schemeClr val="lt1"/>
-          </a:fontRef>
-        </p:style>
-        <p:txBody>
-          <a:bodyPr rtlCol="0" anchor="ctr"/>
-          <a:lstStyle/>
-          <a:p>
-            <a:pPr algn="ctr"/>
-          </a:p>
-        </p:txBody>
-      </p:sp>
-      <p:sp>
-        <p:nvSpPr>
-          <p:cNvPr id="16" name="TextBox 15"/>
-          <p:cNvSpPr txBox="1"/>
-          <p:nvPr/>
-        </p:nvSpPr>
-        <p:spPr>
-          <a:xfrm>
-            <a:off x="1097280" y="2706624"/>
-            <a:ext cx="10362895" cy="402336"/>
-          </a:xfrm>
-          <a:prstGeom prst="rect">
-            <a:avLst/>
-          </a:prstGeom>
-          <a:noFill/>
-        </p:spPr>
-        <p:txBody>
-          <a:bodyPr wrap="square" anchor="ctr"/>
-          <a:lstStyle/>
-          <a:p>
-            <a:r>
-              <a:rPr sz="1500" b="0" i="0">
-                <a:solidFill>
-                  <a:srgbClr val="333333"/>
-                </a:solidFill>
-                <a:latin typeface="Calibri"/>
-              </a:rPr>
-              <a:t>Antes de llamar a pop(), que pregunta deberia hacerle a la pila para que el programa no lance NoSuchElementException?</a:t>
-            </a:r>
-          </a:p>
-        </p:txBody>
-      </p:sp>
-      <p:sp>
-        <p:nvSpPr>
-          <p:cNvPr id="17" name="TextBox 16"/>
-          <p:cNvSpPr txBox="1"/>
-          <p:nvPr/>
-        </p:nvSpPr>
-        <p:spPr>
-          <a:xfrm>
-            <a:off x="11185855" y="6473952"/>
-            <a:ext cx="640080" cy="274320"/>
-          </a:xfrm>
-          <a:prstGeom prst="rect">
-            <a:avLst/>
-          </a:prstGeom>
-          <a:noFill/>
-        </p:spPr>
-        <p:txBody>
-          <a:bodyPr wrap="square">
-            <a:spAutoFit/>
-          </a:bodyPr>
-          <a:lstStyle/>
-          <a:p>
-            <a:pPr algn="r"/>
-            <a:r>
-              <a:rPr sz="1100" b="0" i="0">
-                <a:solidFill>
-                  <a:srgbClr val="666666"/>
-                </a:solidFill>
-                <a:latin typeface="Calibri"/>
-              </a:rPr>
-              <a:t>32</a:t>
-            </a:r>
-          </a:p>
-        </p:txBody>
-      </p:sp>
-    </p:spTree>
-  </p:cSld>
-  <p:clrMapOvr>
-    <a:masterClrMapping/>
-  </p:clrMapOvr>
-</p:sld>
-</file>
-
-<file path=ppt/slides/slide33.xml><?xml version="1.0" encoding="utf-8"?>
-<p:sld xmlns:a="http://schemas.openxmlformats.org/drawingml/2006/main" xmlns:p="http://schemas.openxmlformats.org/presentationml/2006/main" xmlns:r="http://schemas.openxmlformats.org/officeDocument/2006/relationships">
-  <p:cSld>
-    <p:bg>
-      <p:bgPr>
-        <a:solidFill>
-          <a:srgbClr val="FFFFFF"/>
-        </a:solidFill>
-        <a:effectLst/>
-      </p:bgPr>
-    </p:bg>
-    <p:spTree>
-      <p:nvGrpSpPr>
-        <p:cNvPr id="1" name=""/>
-        <p:cNvGrpSpPr/>
-        <p:nvPr/>
-      </p:nvGrpSpPr>
-      <p:grpSpPr/>
-      <p:sp>
-        <p:nvSpPr>
-          <p:cNvPr id="2" name="Rectangle 1"/>
-          <p:cNvSpPr/>
-          <p:nvPr/>
-        </p:nvSpPr>
-        <p:spPr>
-          <a:xfrm>
-            <a:off x="0" y="0"/>
-            <a:ext cx="12191695" cy="960120"/>
-          </a:xfrm>
-          <a:prstGeom prst="rect">
-            <a:avLst/>
-          </a:prstGeom>
-          <a:solidFill>
-            <a:srgbClr val="095292"/>
-          </a:solidFill>
-          <a:ln>
-            <a:noFill/>
-          </a:ln>
-        </p:spPr>
-        <p:style>
-          <a:lnRef idx="1">
-            <a:schemeClr val="accent1"/>
-          </a:lnRef>
-          <a:fillRef idx="3">
-            <a:schemeClr val="accent1"/>
-          </a:fillRef>
-          <a:effectRef idx="2">
-            <a:schemeClr val="accent1"/>
-          </a:effectRef>
-          <a:fontRef idx="minor">
-            <a:schemeClr val="lt1"/>
-          </a:fontRef>
-        </p:style>
-        <p:txBody>
-          <a:bodyPr rtlCol="0" anchor="ctr"/>
-          <a:lstStyle/>
-          <a:p>
-            <a:pPr algn="ctr"/>
-          </a:p>
-        </p:txBody>
-      </p:sp>
-      <p:sp>
-        <p:nvSpPr>
-          <p:cNvPr id="3" name="Rectangle 2"/>
-          <p:cNvSpPr/>
-          <p:nvPr/>
-        </p:nvSpPr>
-        <p:spPr>
-          <a:xfrm>
-            <a:off x="0" y="960120"/>
-            <a:ext cx="12191695" cy="41148"/>
-          </a:xfrm>
-          <a:prstGeom prst="rect">
-            <a:avLst/>
-          </a:prstGeom>
-          <a:solidFill>
-            <a:srgbClr val="FFD000"/>
-          </a:solidFill>
-          <a:ln>
-            <a:noFill/>
-          </a:ln>
-        </p:spPr>
-        <p:style>
-          <a:lnRef idx="1">
-            <a:schemeClr val="accent1"/>
-          </a:lnRef>
-          <a:fillRef idx="3">
-            <a:schemeClr val="accent1"/>
-          </a:fillRef>
-          <a:effectRef idx="2">
-            <a:schemeClr val="accent1"/>
-          </a:effectRef>
-          <a:fontRef idx="minor">
-            <a:schemeClr val="lt1"/>
-          </a:fontRef>
-        </p:style>
-        <p:txBody>
-          <a:bodyPr rtlCol="0" anchor="ctr"/>
-          <a:lstStyle/>
-          <a:p>
-            <a:pPr algn="ctr"/>
-          </a:p>
-        </p:txBody>
-      </p:sp>
-      <p:sp>
-        <p:nvSpPr>
-          <p:cNvPr id="4" name="TextBox 3"/>
-          <p:cNvSpPr txBox="1"/>
-          <p:nvPr/>
-        </p:nvSpPr>
-        <p:spPr>
-          <a:xfrm>
-            <a:off x="457200" y="164592"/>
-            <a:ext cx="11277295" cy="502920"/>
-          </a:xfrm>
-          <a:prstGeom prst="rect">
-            <a:avLst/>
-          </a:prstGeom>
-          <a:noFill/>
-        </p:spPr>
-        <p:txBody>
-          <a:bodyPr wrap="square">
-            <a:spAutoFit/>
-          </a:bodyPr>
-          <a:lstStyle/>
-          <a:p>
-            <a:r>
-              <a:rPr sz="2600" b="1" i="0">
-                <a:solidFill>
-                  <a:srgbClr val="FFFFFF"/>
-                </a:solidFill>
-                <a:latin typeface="Calibri"/>
-              </a:rPr>
-              <a:t>Criterios de exito / entregable</a:t>
-            </a:r>
-          </a:p>
-        </p:txBody>
-      </p:sp>
-      <p:sp>
-        <p:nvSpPr>
-          <p:cNvPr id="5" name="TextBox 4"/>
-          <p:cNvSpPr txBox="1"/>
-          <p:nvPr/>
-        </p:nvSpPr>
-        <p:spPr>
-          <a:xfrm>
-            <a:off x="457200" y="1170432"/>
-            <a:ext cx="11277295" cy="5230368"/>
-          </a:xfrm>
-          <a:prstGeom prst="rect">
-            <a:avLst/>
-          </a:prstGeom>
-          <a:noFill/>
-        </p:spPr>
-        <p:txBody>
-          <a:bodyPr wrap="square">
-            <a:spAutoFit/>
-          </a:bodyPr>
-          <a:lstStyle/>
-          <a:p>
-            <a:pPr>
-              <a:spcAft>
-                <a:spcPts val="800"/>
-              </a:spcAft>
-            </a:pPr>
-            <a:r>
-              <a:rPr sz="2000" b="0" i="0">
-                <a:solidFill>
-                  <a:srgbClr val="333333"/>
-                </a:solidFill>
-                <a:latin typeface="Calibri"/>
-              </a:rPr>
-              <a:t>–   </a:t>
-            </a:r>
-            <a:r>
-              <a:rPr sz="2000" b="1" i="0">
-                <a:solidFill>
-                  <a:srgbClr val="333333"/>
-                </a:solidFill>
-                <a:latin typeface="Calibri"/>
-              </a:rPr>
-              <a:t>Entregable:</a:t>
-            </a:r>
-            <a:r>
-              <a:rPr sz="2000" b="0" i="0">
-                <a:solidFill>
-                  <a:srgbClr val="333333"/>
-                </a:solidFill>
-                <a:latin typeface="Calibri"/>
-              </a:rPr>
-              <a:t> Clases SalaDeEspera (Queue) e HistorialReciente (Deque como pila) integradas al proyecto VetCare, con una demo que atiende en orden de llegada las cuatro mascotas del escenario y deshace la ultima atencion registrada; comprimido y subido a la plataforma del curso.</a:t>
-            </a:r>
-          </a:p>
-          <a:p>
-            <a:pPr>
-              <a:spcAft>
-                <a:spcPts val="800"/>
-              </a:spcAft>
-            </a:pPr>
-            <a:r>
-              <a:rPr sz="2000" b="0" i="0">
-                <a:solidFill>
-                  <a:srgbClr val="333333"/>
-                </a:solidFill>
-                <a:latin typeface="Calibri"/>
-              </a:rPr>
-              <a:t>–   </a:t>
-            </a:r>
-            <a:r>
-              <a:rPr sz="2000" b="1" i="0">
-                <a:solidFill>
-                  <a:srgbClr val="333333"/>
-                </a:solidFill>
-                <a:latin typeface="Calibri"/>
-              </a:rPr>
-              <a:t>Exito:</a:t>
-            </a:r>
-            <a:r>
-              <a:rPr sz="2000" b="0" i="0">
-                <a:solidFill>
-                  <a:srgbClr val="333333"/>
-                </a:solidFill>
-                <a:latin typeface="Calibri"/>
-              </a:rPr>
-              <a:t> Las mascotas se atienden exactamente en el orden en que llegaron, verificable en la salida de consola.</a:t>
-            </a:r>
-          </a:p>
-          <a:p>
-            <a:pPr>
-              <a:spcAft>
-                <a:spcPts val="800"/>
-              </a:spcAft>
-            </a:pPr>
-            <a:r>
-              <a:rPr sz="2000" b="0" i="0">
-                <a:solidFill>
-                  <a:srgbClr val="333333"/>
-                </a:solidFill>
-                <a:latin typeface="Calibri"/>
-              </a:rPr>
-              <a:t>–   </a:t>
-            </a:r>
-            <a:r>
-              <a:rPr sz="2000" b="1" i="0">
-                <a:solidFill>
-                  <a:srgbClr val="333333"/>
-                </a:solidFill>
-                <a:latin typeface="Calibri"/>
-              </a:rPr>
-              <a:t>Exito:</a:t>
-            </a:r>
-            <a:r>
-              <a:rPr sz="2000" b="0" i="0">
-                <a:solidFill>
-                  <a:srgbClr val="333333"/>
-                </a:solidFill>
-                <a:latin typeface="Calibri"/>
-              </a:rPr>
-              <a:t> peek/siguienteEnPantalla no altera el tamano de la cola, mientras que poll/atender lo reduce en uno por llamada.</a:t>
-            </a:r>
-          </a:p>
-          <a:p>
-            <a:pPr>
-              <a:spcAft>
-                <a:spcPts val="800"/>
-              </a:spcAft>
-            </a:pPr>
-            <a:r>
-              <a:rPr sz="2000" b="0" i="0">
-                <a:solidFill>
-                  <a:srgbClr val="333333"/>
-                </a:solidFill>
-                <a:latin typeface="Calibri"/>
-              </a:rPr>
-              <a:t>–   </a:t>
-            </a:r>
-            <a:r>
-              <a:rPr sz="2000" b="1" i="0">
-                <a:solidFill>
-                  <a:srgbClr val="333333"/>
-                </a:solidFill>
-                <a:latin typeface="Calibri"/>
-              </a:rPr>
-              <a:t>Exito:</a:t>
-            </a:r>
-            <a:r>
-              <a:rPr sz="2000" b="0" i="0">
-                <a:solidFill>
-                  <a:srgbClr val="333333"/>
-                </a:solidFill>
-                <a:latin typeface="Calibri"/>
-              </a:rPr>
-              <a:t> Atender con la sala vacia o deshacer con la pila vacia produce un mensaje controlado y nunca una excepcion sin capturar.</a:t>
-            </a:r>
-          </a:p>
-          <a:p>
-            <a:pPr>
-              <a:spcAft>
-                <a:spcPts val="800"/>
-              </a:spcAft>
-            </a:pPr>
-            <a:r>
-              <a:rPr sz="2000" b="0" i="0">
-                <a:solidFill>
-                  <a:srgbClr val="333333"/>
-                </a:solidFill>
-                <a:latin typeface="Calibri"/>
-              </a:rPr>
-              <a:t>–   </a:t>
-            </a:r>
-            <a:r>
-              <a:rPr sz="2000" b="1" i="0">
-                <a:solidFill>
-                  <a:srgbClr val="333333"/>
-                </a:solidFill>
-                <a:latin typeface="Calibri"/>
-              </a:rPr>
-              <a:t>Exito:</a:t>
-            </a:r>
-            <a:r>
-              <a:rPr sz="2000" b="0" i="0">
-                <a:solidFill>
-                  <a:srgbClr val="333333"/>
-                </a:solidFill>
-                <a:latin typeface="Calibri"/>
-              </a:rPr>
-              <a:t> Cada consulta atendida queda registrada automaticamente en la pila y deshacer retira siempre la mas reciente.</a:t>
-            </a:r>
-          </a:p>
-          <a:p>
-            <a:pPr>
-              <a:spcAft>
-                <a:spcPts val="800"/>
-              </a:spcAft>
-            </a:pPr>
-            <a:r>
-              <a:rPr sz="2000" b="0" i="0">
-                <a:solidFill>
-                  <a:srgbClr val="333333"/>
-                </a:solidFill>
-                <a:latin typeface="Calibri"/>
-              </a:rPr>
-              <a:t>–   </a:t>
-            </a:r>
-            <a:r>
-              <a:rPr sz="2000" b="1" i="0">
-                <a:solidFill>
-                  <a:srgbClr val="333333"/>
-                </a:solidFill>
-                <a:latin typeface="Calibri"/>
-              </a:rPr>
-              <a:t>Entrega en la plataforma del curso</a:t>
-            </a:r>
-            <a:r>
-              <a:rPr sz="2000" b="0" i="0">
-                <a:solidFill>
-                  <a:srgbClr val="333333"/>
-                </a:solidFill>
-                <a:latin typeface="Calibri"/>
-              </a:rPr>
-              <a:t> — en la fecha que indique el docente.</a:t>
-            </a:r>
-          </a:p>
-        </p:txBody>
-      </p:sp>
-      <p:sp>
-        <p:nvSpPr>
-          <p:cNvPr id="6" name="TextBox 5"/>
-          <p:cNvSpPr txBox="1"/>
-          <p:nvPr/>
-        </p:nvSpPr>
-        <p:spPr>
-          <a:xfrm>
-            <a:off x="11185855" y="6473952"/>
-            <a:ext cx="640080" cy="274320"/>
-          </a:xfrm>
-          <a:prstGeom prst="rect">
-            <a:avLst/>
-          </a:prstGeom>
-          <a:noFill/>
-        </p:spPr>
-        <p:txBody>
-          <a:bodyPr wrap="square">
-            <a:spAutoFit/>
-          </a:bodyPr>
-          <a:lstStyle/>
-          <a:p>
-            <a:pPr algn="r"/>
-            <a:r>
-              <a:rPr sz="1100" b="0" i="0">
-                <a:solidFill>
-                  <a:srgbClr val="666666"/>
-                </a:solidFill>
-                <a:latin typeface="Calibri"/>
-              </a:rPr>
-              <a:t>33</a:t>
-            </a:r>
-          </a:p>
-        </p:txBody>
-      </p:sp>
-    </p:spTree>
-  </p:cSld>
-  <p:clrMapOvr>
-    <a:masterClrMapping/>
-  </p:clrMapOvr>
-</p:sld>
-</file>
-
-<file path=ppt/slides/slide34.xml><?xml version="1.0" encoding="utf-8"?>
-<p:sld xmlns:a="http://schemas.openxmlformats.org/drawingml/2006/main" xmlns:p="http://schemas.openxmlformats.org/presentationml/2006/main" xmlns:r="http://schemas.openxmlformats.org/officeDocument/2006/relationships">
-  <p:cSld>
-    <p:bg>
-      <p:bgPr>
-        <a:solidFill>
-          <a:srgbClr val="FFFFFF"/>
-        </a:solidFill>
-        <a:effectLst/>
-      </p:bgPr>
-    </p:bg>
-    <p:spTree>
-      <p:nvGrpSpPr>
-        <p:cNvPr id="1" name=""/>
-        <p:cNvGrpSpPr/>
-        <p:nvPr/>
-      </p:nvGrpSpPr>
-      <p:grpSpPr/>
-      <p:sp>
-        <p:nvSpPr>
-          <p:cNvPr id="2" name="Rectangle 1"/>
-          <p:cNvSpPr/>
-          <p:nvPr/>
-        </p:nvSpPr>
-        <p:spPr>
-          <a:xfrm>
-            <a:off x="0" y="0"/>
-            <a:ext cx="12191695" cy="960120"/>
-          </a:xfrm>
-          <a:prstGeom prst="rect">
-            <a:avLst/>
-          </a:prstGeom>
-          <a:solidFill>
-            <a:srgbClr val="095292"/>
-          </a:solidFill>
-          <a:ln>
-            <a:noFill/>
-          </a:ln>
-        </p:spPr>
-        <p:style>
-          <a:lnRef idx="1">
-            <a:schemeClr val="accent1"/>
-          </a:lnRef>
-          <a:fillRef idx="3">
-            <a:schemeClr val="accent1"/>
-          </a:fillRef>
-          <a:effectRef idx="2">
-            <a:schemeClr val="accent1"/>
-          </a:effectRef>
-          <a:fontRef idx="minor">
-            <a:schemeClr val="lt1"/>
-          </a:fontRef>
-        </p:style>
-        <p:txBody>
-          <a:bodyPr rtlCol="0" anchor="ctr"/>
-          <a:lstStyle/>
-          <a:p>
-            <a:pPr algn="ctr"/>
-          </a:p>
-        </p:txBody>
-      </p:sp>
-      <p:sp>
-        <p:nvSpPr>
-          <p:cNvPr id="3" name="Rectangle 2"/>
-          <p:cNvSpPr/>
-          <p:nvPr/>
-        </p:nvSpPr>
-        <p:spPr>
-          <a:xfrm>
-            <a:off x="0" y="960120"/>
-            <a:ext cx="12191695" cy="41148"/>
-          </a:xfrm>
-          <a:prstGeom prst="rect">
-            <a:avLst/>
-          </a:prstGeom>
-          <a:solidFill>
-            <a:srgbClr val="FFD000"/>
-          </a:solidFill>
-          <a:ln>
-            <a:noFill/>
-          </a:ln>
-        </p:spPr>
-        <p:style>
-          <a:lnRef idx="1">
-            <a:schemeClr val="accent1"/>
-          </a:lnRef>
-          <a:fillRef idx="3">
-            <a:schemeClr val="accent1"/>
-          </a:fillRef>
-          <a:effectRef idx="2">
-            <a:schemeClr val="accent1"/>
-          </a:effectRef>
-          <a:fontRef idx="minor">
-            <a:schemeClr val="lt1"/>
-          </a:fontRef>
-        </p:style>
-        <p:txBody>
-          <a:bodyPr rtlCol="0" anchor="ctr"/>
-          <a:lstStyle/>
-          <a:p>
-            <a:pPr algn="ctr"/>
-          </a:p>
-        </p:txBody>
-      </p:sp>
-      <p:sp>
-        <p:nvSpPr>
-          <p:cNvPr id="4" name="TextBox 3"/>
-          <p:cNvSpPr txBox="1"/>
-          <p:nvPr/>
-        </p:nvSpPr>
-        <p:spPr>
-          <a:xfrm>
-            <a:off x="457200" y="164592"/>
-            <a:ext cx="11277295" cy="502920"/>
-          </a:xfrm>
-          <a:prstGeom prst="rect">
-            <a:avLst/>
-          </a:prstGeom>
-          <a:noFill/>
-        </p:spPr>
-        <p:txBody>
-          <a:bodyPr wrap="square">
-            <a:spAutoFit/>
-          </a:bodyPr>
-          <a:lstStyle/>
-          <a:p>
-            <a:r>
-              <a:rPr sz="2600" b="1" i="0">
-                <a:solidFill>
-                  <a:srgbClr val="FFFFFF"/>
-                </a:solidFill>
-                <a:latin typeface="Calibri"/>
-              </a:rPr>
-              <a:t>Para el PI esta semana</a:t>
-            </a:r>
-          </a:p>
-        </p:txBody>
-      </p:sp>
-      <p:sp>
-        <p:nvSpPr>
-          <p:cNvPr id="5" name="Rounded Rectangle 4"/>
-          <p:cNvSpPr/>
-          <p:nvPr/>
-        </p:nvSpPr>
-        <p:spPr>
-          <a:xfrm>
-            <a:off x="457200" y="1261872"/>
-            <a:ext cx="11277295" cy="1051560"/>
-          </a:xfrm>
-          <a:prstGeom prst="roundRect">
-            <a:avLst>
-              <a:gd name="adj" fmla="val 12000"/>
-            </a:avLst>
-          </a:prstGeom>
-          <a:solidFill>
-            <a:srgbClr val="E8F4FA"/>
-          </a:solidFill>
-          <a:ln>
-            <a:noFill/>
-          </a:ln>
-        </p:spPr>
-        <p:style>
-          <a:lnRef idx="1">
-            <a:schemeClr val="accent1"/>
-          </a:lnRef>
-          <a:fillRef idx="3">
-            <a:schemeClr val="accent1"/>
-          </a:fillRef>
-          <a:effectRef idx="2">
-            <a:schemeClr val="accent1"/>
-          </a:effectRef>
-          <a:fontRef idx="minor">
-            <a:schemeClr val="lt1"/>
-          </a:fontRef>
-        </p:style>
-        <p:txBody>
-          <a:bodyPr rtlCol="0" anchor="ctr"/>
-          <a:lstStyle/>
-          <a:p>
-            <a:pPr algn="ctr"/>
-          </a:p>
-        </p:txBody>
-      </p:sp>
-      <p:sp>
-        <p:nvSpPr>
-          <p:cNvPr id="6" name="Rectangle 5"/>
-          <p:cNvSpPr/>
-          <p:nvPr/>
-        </p:nvSpPr>
-        <p:spPr>
-          <a:xfrm>
-            <a:off x="457200" y="1261872"/>
-            <a:ext cx="128016" cy="1051560"/>
-          </a:xfrm>
-          <a:prstGeom prst="rect">
-            <a:avLst/>
-          </a:prstGeom>
-          <a:solidFill>
-            <a:srgbClr val="269CCB"/>
-          </a:solidFill>
-          <a:ln>
-            <a:noFill/>
-          </a:ln>
-        </p:spPr>
-        <p:style>
-          <a:lnRef idx="1">
-            <a:schemeClr val="accent1"/>
-          </a:lnRef>
-          <a:fillRef idx="3">
-            <a:schemeClr val="accent1"/>
-          </a:fillRef>
-          <a:effectRef idx="2">
-            <a:schemeClr val="accent1"/>
-          </a:effectRef>
-          <a:fontRef idx="minor">
-            <a:schemeClr val="lt1"/>
-          </a:fontRef>
-        </p:style>
-        <p:txBody>
-          <a:bodyPr rtlCol="0" anchor="ctr"/>
-          <a:lstStyle/>
-          <a:p>
-            <a:pPr algn="ctr"/>
-          </a:p>
-        </p:txBody>
-      </p:sp>
-      <p:sp>
-        <p:nvSpPr>
-          <p:cNvPr id="7" name="TextBox 6"/>
-          <p:cNvSpPr txBox="1"/>
-          <p:nvPr/>
-        </p:nvSpPr>
-        <p:spPr>
-          <a:xfrm>
-            <a:off x="777240" y="1399031"/>
-            <a:ext cx="10774375" cy="822959"/>
-          </a:xfrm>
-          <a:prstGeom prst="rect">
-            <a:avLst/>
-          </a:prstGeom>
-          <a:noFill/>
-        </p:spPr>
-        <p:txBody>
-          <a:bodyPr wrap="square">
-            <a:spAutoFit/>
-          </a:bodyPr>
-          <a:lstStyle/>
-          <a:p>
-            <a:r>
-              <a:rPr sz="1200" b="1" i="0">
-                <a:solidFill>
-                  <a:srgbClr val="269CCB"/>
-                </a:solidFill>
-                <a:latin typeface="Calibri"/>
-              </a:rPr>
-              <a:t>Info</a:t>
-            </a:r>
-          </a:p>
-          <a:p>
-            <a:pPr>
-              <a:spcBef>
-                <a:spcPts val="400"/>
-              </a:spcBef>
-            </a:pPr>
-            <a:r>
-              <a:rPr sz="1400" b="0" i="0">
-                <a:solidFill>
-                  <a:srgbClr val="333333"/>
-                </a:solidFill>
-                <a:latin typeface="Calibri"/>
-              </a:rPr>
-              <a:t>Hito: VetCare queda con la sala de espera modelada como cola FIFO y el historial de atenciones recientes como pila LIFO, ambas conectadas al registro de mascotas de la clase anterior.</a:t>
-            </a:r>
-          </a:p>
-        </p:txBody>
-      </p:sp>
-      <p:sp>
-        <p:nvSpPr>
-          <p:cNvPr id="8" name="Rounded Rectangle 7"/>
-          <p:cNvSpPr/>
-          <p:nvPr/>
-        </p:nvSpPr>
-        <p:spPr>
-          <a:xfrm>
-            <a:off x="457200" y="2478024"/>
-            <a:ext cx="11277295" cy="1051560"/>
-          </a:xfrm>
-          <a:prstGeom prst="roundRect">
-            <a:avLst>
-              <a:gd name="adj" fmla="val 12000"/>
-            </a:avLst>
-          </a:prstGeom>
-          <a:solidFill>
-            <a:srgbClr val="FFF8E1"/>
-          </a:solidFill>
-          <a:ln>
-            <a:noFill/>
-          </a:ln>
-        </p:spPr>
-        <p:style>
-          <a:lnRef idx="1">
-            <a:schemeClr val="accent1"/>
-          </a:lnRef>
-          <a:fillRef idx="3">
-            <a:schemeClr val="accent1"/>
-          </a:fillRef>
-          <a:effectRef idx="2">
-            <a:schemeClr val="accent1"/>
-          </a:effectRef>
-          <a:fontRef idx="minor">
-            <a:schemeClr val="lt1"/>
-          </a:fontRef>
-        </p:style>
-        <p:txBody>
-          <a:bodyPr rtlCol="0" anchor="ctr"/>
-          <a:lstStyle/>
-          <a:p>
-            <a:pPr algn="ctr"/>
-          </a:p>
-        </p:txBody>
-      </p:sp>
-      <p:sp>
-        <p:nvSpPr>
-          <p:cNvPr id="9" name="Rectangle 8"/>
-          <p:cNvSpPr/>
-          <p:nvPr/>
-        </p:nvSpPr>
-        <p:spPr>
-          <a:xfrm>
-            <a:off x="457200" y="2478024"/>
-            <a:ext cx="128016" cy="1051560"/>
-          </a:xfrm>
-          <a:prstGeom prst="rect">
-            <a:avLst/>
-          </a:prstGeom>
-          <a:solidFill>
-            <a:srgbClr val="FFD000"/>
-          </a:solidFill>
-          <a:ln>
-            <a:noFill/>
-          </a:ln>
-        </p:spPr>
-        <p:style>
-          <a:lnRef idx="1">
-            <a:schemeClr val="accent1"/>
-          </a:lnRef>
-          <a:fillRef idx="3">
-            <a:schemeClr val="accent1"/>
-          </a:fillRef>
-          <a:effectRef idx="2">
-            <a:schemeClr val="accent1"/>
-          </a:effectRef>
-          <a:fontRef idx="minor">
-            <a:schemeClr val="lt1"/>
-          </a:fontRef>
-        </p:style>
-        <p:txBody>
-          <a:bodyPr rtlCol="0" anchor="ctr"/>
-          <a:lstStyle/>
-          <a:p>
-            <a:pPr algn="ctr"/>
-          </a:p>
-        </p:txBody>
-      </p:sp>
-      <p:sp>
-        <p:nvSpPr>
-          <p:cNvPr id="10" name="TextBox 9"/>
-          <p:cNvSpPr txBox="1"/>
-          <p:nvPr/>
-        </p:nvSpPr>
-        <p:spPr>
-          <a:xfrm>
-            <a:off x="777240" y="2615184"/>
-            <a:ext cx="10774375" cy="822959"/>
-          </a:xfrm>
-          <a:prstGeom prst="rect">
-            <a:avLst/>
-          </a:prstGeom>
-          <a:noFill/>
-        </p:spPr>
-        <p:txBody>
-          <a:bodyPr wrap="square">
-            <a:spAutoFit/>
-          </a:bodyPr>
-          <a:lstStyle/>
-          <a:p>
-            <a:r>
-              <a:rPr sz="1200" b="1" i="0">
-                <a:solidFill>
-                  <a:srgbClr val="FFD000"/>
-                </a:solidFill>
-                <a:latin typeface="Calibri"/>
-              </a:rPr>
-              <a:t>Aclaración</a:t>
-            </a:r>
-          </a:p>
-          <a:p>
-            <a:pPr>
-              <a:spcBef>
-                <a:spcPts val="400"/>
-              </a:spcBef>
-            </a:pPr>
-            <a:r>
-              <a:rPr sz="1400" b="0" i="0">
-                <a:solidFill>
-                  <a:srgbClr val="333333"/>
-                </a:solidFill>
-                <a:latin typeface="Calibri"/>
-              </a:rPr>
-              <a:t>Enunciado completo: Clases/Proyecto Integrador/ (VetCare).</a:t>
-            </a:r>
-          </a:p>
-        </p:txBody>
-      </p:sp>
-      <p:sp>
-        <p:nvSpPr>
-          <p:cNvPr id="11" name="Rounded Rectangle 10"/>
-          <p:cNvSpPr/>
-          <p:nvPr/>
-        </p:nvSpPr>
-        <p:spPr>
-          <a:xfrm>
-            <a:off x="457200" y="3694176"/>
-            <a:ext cx="11277295" cy="1051560"/>
-          </a:xfrm>
-          <a:prstGeom prst="roundRect">
-            <a:avLst>
-              <a:gd name="adj" fmla="val 12000"/>
-            </a:avLst>
-          </a:prstGeom>
-          <a:solidFill>
-            <a:srgbClr val="FBE4E4"/>
-          </a:solidFill>
-          <a:ln>
-            <a:noFill/>
-          </a:ln>
-        </p:spPr>
-        <p:style>
-          <a:lnRef idx="1">
-            <a:schemeClr val="accent1"/>
-          </a:lnRef>
-          <a:fillRef idx="3">
-            <a:schemeClr val="accent1"/>
-          </a:fillRef>
-          <a:effectRef idx="2">
-            <a:schemeClr val="accent1"/>
-          </a:effectRef>
-          <a:fontRef idx="minor">
-            <a:schemeClr val="lt1"/>
-          </a:fontRef>
-        </p:style>
-        <p:txBody>
-          <a:bodyPr rtlCol="0" anchor="ctr"/>
-          <a:lstStyle/>
-          <a:p>
-            <a:pPr algn="ctr"/>
-          </a:p>
-        </p:txBody>
-      </p:sp>
-      <p:sp>
-        <p:nvSpPr>
-          <p:cNvPr id="12" name="Rectangle 11"/>
-          <p:cNvSpPr/>
-          <p:nvPr/>
-        </p:nvSpPr>
-        <p:spPr>
-          <a:xfrm>
-            <a:off x="457200" y="3694176"/>
-            <a:ext cx="128016" cy="1051560"/>
-          </a:xfrm>
-          <a:prstGeom prst="rect">
-            <a:avLst/>
-          </a:prstGeom>
-          <a:solidFill>
-            <a:srgbClr val="A02030"/>
-          </a:solidFill>
-          <a:ln>
-            <a:noFill/>
-          </a:ln>
-        </p:spPr>
-        <p:style>
-          <a:lnRef idx="1">
-            <a:schemeClr val="accent1"/>
-          </a:lnRef>
-          <a:fillRef idx="3">
-            <a:schemeClr val="accent1"/>
-          </a:fillRef>
-          <a:effectRef idx="2">
-            <a:schemeClr val="accent1"/>
-          </a:effectRef>
-          <a:fontRef idx="minor">
-            <a:schemeClr val="lt1"/>
-          </a:fontRef>
-        </p:style>
-        <p:txBody>
-          <a:bodyPr rtlCol="0" anchor="ctr"/>
-          <a:lstStyle/>
-          <a:p>
-            <a:pPr algn="ctr"/>
-          </a:p>
-        </p:txBody>
-      </p:sp>
-      <p:sp>
-        <p:nvSpPr>
-          <p:cNvPr id="13" name="TextBox 12"/>
-          <p:cNvSpPr txBox="1"/>
-          <p:nvPr/>
-        </p:nvSpPr>
-        <p:spPr>
-          <a:xfrm>
-            <a:off x="777240" y="3831336"/>
-            <a:ext cx="10774375" cy="822959"/>
-          </a:xfrm>
-          <a:prstGeom prst="rect">
-            <a:avLst/>
-          </a:prstGeom>
-          <a:noFill/>
-        </p:spPr>
-        <p:txBody>
-          <a:bodyPr wrap="square">
-            <a:spAutoFit/>
-          </a:bodyPr>
-          <a:lstStyle/>
-          <a:p>
-            <a:r>
-              <a:rPr sz="1200" b="1" i="0">
-                <a:solidFill>
-                  <a:srgbClr val="A02030"/>
-                </a:solidFill>
-                <a:latin typeface="Calibri"/>
-              </a:rPr>
-              <a:t>Atención</a:t>
-            </a:r>
-          </a:p>
-          <a:p>
-            <a:pPr>
-              <a:spcBef>
-                <a:spcPts val="400"/>
-              </a:spcBef>
-            </a:pPr>
-            <a:r>
-              <a:rPr sz="1400" b="0" i="0">
-                <a:solidFill>
-                  <a:srgbClr val="333333"/>
-                </a:solidFill>
-                <a:latin typeface="Calibri"/>
-              </a:rPr>
-              <a:t>Entrega del taller, si el docente lo asigna · en la fecha que indique el docente.</a:t>
-            </a:r>
-          </a:p>
-        </p:txBody>
-      </p:sp>
-      <p:sp>
-        <p:nvSpPr>
-          <p:cNvPr id="14" name="TextBox 13"/>
-          <p:cNvSpPr txBox="1"/>
-          <p:nvPr/>
-        </p:nvSpPr>
-        <p:spPr>
-          <a:xfrm>
-            <a:off x="11185855" y="6473952"/>
-            <a:ext cx="640080" cy="274320"/>
-          </a:xfrm>
-          <a:prstGeom prst="rect">
-            <a:avLst/>
-          </a:prstGeom>
-          <a:noFill/>
-        </p:spPr>
-        <p:txBody>
-          <a:bodyPr wrap="square">
-            <a:spAutoFit/>
-          </a:bodyPr>
-          <a:lstStyle/>
-          <a:p>
-            <a:pPr algn="r"/>
-            <a:r>
-              <a:rPr sz="1100" b="0" i="0">
-                <a:solidFill>
-                  <a:srgbClr val="666666"/>
-                </a:solidFill>
-                <a:latin typeface="Calibri"/>
-              </a:rPr>
-              <a:t>34</a:t>
-            </a:r>
-          </a:p>
-        </p:txBody>
-      </p:sp>
-    </p:spTree>
-  </p:cSld>
-  <p:clrMapOvr>
-    <a:masterClrMapping/>
-  </p:clrMapOvr>
-</p:sld>
-</file>
-
-<file path=ppt/slides/slide35.xml><?xml version="1.0" encoding="utf-8"?>
-<p:sld xmlns:a="http://schemas.openxmlformats.org/drawingml/2006/main" xmlns:p="http://schemas.openxmlformats.org/presentationml/2006/main" xmlns:r="http://schemas.openxmlformats.org/officeDocument/2006/relationships">
-  <p:cSld>
-    <p:bg>
-      <p:bgPr>
-        <a:solidFill>
-          <a:srgbClr val="FFFFFF"/>
-        </a:solidFill>
-        <a:effectLst/>
-      </p:bgPr>
-    </p:bg>
-    <p:spTree>
-      <p:nvGrpSpPr>
-        <p:cNvPr id="1" name=""/>
-        <p:cNvGrpSpPr/>
-        <p:nvPr/>
-      </p:nvGrpSpPr>
-      <p:grpSpPr/>
-      <p:sp>
-        <p:nvSpPr>
-          <p:cNvPr id="2" name="Rectangle 1"/>
-          <p:cNvSpPr/>
-          <p:nvPr/>
-        </p:nvSpPr>
-        <p:spPr>
-          <a:xfrm>
-            <a:off x="0" y="0"/>
-            <a:ext cx="12191695" cy="164592"/>
-          </a:xfrm>
-          <a:prstGeom prst="rect">
-            <a:avLst/>
-          </a:prstGeom>
-          <a:solidFill>
-            <a:srgbClr val="269CCB"/>
-          </a:solidFill>
-          <a:ln>
-            <a:noFill/>
-          </a:ln>
-        </p:spPr>
-        <p:style>
-          <a:lnRef idx="1">
-            <a:schemeClr val="accent1"/>
-          </a:lnRef>
-          <a:fillRef idx="3">
-            <a:schemeClr val="accent1"/>
-          </a:fillRef>
-          <a:effectRef idx="2">
-            <a:schemeClr val="accent1"/>
-          </a:effectRef>
-          <a:fontRef idx="minor">
-            <a:schemeClr val="lt1"/>
-          </a:fontRef>
-        </p:style>
-        <p:txBody>
-          <a:bodyPr rtlCol="0" anchor="ctr"/>
-          <a:lstStyle/>
-          <a:p>
-            <a:pPr algn="ctr"/>
-          </a:p>
-        </p:txBody>
-      </p:sp>
-      <p:pic>
-        <p:nvPicPr>
-          <p:cNvPr id="3" name="Picture 2" descr="logo_uniajc_color.png"/>
-          <p:cNvPicPr>
-            <a:picLocks noChangeAspect="1"/>
-          </p:cNvPicPr>
-          <p:nvPr/>
-        </p:nvPicPr>
-        <p:blipFill>
-          <a:blip r:embed="rId2"/>
-          <a:stretch>
-            <a:fillRect/>
-          </a:stretch>
-        </p:blipFill>
-        <p:spPr>
-          <a:xfrm>
-            <a:off x="10271455" y="5998464"/>
-            <a:ext cx="1463040" cy="643233"/>
-          </a:xfrm>
-          <a:prstGeom prst="rect">
-            <a:avLst/>
-          </a:prstGeom>
-        </p:spPr>
-      </p:pic>
-      <p:sp>
-        <p:nvSpPr>
-          <p:cNvPr id="4" name="TextBox 3"/>
-          <p:cNvSpPr txBox="1"/>
-          <p:nvPr/>
-        </p:nvSpPr>
-        <p:spPr>
-          <a:xfrm>
-            <a:off x="457200" y="1737360"/>
-            <a:ext cx="11277295" cy="1097280"/>
-          </a:xfrm>
-          <a:prstGeom prst="rect">
-            <a:avLst/>
-          </a:prstGeom>
-          <a:noFill/>
-        </p:spPr>
-        <p:txBody>
-          <a:bodyPr wrap="square" anchor="ctr"/>
-          <a:lstStyle/>
-          <a:p>
-            <a:pPr algn="ctr"/>
-            <a:r>
-              <a:rPr sz="3400" b="1" i="0">
-                <a:solidFill>
-                  <a:srgbClr val="095292"/>
-                </a:solidFill>
-                <a:latin typeface="Calibri"/>
-              </a:rPr>
-              <a:t>Clase 3 · VetCare avanza</a:t>
-            </a:r>
-          </a:p>
-        </p:txBody>
-      </p:sp>
-      <p:sp>
-        <p:nvSpPr>
-          <p:cNvPr id="5" name="TextBox 4"/>
-          <p:cNvSpPr txBox="1"/>
-          <p:nvPr/>
-        </p:nvSpPr>
-        <p:spPr>
-          <a:xfrm>
-            <a:off x="457200" y="3017520"/>
-            <a:ext cx="11277295" cy="1645920"/>
-          </a:xfrm>
-          <a:prstGeom prst="rect">
-            <a:avLst/>
-          </a:prstGeom>
-          <a:noFill/>
-        </p:spPr>
-        <p:txBody>
-          <a:bodyPr wrap="square">
-            <a:spAutoFit/>
-          </a:bodyPr>
-          <a:lstStyle/>
-          <a:p>
-            <a:pPr algn="ctr">
-              <a:spcAft>
-                <a:spcPts val="600"/>
-              </a:spcAft>
-            </a:pPr>
-            <a:r>
-              <a:rPr sz="1600" b="0" i="0">
-                <a:solidFill>
-                  <a:srgbClr val="333333"/>
-                </a:solidFill>
-                <a:latin typeface="Calibri"/>
-              </a:rPr>
-              <a:t>VetCare queda con la sala de espera modelada como cola FIFO y el historial de atenciones recientes como pila LIFO, ambas conectadas al registro de mascotas de la clase anterior.</a:t>
-            </a:r>
-          </a:p>
-          <a:p>
-            <a:pPr algn="ctr">
-              <a:spcAft>
-                <a:spcPts val="600"/>
-              </a:spcAft>
-            </a:pPr>
-            <a:r>
-              <a:rPr sz="1600" b="0" i="0">
-                <a:solidFill>
-                  <a:srgbClr val="333333"/>
-                </a:solidFill>
-                <a:latin typeface="Calibri"/>
-              </a:rPr>
-              <a:t>Entregable: Clases SalaDeEspera (Queue) e HistorialReciente (Deque como pila) integradas al proyecto VetCare, con una demo que atiende en orden de llegada las cuatro mascotas del escenario y deshace la ultima atencion registrada; comprimido y subido a la plataforma del curso.</a:t>
-            </a:r>
-          </a:p>
-          <a:p>
-            <a:pPr algn="ctr">
-              <a:spcAft>
-                <a:spcPts val="600"/>
-              </a:spcAft>
-            </a:pPr>
-            <a:r>
-              <a:rPr sz="1600" b="0" i="0">
-                <a:solidFill>
-                  <a:srgbClr val="333333"/>
-                </a:solidFill>
-                <a:latin typeface="Calibri"/>
-              </a:rPr>
-              <a:t>Siguiente clase: continuamos el hilo del PI</a:t>
-            </a:r>
-          </a:p>
-        </p:txBody>
-      </p:sp>
-      <p:sp>
-        <p:nvSpPr>
-          <p:cNvPr id="6" name="TextBox 5"/>
-          <p:cNvSpPr txBox="1"/>
-          <p:nvPr/>
-        </p:nvSpPr>
-        <p:spPr>
-          <a:xfrm>
-            <a:off x="457200" y="4754880"/>
-            <a:ext cx="11277295" cy="640080"/>
-          </a:xfrm>
-          <a:prstGeom prst="rect">
-            <a:avLst/>
-          </a:prstGeom>
-          <a:noFill/>
-        </p:spPr>
-        <p:txBody>
-          <a:bodyPr wrap="square">
-            <a:spAutoFit/>
-          </a:bodyPr>
-          <a:lstStyle/>
-          <a:p>
-            <a:pPr algn="ctr"/>
-            <a:r>
-              <a:rPr sz="2000" b="1" i="0">
-                <a:solidFill>
-                  <a:srgbClr val="269CCB"/>
-                </a:solidFill>
-                <a:latin typeface="Calibri"/>
-              </a:rPr>
-              <a:t>Teoria al servicio del proyecto</a:t>
             </a:r>
           </a:p>
         </p:txBody>
@@ -18542,4 +16079,324 @@
   </a:objectDefaults>
   <a:extraClrSchemeLst/>
 </a:theme>
+</file>
+
+<file path=ppt/theme/theme2.xml><?xml version="1.0" encoding="utf-8"?>
+<a:theme xmlns:a="http://schemas.openxmlformats.org/drawingml/2006/main" name="Office Theme">
+  <a:themeElements>
+    <a:clrScheme name="Office">
+      <a:dk1>
+        <a:sysClr val="windowText" lastClr="000000"/>
+      </a:dk1>
+      <a:lt1>
+        <a:sysClr val="window" lastClr="FFFFFF"/>
+      </a:lt1>
+      <a:dk2>
+        <a:srgbClr val="1F497D"/>
+      </a:dk2>
+      <a:lt2>
+        <a:srgbClr val="EEECE1"/>
+      </a:lt2>
+      <a:accent1>
+        <a:srgbClr val="4F81BD"/>
+      </a:accent1>
+      <a:accent2>
+        <a:srgbClr val="C0504D"/>
+      </a:accent2>
+      <a:accent3>
+        <a:srgbClr val="9BBB59"/>
+      </a:accent3>
+      <a:accent4>
+        <a:srgbClr val="8064A2"/>
+      </a:accent4>
+      <a:accent5>
+        <a:srgbClr val="4BACC6"/>
+      </a:accent5>
+      <a:accent6>
+        <a:srgbClr val="F79646"/>
+      </a:accent6>
+      <a:hlink>
+        <a:srgbClr val="0000FF"/>
+      </a:hlink>
+      <a:folHlink>
+        <a:srgbClr val="800080"/>
+      </a:folHlink>
+    </a:clrScheme>
+    <a:fontScheme name="Office">
+      <a:majorFont>
+        <a:latin typeface="Calibri"/>
+        <a:ea typeface=""/>
+        <a:cs typeface=""/>
+        <a:font script="Jpan" typeface="ＭＳ Ｐゴシック"/>
+        <a:font script="Hang" typeface="맑은 고딕"/>
+        <a:font script="Hans" typeface="宋体"/>
+        <a:font script="Hant" typeface="新細明體"/>
+        <a:font script="Arab" typeface="Times New Roman"/>
+        <a:font script="Hebr" typeface="Times New Roman"/>
+        <a:font script="Thai" typeface="Angsana New"/>
+        <a:font script="Ethi" typeface="Nyala"/>
+        <a:font script="Beng" typeface="Vrinda"/>
+        <a:font script="Gujr" typeface="Shruti"/>
+        <a:font script="Khmr" typeface="MoolBoran"/>
+        <a:font script="Knda" typeface="Tunga"/>
+        <a:font script="Guru" typeface="Raavi"/>
+        <a:font script="Cans" typeface="Euphemia"/>
+        <a:font script="Cher" typeface="Plantagenet Cherokee"/>
+        <a:font script="Yiii" typeface="Microsoft Yi Baiti"/>
+        <a:font script="Tibt" typeface="Microsoft Himalaya"/>
+        <a:font script="Thaa" typeface="MV Boli"/>
+        <a:font script="Deva" typeface="Mangal"/>
+        <a:font script="Telu" typeface="Gautami"/>
+        <a:font script="Taml" typeface="Latha"/>
+        <a:font script="Syrc" typeface="Estrangelo Edessa"/>
+        <a:font script="Orya" typeface="Kalinga"/>
+        <a:font script="Mlym" typeface="Kartika"/>
+        <a:font script="Laoo" typeface="DokChampa"/>
+        <a:font script="Sinh" typeface="Iskoola Pota"/>
+        <a:font script="Mong" typeface="Mongolian Baiti"/>
+        <a:font script="Viet" typeface="Times New Roman"/>
+        <a:font script="Uigh" typeface="Microsoft Uighur"/>
+        <a:font script="Geor" typeface="Sylfaen"/>
+      </a:majorFont>
+      <a:minorFont>
+        <a:latin typeface="Calibri"/>
+        <a:ea typeface=""/>
+        <a:cs typeface=""/>
+        <a:font script="Jpan" typeface="ＭＳ Ｐゴシック"/>
+        <a:font script="Hang" typeface="맑은 고딕"/>
+        <a:font script="Hans" typeface="宋体"/>
+        <a:font script="Hant" typeface="新細明體"/>
+        <a:font script="Arab" typeface="Arial"/>
+        <a:font script="Hebr" typeface="Arial"/>
+        <a:font script="Thai" typeface="Cordia New"/>
+        <a:font script="Ethi" typeface="Nyala"/>
+        <a:font script="Beng" typeface="Vrinda"/>
+        <a:font script="Gujr" typeface="Shruti"/>
+        <a:font script="Khmr" typeface="DaunPenh"/>
+        <a:font script="Knda" typeface="Tunga"/>
+        <a:font script="Guru" typeface="Raavi"/>
+        <a:font script="Cans" typeface="Euphemia"/>
+        <a:font script="Cher" typeface="Plantagenet Cherokee"/>
+        <a:font script="Yiii" typeface="Microsoft Yi Baiti"/>
+        <a:font script="Tibt" typeface="Microsoft Himalaya"/>
+        <a:font script="Thaa" typeface="MV Boli"/>
+        <a:font script="Deva" typeface="Mangal"/>
+        <a:font script="Telu" typeface="Gautami"/>
+        <a:font script="Taml" typeface="Latha"/>
+        <a:font script="Syrc" typeface="Estrangelo Edessa"/>
+        <a:font script="Orya" typeface="Kalinga"/>
+        <a:font script="Mlym" typeface="Kartika"/>
+        <a:font script="Laoo" typeface="DokChampa"/>
+        <a:font script="Sinh" typeface="Iskoola Pota"/>
+        <a:font script="Mong" typeface="Mongolian Baiti"/>
+        <a:font script="Viet" typeface="Arial"/>
+        <a:font script="Uigh" typeface="Microsoft Uighur"/>
+        <a:font script="Geor" typeface="Sylfaen"/>
+      </a:minorFont>
+    </a:fontScheme>
+    <a:fmtScheme name="Office">
+      <a:fillStyleLst>
+        <a:solidFill>
+          <a:schemeClr val="phClr"/>
+        </a:solidFill>
+        <a:gradFill rotWithShape="1">
+          <a:gsLst>
+            <a:gs pos="0">
+              <a:schemeClr val="phClr">
+                <a:tint val="50000"/>
+                <a:satMod val="300000"/>
+              </a:schemeClr>
+            </a:gs>
+            <a:gs pos="35000">
+              <a:schemeClr val="phClr">
+                <a:tint val="37000"/>
+                <a:satMod val="300000"/>
+              </a:schemeClr>
+            </a:gs>
+            <a:gs pos="100000">
+              <a:schemeClr val="phClr">
+                <a:tint val="15000"/>
+                <a:satMod val="350000"/>
+              </a:schemeClr>
+            </a:gs>
+          </a:gsLst>
+          <a:lin ang="16200000" scaled="1"/>
+        </a:gradFill>
+        <a:gradFill rotWithShape="1">
+          <a:gsLst>
+            <a:gs pos="0">
+              <a:schemeClr val="phClr">
+                <a:tint val="100000"/>
+                <a:shade val="100000"/>
+                <a:satMod val="130000"/>
+              </a:schemeClr>
+            </a:gs>
+            <a:gs pos="100000">
+              <a:schemeClr val="phClr">
+                <a:tint val="50000"/>
+                <a:shade val="100000"/>
+                <a:satMod val="350000"/>
+              </a:schemeClr>
+            </a:gs>
+          </a:gsLst>
+          <a:lin ang="16200000" scaled="0"/>
+        </a:gradFill>
+      </a:fillStyleLst>
+      <a:lnStyleLst>
+        <a:ln w="9525" cap="flat" cmpd="sng" algn="ctr">
+          <a:solidFill>
+            <a:schemeClr val="phClr">
+              <a:shade val="95000"/>
+              <a:satMod val="105000"/>
+            </a:schemeClr>
+          </a:solidFill>
+          <a:prstDash val="solid"/>
+        </a:ln>
+        <a:ln w="25400" cap="flat" cmpd="sng" algn="ctr">
+          <a:solidFill>
+            <a:schemeClr val="phClr"/>
+          </a:solidFill>
+          <a:prstDash val="solid"/>
+        </a:ln>
+        <a:ln w="38100" cap="flat" cmpd="sng" algn="ctr">
+          <a:solidFill>
+            <a:schemeClr val="phClr"/>
+          </a:solidFill>
+          <a:prstDash val="solid"/>
+        </a:ln>
+      </a:lnStyleLst>
+      <a:effectStyleLst>
+        <a:effectStyle>
+          <a:effectLst>
+            <a:outerShdw blurRad="40000" dist="20000" dir="5400000" rotWithShape="0">
+              <a:srgbClr val="000000">
+                <a:alpha val="38000"/>
+              </a:srgbClr>
+            </a:outerShdw>
+          </a:effectLst>
+        </a:effectStyle>
+        <a:effectStyle>
+          <a:effectLst>
+            <a:outerShdw blurRad="40000" dist="23000" dir="5400000" rotWithShape="0">
+              <a:srgbClr val="000000">
+                <a:alpha val="35000"/>
+              </a:srgbClr>
+            </a:outerShdw>
+          </a:effectLst>
+        </a:effectStyle>
+        <a:effectStyle>
+          <a:effectLst>
+            <a:outerShdw blurRad="40000" dist="23000" dir="5400000" rotWithShape="0">
+              <a:srgbClr val="000000">
+                <a:alpha val="35000"/>
+              </a:srgbClr>
+            </a:outerShdw>
+          </a:effectLst>
+          <a:scene3d>
+            <a:camera prst="orthographicFront">
+              <a:rot lat="0" lon="0" rev="0"/>
+            </a:camera>
+            <a:lightRig rig="threePt" dir="t">
+              <a:rot lat="0" lon="0" rev="1200000"/>
+            </a:lightRig>
+          </a:scene3d>
+          <a:sp3d>
+            <a:bevelT w="63500" h="25400"/>
+          </a:sp3d>
+        </a:effectStyle>
+      </a:effectStyleLst>
+      <a:bgFillStyleLst>
+        <a:solidFill>
+          <a:schemeClr val="phClr"/>
+        </a:solidFill>
+        <a:gradFill rotWithShape="1">
+          <a:gsLst>
+            <a:gs pos="0">
+              <a:schemeClr val="phClr">
+                <a:tint val="40000"/>
+                <a:satMod val="350000"/>
+              </a:schemeClr>
+            </a:gs>
+            <a:gs pos="40000">
+              <a:schemeClr val="phClr">
+                <a:tint val="45000"/>
+                <a:shade val="99000"/>
+                <a:satMod val="350000"/>
+              </a:schemeClr>
+            </a:gs>
+            <a:gs pos="100000">
+              <a:schemeClr val="phClr">
+                <a:shade val="20000"/>
+                <a:satMod val="255000"/>
+              </a:schemeClr>
+            </a:gs>
+          </a:gsLst>
+          <a:path path="circle">
+            <a:fillToRect l="50000" t="-80000" r="50000" b="180000"/>
+          </a:path>
+        </a:gradFill>
+        <a:gradFill rotWithShape="1">
+          <a:gsLst>
+            <a:gs pos="0">
+              <a:schemeClr val="phClr">
+                <a:tint val="80000"/>
+                <a:satMod val="300000"/>
+              </a:schemeClr>
+            </a:gs>
+            <a:gs pos="100000">
+              <a:schemeClr val="phClr">
+                <a:shade val="30000"/>
+                <a:satMod val="200000"/>
+              </a:schemeClr>
+            </a:gs>
+          </a:gsLst>
+          <a:path path="circle">
+            <a:fillToRect l="50000" t="50000" r="50000" b="50000"/>
+          </a:path>
+        </a:gradFill>
+      </a:bgFillStyleLst>
+    </a:fmtScheme>
+  </a:themeElements>
+  <a:objectDefaults>
+    <a:spDef>
+      <a:spPr/>
+      <a:bodyPr/>
+      <a:lstStyle/>
+      <a:style>
+        <a:lnRef idx="1">
+          <a:schemeClr val="accent1"/>
+        </a:lnRef>
+        <a:fillRef idx="3">
+          <a:schemeClr val="accent1"/>
+        </a:fillRef>
+        <a:effectRef idx="2">
+          <a:schemeClr val="accent1"/>
+        </a:effectRef>
+        <a:fontRef idx="minor">
+          <a:schemeClr val="lt1"/>
+        </a:fontRef>
+      </a:style>
+    </a:spDef>
+    <a:lnDef>
+      <a:spPr/>
+      <a:bodyPr/>
+      <a:lstStyle/>
+      <a:style>
+        <a:lnRef idx="2">
+          <a:schemeClr val="accent1"/>
+        </a:lnRef>
+        <a:fillRef idx="0">
+          <a:schemeClr val="accent1"/>
+        </a:fillRef>
+        <a:effectRef idx="1">
+          <a:schemeClr val="accent1"/>
+        </a:effectRef>
+        <a:fontRef idx="minor">
+          <a:schemeClr val="tx1"/>
+        </a:fontRef>
+      </a:style>
+    </a:lnDef>
+  </a:objectDefaults>
+  <a:extraClrSchemeLst/>
+</a:theme>
 </file>
--- a/Programacion II/Clases/Clase 3 - Pilas y colas/Presentacion.pptx
+++ b/Programacion II/Clases/Clase 3 - Pilas y colas/Presentacion.pptx
@@ -606,7 +606,7 @@
           <a:lstStyle/>
           <a:p>
             <a:r>
-              <a:t>En VetCare usamos siempre offer/poll/peek porque avisan con false o con null en vez de reventar, y en una recepcion que puede quedar vacia a media manana eso es exactamente lo que queremos. peek es lo que alimenta la pantalla de turnos que ve el publico; poll es lo que hace el medico cuando abre la puerta del consultorio.</a:t>
+              <a:t>En el sistema de la clinica usamos siempre offer/poll/peek porque avisan con false o con null en vez de reventar, y en una recepcion que puede quedar vacia a media manana eso es exactamente lo que queremos. peek es lo que alimenta la pantalla de turnos que ve el publico; poll es lo que hace el medico cuando abre la puerta del consultorio.</a:t>
             </a:r>
           </a:p>
         </p:txBody>
@@ -4352,7 +4352,7 @@
                 </a:solidFill>
                 <a:latin typeface="Calibri"/>
               </a:rPr>
-              <a:t>VetCareSalaDeEspera.java — class VetCareSalaDeEspera</a:t>
+              <a:t>ClinicaSalaDeEspera.java — class ClinicaSalaDeEspera</a:t>
             </a:r>
           </a:p>
         </p:txBody>
@@ -4511,7 +4511,7 @@
                 </a:solidFill>
                 <a:latin typeface="Calibri"/>
               </a:rPr>
-              <a:t>public class VetCareSalaDeEspera {</a:t>
+              <a:t>public class ClinicaSalaDeEspera {</a:t>
             </a:r>
           </a:p>
           <a:p>
@@ -4708,7 +4708,7 @@
                 </a:solidFill>
                 <a:latin typeface="Calibri"/>
               </a:rPr>
-              <a:t>VetCareSalaDeEspera.java — main() (1/3)</a:t>
+              <a:t>ClinicaSalaDeEspera.java — main() (1/3)</a:t>
             </a:r>
           </a:p>
         </p:txBody>
@@ -5375,7 +5375,7 @@
                 </a:solidFill>
                 <a:latin typeface="Calibri"/>
               </a:rPr>
-              <a:t>VetCareSalaDeEspera.java — main() (2/3)</a:t>
+              <a:t>ClinicaSalaDeEspera.java — main() (2/3)</a:t>
             </a:r>
           </a:p>
         </p:txBody>
@@ -6042,7 +6042,7 @@
                 </a:solidFill>
                 <a:latin typeface="Calibri"/>
               </a:rPr>
-              <a:t>VetCareSalaDeEspera.java — main() (3/3)</a:t>
+              <a:t>ClinicaSalaDeEspera.java — main() (3/3)</a:t>
             </a:r>
           </a:p>
         </p:txBody>
@@ -6494,7 +6494,7 @@
                 </a:solidFill>
                 <a:latin typeface="Calibri"/>
               </a:rPr>
-              <a:t>VetCareSalaDeEspera.java — class Turno</a:t>
+              <a:t>ClinicaSalaDeEspera.java — class Turno</a:t>
             </a:r>
           </a:p>
         </p:txBody>
@@ -6930,7 +6930,7 @@
                 </a:solidFill>
                 <a:latin typeface="Calibri"/>
               </a:rPr>
-              <a:t>VetCareSalaDeEspera.java — Turno()</a:t>
+              <a:t>ClinicaSalaDeEspera.java — Turno()</a:t>
             </a:r>
           </a:p>
         </p:txBody>
@@ -7462,7 +7462,7 @@
                 </a:solidFill>
                 <a:latin typeface="Calibri"/>
               </a:rPr>
-              <a:t>VetCareSalaDeEspera.java — class SalaDeEspera</a:t>
+              <a:t>ClinicaSalaDeEspera.java — class SalaDeEspera</a:t>
             </a:r>
           </a:p>
         </p:txBody>
@@ -7850,7 +7850,7 @@
                 </a:solidFill>
                 <a:latin typeface="Calibri"/>
               </a:rPr>
-              <a:t>VetCareSalaDeEspera.java — registrarLlegada()</a:t>
+              <a:t>ClinicaSalaDeEspera.java — registrarLlegada()</a:t>
             </a:r>
           </a:p>
         </p:txBody>
@@ -8270,7 +8270,7 @@
                 </a:solidFill>
                 <a:latin typeface="Calibri"/>
               </a:rPr>
-              <a:t>VetCareSalaDeEspera.java — siguienteEnPantalla()</a:t>
+              <a:t>ClinicaSalaDeEspera.java — siguienteEnPantalla()</a:t>
             </a:r>
           </a:p>
         </p:txBody>
@@ -8658,7 +8658,7 @@
                 </a:solidFill>
                 <a:latin typeface="Calibri"/>
               </a:rPr>
-              <a:t>VetCareSalaDeEspera.java — atender()</a:t>
+              <a:t>ClinicaSalaDeEspera.java — atender()</a:t>
             </a:r>
           </a:p>
         </p:txBody>
@@ -9274,7 +9274,7 @@
                 </a:solidFill>
                 <a:latin typeface="Calibri"/>
               </a:rPr>
-              <a:t>–   Todo con el mismo dominio: la clinica veterinaria Huellitas (VetCare).</a:t>
+              <a:t>–   Todo con el mismo dominio: una clinica veterinaria.</a:t>
             </a:r>
           </a:p>
         </p:txBody>
@@ -9455,7 +9455,7 @@
                 </a:solidFill>
                 <a:latin typeface="Calibri"/>
               </a:rPr>
-              <a:t>VetCareSalaDeEspera.java — estaVacia()</a:t>
+              <a:t>ClinicaSalaDeEspera.java — estaVacia()</a:t>
             </a:r>
           </a:p>
         </p:txBody>
@@ -9843,7 +9843,7 @@
                 </a:solidFill>
                 <a:latin typeface="Calibri"/>
               </a:rPr>
-              <a:t>VetCareSalaDeEspera.java — cantidad()</a:t>
+              <a:t>ClinicaSalaDeEspera.java — cantidad()</a:t>
             </a:r>
           </a:p>
         </p:txBody>
@@ -10263,7 +10263,7 @@
                 </a:solidFill>
                 <a:latin typeface="Calibri"/>
               </a:rPr>
-              <a:t>VetCareSalaDeEspera.java — class HistorialReciente</a:t>
+              <a:t>ClinicaSalaDeEspera.java — class HistorialReciente</a:t>
             </a:r>
           </a:p>
         </p:txBody>
@@ -10651,7 +10651,7 @@
                 </a:solidFill>
                 <a:latin typeface="Calibri"/>
               </a:rPr>
-              <a:t>VetCareSalaDeEspera.java — registrar()</a:t>
+              <a:t>ClinicaSalaDeEspera.java — registrar()</a:t>
             </a:r>
           </a:p>
         </p:txBody>
@@ -11055,7 +11055,7 @@
                 </a:solidFill>
                 <a:latin typeface="Calibri"/>
               </a:rPr>
-              <a:t>VetCareSalaDeEspera.java — ultimaAtencion()</a:t>
+              <a:t>ClinicaSalaDeEspera.java — ultimaAtencion()</a:t>
             </a:r>
           </a:p>
         </p:txBody>
@@ -11443,7 +11443,7 @@
                 </a:solidFill>
                 <a:latin typeface="Calibri"/>
               </a:rPr>
-              <a:t>VetCareSalaDeEspera.java — deshacer()</a:t>
+              <a:t>ClinicaSalaDeEspera.java — deshacer()</a:t>
             </a:r>
           </a:p>
         </p:txBody>
@@ -11879,7 +11879,7 @@
                 </a:solidFill>
                 <a:latin typeface="Calibri"/>
               </a:rPr>
-              <a:t>VetCareSalaDeEspera.java — cantidad()</a:t>
+              <a:t>ClinicaSalaDeEspera.java — cantidad()</a:t>
             </a:r>
           </a:p>
         </p:txBody>
@@ -13021,7 +13021,7 @@
                 </a:solidFill>
                 <a:latin typeface="Calibri"/>
               </a:rPr>
-              <a:t>–   Mismo dominio VetCare — no otro ejemplo.</a:t>
+              <a:t>–   Mismo dominio de la clinica — no otro ejemplo.</a:t>
             </a:r>
           </a:p>
         </p:txBody>
@@ -13822,7 +13822,7 @@
                 </a:solidFill>
                 <a:latin typeface="Calibri"/>
               </a:rPr>
-              <a:t>Demo en vivo sobre VetCare</a:t>
+              <a:t>Demo en vivo sobre el tema</a:t>
             </a:r>
           </a:p>
         </p:txBody>
@@ -14357,7 +14357,7 @@
                 </a:solidFill>
                 <a:latin typeface="Calibri"/>
               </a:rPr>
-              <a:t>–   La sala de espera de Huellitas tiene una regla sagrada: el que llega primero pasa primero.</a:t>
+              <a:t>–   La sala de espera de la clinica tiene una regla sagrada: el que llega primero pasa primero.</a:t>
             </a:r>
           </a:p>
           <a:p>
@@ -15161,7 +15161,7 @@
                 </a:solidFill>
                 <a:latin typeface="Calibri"/>
               </a:rPr>
-              <a:t>–   En VetCare la pila guarda el historial de atenciones recientes: cada consulta terminada se apila, la pantalla del medico muestra siempre la de encima con peek, y si registro una atencion por equivocacion, pop la deshace.</a:t>
+              <a:t>–   En el sistema de la clinica la pila guarda el historial de atenciones recientes: cada consulta terminada se apila, la pantalla del medico muestra siempre la de encima con peek, y si registro una atencion por equivocacion, pop la deshace.</a:t>
             </a:r>
           </a:p>
         </p:txBody>
@@ -15681,7 +15681,7 @@
                 </a:solidFill>
                 <a:latin typeface="Calibri"/>
               </a:rPr>
-              <a:t>–   En VetCare resolvemos la urgencia sin traicionar el modelo: usamos Deque&lt;Turno&gt; y decimos addLast para el que llega normal y addFirst para el caso critico</a:t>
+              <a:t>–   En el sistema de la clinica resolvemos la urgencia sin traicionar el modelo: usamos Deque&lt;Turno&gt; y decimos addLast para el que llega normal y addFirst para el caso critico</a:t>
             </a:r>
           </a:p>
           <a:p>

--- a/Programacion II/Clases/Clase 3 - Pilas y colas/Presentacion.pptx
+++ b/Programacion II/Clases/Clase 3 - Pilas y colas/Presentacion.pptx
@@ -828,94 +828,6 @@
           <a:p>
             <a:r>
               <a:t>Un punto que confunde mucho: una cola no se recorre para buscar. Si usted se descubre iterando la sala de espera para encontrar a Firulais y sacarlo del medio, la senal es que ese caso de uso no es una cola pura, y que necesita otra estructura al lado (por ejemplo un Deque que permita addFirst para urgencias, o un HashMap que veremos la proxima clase). En el sistema de la clinica resolvemos la urgencia sin traicionar el modelo: usamos Deque&lt;Turno&gt; y decimos addLast para el que llega normal y addFirst para el caso critico, dejando explicito en el codigo que colarse es una operacion excepcional y con nombre propio, no un accidente. Ademas, recorrer una cola con for-each la muestra pero no la consume; muchos estudiantes imprimen la cola con un for-each, ven todos los turnos y creen que ya los atendieron, cuando en realidad size() sigue igual. Consumir es poll; mirar es peek o for-each.</a:t>
-            </a:r>
-          </a:p>
-        </p:txBody>
-      </p:sp>
-      <p:sp>
-        <p:nvSpPr>
-          <p:cNvPr id="4" name="Slide Number Placeholder 3"/>
-          <p:cNvSpPr>
-            <a:spLocks noGrp="1"/>
-          </p:cNvSpPr>
-          <p:nvPr>
-            <p:ph type="sldNum" idx="5" sz="quarter"/>
-          </p:nvPr>
-        </p:nvSpPr>
-        <p:spPr/>
-      </p:sp>
-    </p:spTree>
-  </p:cSld>
-  <p:clrMapOvr>
-    <a:masterClrMapping/>
-  </p:clrMapOvr>
-</p:notes>
-</file>
-
-<file path=ppt/notesSlides/notesSlide6.xml><?xml version="1.0" encoding="utf-8"?>
-<p:notes xmlns:a="http://schemas.openxmlformats.org/drawingml/2006/main" xmlns:p="http://schemas.openxmlformats.org/presentationml/2006/main" xmlns:r="http://schemas.openxmlformats.org/officeDocument/2006/relationships">
-  <p:cSld>
-    <p:spTree>
-      <p:nvGrpSpPr>
-        <p:cNvPr id="1" name=""/>
-        <p:cNvGrpSpPr/>
-        <p:nvPr/>
-      </p:nvGrpSpPr>
-      <p:grpSpPr>
-        <a:xfrm>
-          <a:off x="0" y="0"/>
-          <a:ext cx="0" cy="0"/>
-          <a:chOff x="0" y="0"/>
-          <a:chExt cx="0" cy="0"/>
-        </a:xfrm>
-      </p:grpSpPr>
-      <p:sp>
-        <p:nvSpPr>
-          <p:cNvPr id="2" name="Slide Image Placeholder 1"/>
-          <p:cNvSpPr>
-            <a:spLocks noGrp="1"/>
-          </p:cNvSpPr>
-          <p:nvPr>
-            <p:ph type="sldImg" idx="2"/>
-          </p:nvPr>
-        </p:nvSpPr>
-        <p:spPr/>
-      </p:sp>
-      <p:sp>
-        <p:nvSpPr>
-          <p:cNvPr id="3" name="Notes Placeholder 2"/>
-          <p:cNvSpPr>
-            <a:spLocks noGrp="1"/>
-          </p:cNvSpPr>
-          <p:nvPr>
-            <p:ph type="body" idx="3" sz="quarter"/>
-          </p:nvPr>
-        </p:nvSpPr>
-        <p:spPr/>
-        <p:txBody>
-          <a:bodyPr/>
-          <a:lstStyle/>
-          <a:p>
-            <a:r>
-              <a:t>TEXTO COMPLETO DE LA LÁMINA (se proyecta resumido):</a:t>
-            </a:r>
-          </a:p>
-          <a:p/>
-          <a:p>
-            <a:r>
-              <a:t>Herramienta: Visual Studio Code (Java)</a:t>
-            </a:r>
-          </a:p>
-          <a:p/>
-          <a:p>
-            <a:r>
-              <a:t>Demo: El docente encola cuatro mascotas, muestra en pantalla la diferencia entre peek() y poll() atendiendo en orden de llegada, y luego usa push/pop para deshacer la ultima atencion registrada.</a:t>
-            </a:r>
-          </a:p>
-          <a:p/>
-          <a:p>
-            <a:r>
-              <a:t>Mismo dominio de la clinica — no otro ejemplo.</a:t>
             </a:r>
           </a:p>
         </p:txBody>
@@ -9675,118 +9587,14 @@
       </p:sp>
       <p:sp>
         <p:nvSpPr>
-          <p:cNvPr id="5" name="Rounded Rectangle 4"/>
-          <p:cNvSpPr/>
-          <p:nvPr/>
-        </p:nvSpPr>
-        <p:spPr>
-          <a:xfrm>
-            <a:off x="5797149" y="1573813"/>
-            <a:ext cx="6010497" cy="4057845"/>
-          </a:xfrm>
-          <a:prstGeom prst="roundRect">
-            <a:avLst>
-              <a:gd name="adj" fmla="val 4000"/>
-            </a:avLst>
-          </a:prstGeom>
-          <a:solidFill>
-            <a:srgbClr val="E8EEF4"/>
-          </a:solidFill>
-          <a:ln>
-            <a:noFill/>
-          </a:ln>
-        </p:spPr>
-        <p:style>
-          <a:lnRef idx="1">
-            <a:schemeClr val="accent1"/>
-          </a:lnRef>
-          <a:fillRef idx="3">
-            <a:schemeClr val="accent1"/>
-          </a:fillRef>
-          <a:effectRef idx="2">
-            <a:schemeClr val="accent1"/>
-          </a:effectRef>
-          <a:fontRef idx="minor">
-            <a:schemeClr val="lt1"/>
-          </a:fontRef>
-        </p:style>
-        <p:txBody>
-          <a:bodyPr rtlCol="0" anchor="ctr"/>
-          <a:lstStyle/>
-          <a:p>
-            <a:pPr algn="ctr"/>
-          </a:p>
-        </p:txBody>
-      </p:sp>
-      <p:pic>
-        <p:nvPicPr>
-          <p:cNvPr id="6" name="Picture 5" descr="laptop-code-live-demo.jpg"/>
-          <p:cNvPicPr>
-            <a:picLocks noChangeAspect="1"/>
-          </p:cNvPicPr>
-          <p:nvPr/>
-        </p:nvPicPr>
-        <p:blipFill>
-          <a:blip r:embed="rId2"/>
-          <a:stretch>
-            <a:fillRect/>
-          </a:stretch>
-        </p:blipFill>
-        <p:spPr>
-          <a:xfrm>
-            <a:off x="5870301" y="1646965"/>
-            <a:ext cx="5864193" cy="3911541"/>
-          </a:xfrm>
-          <a:prstGeom prst="rect">
-            <a:avLst/>
-          </a:prstGeom>
-        </p:spPr>
-      </p:pic>
-      <p:sp>
-        <p:nvSpPr>
-          <p:cNvPr id="7" name="TextBox 6"/>
+          <p:cNvPr id="5" name="TextBox 4"/>
           <p:cNvSpPr txBox="1"/>
           <p:nvPr/>
         </p:nvSpPr>
         <p:spPr>
           <a:xfrm>
-            <a:off x="5870301" y="5961888"/>
-            <a:ext cx="5864193" cy="320040"/>
-          </a:xfrm>
-          <a:prstGeom prst="rect">
-            <a:avLst/>
-          </a:prstGeom>
-          <a:noFill/>
-        </p:spPr>
-        <p:txBody>
-          <a:bodyPr wrap="square">
-            <a:spAutoFit/>
-          </a:bodyPr>
-          <a:lstStyle/>
-          <a:p>
-            <a:pPr algn="ctr"/>
-            <a:r>
-              <a:rPr sz="1100" b="0" i="1">
-                <a:solidFill>
-                  <a:srgbClr val="666666"/>
-                </a:solidFill>
-                <a:latin typeface="Calibri"/>
-              </a:rPr>
-              <a:t>Foto: olia danilevich · Pexels</a:t>
-            </a:r>
-          </a:p>
-        </p:txBody>
-      </p:sp>
-      <p:sp>
-        <p:nvSpPr>
-          <p:cNvPr id="8" name="TextBox 7"/>
-          <p:cNvSpPr txBox="1"/>
-          <p:nvPr/>
-        </p:nvSpPr>
-        <p:spPr>
-          <a:xfrm>
-            <a:off x="457200" y="1353312"/>
-            <a:ext cx="5093061" cy="5047488"/>
+            <a:off x="457200" y="1170432"/>
+            <a:ext cx="11277295" cy="5230368"/>
           </a:xfrm>
           <a:prstGeom prst="rect">
             <a:avLst/>
@@ -9856,6 +9664,15 @@
               </a:rPr>
               <a:t>Demo:</a:t>
             </a:r>
+            <a:r>
+              <a:rPr sz="2000" b="0" i="0">
+                <a:solidFill>
+                  <a:srgbClr val="333333"/>
+                </a:solidFill>
+                <a:latin typeface="Calibri"/>
+              </a:rPr>
+              <a:t> El docente encola cuatro mascotas, muestra en pantalla la diferencia entre peek() y poll() atendiendo en orden de llegada, y luego usa push/pop para deshacer la ultima atencion registrada.</a:t>
+            </a:r>
           </a:p>
           <a:p>
             <a:pPr>
@@ -9877,7 +9694,7 @@
       </p:sp>
       <p:sp>
         <p:nvSpPr>
-          <p:cNvPr id="9" name="TextBox 8"/>
+          <p:cNvPr id="6" name="TextBox 5"/>
           <p:cNvSpPr txBox="1"/>
           <p:nvPr/>
         </p:nvSpPr>
@@ -10290,118 +10107,14 @@
       </p:sp>
       <p:sp>
         <p:nvSpPr>
-          <p:cNvPr id="5" name="Rounded Rectangle 4"/>
-          <p:cNvSpPr/>
-          <p:nvPr/>
-        </p:nvSpPr>
-        <p:spPr>
-          <a:xfrm>
-            <a:off x="5797149" y="1573813"/>
-            <a:ext cx="6010497" cy="4057845"/>
-          </a:xfrm>
-          <a:prstGeom prst="roundRect">
-            <a:avLst>
-              <a:gd name="adj" fmla="val 4000"/>
-            </a:avLst>
-          </a:prstGeom>
-          <a:solidFill>
-            <a:srgbClr val="E8EEF4"/>
-          </a:solidFill>
-          <a:ln>
-            <a:noFill/>
-          </a:ln>
-        </p:spPr>
-        <p:style>
-          <a:lnRef idx="1">
-            <a:schemeClr val="accent1"/>
-          </a:lnRef>
-          <a:fillRef idx="3">
-            <a:schemeClr val="accent1"/>
-          </a:fillRef>
-          <a:effectRef idx="2">
-            <a:schemeClr val="accent1"/>
-          </a:effectRef>
-          <a:fontRef idx="minor">
-            <a:schemeClr val="lt1"/>
-          </a:fontRef>
-        </p:style>
-        <p:txBody>
-          <a:bodyPr rtlCol="0" anchor="ctr"/>
-          <a:lstStyle/>
-          <a:p>
-            <a:pPr algn="ctr"/>
-          </a:p>
-        </p:txBody>
-      </p:sp>
-      <p:pic>
-        <p:nvPicPr>
-          <p:cNvPr id="6" name="Picture 5" descr="notebook-planning-desk-coffee.jpg"/>
-          <p:cNvPicPr>
-            <a:picLocks noChangeAspect="1"/>
-          </p:cNvPicPr>
-          <p:nvPr/>
-        </p:nvPicPr>
-        <p:blipFill>
-          <a:blip r:embed="rId2"/>
-          <a:stretch>
-            <a:fillRect/>
-          </a:stretch>
-        </p:blipFill>
-        <p:spPr>
-          <a:xfrm>
-            <a:off x="5870301" y="1646965"/>
-            <a:ext cx="5864193" cy="3911541"/>
-          </a:xfrm>
-          <a:prstGeom prst="rect">
-            <a:avLst/>
-          </a:prstGeom>
-        </p:spPr>
-      </p:pic>
-      <p:sp>
-        <p:nvSpPr>
-          <p:cNvPr id="7" name="TextBox 6"/>
+          <p:cNvPr id="5" name="TextBox 4"/>
           <p:cNvSpPr txBox="1"/>
           <p:nvPr/>
         </p:nvSpPr>
         <p:spPr>
           <a:xfrm>
-            <a:off x="5870301" y="5961888"/>
-            <a:ext cx="5864193" cy="320040"/>
-          </a:xfrm>
-          <a:prstGeom prst="rect">
-            <a:avLst/>
-          </a:prstGeom>
-          <a:noFill/>
-        </p:spPr>
-        <p:txBody>
-          <a:bodyPr wrap="square">
-            <a:spAutoFit/>
-          </a:bodyPr>
-          <a:lstStyle/>
-          <a:p>
-            <a:pPr algn="ctr"/>
-            <a:r>
-              <a:rPr sz="1100" b="0" i="1">
-                <a:solidFill>
-                  <a:srgbClr val="666666"/>
-                </a:solidFill>
-                <a:latin typeface="Calibri"/>
-              </a:rPr>
-              <a:t>Foto: Cup of  Couple · Pexels</a:t>
-            </a:r>
-          </a:p>
-        </p:txBody>
-      </p:sp>
-      <p:sp>
-        <p:nvSpPr>
-          <p:cNvPr id="8" name="TextBox 7"/>
-          <p:cNvSpPr txBox="1"/>
-          <p:nvPr/>
-        </p:nvSpPr>
-        <p:spPr>
-          <a:xfrm>
-            <a:off x="457200" y="1353312"/>
-            <a:ext cx="5093061" cy="5047488"/>
+            <a:off x="457200" y="1170432"/>
+            <a:ext cx="11277295" cy="5230368"/>
           </a:xfrm>
           <a:prstGeom prst="rect">
             <a:avLst/>
@@ -10526,7 +10239,7 @@
       </p:sp>
       <p:sp>
         <p:nvSpPr>
-          <p:cNvPr id="9" name="TextBox 8"/>
+          <p:cNvPr id="6" name="TextBox 5"/>
           <p:cNvSpPr txBox="1"/>
           <p:nvPr/>
         </p:nvSpPr>

--- a/Programacion II/Clases/Clase 3 - Pilas y colas/Presentacion.pptx
+++ b/Programacion II/Clases/Clase 3 - Pilas y colas/Presentacion.pptx
@@ -828,6 +828,94 @@
           <a:p>
             <a:r>
               <a:t>Un punto que confunde mucho: una cola no se recorre para buscar. Si usted se descubre iterando la sala de espera para encontrar a Firulais y sacarlo del medio, la senal es que ese caso de uso no es una cola pura, y que necesita otra estructura al lado (por ejemplo un Deque que permita addFirst para urgencias, o un HashMap que veremos la proxima clase). En el sistema de la clinica resolvemos la urgencia sin traicionar el modelo: usamos Deque&lt;Turno&gt; y decimos addLast para el que llega normal y addFirst para el caso critico, dejando explicito en el codigo que colarse es una operacion excepcional y con nombre propio, no un accidente. Ademas, recorrer una cola con for-each la muestra pero no la consume; muchos estudiantes imprimen la cola con un for-each, ven todos los turnos y creen que ya los atendieron, cuando en realidad size() sigue igual. Consumir es poll; mirar es peek o for-each.</a:t>
+            </a:r>
+          </a:p>
+        </p:txBody>
+      </p:sp>
+      <p:sp>
+        <p:nvSpPr>
+          <p:cNvPr id="4" name="Slide Number Placeholder 3"/>
+          <p:cNvSpPr>
+            <a:spLocks noGrp="1"/>
+          </p:cNvSpPr>
+          <p:nvPr>
+            <p:ph type="sldNum" idx="5" sz="quarter"/>
+          </p:nvPr>
+        </p:nvSpPr>
+        <p:spPr/>
+      </p:sp>
+    </p:spTree>
+  </p:cSld>
+  <p:clrMapOvr>
+    <a:masterClrMapping/>
+  </p:clrMapOvr>
+</p:notes>
+</file>
+
+<file path=ppt/notesSlides/notesSlide6.xml><?xml version="1.0" encoding="utf-8"?>
+<p:notes xmlns:a="http://schemas.openxmlformats.org/drawingml/2006/main" xmlns:p="http://schemas.openxmlformats.org/presentationml/2006/main" xmlns:r="http://schemas.openxmlformats.org/officeDocument/2006/relationships">
+  <p:cSld>
+    <p:spTree>
+      <p:nvGrpSpPr>
+        <p:cNvPr id="1" name=""/>
+        <p:cNvGrpSpPr/>
+        <p:nvPr/>
+      </p:nvGrpSpPr>
+      <p:grpSpPr>
+        <a:xfrm>
+          <a:off x="0" y="0"/>
+          <a:ext cx="0" cy="0"/>
+          <a:chOff x="0" y="0"/>
+          <a:chExt cx="0" cy="0"/>
+        </a:xfrm>
+      </p:grpSpPr>
+      <p:sp>
+        <p:nvSpPr>
+          <p:cNvPr id="2" name="Slide Image Placeholder 1"/>
+          <p:cNvSpPr>
+            <a:spLocks noGrp="1"/>
+          </p:cNvSpPr>
+          <p:nvPr>
+            <p:ph type="sldImg" idx="2"/>
+          </p:nvPr>
+        </p:nvSpPr>
+        <p:spPr/>
+      </p:sp>
+      <p:sp>
+        <p:nvSpPr>
+          <p:cNvPr id="3" name="Notes Placeholder 2"/>
+          <p:cNvSpPr>
+            <a:spLocks noGrp="1"/>
+          </p:cNvSpPr>
+          <p:nvPr>
+            <p:ph type="body" idx="3" sz="quarter"/>
+          </p:nvPr>
+        </p:nvSpPr>
+        <p:spPr/>
+        <p:txBody>
+          <a:bodyPr/>
+          <a:lstStyle/>
+          <a:p>
+            <a:r>
+              <a:t>TEXTO COMPLETO DE LA LÁMINA (se proyecta resumido):</a:t>
+            </a:r>
+          </a:p>
+          <a:p/>
+          <a:p>
+            <a:r>
+              <a:t>Herramienta: Visual Studio Code (Java)</a:t>
+            </a:r>
+          </a:p>
+          <a:p/>
+          <a:p>
+            <a:r>
+              <a:t>Demo: El docente encola cuatro mascotas, muestra en pantalla la diferencia entre peek() y poll() atendiendo en orden de llegada, y luego usa push/pop para deshacer la ultima atencion registrada.</a:t>
+            </a:r>
+          </a:p>
+          <a:p/>
+          <a:p>
+            <a:r>
+              <a:t>Mismo dominio de la clinica — no otro ejemplo.</a:t>
             </a:r>
           </a:p>
         </p:txBody>
@@ -7492,9 +7580,33 @@
           </a:prstGeom>
         </p:spPr>
       </p:pic>
-      <p:sp>
-        <p:nvSpPr>
-          <p:cNvPr id="13" name="TextBox 12"/>
+      <p:pic>
+        <p:nvPicPr>
+          <p:cNvPr id="9" name="Picture 8" descr="arreglo-circular-paso4.png"/>
+          <p:cNvPicPr>
+            <a:picLocks noChangeAspect="1"/>
+          </p:cNvPicPr>
+          <p:nvPr/>
+        </p:nvPicPr>
+        <p:blipFill>
+          <a:blip r:embed="rId5"/>
+          <a:stretch>
+            <a:fillRect/>
+          </a:stretch>
+        </p:blipFill>
+        <p:spPr>
+          <a:xfrm>
+            <a:off x="5876318" y="1261872"/>
+            <a:ext cx="5852160" cy="4681728"/>
+          </a:xfrm>
+          <a:prstGeom prst="rect">
+            <a:avLst/>
+          </a:prstGeom>
+        </p:spPr>
+      </p:pic>
+      <p:sp>
+        <p:nvSpPr>
+          <p:cNvPr id="18" name="TextBox 17"/>
           <p:cNvSpPr txBox="1"/>
           <p:nvPr/>
         </p:nvSpPr>
@@ -7529,7 +7641,7 @@
       </p:sp>
       <p:sp>
         <p:nvSpPr>
-          <p:cNvPr id="14" name="TextBox 13"/>
+          <p:cNvPr id="19" name="TextBox 18"/>
           <p:cNvSpPr txBox="1"/>
           <p:nvPr/>
         </p:nvSpPr>
@@ -7600,7 +7712,7 @@
       </p:sp>
       <p:sp>
         <p:nvSpPr>
-          <p:cNvPr id="15" name="TextBox 14"/>
+          <p:cNvPr id="20" name="TextBox 19"/>
           <p:cNvSpPr txBox="1"/>
           <p:nvPr/>
         </p:nvSpPr>
@@ -7752,6 +7864,59 @@
                       </p:childTnLst>
                     </p:cTn>
                   </p:par>
+                  <p:par>
+                    <p:cTn id="13" fill="hold">
+                      <p:stCondLst>
+                        <p:cond delay="indefinite"/>
+                      </p:stCondLst>
+                      <p:childTnLst>
+                        <p:par>
+                          <p:cTn id="14" fill="hold">
+                            <p:stCondLst>
+                              <p:cond delay="0"/>
+                            </p:stCondLst>
+                            <p:childTnLst>
+                              <p:par>
+                                <p:cTn id="15" presetID="10" presetClass="entr" presetSubtype="0" fill="hold" nodeType="clickEffect">
+                                  <p:stCondLst>
+                                    <p:cond delay="0"/>
+                                  </p:stCondLst>
+                                  <p:childTnLst>
+                                    <p:set>
+                                      <p:cBhvr>
+                                        <p:cTn id="16" dur="1" fill="hold">
+                                          <p:stCondLst>
+                                            <p:cond delay="0"/>
+                                          </p:stCondLst>
+                                        </p:cTn>
+                                        <p:tgtEl>
+                                          <p:spTgt spid="9"/>
+                                        </p:tgtEl>
+                                        <p:attrNameLst>
+                                          <p:attrName>style.visibility</p:attrName>
+                                        </p:attrNameLst>
+                                      </p:cBhvr>
+                                      <p:to>
+                                        <p:strVal val="visible"/>
+                                      </p:to>
+                                    </p:set>
+                                    <p:animEffect transition="in" filter="fade">
+                                      <p:cBhvr>
+                                        <p:cTn id="17" dur="450"/>
+                                        <p:tgtEl>
+                                          <p:spTgt spid="9"/>
+                                        </p:tgtEl>
+                                      </p:cBhvr>
+                                    </p:animEffect>
+                                  </p:childTnLst>
+                                </p:cTn>
+                              </p:par>
+                            </p:childTnLst>
+                          </p:cTn>
+                        </p:par>
+                      </p:childTnLst>
+                    </p:cTn>
+                  </p:par>
                 </p:childTnLst>
               </p:cTn>
               <p:prevCondLst>
@@ -8032,9 +8197,33 @@
           </a:prstGeom>
         </p:spPr>
       </p:pic>
-      <p:sp>
-        <p:nvSpPr>
-          <p:cNvPr id="13" name="TextBox 12"/>
+      <p:pic>
+        <p:nvPicPr>
+          <p:cNvPr id="9" name="Picture 8" descr="urgencia-addfirst-paso4.png"/>
+          <p:cNvPicPr>
+            <a:picLocks noChangeAspect="1"/>
+          </p:cNvPicPr>
+          <p:nvPr/>
+        </p:nvPicPr>
+        <p:blipFill>
+          <a:blip r:embed="rId5"/>
+          <a:stretch>
+            <a:fillRect/>
+          </a:stretch>
+        </p:blipFill>
+        <p:spPr>
+          <a:xfrm>
+            <a:off x="5876318" y="1261872"/>
+            <a:ext cx="5852160" cy="4681728"/>
+          </a:xfrm>
+          <a:prstGeom prst="rect">
+            <a:avLst/>
+          </a:prstGeom>
+        </p:spPr>
+      </p:pic>
+      <p:sp>
+        <p:nvSpPr>
+          <p:cNvPr id="18" name="TextBox 17"/>
           <p:cNvSpPr txBox="1"/>
           <p:nvPr/>
         </p:nvSpPr>
@@ -8069,7 +8258,7 @@
       </p:sp>
       <p:sp>
         <p:nvSpPr>
-          <p:cNvPr id="14" name="TextBox 13"/>
+          <p:cNvPr id="19" name="TextBox 18"/>
           <p:cNvSpPr txBox="1"/>
           <p:nvPr/>
         </p:nvSpPr>
@@ -8156,7 +8345,7 @@
       </p:sp>
       <p:sp>
         <p:nvSpPr>
-          <p:cNvPr id="15" name="TextBox 14"/>
+          <p:cNvPr id="20" name="TextBox 19"/>
           <p:cNvSpPr txBox="1"/>
           <p:nvPr/>
         </p:nvSpPr>
@@ -8308,6 +8497,59 @@
                       </p:childTnLst>
                     </p:cTn>
                   </p:par>
+                  <p:par>
+                    <p:cTn id="13" fill="hold">
+                      <p:stCondLst>
+                        <p:cond delay="indefinite"/>
+                      </p:stCondLst>
+                      <p:childTnLst>
+                        <p:par>
+                          <p:cTn id="14" fill="hold">
+                            <p:stCondLst>
+                              <p:cond delay="0"/>
+                            </p:stCondLst>
+                            <p:childTnLst>
+                              <p:par>
+                                <p:cTn id="15" presetID="10" presetClass="entr" presetSubtype="0" fill="hold" nodeType="clickEffect">
+                                  <p:stCondLst>
+                                    <p:cond delay="0"/>
+                                  </p:stCondLst>
+                                  <p:childTnLst>
+                                    <p:set>
+                                      <p:cBhvr>
+                                        <p:cTn id="16" dur="1" fill="hold">
+                                          <p:stCondLst>
+                                            <p:cond delay="0"/>
+                                          </p:stCondLst>
+                                        </p:cTn>
+                                        <p:tgtEl>
+                                          <p:spTgt spid="9"/>
+                                        </p:tgtEl>
+                                        <p:attrNameLst>
+                                          <p:attrName>style.visibility</p:attrName>
+                                        </p:attrNameLst>
+                                      </p:cBhvr>
+                                      <p:to>
+                                        <p:strVal val="visible"/>
+                                      </p:to>
+                                    </p:set>
+                                    <p:animEffect transition="in" filter="fade">
+                                      <p:cBhvr>
+                                        <p:cTn id="17" dur="450"/>
+                                        <p:tgtEl>
+                                          <p:spTgt spid="9"/>
+                                        </p:tgtEl>
+                                      </p:cBhvr>
+                                    </p:animEffect>
+                                  </p:childTnLst>
+                                </p:cTn>
+                              </p:par>
+                            </p:childTnLst>
+                          </p:cTn>
+                        </p:par>
+                      </p:childTnLst>
+                    </p:cTn>
+                  </p:par>
                 </p:childTnLst>
               </p:cTn>
               <p:prevCondLst>
@@ -9587,14 +9829,83 @@
       </p:sp>
       <p:sp>
         <p:nvSpPr>
-          <p:cNvPr id="5" name="TextBox 4"/>
+          <p:cNvPr id="5" name="Rounded Rectangle 4"/>
+          <p:cNvSpPr/>
+          <p:nvPr/>
+        </p:nvSpPr>
+        <p:spPr>
+          <a:xfrm>
+            <a:off x="5797149" y="1343926"/>
+            <a:ext cx="6010497" cy="4837658"/>
+          </a:xfrm>
+          <a:prstGeom prst="roundRect">
+            <a:avLst>
+              <a:gd name="adj" fmla="val 4000"/>
+            </a:avLst>
+          </a:prstGeom>
+          <a:solidFill>
+            <a:srgbClr val="E8EEF4"/>
+          </a:solidFill>
+          <a:ln>
+            <a:noFill/>
+          </a:ln>
+        </p:spPr>
+        <p:style>
+          <a:lnRef idx="1">
+            <a:schemeClr val="accent1"/>
+          </a:lnRef>
+          <a:fillRef idx="3">
+            <a:schemeClr val="accent1"/>
+          </a:fillRef>
+          <a:effectRef idx="2">
+            <a:schemeClr val="accent1"/>
+          </a:effectRef>
+          <a:fontRef idx="minor">
+            <a:schemeClr val="lt1"/>
+          </a:fontRef>
+        </p:style>
+        <p:txBody>
+          <a:bodyPr rtlCol="0" anchor="ctr"/>
+          <a:lstStyle/>
+          <a:p>
+            <a:pPr algn="ctr"/>
+          </a:p>
+        </p:txBody>
+      </p:sp>
+      <p:pic>
+        <p:nvPicPr>
+          <p:cNvPr id="6" name="Picture 5" descr="ilus-demo-paso1.png"/>
+          <p:cNvPicPr>
+            <a:picLocks noChangeAspect="1"/>
+          </p:cNvPicPr>
+          <p:nvPr/>
+        </p:nvPicPr>
+        <p:blipFill>
+          <a:blip r:embed="rId2"/>
+          <a:stretch>
+            <a:fillRect/>
+          </a:stretch>
+        </p:blipFill>
+        <p:spPr>
+          <a:xfrm>
+            <a:off x="5870301" y="1417078"/>
+            <a:ext cx="5864193" cy="4691354"/>
+          </a:xfrm>
+          <a:prstGeom prst="rect">
+            <a:avLst/>
+          </a:prstGeom>
+        </p:spPr>
+      </p:pic>
+      <p:sp>
+        <p:nvSpPr>
+          <p:cNvPr id="7" name="TextBox 6"/>
           <p:cNvSpPr txBox="1"/>
           <p:nvPr/>
         </p:nvSpPr>
         <p:spPr>
           <a:xfrm>
-            <a:off x="457200" y="1170432"/>
-            <a:ext cx="11277295" cy="5230368"/>
+            <a:off x="457200" y="1353312"/>
+            <a:ext cx="5093061" cy="5047488"/>
           </a:xfrm>
           <a:prstGeom prst="rect">
             <a:avLst/>
@@ -9671,7 +9982,7 @@
                 </a:solidFill>
                 <a:latin typeface="Calibri"/>
               </a:rPr>
-              <a:t> El docente encola cuatro mascotas, muestra en pantalla la diferencia entre peek() y poll() atendiendo en orden de llegada, y luego usa push/pop para deshacer la ultima atencion registrada.</a:t>
+              <a:t> El docente encola cuatro mascotas, muestra en pantalla la diferencia entre peek() y poll() atendiendo en orden de llegada, y luego usa…</a:t>
             </a:r>
           </a:p>
           <a:p>
@@ -9694,7 +10005,7 @@
       </p:sp>
       <p:sp>
         <p:nvSpPr>
-          <p:cNvPr id="6" name="TextBox 5"/>
+          <p:cNvPr id="8" name="TextBox 7"/>
           <p:cNvSpPr txBox="1"/>
           <p:nvPr/>
         </p:nvSpPr>
@@ -11967,9 +12278,33 @@
           </a:prstGeom>
         </p:spPr>
       </p:pic>
-      <p:sp>
-        <p:nvSpPr>
-          <p:cNvPr id="18" name="TextBox 17"/>
+      <p:pic>
+        <p:nvPicPr>
+          <p:cNvPr id="10" name="Picture 9" descr="cola-fifo-paso5.png"/>
+          <p:cNvPicPr>
+            <a:picLocks noChangeAspect="1"/>
+          </p:cNvPicPr>
+          <p:nvPr/>
+        </p:nvPicPr>
+        <p:blipFill>
+          <a:blip r:embed="rId6"/>
+          <a:stretch>
+            <a:fillRect/>
+          </a:stretch>
+        </p:blipFill>
+        <p:spPr>
+          <a:xfrm>
+            <a:off x="5876318" y="1261872"/>
+            <a:ext cx="5852160" cy="4681728"/>
+          </a:xfrm>
+          <a:prstGeom prst="rect">
+            <a:avLst/>
+          </a:prstGeom>
+        </p:spPr>
+      </p:pic>
+      <p:sp>
+        <p:nvSpPr>
+          <p:cNvPr id="23" name="TextBox 22"/>
           <p:cNvSpPr txBox="1"/>
           <p:nvPr/>
         </p:nvSpPr>
@@ -12004,7 +12339,7 @@
       </p:sp>
       <p:sp>
         <p:nvSpPr>
-          <p:cNvPr id="19" name="TextBox 18"/>
+          <p:cNvPr id="24" name="TextBox 23"/>
           <p:cNvSpPr txBox="1"/>
           <p:nvPr/>
         </p:nvSpPr>
@@ -12091,7 +12426,7 @@
       </p:sp>
       <p:sp>
         <p:nvSpPr>
-          <p:cNvPr id="20" name="TextBox 19"/>
+          <p:cNvPr id="25" name="TextBox 24"/>
           <p:cNvSpPr txBox="1"/>
           <p:nvPr/>
         </p:nvSpPr>
@@ -12284,6 +12619,59 @@
                                         <p:cTn id="17" dur="450"/>
                                         <p:tgtEl>
                                           <p:spTgt spid="9"/>
+                                        </p:tgtEl>
+                                      </p:cBhvr>
+                                    </p:animEffect>
+                                  </p:childTnLst>
+                                </p:cTn>
+                              </p:par>
+                            </p:childTnLst>
+                          </p:cTn>
+                        </p:par>
+                      </p:childTnLst>
+                    </p:cTn>
+                  </p:par>
+                  <p:par>
+                    <p:cTn id="18" fill="hold">
+                      <p:stCondLst>
+                        <p:cond delay="indefinite"/>
+                      </p:stCondLst>
+                      <p:childTnLst>
+                        <p:par>
+                          <p:cTn id="19" fill="hold">
+                            <p:stCondLst>
+                              <p:cond delay="0"/>
+                            </p:stCondLst>
+                            <p:childTnLst>
+                              <p:par>
+                                <p:cTn id="20" presetID="10" presetClass="entr" presetSubtype="0" fill="hold" nodeType="clickEffect">
+                                  <p:stCondLst>
+                                    <p:cond delay="0"/>
+                                  </p:stCondLst>
+                                  <p:childTnLst>
+                                    <p:set>
+                                      <p:cBhvr>
+                                        <p:cTn id="21" dur="1" fill="hold">
+                                          <p:stCondLst>
+                                            <p:cond delay="0"/>
+                                          </p:stCondLst>
+                                        </p:cTn>
+                                        <p:tgtEl>
+                                          <p:spTgt spid="10"/>
+                                        </p:tgtEl>
+                                        <p:attrNameLst>
+                                          <p:attrName>style.visibility</p:attrName>
+                                        </p:attrNameLst>
+                                      </p:cBhvr>
+                                      <p:to>
+                                        <p:strVal val="visible"/>
+                                      </p:to>
+                                    </p:set>
+                                    <p:animEffect transition="in" filter="fade">
+                                      <p:cBhvr>
+                                        <p:cTn id="22" dur="450"/>
+                                        <p:tgtEl>
+                                          <p:spTgt spid="10"/>
                                         </p:tgtEl>
                                       </p:cBhvr>
                                     </p:animEffect>

--- a/Programacion II/Clases/Clase 3 - Pilas y colas/Presentacion.pptx
+++ b/Programacion II/Clases/Clase 3 - Pilas y colas/Presentacion.pptx
@@ -6103,7 +6103,7 @@
         <p:spPr>
           <a:xfrm>
             <a:off x="457200" y="1261872"/>
-            <a:ext cx="11277295" cy="4660587"/>
+            <a:ext cx="11277295" cy="4459049"/>
           </a:xfrm>
           <a:prstGeom prst="roundRect">
             <a:avLst>
@@ -6353,7 +6353,7 @@
         <p:spPr>
           <a:xfrm>
             <a:off x="685800" y="1719072"/>
-            <a:ext cx="502920" cy="4066227"/>
+            <a:ext cx="502920" cy="3864689"/>
           </a:xfrm>
           <a:prstGeom prst="rect">
             <a:avLst/>
@@ -6368,11 +6368,11 @@
           <a:p>
             <a:pPr algn="r">
               <a:spcAft>
-                <a:spcPts val="364"/>
+                <a:spcPts val="342"/>
               </a:spcAft>
             </a:pPr>
             <a:r>
-              <a:rPr sz="1700" i="0" b="0">
+              <a:rPr sz="1600" i="0" b="0">
                 <a:solidFill>
                   <a:srgbClr val="858585"/>
                 </a:solidFill>
@@ -6384,11 +6384,11 @@
           <a:p>
             <a:pPr algn="r">
               <a:spcAft>
-                <a:spcPts val="364"/>
+                <a:spcPts val="342"/>
               </a:spcAft>
             </a:pPr>
             <a:r>
-              <a:rPr sz="1700" i="0" b="0">
+              <a:rPr sz="1600" i="0" b="0">
                 <a:solidFill>
                   <a:srgbClr val="858585"/>
                 </a:solidFill>
@@ -6400,11 +6400,11 @@
           <a:p>
             <a:pPr algn="r">
               <a:spcAft>
-                <a:spcPts val="364"/>
+                <a:spcPts val="342"/>
               </a:spcAft>
             </a:pPr>
             <a:r>
-              <a:rPr sz="1700" i="0" b="0">
+              <a:rPr sz="1600" i="0" b="0">
                 <a:solidFill>
                   <a:srgbClr val="858585"/>
                 </a:solidFill>
@@ -6416,11 +6416,11 @@
           <a:p>
             <a:pPr algn="r">
               <a:spcAft>
-                <a:spcPts val="364"/>
+                <a:spcPts val="342"/>
               </a:spcAft>
             </a:pPr>
             <a:r>
-              <a:rPr sz="1700" i="0" b="0">
+              <a:rPr sz="1600" i="0" b="0">
                 <a:solidFill>
                   <a:srgbClr val="858585"/>
                 </a:solidFill>
@@ -6432,11 +6432,11 @@
           <a:p>
             <a:pPr algn="r">
               <a:spcAft>
-                <a:spcPts val="364"/>
+                <a:spcPts val="342"/>
               </a:spcAft>
             </a:pPr>
             <a:r>
-              <a:rPr sz="1700" i="0" b="0">
+              <a:rPr sz="1600" i="0" b="0">
                 <a:solidFill>
                   <a:srgbClr val="858585"/>
                 </a:solidFill>
@@ -6448,11 +6448,11 @@
           <a:p>
             <a:pPr algn="r">
               <a:spcAft>
-                <a:spcPts val="364"/>
+                <a:spcPts val="342"/>
               </a:spcAft>
             </a:pPr>
             <a:r>
-              <a:rPr sz="1700" i="0" b="0">
+              <a:rPr sz="1600" i="0" b="0">
                 <a:solidFill>
                   <a:srgbClr val="858585"/>
                 </a:solidFill>
@@ -6464,11 +6464,11 @@
           <a:p>
             <a:pPr algn="r">
               <a:spcAft>
-                <a:spcPts val="364"/>
+                <a:spcPts val="342"/>
               </a:spcAft>
             </a:pPr>
             <a:r>
-              <a:rPr sz="1700" i="0" b="0">
+              <a:rPr sz="1600" i="0" b="0">
                 <a:solidFill>
                   <a:srgbClr val="858585"/>
                 </a:solidFill>
@@ -6480,11 +6480,11 @@
           <a:p>
             <a:pPr algn="r">
               <a:spcAft>
-                <a:spcPts val="364"/>
+                <a:spcPts val="342"/>
               </a:spcAft>
             </a:pPr>
             <a:r>
-              <a:rPr sz="1700" i="0" b="0">
+              <a:rPr sz="1600" i="0" b="0">
                 <a:solidFill>
                   <a:srgbClr val="858585"/>
                 </a:solidFill>
@@ -6496,11 +6496,11 @@
           <a:p>
             <a:pPr algn="r">
               <a:spcAft>
-                <a:spcPts val="364"/>
+                <a:spcPts val="342"/>
               </a:spcAft>
             </a:pPr>
             <a:r>
-              <a:rPr sz="1700" i="0" b="0">
+              <a:rPr sz="1600" i="0" b="0">
                 <a:solidFill>
                   <a:srgbClr val="858585"/>
                 </a:solidFill>
@@ -6512,11 +6512,11 @@
           <a:p>
             <a:pPr algn="r">
               <a:spcAft>
-                <a:spcPts val="364"/>
+                <a:spcPts val="342"/>
               </a:spcAft>
             </a:pPr>
             <a:r>
-              <a:rPr sz="1700" i="0" b="0">
+              <a:rPr sz="1600" i="0" b="0">
                 <a:solidFill>
                   <a:srgbClr val="858585"/>
                 </a:solidFill>
@@ -6528,11 +6528,11 @@
           <a:p>
             <a:pPr algn="r">
               <a:spcAft>
-                <a:spcPts val="364"/>
+                <a:spcPts val="342"/>
               </a:spcAft>
             </a:pPr>
             <a:r>
-              <a:rPr sz="1700" i="0" b="0">
+              <a:rPr sz="1600" i="0" b="0">
                 <a:solidFill>
                   <a:srgbClr val="858585"/>
                 </a:solidFill>
@@ -6544,11 +6544,11 @@
           <a:p>
             <a:pPr algn="r">
               <a:spcAft>
-                <a:spcPts val="364"/>
+                <a:spcPts val="342"/>
               </a:spcAft>
             </a:pPr>
             <a:r>
-              <a:rPr sz="1700" i="0" b="0">
+              <a:rPr sz="1600" i="0" b="0">
                 <a:solidFill>
                   <a:srgbClr val="858585"/>
                 </a:solidFill>
@@ -6560,11 +6560,11 @@
           <a:p>
             <a:pPr algn="r">
               <a:spcAft>
-                <a:spcPts val="364"/>
+                <a:spcPts val="342"/>
               </a:spcAft>
             </a:pPr>
             <a:r>
-              <a:rPr sz="1700" i="0" b="0">
+              <a:rPr sz="1600" i="0" b="0">
                 <a:solidFill>
                   <a:srgbClr val="858585"/>
                 </a:solidFill>
@@ -6584,7 +6584,7 @@
         <p:spPr>
           <a:xfrm>
             <a:off x="1188720" y="1719072"/>
-            <a:ext cx="10271455" cy="4066227"/>
+            <a:ext cx="10271455" cy="3864689"/>
           </a:xfrm>
           <a:prstGeom prst="rect">
             <a:avLst/>
@@ -6599,11 +6599,11 @@
           <a:p>
             <a:pPr>
               <a:spcAft>
-                <a:spcPts val="364"/>
+                <a:spcPts val="342"/>
               </a:spcAft>
             </a:pPr>
             <a:r>
-              <a:rPr sz="1700" i="0" b="0">
+              <a:rPr sz="1600" i="0" b="0">
                 <a:solidFill>
                   <a:srgbClr val="DCDCAA"/>
                 </a:solidFill>
@@ -6612,7 +6612,7 @@
               <a:t>System.out.println</a:t>
             </a:r>
             <a:r>
-              <a:rPr sz="1700" i="0" b="0">
+              <a:rPr sz="1600" i="0" b="0">
                 <a:solidFill>
                   <a:srgbClr val="D4D4D4"/>
                 </a:solidFill>
@@ -6621,7 +6621,7 @@
               <a:t>(</a:t>
             </a:r>
             <a:r>
-              <a:rPr sz="1700" i="0" b="0">
+              <a:rPr sz="1600" i="0" b="0">
                 <a:solidFill>
                   <a:srgbClr val="CE9178"/>
                 </a:solidFill>
@@ -6630,7 +6630,7 @@
               <a:t>"=== 2. El consultorio atiende (poll = saca el primero) ==="</a:t>
             </a:r>
             <a:r>
-              <a:rPr sz="1700" i="0" b="0">
+              <a:rPr sz="1600" i="0" b="0">
                 <a:solidFill>
                   <a:srgbClr val="D4D4D4"/>
                 </a:solidFill>
@@ -6642,11 +6642,11 @@
           <a:p>
             <a:pPr>
               <a:spcAft>
-                <a:spcPts val="364"/>
+                <a:spcPts val="342"/>
               </a:spcAft>
             </a:pPr>
             <a:r>
-              <a:rPr sz="1700" i="0" b="0">
+              <a:rPr sz="1600" i="0" b="0">
                 <a:solidFill>
                   <a:srgbClr val="569CD6"/>
                 </a:solidFill>
@@ -6655,7 +6655,7 @@
               <a:t>while</a:t>
             </a:r>
             <a:r>
-              <a:rPr sz="1700" i="0" b="0">
+              <a:rPr sz="1600" i="0" b="0">
                 <a:solidFill>
                   <a:srgbClr val="D4D4D4"/>
                 </a:solidFill>
@@ -6664,7 +6664,7 @@
               <a:t> (!</a:t>
             </a:r>
             <a:r>
-              <a:rPr sz="1700" i="0" b="0">
+              <a:rPr sz="1600" i="0" b="0">
                 <a:solidFill>
                   <a:srgbClr val="DCDCAA"/>
                 </a:solidFill>
@@ -6673,7 +6673,7 @@
               <a:t>sala.estaVacia</a:t>
             </a:r>
             <a:r>
-              <a:rPr sz="1700" i="0" b="0">
+              <a:rPr sz="1600" i="0" b="0">
                 <a:solidFill>
                   <a:srgbClr val="D4D4D4"/>
                 </a:solidFill>
@@ -6685,11 +6685,11 @@
           <a:p>
             <a:pPr>
               <a:spcAft>
-                <a:spcPts val="364"/>
+                <a:spcPts val="342"/>
               </a:spcAft>
             </a:pPr>
             <a:r>
-              <a:rPr sz="1700" i="0" b="0">
+              <a:rPr sz="1600" i="0" b="0">
                 <a:solidFill>
                   <a:srgbClr val="D4D4D4"/>
                 </a:solidFill>
@@ -6698,7 +6698,7 @@
               <a:t>    </a:t>
             </a:r>
             <a:r>
-              <a:rPr sz="1700" i="0" b="0">
+              <a:rPr sz="1600" i="0" b="0">
                 <a:solidFill>
                   <a:srgbClr val="D4D4D4"/>
                 </a:solidFill>
@@ -6707,7 +6707,7 @@
               <a:t>Turno</a:t>
             </a:r>
             <a:r>
-              <a:rPr sz="1700" i="0" b="0">
+              <a:rPr sz="1600" i="0" b="0">
                 <a:solidFill>
                   <a:srgbClr val="D4D4D4"/>
                 </a:solidFill>
@@ -6716,7 +6716,7 @@
               <a:t> </a:t>
             </a:r>
             <a:r>
-              <a:rPr sz="1700" i="0" b="0">
+              <a:rPr sz="1600" i="0" b="0">
                 <a:solidFill>
                   <a:srgbClr val="D4D4D4"/>
                 </a:solidFill>
@@ -6725,7 +6725,7 @@
               <a:t>t</a:t>
             </a:r>
             <a:r>
-              <a:rPr sz="1700" i="0" b="0">
+              <a:rPr sz="1600" i="0" b="0">
                 <a:solidFill>
                   <a:srgbClr val="D4D4D4"/>
                 </a:solidFill>
@@ -6734,7 +6734,7 @@
               <a:t> = </a:t>
             </a:r>
             <a:r>
-              <a:rPr sz="1700" i="0" b="0">
+              <a:rPr sz="1600" i="0" b="0">
                 <a:solidFill>
                   <a:srgbClr val="DCDCAA"/>
                 </a:solidFill>
@@ -6743,7 +6743,7 @@
               <a:t>sala.atender</a:t>
             </a:r>
             <a:r>
-              <a:rPr sz="1700" i="0" b="0">
+              <a:rPr sz="1600" i="0" b="0">
                 <a:solidFill>
                   <a:srgbClr val="D4D4D4"/>
                 </a:solidFill>
@@ -6752,7 +6752,7 @@
               <a:t>(); </a:t>
             </a:r>
             <a:r>
-              <a:rPr sz="1700" i="1" b="0">
+              <a:rPr sz="1600" i="1" b="0">
                 <a:solidFill>
                   <a:srgbClr val="6A9955"/>
                 </a:solidFill>
@@ -6764,11 +6764,11 @@
           <a:p>
             <a:pPr>
               <a:spcAft>
-                <a:spcPts val="364"/>
+                <a:spcPts val="342"/>
               </a:spcAft>
             </a:pPr>
             <a:r>
-              <a:rPr sz="1700" i="0" b="0">
+              <a:rPr sz="1600" i="0" b="0">
                 <a:solidFill>
                   <a:srgbClr val="D4D4D4"/>
                 </a:solidFill>
@@ -6777,7 +6777,7 @@
               <a:t>    </a:t>
             </a:r>
             <a:r>
-              <a:rPr sz="1700" i="0" b="0">
+              <a:rPr sz="1600" i="0" b="0">
                 <a:solidFill>
                   <a:srgbClr val="DCDCAA"/>
                 </a:solidFill>
@@ -6786,7 +6786,7 @@
               <a:t>historial.registrar</a:t>
             </a:r>
             <a:r>
-              <a:rPr sz="1700" i="0" b="0">
+              <a:rPr sz="1600" i="0" b="0">
                 <a:solidFill>
                   <a:srgbClr val="D4D4D4"/>
                 </a:solidFill>
@@ -6795,7 +6795,7 @@
               <a:t>(</a:t>
             </a:r>
             <a:r>
-              <a:rPr sz="1700" i="0" b="0">
+              <a:rPr sz="1600" i="0" b="0">
                 <a:solidFill>
                   <a:srgbClr val="CE9178"/>
                 </a:solidFill>
@@ -6804,7 +6804,7 @@
               <a:t>"Consulta de "</a:t>
             </a:r>
             <a:r>
-              <a:rPr sz="1700" i="0" b="0">
+              <a:rPr sz="1600" i="0" b="0">
                 <a:solidFill>
                   <a:srgbClr val="D4D4D4"/>
                 </a:solidFill>
@@ -6813,7 +6813,7 @@
               <a:t> + </a:t>
             </a:r>
             <a:r>
-              <a:rPr sz="1700" i="0" b="0">
+              <a:rPr sz="1600" i="0" b="0">
                 <a:solidFill>
                   <a:srgbClr val="DCDCAA"/>
                 </a:solidFill>
@@ -6822,7 +6822,7 @@
               <a:t>t.getNombre</a:t>
             </a:r>
             <a:r>
-              <a:rPr sz="1700" i="0" b="0">
+              <a:rPr sz="1600" i="0" b="0">
                 <a:solidFill>
                   <a:srgbClr val="D4D4D4"/>
                 </a:solidFill>
@@ -6831,7 +6831,7 @@
               <a:t>() + </a:t>
             </a:r>
             <a:r>
-              <a:rPr sz="1700" i="0" b="0">
+              <a:rPr sz="1600" i="0" b="0">
                 <a:solidFill>
                   <a:srgbClr val="CE9178"/>
                 </a:solidFill>
@@ -6840,7 +6840,7 @@
               <a:t>" ("</a:t>
             </a:r>
             <a:r>
-              <a:rPr sz="1700" i="0" b="0">
+              <a:rPr sz="1600" i="0" b="0">
                 <a:solidFill>
                   <a:srgbClr val="D4D4D4"/>
                 </a:solidFill>
@@ -6849,7 +6849,7 @@
               <a:t> + </a:t>
             </a:r>
             <a:r>
-              <a:rPr sz="1700" i="0" b="0">
+              <a:rPr sz="1600" i="0" b="0">
                 <a:solidFill>
                   <a:srgbClr val="DCDCAA"/>
                 </a:solidFill>
@@ -6858,7 +6858,7 @@
               <a:t>t.getId</a:t>
             </a:r>
             <a:r>
-              <a:rPr sz="1700" i="0" b="0">
+              <a:rPr sz="1600" i="0" b="0">
                 <a:solidFill>
                   <a:srgbClr val="D4D4D4"/>
                 </a:solidFill>
@@ -6867,7 +6867,7 @@
               <a:t>() + </a:t>
             </a:r>
             <a:r>
-              <a:rPr sz="1700" i="0" b="0">
+              <a:rPr sz="1600" i="0" b="0">
                 <a:solidFill>
                   <a:srgbClr val="CE9178"/>
                 </a:solidFill>
@@ -6876,7 +6876,7 @@
               <a:t>")"</a:t>
             </a:r>
             <a:r>
-              <a:rPr sz="1700" i="0" b="0">
+              <a:rPr sz="1600" i="0" b="0">
                 <a:solidFill>
                   <a:srgbClr val="D4D4D4"/>
                 </a:solidFill>
@@ -6888,11 +6888,11 @@
           <a:p>
             <a:pPr>
               <a:spcAft>
-                <a:spcPts val="364"/>
+                <a:spcPts val="342"/>
               </a:spcAft>
             </a:pPr>
             <a:r>
-              <a:rPr sz="1700" i="0" b="0">
+              <a:rPr sz="1600" i="0" b="0">
                 <a:solidFill>
                   <a:srgbClr val="D4D4D4"/>
                 </a:solidFill>
@@ -6904,11 +6904,11 @@
           <a:p>
             <a:pPr>
               <a:spcAft>
-                <a:spcPts val="364"/>
+                <a:spcPts val="342"/>
               </a:spcAft>
             </a:pPr>
             <a:r>
-              <a:rPr sz="1700" i="0" b="0">
+              <a:rPr sz="1600" i="0" b="0">
                 <a:solidFill>
                   <a:srgbClr val="DCDCAA"/>
                 </a:solidFill>
@@ -6917,7 +6917,7 @@
               <a:t>sala.atender</a:t>
             </a:r>
             <a:r>
-              <a:rPr sz="1700" i="0" b="0">
+              <a:rPr sz="1600" i="0" b="0">
                 <a:solidFill>
                   <a:srgbClr val="D4D4D4"/>
                 </a:solidFill>
@@ -6926,7 +6926,7 @@
               <a:t>(); </a:t>
             </a:r>
             <a:r>
-              <a:rPr sz="1700" i="1" b="0">
+              <a:rPr sz="1600" i="1" b="0">
                 <a:solidFill>
                   <a:srgbClr val="6A9955"/>
                 </a:solidFill>
@@ -6938,11 +6938,11 @@
           <a:p>
             <a:pPr>
               <a:spcAft>
-                <a:spcPts val="364"/>
+                <a:spcPts val="342"/>
               </a:spcAft>
             </a:pPr>
             <a:r>
-              <a:rPr sz="1700" i="0" b="0">
+              <a:rPr sz="1600" i="0" b="0">
                 <a:solidFill>
                   <a:srgbClr val="D4D4D4"/>
                 </a:solidFill>
@@ -6954,11 +6954,11 @@
           <a:p>
             <a:pPr>
               <a:spcAft>
-                <a:spcPts val="364"/>
+                <a:spcPts val="342"/>
               </a:spcAft>
             </a:pPr>
             <a:r>
-              <a:rPr sz="1700" i="0" b="0">
+              <a:rPr sz="1600" i="0" b="0">
                 <a:solidFill>
                   <a:srgbClr val="DCDCAA"/>
                 </a:solidFill>
@@ -6967,7 +6967,7 @@
               <a:t>System.out.println</a:t>
             </a:r>
             <a:r>
-              <a:rPr sz="1700" i="0" b="0">
+              <a:rPr sz="1600" i="0" b="0">
                 <a:solidFill>
                   <a:srgbClr val="D4D4D4"/>
                 </a:solidFill>
@@ -6979,11 +6979,11 @@
           <a:p>
             <a:pPr>
               <a:spcAft>
-                <a:spcPts val="364"/>
+                <a:spcPts val="342"/>
               </a:spcAft>
             </a:pPr>
             <a:r>
-              <a:rPr sz="1700" i="0" b="0">
+              <a:rPr sz="1600" i="0" b="0">
                 <a:solidFill>
                   <a:srgbClr val="DCDCAA"/>
                 </a:solidFill>
@@ -6992,7 +6992,7 @@
               <a:t>System.out.println</a:t>
             </a:r>
             <a:r>
-              <a:rPr sz="1700" i="0" b="0">
+              <a:rPr sz="1600" i="0" b="0">
                 <a:solidFill>
                   <a:srgbClr val="D4D4D4"/>
                 </a:solidFill>
@@ -7001,7 +7001,7 @@
               <a:t>(</a:t>
             </a:r>
             <a:r>
-              <a:rPr sz="1700" i="0" b="0">
+              <a:rPr sz="1600" i="0" b="0">
                 <a:solidFill>
                   <a:srgbClr val="CE9178"/>
                 </a:solidFill>
@@ -7010,7 +7010,7 @@
               <a:t>"=== 3. Historial reciente (LIFO) ==="</a:t>
             </a:r>
             <a:r>
-              <a:rPr sz="1700" i="0" b="0">
+              <a:rPr sz="1600" i="0" b="0">
                 <a:solidFill>
                   <a:srgbClr val="D4D4D4"/>
                 </a:solidFill>
@@ -7022,11 +7022,11 @@
           <a:p>
             <a:pPr>
               <a:spcAft>
-                <a:spcPts val="364"/>
+                <a:spcPts val="342"/>
               </a:spcAft>
             </a:pPr>
             <a:r>
-              <a:rPr sz="1700" i="0" b="0">
+              <a:rPr sz="1600" i="0" b="0">
                 <a:solidFill>
                   <a:srgbClr val="DCDCAA"/>
                 </a:solidFill>
@@ -7035,7 +7035,7 @@
               <a:t>System.out.println</a:t>
             </a:r>
             <a:r>
-              <a:rPr sz="1700" i="0" b="0">
+              <a:rPr sz="1600" i="0" b="0">
                 <a:solidFill>
                   <a:srgbClr val="D4D4D4"/>
                 </a:solidFill>
@@ -7044,7 +7044,7 @@
               <a:t>(</a:t>
             </a:r>
             <a:r>
-              <a:rPr sz="1700" i="0" b="0">
+              <a:rPr sz="1600" i="0" b="0">
                 <a:solidFill>
                   <a:srgbClr val="CE9178"/>
                 </a:solidFill>
@@ -7053,7 +7053,7 @@
               <a:t>"Ultimo movimiento (peek): "</a:t>
             </a:r>
             <a:r>
-              <a:rPr sz="1700" i="0" b="0">
+              <a:rPr sz="1600" i="0" b="0">
                 <a:solidFill>
                   <a:srgbClr val="D4D4D4"/>
                 </a:solidFill>
@@ -7062,7 +7062,7 @@
               <a:t> + </a:t>
             </a:r>
             <a:r>
-              <a:rPr sz="1700" i="0" b="0">
+              <a:rPr sz="1600" i="0" b="0">
                 <a:solidFill>
                   <a:srgbClr val="DCDCAA"/>
                 </a:solidFill>
@@ -7071,7 +7071,7 @@
               <a:t>historial.ultimaAtencion</a:t>
             </a:r>
             <a:r>
-              <a:rPr sz="1700" i="0" b="0">
+              <a:rPr sz="1600" i="0" b="0">
                 <a:solidFill>
                   <a:srgbClr val="D4D4D4"/>
                 </a:solidFill>
@@ -7083,11 +7083,11 @@
           <a:p>
             <a:pPr>
               <a:spcAft>
-                <a:spcPts val="364"/>
+                <a:spcPts val="342"/>
               </a:spcAft>
             </a:pPr>
             <a:r>
-              <a:rPr sz="1700" i="0" b="0">
+              <a:rPr sz="1600" i="0" b="0">
                 <a:solidFill>
                   <a:srgbClr val="DCDCAA"/>
                 </a:solidFill>
@@ -7096,7 +7096,7 @@
               <a:t>System.out.println</a:t>
             </a:r>
             <a:r>
-              <a:rPr sz="1700" i="0" b="0">
+              <a:rPr sz="1600" i="0" b="0">
                 <a:solidFill>
                   <a:srgbClr val="D4D4D4"/>
                 </a:solidFill>
@@ -7105,7 +7105,7 @@
               <a:t>(</a:t>
             </a:r>
             <a:r>
-              <a:rPr sz="1700" i="0" b="0">
+              <a:rPr sz="1600" i="0" b="0">
                 <a:solidFill>
                   <a:srgbClr val="DCDCAA"/>
                 </a:solidFill>
@@ -7114,7 +7114,7 @@
               <a:t>historial.deshacer</a:t>
             </a:r>
             <a:r>
-              <a:rPr sz="1700" i="0" b="0">
+              <a:rPr sz="1600" i="0" b="0">
                 <a:solidFill>
                   <a:srgbClr val="D4D4D4"/>
                 </a:solidFill>
@@ -7126,11 +7126,11 @@
           <a:p>
             <a:pPr>
               <a:spcAft>
-                <a:spcPts val="364"/>
+                <a:spcPts val="342"/>
               </a:spcAft>
             </a:pPr>
             <a:r>
-              <a:rPr sz="1700" i="0" b="0">
+              <a:rPr sz="1600" i="0" b="0">
                 <a:solidFill>
                   <a:srgbClr val="DCDCAA"/>
                 </a:solidFill>
@@ -7139,7 +7139,7 @@
               <a:t>System.out.println</a:t>
             </a:r>
             <a:r>
-              <a:rPr sz="1700" i="0" b="0">
+              <a:rPr sz="1600" i="0" b="0">
                 <a:solidFill>
                   <a:srgbClr val="D4D4D4"/>
                 </a:solidFill>
@@ -7148,7 +7148,7 @@
               <a:t>(</a:t>
             </a:r>
             <a:r>
-              <a:rPr sz="1700" i="0" b="0">
+              <a:rPr sz="1600" i="0" b="0">
                 <a:solidFill>
                   <a:srgbClr val="CE9178"/>
                 </a:solidFill>
@@ -7157,7 +7157,7 @@
               <a:t>"Ahora el ultimo es: "</a:t>
             </a:r>
             <a:r>
-              <a:rPr sz="1700" i="0" b="0">
+              <a:rPr sz="1600" i="0" b="0">
                 <a:solidFill>
                   <a:srgbClr val="D4D4D4"/>
                 </a:solidFill>
@@ -7166,7 +7166,7 @@
               <a:t> + </a:t>
             </a:r>
             <a:r>
-              <a:rPr sz="1700" i="0" b="0">
+              <a:rPr sz="1600" i="0" b="0">
                 <a:solidFill>
                   <a:srgbClr val="DCDCAA"/>
                 </a:solidFill>
@@ -7175,7 +7175,7 @@
               <a:t>historial.ultimaAtencion</a:t>
             </a:r>
             <a:r>
-              <a:rPr sz="1700" i="0" b="0">
+              <a:rPr sz="1600" i="0" b="0">
                 <a:solidFill>
                   <a:srgbClr val="D4D4D4"/>
                 </a:solidFill>
@@ -7187,11 +7187,11 @@
           <a:p>
             <a:pPr>
               <a:spcAft>
-                <a:spcPts val="364"/>
+                <a:spcPts val="342"/>
               </a:spcAft>
             </a:pPr>
             <a:r>
-              <a:rPr sz="1700" i="0" b="0">
+              <a:rPr sz="1600" i="0" b="0">
                 <a:solidFill>
                   <a:srgbClr val="DCDCAA"/>
                 </a:solidFill>
@@ -7200,7 +7200,7 @@
               <a:t>System.out.println</a:t>
             </a:r>
             <a:r>
-              <a:rPr sz="1700" i="0" b="0">
+              <a:rPr sz="1600" i="0" b="0">
                 <a:solidFill>
                   <a:srgbClr val="D4D4D4"/>
                 </a:solidFill>
@@ -7209,7 +7209,7 @@
               <a:t>(</a:t>
             </a:r>
             <a:r>
-              <a:rPr sz="1700" i="0" b="0">
+              <a:rPr sz="1600" i="0" b="0">
                 <a:solidFill>
                   <a:srgbClr val="CE9178"/>
                 </a:solidFill>
@@ -7218,7 +7218,7 @@
               <a:t>"Movimientos guardados: "</a:t>
             </a:r>
             <a:r>
-              <a:rPr sz="1700" i="0" b="0">
+              <a:rPr sz="1600" i="0" b="0">
                 <a:solidFill>
                   <a:srgbClr val="D4D4D4"/>
                 </a:solidFill>
@@ -7227,7 +7227,7 @@
               <a:t> + </a:t>
             </a:r>
             <a:r>
-              <a:rPr sz="1700" i="0" b="0">
+              <a:rPr sz="1600" i="0" b="0">
                 <a:solidFill>
                   <a:srgbClr val="DCDCAA"/>
                 </a:solidFill>
@@ -7236,7 +7236,7 @@
               <a:t>historial.cantidad</a:t>
             </a:r>
             <a:r>
-              <a:rPr sz="1700" i="0" b="0">
+              <a:rPr sz="1600" i="0" b="0">
                 <a:solidFill>
                   <a:srgbClr val="D4D4D4"/>
                 </a:solidFill>
@@ -8722,7 +8722,7 @@
         <p:spPr>
           <a:xfrm>
             <a:off x="457200" y="1261872"/>
-            <a:ext cx="11277295" cy="4106425"/>
+            <a:ext cx="11277295" cy="2633647"/>
           </a:xfrm>
           <a:prstGeom prst="roundRect">
             <a:avLst>
@@ -8971,8 +8971,8 @@
         </p:nvSpPr>
         <p:spPr>
           <a:xfrm>
-            <a:off x="1188720" y="1719072"/>
-            <a:ext cx="10271455" cy="3512065"/>
+            <a:off x="685800" y="1719072"/>
+            <a:ext cx="502920" cy="2039287"/>
           </a:xfrm>
           <a:prstGeom prst="rect">
             <a:avLst/>
@@ -8985,628 +8985,115 @@
           </a:bodyPr>
           <a:lstStyle/>
           <a:p>
-            <a:pPr>
+            <a:pPr algn="r">
               <a:spcAft>
-                <a:spcPts val="428"/>
+                <a:spcPts val="321"/>
               </a:spcAft>
             </a:pPr>
             <a:r>
-              <a:rPr sz="2000" i="0" b="0">
-                <a:solidFill>
-                  <a:srgbClr val="4EC9B0"/>
-                </a:solidFill>
-                <a:latin typeface="Consolas"/>
-              </a:rPr>
-              <a:t>Deque</a:t>
-            </a:r>
-            <a:r>
-              <a:rPr sz="2000" i="0" b="0">
-                <a:solidFill>
-                  <a:srgbClr val="D4D4D4"/>
-                </a:solidFill>
-                <a:latin typeface="Consolas"/>
-              </a:rPr>
-              <a:t>&lt;</a:t>
-            </a:r>
-            <a:r>
-              <a:rPr sz="2000" i="0" b="0">
-                <a:solidFill>
-                  <a:srgbClr val="D4D4D4"/>
-                </a:solidFill>
-                <a:latin typeface="Consolas"/>
-              </a:rPr>
-              <a:t>Turno</a:t>
-            </a:r>
-            <a:r>
-              <a:rPr sz="2000" i="0" b="0">
-                <a:solidFill>
-                  <a:srgbClr val="D4D4D4"/>
-                </a:solidFill>
-                <a:latin typeface="Consolas"/>
-              </a:rPr>
-              <a:t>&gt; </a:t>
-            </a:r>
-            <a:r>
-              <a:rPr sz="2000" i="0" b="0">
-                <a:solidFill>
-                  <a:srgbClr val="D4D4D4"/>
-                </a:solidFill>
-                <a:latin typeface="Consolas"/>
-              </a:rPr>
-              <a:t>filaConUrgencias</a:t>
-            </a:r>
-            <a:r>
-              <a:rPr sz="2000" i="0" b="0">
-                <a:solidFill>
-                  <a:srgbClr val="D4D4D4"/>
-                </a:solidFill>
-                <a:latin typeface="Consolas"/>
-              </a:rPr>
-              <a:t> = </a:t>
-            </a:r>
-            <a:r>
-              <a:rPr sz="2000" i="0" b="0">
-                <a:solidFill>
-                  <a:srgbClr val="569CD6"/>
-                </a:solidFill>
-                <a:latin typeface="Consolas"/>
-              </a:rPr>
-              <a:t>new</a:t>
-            </a:r>
-            <a:r>
-              <a:rPr sz="2000" i="0" b="0">
-                <a:solidFill>
-                  <a:srgbClr val="D4D4D4"/>
-                </a:solidFill>
-                <a:latin typeface="Consolas"/>
-              </a:rPr>
-              <a:t> </a:t>
-            </a:r>
-            <a:r>
-              <a:rPr sz="2000" i="0" b="0">
-                <a:solidFill>
-                  <a:srgbClr val="4EC9B0"/>
-                </a:solidFill>
-                <a:latin typeface="Consolas"/>
-              </a:rPr>
-              <a:t>ArrayDeque</a:t>
-            </a:r>
-            <a:r>
-              <a:rPr sz="2000" i="0" b="0">
-                <a:solidFill>
-                  <a:srgbClr val="D4D4D4"/>
-                </a:solidFill>
-                <a:latin typeface="Consolas"/>
-              </a:rPr>
-              <a:t>&lt;&gt;();</a:t>
-            </a:r>
-          </a:p>
-          <a:p>
-            <a:pPr>
+              <a:rPr sz="1500" i="0" b="0">
+                <a:solidFill>
+                  <a:srgbClr val="858585"/>
+                </a:solidFill>
+                <a:latin typeface="Consolas"/>
+              </a:rPr>
+              <a:t>1</a:t>
+            </a:r>
+          </a:p>
+          <a:p>
+            <a:pPr algn="r">
               <a:spcAft>
-                <a:spcPts val="428"/>
+                <a:spcPts val="321"/>
               </a:spcAft>
             </a:pPr>
             <a:r>
-              <a:rPr sz="2000" i="0" b="0">
-                <a:solidFill>
-                  <a:srgbClr val="DCDCAA"/>
-                </a:solidFill>
-                <a:latin typeface="Consolas"/>
-              </a:rPr>
-              <a:t>filaConUrgencias.addLast</a:t>
-            </a:r>
-            <a:r>
-              <a:rPr sz="2000" i="0" b="0">
-                <a:solidFill>
-                  <a:srgbClr val="D4D4D4"/>
-                </a:solidFill>
-                <a:latin typeface="Consolas"/>
-              </a:rPr>
-              <a:t>(</a:t>
-            </a:r>
-            <a:r>
-              <a:rPr sz="2000" i="0" b="0">
-                <a:solidFill>
-                  <a:srgbClr val="569CD6"/>
-                </a:solidFill>
-                <a:latin typeface="Consolas"/>
-              </a:rPr>
-              <a:t>new</a:t>
-            </a:r>
-            <a:r>
-              <a:rPr sz="2000" i="0" b="0">
-                <a:solidFill>
-                  <a:srgbClr val="D4D4D4"/>
-                </a:solidFill>
-                <a:latin typeface="Consolas"/>
-              </a:rPr>
-              <a:t> </a:t>
-            </a:r>
-            <a:r>
-              <a:rPr sz="2000" i="0" b="0">
-                <a:solidFill>
-                  <a:srgbClr val="4EC9B0"/>
-                </a:solidFill>
-                <a:latin typeface="Consolas"/>
-              </a:rPr>
-              <a:t>Turno</a:t>
-            </a:r>
-            <a:r>
-              <a:rPr sz="2000" i="0" b="0">
-                <a:solidFill>
-                  <a:srgbClr val="D4D4D4"/>
-                </a:solidFill>
-                <a:latin typeface="Consolas"/>
-              </a:rPr>
-              <a:t>(</a:t>
-            </a:r>
-            <a:r>
-              <a:rPr sz="2000" i="0" b="0">
-                <a:solidFill>
-                  <a:srgbClr val="CE9178"/>
-                </a:solidFill>
-                <a:latin typeface="Consolas"/>
-              </a:rPr>
-              <a:t>"M-004"</a:t>
-            </a:r>
-            <a:r>
-              <a:rPr sz="2000" i="0" b="0">
-                <a:solidFill>
-                  <a:srgbClr val="D4D4D4"/>
-                </a:solidFill>
-                <a:latin typeface="Consolas"/>
-              </a:rPr>
-              <a:t>, </a:t>
-            </a:r>
-            <a:r>
-              <a:rPr sz="2000" i="0" b="0">
-                <a:solidFill>
-                  <a:srgbClr val="CE9178"/>
-                </a:solidFill>
-                <a:latin typeface="Consolas"/>
-              </a:rPr>
-              <a:t>"Nieve"</a:t>
-            </a:r>
-            <a:r>
-              <a:rPr sz="2000" i="0" b="0">
-                <a:solidFill>
-                  <a:srgbClr val="D4D4D4"/>
-                </a:solidFill>
-                <a:latin typeface="Consolas"/>
-              </a:rPr>
-              <a:t>, </a:t>
-            </a:r>
-            <a:r>
-              <a:rPr sz="2000" i="0" b="0">
-                <a:solidFill>
-                  <a:srgbClr val="CE9178"/>
-                </a:solidFill>
-                <a:latin typeface="Consolas"/>
-              </a:rPr>
-              <a:t>"Sara Diaz"</a:t>
-            </a:r>
-            <a:r>
-              <a:rPr sz="2000" i="0" b="0">
-                <a:solidFill>
-                  <a:srgbClr val="D4D4D4"/>
-                </a:solidFill>
-                <a:latin typeface="Consolas"/>
-              </a:rPr>
-              <a:t>, </a:t>
-            </a:r>
-            <a:r>
-              <a:rPr sz="2000" i="0" b="0">
-                <a:solidFill>
-                  <a:srgbClr val="CE9178"/>
-                </a:solidFill>
-                <a:latin typeface="Consolas"/>
-              </a:rPr>
-              <a:t>"Desparasitacion"</a:t>
-            </a:r>
-            <a:r>
-              <a:rPr sz="2000" i="0" b="0">
-                <a:solidFill>
-                  <a:srgbClr val="D4D4D4"/>
-                </a:solidFill>
-                <a:latin typeface="Consolas"/>
-              </a:rPr>
-              <a:t>));</a:t>
-            </a:r>
-          </a:p>
-          <a:p>
-            <a:pPr>
+              <a:rPr sz="1500" i="0" b="0">
+                <a:solidFill>
+                  <a:srgbClr val="858585"/>
+                </a:solidFill>
+                <a:latin typeface="Consolas"/>
+              </a:rPr>
+              <a:t>2</a:t>
+            </a:r>
+          </a:p>
+          <a:p>
+            <a:pPr algn="r">
               <a:spcAft>
-                <a:spcPts val="428"/>
+                <a:spcPts val="321"/>
               </a:spcAft>
             </a:pPr>
             <a:r>
-              <a:rPr sz="2000" i="0" b="0">
-                <a:solidFill>
-                  <a:srgbClr val="DCDCAA"/>
-                </a:solidFill>
-                <a:latin typeface="Consolas"/>
-              </a:rPr>
-              <a:t>filaConUrgencias.addLast</a:t>
-            </a:r>
-            <a:r>
-              <a:rPr sz="2000" i="0" b="0">
-                <a:solidFill>
-                  <a:srgbClr val="D4D4D4"/>
-                </a:solidFill>
-                <a:latin typeface="Consolas"/>
-              </a:rPr>
-              <a:t>(</a:t>
-            </a:r>
-            <a:r>
-              <a:rPr sz="2000" i="0" b="0">
-                <a:solidFill>
-                  <a:srgbClr val="569CD6"/>
-                </a:solidFill>
-                <a:latin typeface="Consolas"/>
-              </a:rPr>
-              <a:t>new</a:t>
-            </a:r>
-            <a:r>
-              <a:rPr sz="2000" i="0" b="0">
-                <a:solidFill>
-                  <a:srgbClr val="D4D4D4"/>
-                </a:solidFill>
-                <a:latin typeface="Consolas"/>
-              </a:rPr>
-              <a:t> </a:t>
-            </a:r>
-            <a:r>
-              <a:rPr sz="2000" i="0" b="0">
-                <a:solidFill>
-                  <a:srgbClr val="4EC9B0"/>
-                </a:solidFill>
-                <a:latin typeface="Consolas"/>
-              </a:rPr>
-              <a:t>Turno</a:t>
-            </a:r>
-            <a:r>
-              <a:rPr sz="2000" i="0" b="0">
-                <a:solidFill>
-                  <a:srgbClr val="D4D4D4"/>
-                </a:solidFill>
-                <a:latin typeface="Consolas"/>
-              </a:rPr>
-              <a:t>(</a:t>
-            </a:r>
-            <a:r>
-              <a:rPr sz="2000" i="0" b="0">
-                <a:solidFill>
-                  <a:srgbClr val="CE9178"/>
-                </a:solidFill>
-                <a:latin typeface="Consolas"/>
-              </a:rPr>
-              <a:t>"M-005"</a:t>
-            </a:r>
-            <a:r>
-              <a:rPr sz="2000" i="0" b="0">
-                <a:solidFill>
-                  <a:srgbClr val="D4D4D4"/>
-                </a:solidFill>
-                <a:latin typeface="Consolas"/>
-              </a:rPr>
-              <a:t>, </a:t>
-            </a:r>
-            <a:r>
-              <a:rPr sz="2000" i="0" b="0">
-                <a:solidFill>
-                  <a:srgbClr val="CE9178"/>
-                </a:solidFill>
-                <a:latin typeface="Consolas"/>
-              </a:rPr>
-              <a:t>"Toby"</a:t>
-            </a:r>
-            <a:r>
-              <a:rPr sz="2000" i="0" b="0">
-                <a:solidFill>
-                  <a:srgbClr val="D4D4D4"/>
-                </a:solidFill>
-                <a:latin typeface="Consolas"/>
-              </a:rPr>
-              <a:t>, </a:t>
-            </a:r>
-            <a:r>
-              <a:rPr sz="2000" i="0" b="0">
-                <a:solidFill>
-                  <a:srgbClr val="CE9178"/>
-                </a:solidFill>
-                <a:latin typeface="Consolas"/>
-              </a:rPr>
-              <a:t>"Sara Diaz"</a:t>
-            </a:r>
-            <a:r>
-              <a:rPr sz="2000" i="0" b="0">
-                <a:solidFill>
-                  <a:srgbClr val="D4D4D4"/>
-                </a:solidFill>
-                <a:latin typeface="Consolas"/>
-              </a:rPr>
-              <a:t>, </a:t>
-            </a:r>
-            <a:r>
-              <a:rPr sz="2000" i="0" b="0">
-                <a:solidFill>
-                  <a:srgbClr val="CE9178"/>
-                </a:solidFill>
-                <a:latin typeface="Consolas"/>
-              </a:rPr>
-              <a:t>"Control"</a:t>
-            </a:r>
-            <a:r>
-              <a:rPr sz="2000" i="0" b="0">
-                <a:solidFill>
-                  <a:srgbClr val="D4D4D4"/>
-                </a:solidFill>
-                <a:latin typeface="Consolas"/>
-              </a:rPr>
-              <a:t>));</a:t>
-            </a:r>
-          </a:p>
-          <a:p>
-            <a:pPr>
+              <a:rPr sz="1500" i="0" b="0">
+                <a:solidFill>
+                  <a:srgbClr val="858585"/>
+                </a:solidFill>
+                <a:latin typeface="Consolas"/>
+              </a:rPr>
+              <a:t>3</a:t>
+            </a:r>
+          </a:p>
+          <a:p>
+            <a:pPr algn="r">
               <a:spcAft>
-                <a:spcPts val="428"/>
+                <a:spcPts val="321"/>
               </a:spcAft>
             </a:pPr>
             <a:r>
-              <a:rPr sz="2000" i="0" b="0">
-                <a:solidFill>
-                  <a:srgbClr val="DCDCAA"/>
-                </a:solidFill>
-                <a:latin typeface="Consolas"/>
-              </a:rPr>
-              <a:t>filaConUrgencias.addFirst</a:t>
-            </a:r>
-            <a:r>
-              <a:rPr sz="2000" i="0" b="0">
-                <a:solidFill>
-                  <a:srgbClr val="D4D4D4"/>
-                </a:solidFill>
-                <a:latin typeface="Consolas"/>
-              </a:rPr>
-              <a:t>(</a:t>
-            </a:r>
-            <a:r>
-              <a:rPr sz="2000" i="0" b="0">
-                <a:solidFill>
-                  <a:srgbClr val="569CD6"/>
-                </a:solidFill>
-                <a:latin typeface="Consolas"/>
-              </a:rPr>
-              <a:t>new</a:t>
-            </a:r>
-            <a:r>
-              <a:rPr sz="2000" i="0" b="0">
-                <a:solidFill>
-                  <a:srgbClr val="D4D4D4"/>
-                </a:solidFill>
-                <a:latin typeface="Consolas"/>
-              </a:rPr>
-              <a:t> </a:t>
-            </a:r>
-            <a:r>
-              <a:rPr sz="2000" i="0" b="0">
-                <a:solidFill>
-                  <a:srgbClr val="4EC9B0"/>
-                </a:solidFill>
-                <a:latin typeface="Consolas"/>
-              </a:rPr>
-              <a:t>Turno</a:t>
-            </a:r>
-            <a:r>
-              <a:rPr sz="2000" i="0" b="0">
-                <a:solidFill>
-                  <a:srgbClr val="D4D4D4"/>
-                </a:solidFill>
-                <a:latin typeface="Consolas"/>
-              </a:rPr>
-              <a:t>(</a:t>
-            </a:r>
-            <a:r>
-              <a:rPr sz="2000" i="0" b="0">
-                <a:solidFill>
-                  <a:srgbClr val="CE9178"/>
-                </a:solidFill>
-                <a:latin typeface="Consolas"/>
-              </a:rPr>
-              <a:t>"M-009"</a:t>
-            </a:r>
-            <a:r>
-              <a:rPr sz="2000" i="0" b="0">
-                <a:solidFill>
-                  <a:srgbClr val="D4D4D4"/>
-                </a:solidFill>
-                <a:latin typeface="Consolas"/>
-              </a:rPr>
-              <a:t>, </a:t>
-            </a:r>
-            <a:r>
-              <a:rPr sz="2000" i="0" b="0">
-                <a:solidFill>
-                  <a:srgbClr val="CE9178"/>
-                </a:solidFill>
-                <a:latin typeface="Consolas"/>
-              </a:rPr>
-              <a:t>"Canela"</a:t>
-            </a:r>
-            <a:r>
-              <a:rPr sz="2000" i="0" b="0">
-                <a:solidFill>
-                  <a:srgbClr val="D4D4D4"/>
-                </a:solidFill>
-                <a:latin typeface="Consolas"/>
-              </a:rPr>
-              <a:t>, </a:t>
-            </a:r>
-            <a:r>
-              <a:rPr sz="2000" i="0" b="0">
-                <a:solidFill>
-                  <a:srgbClr val="CE9178"/>
-                </a:solidFill>
-                <a:latin typeface="Consolas"/>
-              </a:rPr>
-              <a:t>"Ana Gomez"</a:t>
-            </a:r>
-            <a:r>
-              <a:rPr sz="2000" i="0" b="0">
-                <a:solidFill>
-                  <a:srgbClr val="D4D4D4"/>
-                </a:solidFill>
-                <a:latin typeface="Consolas"/>
-              </a:rPr>
-              <a:t>, </a:t>
-            </a:r>
-            <a:r>
-              <a:rPr sz="2000" i="0" b="0">
-                <a:solidFill>
-                  <a:srgbClr val="CE9178"/>
-                </a:solidFill>
-                <a:latin typeface="Consolas"/>
-              </a:rPr>
-              <a:t>"URGENCIA"</a:t>
-            </a:r>
-            <a:r>
-              <a:rPr sz="2000" i="0" b="0">
-                <a:solidFill>
-                  <a:srgbClr val="D4D4D4"/>
-                </a:solidFill>
-                <a:latin typeface="Consolas"/>
-              </a:rPr>
-              <a:t>));</a:t>
-            </a:r>
-          </a:p>
-          <a:p>
-            <a:pPr>
+              <a:rPr sz="1500" i="0" b="0">
+                <a:solidFill>
+                  <a:srgbClr val="858585"/>
+                </a:solidFill>
+                <a:latin typeface="Consolas"/>
+              </a:rPr>
+              <a:t>4</a:t>
+            </a:r>
+          </a:p>
+          <a:p>
+            <a:pPr algn="r">
               <a:spcAft>
-                <a:spcPts val="428"/>
+                <a:spcPts val="321"/>
               </a:spcAft>
             </a:pPr>
             <a:r>
-              <a:rPr sz="2000" i="0" b="0">
-                <a:solidFill>
-                  <a:srgbClr val="569CD6"/>
-                </a:solidFill>
-                <a:latin typeface="Consolas"/>
-              </a:rPr>
-              <a:t>while</a:t>
-            </a:r>
-            <a:r>
-              <a:rPr sz="2000" i="0" b="0">
-                <a:solidFill>
-                  <a:srgbClr val="D4D4D4"/>
-                </a:solidFill>
-                <a:latin typeface="Consolas"/>
-              </a:rPr>
-              <a:t> (!</a:t>
-            </a:r>
-            <a:r>
-              <a:rPr sz="2000" i="0" b="0">
-                <a:solidFill>
-                  <a:srgbClr val="DCDCAA"/>
-                </a:solidFill>
-                <a:latin typeface="Consolas"/>
-              </a:rPr>
-              <a:t>filaConUrgencias.isEmpty</a:t>
-            </a:r>
-            <a:r>
-              <a:rPr sz="2000" i="0" b="0">
-                <a:solidFill>
-                  <a:srgbClr val="D4D4D4"/>
-                </a:solidFill>
-                <a:latin typeface="Consolas"/>
-              </a:rPr>
-              <a:t>()) {</a:t>
-            </a:r>
-          </a:p>
-          <a:p>
-            <a:pPr>
+              <a:rPr sz="1500" i="0" b="0">
+                <a:solidFill>
+                  <a:srgbClr val="858585"/>
+                </a:solidFill>
+                <a:latin typeface="Consolas"/>
+              </a:rPr>
+              <a:t>5</a:t>
+            </a:r>
+          </a:p>
+          <a:p>
+            <a:pPr algn="r">
               <a:spcAft>
-                <a:spcPts val="428"/>
+                <a:spcPts val="321"/>
               </a:spcAft>
             </a:pPr>
             <a:r>
-              <a:rPr sz="2000" i="0" b="0">
-                <a:solidFill>
-                  <a:srgbClr val="D4D4D4"/>
-                </a:solidFill>
-                <a:latin typeface="Consolas"/>
-              </a:rPr>
-              <a:t>    </a:t>
-            </a:r>
-            <a:r>
-              <a:rPr sz="2000" i="0" b="0">
-                <a:solidFill>
-                  <a:srgbClr val="DCDCAA"/>
-                </a:solidFill>
-                <a:latin typeface="Consolas"/>
-              </a:rPr>
-              <a:t>System.out.println</a:t>
-            </a:r>
-            <a:r>
-              <a:rPr sz="2000" i="0" b="0">
-                <a:solidFill>
-                  <a:srgbClr val="D4D4D4"/>
-                </a:solidFill>
-                <a:latin typeface="Consolas"/>
-              </a:rPr>
-              <a:t>(</a:t>
-            </a:r>
-            <a:r>
-              <a:rPr sz="2000" i="0" b="0">
-                <a:solidFill>
-                  <a:srgbClr val="CE9178"/>
-                </a:solidFill>
-                <a:latin typeface="Consolas"/>
-              </a:rPr>
-              <a:t>"Pasa: "</a:t>
-            </a:r>
-            <a:r>
-              <a:rPr sz="2000" i="0" b="0">
-                <a:solidFill>
-                  <a:srgbClr val="D4D4D4"/>
-                </a:solidFill>
-                <a:latin typeface="Consolas"/>
-              </a:rPr>
-              <a:t> + </a:t>
-            </a:r>
-            <a:r>
-              <a:rPr sz="2000" i="0" b="0">
-                <a:solidFill>
-                  <a:srgbClr val="DCDCAA"/>
-                </a:solidFill>
-                <a:latin typeface="Consolas"/>
-              </a:rPr>
-              <a:t>filaConUrgencias.pollFirst</a:t>
-            </a:r>
-            <a:r>
-              <a:rPr sz="2000" i="0" b="0">
-                <a:solidFill>
-                  <a:srgbClr val="D4D4D4"/>
-                </a:solidFill>
-                <a:latin typeface="Consolas"/>
-              </a:rPr>
-              <a:t>());</a:t>
-            </a:r>
-          </a:p>
-          <a:p>
-            <a:pPr>
+              <a:rPr sz="1500" i="0" b="0">
+                <a:solidFill>
+                  <a:srgbClr val="858585"/>
+                </a:solidFill>
+                <a:latin typeface="Consolas"/>
+              </a:rPr>
+              <a:t>6</a:t>
+            </a:r>
+          </a:p>
+          <a:p>
+            <a:pPr algn="r">
               <a:spcAft>
-                <a:spcPts val="428"/>
+                <a:spcPts val="321"/>
               </a:spcAft>
             </a:pPr>
             <a:r>
-              <a:rPr sz="2000" i="0" b="0">
-                <a:solidFill>
-                  <a:srgbClr val="D4D4D4"/>
-                </a:solidFill>
-                <a:latin typeface="Consolas"/>
-              </a:rPr>
-              <a:t>}</a:t>
+              <a:rPr sz="1500" i="0" b="0">
+                <a:solidFill>
+                  <a:srgbClr val="858585"/>
+                </a:solidFill>
+                <a:latin typeface="Consolas"/>
+              </a:rPr>
+              <a:t>7</a:t>
             </a:r>
           </a:p>
         </p:txBody>
@@ -9619,8 +9106,8 @@
         </p:nvSpPr>
         <p:spPr>
           <a:xfrm>
-            <a:off x="457200" y="6035040"/>
-            <a:ext cx="11277295" cy="365760"/>
+            <a:off x="1188720" y="1719072"/>
+            <a:ext cx="10271455" cy="2039287"/>
           </a:xfrm>
           <a:prstGeom prst="rect">
             <a:avLst/>
@@ -9633,6 +9120,654 @@
           </a:bodyPr>
           <a:lstStyle/>
           <a:p>
+            <a:pPr>
+              <a:spcAft>
+                <a:spcPts val="321"/>
+              </a:spcAft>
+            </a:pPr>
+            <a:r>
+              <a:rPr sz="1500" i="0" b="0">
+                <a:solidFill>
+                  <a:srgbClr val="4EC9B0"/>
+                </a:solidFill>
+                <a:latin typeface="Consolas"/>
+              </a:rPr>
+              <a:t>Deque</a:t>
+            </a:r>
+            <a:r>
+              <a:rPr sz="1500" i="0" b="0">
+                <a:solidFill>
+                  <a:srgbClr val="D4D4D4"/>
+                </a:solidFill>
+                <a:latin typeface="Consolas"/>
+              </a:rPr>
+              <a:t>&lt;</a:t>
+            </a:r>
+            <a:r>
+              <a:rPr sz="1500" i="0" b="0">
+                <a:solidFill>
+                  <a:srgbClr val="D4D4D4"/>
+                </a:solidFill>
+                <a:latin typeface="Consolas"/>
+              </a:rPr>
+              <a:t>Turno</a:t>
+            </a:r>
+            <a:r>
+              <a:rPr sz="1500" i="0" b="0">
+                <a:solidFill>
+                  <a:srgbClr val="D4D4D4"/>
+                </a:solidFill>
+                <a:latin typeface="Consolas"/>
+              </a:rPr>
+              <a:t>&gt; </a:t>
+            </a:r>
+            <a:r>
+              <a:rPr sz="1500" i="0" b="0">
+                <a:solidFill>
+                  <a:srgbClr val="D4D4D4"/>
+                </a:solidFill>
+                <a:latin typeface="Consolas"/>
+              </a:rPr>
+              <a:t>filaConUrgencias</a:t>
+            </a:r>
+            <a:r>
+              <a:rPr sz="1500" i="0" b="0">
+                <a:solidFill>
+                  <a:srgbClr val="D4D4D4"/>
+                </a:solidFill>
+                <a:latin typeface="Consolas"/>
+              </a:rPr>
+              <a:t> = </a:t>
+            </a:r>
+            <a:r>
+              <a:rPr sz="1500" i="0" b="0">
+                <a:solidFill>
+                  <a:srgbClr val="569CD6"/>
+                </a:solidFill>
+                <a:latin typeface="Consolas"/>
+              </a:rPr>
+              <a:t>new</a:t>
+            </a:r>
+            <a:r>
+              <a:rPr sz="1500" i="0" b="0">
+                <a:solidFill>
+                  <a:srgbClr val="D4D4D4"/>
+                </a:solidFill>
+                <a:latin typeface="Consolas"/>
+              </a:rPr>
+              <a:t> </a:t>
+            </a:r>
+            <a:r>
+              <a:rPr sz="1500" i="0" b="0">
+                <a:solidFill>
+                  <a:srgbClr val="4EC9B0"/>
+                </a:solidFill>
+                <a:latin typeface="Consolas"/>
+              </a:rPr>
+              <a:t>ArrayDeque</a:t>
+            </a:r>
+            <a:r>
+              <a:rPr sz="1500" i="0" b="0">
+                <a:solidFill>
+                  <a:srgbClr val="D4D4D4"/>
+                </a:solidFill>
+                <a:latin typeface="Consolas"/>
+              </a:rPr>
+              <a:t>&lt;&gt;();</a:t>
+            </a:r>
+          </a:p>
+          <a:p>
+            <a:pPr>
+              <a:spcAft>
+                <a:spcPts val="321"/>
+              </a:spcAft>
+            </a:pPr>
+            <a:r>
+              <a:rPr sz="1500" i="0" b="0">
+                <a:solidFill>
+                  <a:srgbClr val="DCDCAA"/>
+                </a:solidFill>
+                <a:latin typeface="Consolas"/>
+              </a:rPr>
+              <a:t>filaConUrgencias.addLast</a:t>
+            </a:r>
+            <a:r>
+              <a:rPr sz="1500" i="0" b="0">
+                <a:solidFill>
+                  <a:srgbClr val="D4D4D4"/>
+                </a:solidFill>
+                <a:latin typeface="Consolas"/>
+              </a:rPr>
+              <a:t>(</a:t>
+            </a:r>
+            <a:r>
+              <a:rPr sz="1500" i="0" b="0">
+                <a:solidFill>
+                  <a:srgbClr val="569CD6"/>
+                </a:solidFill>
+                <a:latin typeface="Consolas"/>
+              </a:rPr>
+              <a:t>new</a:t>
+            </a:r>
+            <a:r>
+              <a:rPr sz="1500" i="0" b="0">
+                <a:solidFill>
+                  <a:srgbClr val="D4D4D4"/>
+                </a:solidFill>
+                <a:latin typeface="Consolas"/>
+              </a:rPr>
+              <a:t> </a:t>
+            </a:r>
+            <a:r>
+              <a:rPr sz="1500" i="0" b="0">
+                <a:solidFill>
+                  <a:srgbClr val="4EC9B0"/>
+                </a:solidFill>
+                <a:latin typeface="Consolas"/>
+              </a:rPr>
+              <a:t>Turno</a:t>
+            </a:r>
+            <a:r>
+              <a:rPr sz="1500" i="0" b="0">
+                <a:solidFill>
+                  <a:srgbClr val="D4D4D4"/>
+                </a:solidFill>
+                <a:latin typeface="Consolas"/>
+              </a:rPr>
+              <a:t>(</a:t>
+            </a:r>
+            <a:r>
+              <a:rPr sz="1500" i="0" b="0">
+                <a:solidFill>
+                  <a:srgbClr val="CE9178"/>
+                </a:solidFill>
+                <a:latin typeface="Consolas"/>
+              </a:rPr>
+              <a:t>"M-004"</a:t>
+            </a:r>
+            <a:r>
+              <a:rPr sz="1500" i="0" b="0">
+                <a:solidFill>
+                  <a:srgbClr val="D4D4D4"/>
+                </a:solidFill>
+                <a:latin typeface="Consolas"/>
+              </a:rPr>
+              <a:t>, </a:t>
+            </a:r>
+            <a:r>
+              <a:rPr sz="1500" i="0" b="0">
+                <a:solidFill>
+                  <a:srgbClr val="CE9178"/>
+                </a:solidFill>
+                <a:latin typeface="Consolas"/>
+              </a:rPr>
+              <a:t>"Nieve"</a:t>
+            </a:r>
+            <a:r>
+              <a:rPr sz="1500" i="0" b="0">
+                <a:solidFill>
+                  <a:srgbClr val="D4D4D4"/>
+                </a:solidFill>
+                <a:latin typeface="Consolas"/>
+              </a:rPr>
+              <a:t>, </a:t>
+            </a:r>
+            <a:r>
+              <a:rPr sz="1500" i="0" b="0">
+                <a:solidFill>
+                  <a:srgbClr val="CE9178"/>
+                </a:solidFill>
+                <a:latin typeface="Consolas"/>
+              </a:rPr>
+              <a:t>"Sara Diaz"</a:t>
+            </a:r>
+            <a:r>
+              <a:rPr sz="1500" i="0" b="0">
+                <a:solidFill>
+                  <a:srgbClr val="D4D4D4"/>
+                </a:solidFill>
+                <a:latin typeface="Consolas"/>
+              </a:rPr>
+              <a:t>, </a:t>
+            </a:r>
+            <a:r>
+              <a:rPr sz="1500" i="0" b="0">
+                <a:solidFill>
+                  <a:srgbClr val="CE9178"/>
+                </a:solidFill>
+                <a:latin typeface="Consolas"/>
+              </a:rPr>
+              <a:t>"Desparasitacion"</a:t>
+            </a:r>
+            <a:r>
+              <a:rPr sz="1500" i="0" b="0">
+                <a:solidFill>
+                  <a:srgbClr val="D4D4D4"/>
+                </a:solidFill>
+                <a:latin typeface="Consolas"/>
+              </a:rPr>
+              <a:t>));</a:t>
+            </a:r>
+          </a:p>
+          <a:p>
+            <a:pPr>
+              <a:spcAft>
+                <a:spcPts val="321"/>
+              </a:spcAft>
+            </a:pPr>
+            <a:r>
+              <a:rPr sz="1500" i="0" b="0">
+                <a:solidFill>
+                  <a:srgbClr val="DCDCAA"/>
+                </a:solidFill>
+                <a:latin typeface="Consolas"/>
+              </a:rPr>
+              <a:t>filaConUrgencias.addLast</a:t>
+            </a:r>
+            <a:r>
+              <a:rPr sz="1500" i="0" b="0">
+                <a:solidFill>
+                  <a:srgbClr val="D4D4D4"/>
+                </a:solidFill>
+                <a:latin typeface="Consolas"/>
+              </a:rPr>
+              <a:t>(</a:t>
+            </a:r>
+            <a:r>
+              <a:rPr sz="1500" i="0" b="0">
+                <a:solidFill>
+                  <a:srgbClr val="569CD6"/>
+                </a:solidFill>
+                <a:latin typeface="Consolas"/>
+              </a:rPr>
+              <a:t>new</a:t>
+            </a:r>
+            <a:r>
+              <a:rPr sz="1500" i="0" b="0">
+                <a:solidFill>
+                  <a:srgbClr val="D4D4D4"/>
+                </a:solidFill>
+                <a:latin typeface="Consolas"/>
+              </a:rPr>
+              <a:t> </a:t>
+            </a:r>
+            <a:r>
+              <a:rPr sz="1500" i="0" b="0">
+                <a:solidFill>
+                  <a:srgbClr val="4EC9B0"/>
+                </a:solidFill>
+                <a:latin typeface="Consolas"/>
+              </a:rPr>
+              <a:t>Turno</a:t>
+            </a:r>
+            <a:r>
+              <a:rPr sz="1500" i="0" b="0">
+                <a:solidFill>
+                  <a:srgbClr val="D4D4D4"/>
+                </a:solidFill>
+                <a:latin typeface="Consolas"/>
+              </a:rPr>
+              <a:t>(</a:t>
+            </a:r>
+            <a:r>
+              <a:rPr sz="1500" i="0" b="0">
+                <a:solidFill>
+                  <a:srgbClr val="CE9178"/>
+                </a:solidFill>
+                <a:latin typeface="Consolas"/>
+              </a:rPr>
+              <a:t>"M-005"</a:t>
+            </a:r>
+            <a:r>
+              <a:rPr sz="1500" i="0" b="0">
+                <a:solidFill>
+                  <a:srgbClr val="D4D4D4"/>
+                </a:solidFill>
+                <a:latin typeface="Consolas"/>
+              </a:rPr>
+              <a:t>, </a:t>
+            </a:r>
+            <a:r>
+              <a:rPr sz="1500" i="0" b="0">
+                <a:solidFill>
+                  <a:srgbClr val="CE9178"/>
+                </a:solidFill>
+                <a:latin typeface="Consolas"/>
+              </a:rPr>
+              <a:t>"Toby"</a:t>
+            </a:r>
+            <a:r>
+              <a:rPr sz="1500" i="0" b="0">
+                <a:solidFill>
+                  <a:srgbClr val="D4D4D4"/>
+                </a:solidFill>
+                <a:latin typeface="Consolas"/>
+              </a:rPr>
+              <a:t>, </a:t>
+            </a:r>
+            <a:r>
+              <a:rPr sz="1500" i="0" b="0">
+                <a:solidFill>
+                  <a:srgbClr val="CE9178"/>
+                </a:solidFill>
+                <a:latin typeface="Consolas"/>
+              </a:rPr>
+              <a:t>"Sara Diaz"</a:t>
+            </a:r>
+            <a:r>
+              <a:rPr sz="1500" i="0" b="0">
+                <a:solidFill>
+                  <a:srgbClr val="D4D4D4"/>
+                </a:solidFill>
+                <a:latin typeface="Consolas"/>
+              </a:rPr>
+              <a:t>, </a:t>
+            </a:r>
+            <a:r>
+              <a:rPr sz="1500" i="0" b="0">
+                <a:solidFill>
+                  <a:srgbClr val="CE9178"/>
+                </a:solidFill>
+                <a:latin typeface="Consolas"/>
+              </a:rPr>
+              <a:t>"Control"</a:t>
+            </a:r>
+            <a:r>
+              <a:rPr sz="1500" i="0" b="0">
+                <a:solidFill>
+                  <a:srgbClr val="D4D4D4"/>
+                </a:solidFill>
+                <a:latin typeface="Consolas"/>
+              </a:rPr>
+              <a:t>));</a:t>
+            </a:r>
+          </a:p>
+          <a:p>
+            <a:pPr>
+              <a:spcAft>
+                <a:spcPts val="321"/>
+              </a:spcAft>
+            </a:pPr>
+            <a:r>
+              <a:rPr sz="1500" i="0" b="0">
+                <a:solidFill>
+                  <a:srgbClr val="DCDCAA"/>
+                </a:solidFill>
+                <a:latin typeface="Consolas"/>
+              </a:rPr>
+              <a:t>filaConUrgencias.addFirst</a:t>
+            </a:r>
+            <a:r>
+              <a:rPr sz="1500" i="0" b="0">
+                <a:solidFill>
+                  <a:srgbClr val="D4D4D4"/>
+                </a:solidFill>
+                <a:latin typeface="Consolas"/>
+              </a:rPr>
+              <a:t>(</a:t>
+            </a:r>
+            <a:r>
+              <a:rPr sz="1500" i="0" b="0">
+                <a:solidFill>
+                  <a:srgbClr val="569CD6"/>
+                </a:solidFill>
+                <a:latin typeface="Consolas"/>
+              </a:rPr>
+              <a:t>new</a:t>
+            </a:r>
+            <a:r>
+              <a:rPr sz="1500" i="0" b="0">
+                <a:solidFill>
+                  <a:srgbClr val="D4D4D4"/>
+                </a:solidFill>
+                <a:latin typeface="Consolas"/>
+              </a:rPr>
+              <a:t> </a:t>
+            </a:r>
+            <a:r>
+              <a:rPr sz="1500" i="0" b="0">
+                <a:solidFill>
+                  <a:srgbClr val="4EC9B0"/>
+                </a:solidFill>
+                <a:latin typeface="Consolas"/>
+              </a:rPr>
+              <a:t>Turno</a:t>
+            </a:r>
+            <a:r>
+              <a:rPr sz="1500" i="0" b="0">
+                <a:solidFill>
+                  <a:srgbClr val="D4D4D4"/>
+                </a:solidFill>
+                <a:latin typeface="Consolas"/>
+              </a:rPr>
+              <a:t>(</a:t>
+            </a:r>
+            <a:r>
+              <a:rPr sz="1500" i="0" b="0">
+                <a:solidFill>
+                  <a:srgbClr val="CE9178"/>
+                </a:solidFill>
+                <a:latin typeface="Consolas"/>
+              </a:rPr>
+              <a:t>"M-009"</a:t>
+            </a:r>
+            <a:r>
+              <a:rPr sz="1500" i="0" b="0">
+                <a:solidFill>
+                  <a:srgbClr val="D4D4D4"/>
+                </a:solidFill>
+                <a:latin typeface="Consolas"/>
+              </a:rPr>
+              <a:t>, </a:t>
+            </a:r>
+            <a:r>
+              <a:rPr sz="1500" i="0" b="0">
+                <a:solidFill>
+                  <a:srgbClr val="CE9178"/>
+                </a:solidFill>
+                <a:latin typeface="Consolas"/>
+              </a:rPr>
+              <a:t>"Canela"</a:t>
+            </a:r>
+            <a:r>
+              <a:rPr sz="1500" i="0" b="0">
+                <a:solidFill>
+                  <a:srgbClr val="D4D4D4"/>
+                </a:solidFill>
+                <a:latin typeface="Consolas"/>
+              </a:rPr>
+              <a:t>, </a:t>
+            </a:r>
+            <a:r>
+              <a:rPr sz="1500" i="0" b="0">
+                <a:solidFill>
+                  <a:srgbClr val="CE9178"/>
+                </a:solidFill>
+                <a:latin typeface="Consolas"/>
+              </a:rPr>
+              <a:t>"Ana Gomez"</a:t>
+            </a:r>
+            <a:r>
+              <a:rPr sz="1500" i="0" b="0">
+                <a:solidFill>
+                  <a:srgbClr val="D4D4D4"/>
+                </a:solidFill>
+                <a:latin typeface="Consolas"/>
+              </a:rPr>
+              <a:t>, </a:t>
+            </a:r>
+            <a:r>
+              <a:rPr sz="1500" i="0" b="0">
+                <a:solidFill>
+                  <a:srgbClr val="CE9178"/>
+                </a:solidFill>
+                <a:latin typeface="Consolas"/>
+              </a:rPr>
+              <a:t>"URGENCIA"</a:t>
+            </a:r>
+            <a:r>
+              <a:rPr sz="1500" i="0" b="0">
+                <a:solidFill>
+                  <a:srgbClr val="D4D4D4"/>
+                </a:solidFill>
+                <a:latin typeface="Consolas"/>
+              </a:rPr>
+              <a:t>));</a:t>
+            </a:r>
+          </a:p>
+          <a:p>
+            <a:pPr>
+              <a:spcAft>
+                <a:spcPts val="321"/>
+              </a:spcAft>
+            </a:pPr>
+            <a:r>
+              <a:rPr sz="1500" i="0" b="0">
+                <a:solidFill>
+                  <a:srgbClr val="569CD6"/>
+                </a:solidFill>
+                <a:latin typeface="Consolas"/>
+              </a:rPr>
+              <a:t>while</a:t>
+            </a:r>
+            <a:r>
+              <a:rPr sz="1500" i="0" b="0">
+                <a:solidFill>
+                  <a:srgbClr val="D4D4D4"/>
+                </a:solidFill>
+                <a:latin typeface="Consolas"/>
+              </a:rPr>
+              <a:t> (!</a:t>
+            </a:r>
+            <a:r>
+              <a:rPr sz="1500" i="0" b="0">
+                <a:solidFill>
+                  <a:srgbClr val="DCDCAA"/>
+                </a:solidFill>
+                <a:latin typeface="Consolas"/>
+              </a:rPr>
+              <a:t>filaConUrgencias.isEmpty</a:t>
+            </a:r>
+            <a:r>
+              <a:rPr sz="1500" i="0" b="0">
+                <a:solidFill>
+                  <a:srgbClr val="D4D4D4"/>
+                </a:solidFill>
+                <a:latin typeface="Consolas"/>
+              </a:rPr>
+              <a:t>()) {</a:t>
+            </a:r>
+          </a:p>
+          <a:p>
+            <a:pPr>
+              <a:spcAft>
+                <a:spcPts val="321"/>
+              </a:spcAft>
+            </a:pPr>
+            <a:r>
+              <a:rPr sz="1500" i="0" b="0">
+                <a:solidFill>
+                  <a:srgbClr val="D4D4D4"/>
+                </a:solidFill>
+                <a:latin typeface="Consolas"/>
+              </a:rPr>
+              <a:t>    </a:t>
+            </a:r>
+            <a:r>
+              <a:rPr sz="1500" i="0" b="0">
+                <a:solidFill>
+                  <a:srgbClr val="DCDCAA"/>
+                </a:solidFill>
+                <a:latin typeface="Consolas"/>
+              </a:rPr>
+              <a:t>System.out.println</a:t>
+            </a:r>
+            <a:r>
+              <a:rPr sz="1500" i="0" b="0">
+                <a:solidFill>
+                  <a:srgbClr val="D4D4D4"/>
+                </a:solidFill>
+                <a:latin typeface="Consolas"/>
+              </a:rPr>
+              <a:t>(</a:t>
+            </a:r>
+            <a:r>
+              <a:rPr sz="1500" i="0" b="0">
+                <a:solidFill>
+                  <a:srgbClr val="CE9178"/>
+                </a:solidFill>
+                <a:latin typeface="Consolas"/>
+              </a:rPr>
+              <a:t>"Pasa: "</a:t>
+            </a:r>
+            <a:r>
+              <a:rPr sz="1500" i="0" b="0">
+                <a:solidFill>
+                  <a:srgbClr val="D4D4D4"/>
+                </a:solidFill>
+                <a:latin typeface="Consolas"/>
+              </a:rPr>
+              <a:t> + </a:t>
+            </a:r>
+            <a:r>
+              <a:rPr sz="1500" i="0" b="0">
+                <a:solidFill>
+                  <a:srgbClr val="DCDCAA"/>
+                </a:solidFill>
+                <a:latin typeface="Consolas"/>
+              </a:rPr>
+              <a:t>filaConUrgencias.pollFirst</a:t>
+            </a:r>
+            <a:r>
+              <a:rPr sz="1500" i="0" b="0">
+                <a:solidFill>
+                  <a:srgbClr val="D4D4D4"/>
+                </a:solidFill>
+                <a:latin typeface="Consolas"/>
+              </a:rPr>
+              <a:t>());</a:t>
+            </a:r>
+          </a:p>
+          <a:p>
+            <a:pPr>
+              <a:spcAft>
+                <a:spcPts val="321"/>
+              </a:spcAft>
+            </a:pPr>
+            <a:r>
+              <a:rPr sz="1500" i="0" b="0">
+                <a:solidFill>
+                  <a:srgbClr val="D4D4D4"/>
+                </a:solidFill>
+                <a:latin typeface="Consolas"/>
+              </a:rPr>
+              <a:t>}</a:t>
+            </a:r>
+          </a:p>
+        </p:txBody>
+      </p:sp>
+      <p:sp>
+        <p:nvSpPr>
+          <p:cNvPr id="13" name="TextBox 12"/>
+          <p:cNvSpPr txBox="1"/>
+          <p:nvPr/>
+        </p:nvSpPr>
+        <p:spPr>
+          <a:xfrm>
+            <a:off x="457200" y="6035040"/>
+            <a:ext cx="11277295" cy="365760"/>
+          </a:xfrm>
+          <a:prstGeom prst="rect">
+            <a:avLst/>
+          </a:prstGeom>
+          <a:noFill/>
+        </p:spPr>
+        <p:txBody>
+          <a:bodyPr wrap="square">
+            <a:spAutoFit/>
+          </a:bodyPr>
+          <a:lstStyle/>
+          <a:p>
             <a:pPr algn="ctr"/>
             <a:r>
               <a:rPr sz="1300" b="0" i="1">
@@ -9648,7 +9783,7 @@
       </p:sp>
       <p:sp>
         <p:nvSpPr>
-          <p:cNvPr id="13" name="TextBox 12"/>
+          <p:cNvPr id="14" name="TextBox 13"/>
           <p:cNvSpPr txBox="1"/>
           <p:nvPr/>
         </p:nvSpPr>
@@ -14106,7 +14241,7 @@
         <p:spPr>
           <a:xfrm>
             <a:off x="457200" y="1261872"/>
-            <a:ext cx="11277295" cy="4398352"/>
+            <a:ext cx="11277295" cy="4227820"/>
           </a:xfrm>
           <a:prstGeom prst="roundRect">
             <a:avLst>
@@ -14356,7 +14491,7 @@
         <p:spPr>
           <a:xfrm>
             <a:off x="685800" y="1719072"/>
-            <a:ext cx="502920" cy="3803992"/>
+            <a:ext cx="502920" cy="3633460"/>
           </a:xfrm>
           <a:prstGeom prst="rect">
             <a:avLst/>
@@ -14371,11 +14506,11 @@
           <a:p>
             <a:pPr algn="r">
               <a:spcAft>
-                <a:spcPts val="407"/>
+                <a:spcPts val="385"/>
               </a:spcAft>
             </a:pPr>
             <a:r>
-              <a:rPr sz="1900" i="0" b="0">
+              <a:rPr sz="1800" i="0" b="0">
                 <a:solidFill>
                   <a:srgbClr val="858585"/>
                 </a:solidFill>
@@ -14387,11 +14522,11 @@
           <a:p>
             <a:pPr algn="r">
               <a:spcAft>
-                <a:spcPts val="407"/>
+                <a:spcPts val="385"/>
               </a:spcAft>
             </a:pPr>
             <a:r>
-              <a:rPr sz="1900" i="0" b="0">
+              <a:rPr sz="1800" i="0" b="0">
                 <a:solidFill>
                   <a:srgbClr val="858585"/>
                 </a:solidFill>
@@ -14403,11 +14538,11 @@
           <a:p>
             <a:pPr algn="r">
               <a:spcAft>
-                <a:spcPts val="407"/>
+                <a:spcPts val="385"/>
               </a:spcAft>
             </a:pPr>
             <a:r>
-              <a:rPr sz="1900" i="0" b="0">
+              <a:rPr sz="1800" i="0" b="0">
                 <a:solidFill>
                   <a:srgbClr val="858585"/>
                 </a:solidFill>
@@ -14419,11 +14554,11 @@
           <a:p>
             <a:pPr algn="r">
               <a:spcAft>
-                <a:spcPts val="407"/>
+                <a:spcPts val="385"/>
               </a:spcAft>
             </a:pPr>
             <a:r>
-              <a:rPr sz="1900" i="0" b="0">
+              <a:rPr sz="1800" i="0" b="0">
                 <a:solidFill>
                   <a:srgbClr val="858585"/>
                 </a:solidFill>
@@ -14435,11 +14570,11 @@
           <a:p>
             <a:pPr algn="r">
               <a:spcAft>
-                <a:spcPts val="407"/>
+                <a:spcPts val="385"/>
               </a:spcAft>
             </a:pPr>
             <a:r>
-              <a:rPr sz="1900" i="0" b="0">
+              <a:rPr sz="1800" i="0" b="0">
                 <a:solidFill>
                   <a:srgbClr val="858585"/>
                 </a:solidFill>
@@ -14451,11 +14586,11 @@
           <a:p>
             <a:pPr algn="r">
               <a:spcAft>
-                <a:spcPts val="407"/>
+                <a:spcPts val="385"/>
               </a:spcAft>
             </a:pPr>
             <a:r>
-              <a:rPr sz="1900" i="0" b="0">
+              <a:rPr sz="1800" i="0" b="0">
                 <a:solidFill>
                   <a:srgbClr val="858585"/>
                 </a:solidFill>
@@ -14467,11 +14602,11 @@
           <a:p>
             <a:pPr algn="r">
               <a:spcAft>
-                <a:spcPts val="407"/>
+                <a:spcPts val="385"/>
               </a:spcAft>
             </a:pPr>
             <a:r>
-              <a:rPr sz="1900" i="0" b="0">
+              <a:rPr sz="1800" i="0" b="0">
                 <a:solidFill>
                   <a:srgbClr val="858585"/>
                 </a:solidFill>
@@ -14483,11 +14618,11 @@
           <a:p>
             <a:pPr algn="r">
               <a:spcAft>
-                <a:spcPts val="407"/>
+                <a:spcPts val="385"/>
               </a:spcAft>
             </a:pPr>
             <a:r>
-              <a:rPr sz="1900" i="0" b="0">
+              <a:rPr sz="1800" i="0" b="0">
                 <a:solidFill>
                   <a:srgbClr val="858585"/>
                 </a:solidFill>
@@ -14499,11 +14634,11 @@
           <a:p>
             <a:pPr algn="r">
               <a:spcAft>
-                <a:spcPts val="407"/>
+                <a:spcPts val="385"/>
               </a:spcAft>
             </a:pPr>
             <a:r>
-              <a:rPr sz="1900" i="0" b="0">
+              <a:rPr sz="1800" i="0" b="0">
                 <a:solidFill>
                   <a:srgbClr val="858585"/>
                 </a:solidFill>
@@ -14515,11 +14650,11 @@
           <a:p>
             <a:pPr algn="r">
               <a:spcAft>
-                <a:spcPts val="407"/>
+                <a:spcPts val="385"/>
               </a:spcAft>
             </a:pPr>
             <a:r>
-              <a:rPr sz="1900" i="0" b="0">
+              <a:rPr sz="1800" i="0" b="0">
                 <a:solidFill>
                   <a:srgbClr val="858585"/>
                 </a:solidFill>
@@ -14531,11 +14666,11 @@
           <a:p>
             <a:pPr algn="r">
               <a:spcAft>
-                <a:spcPts val="407"/>
+                <a:spcPts val="385"/>
               </a:spcAft>
             </a:pPr>
             <a:r>
-              <a:rPr sz="1900" i="0" b="0">
+              <a:rPr sz="1800" i="0" b="0">
                 <a:solidFill>
                   <a:srgbClr val="858585"/>
                 </a:solidFill>
@@ -14555,7 +14690,7 @@
         <p:spPr>
           <a:xfrm>
             <a:off x="1188720" y="1719072"/>
-            <a:ext cx="10271455" cy="3803992"/>
+            <a:ext cx="10271455" cy="3633460"/>
           </a:xfrm>
           <a:prstGeom prst="rect">
             <a:avLst/>
@@ -14570,11 +14705,11 @@
           <a:p>
             <a:pPr>
               <a:spcAft>
-                <a:spcPts val="407"/>
+                <a:spcPts val="385"/>
               </a:spcAft>
             </a:pPr>
             <a:r>
-              <a:rPr sz="1900" i="0" b="0">
+              <a:rPr sz="1800" i="0" b="0">
                 <a:solidFill>
                   <a:srgbClr val="569CD6"/>
                 </a:solidFill>
@@ -14583,7 +14718,7 @@
               <a:t>private</a:t>
             </a:r>
             <a:r>
-              <a:rPr sz="1900" i="0" b="0">
+              <a:rPr sz="1800" i="0" b="0">
                 <a:solidFill>
                   <a:srgbClr val="D4D4D4"/>
                 </a:solidFill>
@@ -14592,7 +14727,7 @@
               <a:t> </a:t>
             </a:r>
             <a:r>
-              <a:rPr sz="1900" i="0" b="0">
+              <a:rPr sz="1800" i="0" b="0">
                 <a:solidFill>
                   <a:srgbClr val="569CD6"/>
                 </a:solidFill>
@@ -14601,7 +14736,7 @@
               <a:t>final</a:t>
             </a:r>
             <a:r>
-              <a:rPr sz="1900" i="0" b="0">
+              <a:rPr sz="1800" i="0" b="0">
                 <a:solidFill>
                   <a:srgbClr val="D4D4D4"/>
                 </a:solidFill>
@@ -14610,7 +14745,7 @@
               <a:t> </a:t>
             </a:r>
             <a:r>
-              <a:rPr sz="1900" i="0" b="0">
+              <a:rPr sz="1800" i="0" b="0">
                 <a:solidFill>
                   <a:srgbClr val="4EC9B0"/>
                 </a:solidFill>
@@ -14619,7 +14754,7 @@
               <a:t>Queue</a:t>
             </a:r>
             <a:r>
-              <a:rPr sz="1900" i="0" b="0">
+              <a:rPr sz="1800" i="0" b="0">
                 <a:solidFill>
                   <a:srgbClr val="D4D4D4"/>
                 </a:solidFill>
@@ -14628,7 +14763,7 @@
               <a:t>&lt;</a:t>
             </a:r>
             <a:r>
-              <a:rPr sz="1900" i="0" b="0">
+              <a:rPr sz="1800" i="0" b="0">
                 <a:solidFill>
                   <a:srgbClr val="D4D4D4"/>
                 </a:solidFill>
@@ -14637,7 +14772,7 @@
               <a:t>Turno</a:t>
             </a:r>
             <a:r>
-              <a:rPr sz="1900" i="0" b="0">
+              <a:rPr sz="1800" i="0" b="0">
                 <a:solidFill>
                   <a:srgbClr val="D4D4D4"/>
                 </a:solidFill>
@@ -14646,7 +14781,7 @@
               <a:t>&gt; </a:t>
             </a:r>
             <a:r>
-              <a:rPr sz="1900" i="0" b="0">
+              <a:rPr sz="1800" i="0" b="0">
                 <a:solidFill>
                   <a:srgbClr val="D4D4D4"/>
                 </a:solidFill>
@@ -14655,7 +14790,7 @@
               <a:t>cola</a:t>
             </a:r>
             <a:r>
-              <a:rPr sz="1900" i="0" b="0">
+              <a:rPr sz="1800" i="0" b="0">
                 <a:solidFill>
                   <a:srgbClr val="D4D4D4"/>
                 </a:solidFill>
@@ -14664,7 +14799,7 @@
               <a:t> = </a:t>
             </a:r>
             <a:r>
-              <a:rPr sz="1900" i="0" b="0">
+              <a:rPr sz="1800" i="0" b="0">
                 <a:solidFill>
                   <a:srgbClr val="569CD6"/>
                 </a:solidFill>
@@ -14673,7 +14808,7 @@
               <a:t>new</a:t>
             </a:r>
             <a:r>
-              <a:rPr sz="1900" i="0" b="0">
+              <a:rPr sz="1800" i="0" b="0">
                 <a:solidFill>
                   <a:srgbClr val="D4D4D4"/>
                 </a:solidFill>
@@ -14682,7 +14817,7 @@
               <a:t> </a:t>
             </a:r>
             <a:r>
-              <a:rPr sz="1900" i="0" b="0">
+              <a:rPr sz="1800" i="0" b="0">
                 <a:solidFill>
                   <a:srgbClr val="4EC9B0"/>
                 </a:solidFill>
@@ -14691,7 +14826,7 @@
               <a:t>LinkedList</a:t>
             </a:r>
             <a:r>
-              <a:rPr sz="1900" i="0" b="0">
+              <a:rPr sz="1800" i="0" b="0">
                 <a:solidFill>
                   <a:srgbClr val="D4D4D4"/>
                 </a:solidFill>
@@ -14700,7 +14835,7 @@
               <a:t>&lt;&gt;(); </a:t>
             </a:r>
             <a:r>
-              <a:rPr sz="1900" i="1" b="0">
+              <a:rPr sz="1800" i="1" b="0">
                 <a:solidFill>
                   <a:srgbClr val="6A9955"/>
                 </a:solidFill>
@@ -14712,11 +14847,11 @@
           <a:p>
             <a:pPr>
               <a:spcAft>
-                <a:spcPts val="407"/>
+                <a:spcPts val="385"/>
               </a:spcAft>
             </a:pPr>
             <a:r>
-              <a:rPr sz="1900" i="0" b="0">
+              <a:rPr sz="1800" i="0" b="0">
                 <a:solidFill>
                   <a:srgbClr val="D4D4D4"/>
                 </a:solidFill>
@@ -14728,11 +14863,11 @@
           <a:p>
             <a:pPr>
               <a:spcAft>
-                <a:spcPts val="407"/>
+                <a:spcPts val="385"/>
               </a:spcAft>
             </a:pPr>
             <a:r>
-              <a:rPr sz="1900" i="0" b="0">
+              <a:rPr sz="1800" i="0" b="0">
                 <a:solidFill>
                   <a:srgbClr val="569CD6"/>
                 </a:solidFill>
@@ -14741,7 +14876,7 @@
               <a:t>public</a:t>
             </a:r>
             <a:r>
-              <a:rPr sz="1900" i="0" b="0">
+              <a:rPr sz="1800" i="0" b="0">
                 <a:solidFill>
                   <a:srgbClr val="D4D4D4"/>
                 </a:solidFill>
@@ -14750,7 +14885,7 @@
               <a:t> </a:t>
             </a:r>
             <a:r>
-              <a:rPr sz="1900" i="0" b="0">
+              <a:rPr sz="1800" i="0" b="0">
                 <a:solidFill>
                   <a:srgbClr val="4EC9B0"/>
                 </a:solidFill>
@@ -14759,7 +14894,7 @@
               <a:t>int</a:t>
             </a:r>
             <a:r>
-              <a:rPr sz="1900" i="0" b="0">
+              <a:rPr sz="1800" i="0" b="0">
                 <a:solidFill>
                   <a:srgbClr val="D4D4D4"/>
                 </a:solidFill>
@@ -14768,7 +14903,7 @@
               <a:t> </a:t>
             </a:r>
             <a:r>
-              <a:rPr sz="1900" i="0" b="0">
+              <a:rPr sz="1800" i="0" b="0">
                 <a:solidFill>
                   <a:srgbClr val="DCDCAA"/>
                 </a:solidFill>
@@ -14777,7 +14912,7 @@
               <a:t>registrarLlegada</a:t>
             </a:r>
             <a:r>
-              <a:rPr sz="1900" i="0" b="0">
+              <a:rPr sz="1800" i="0" b="0">
                 <a:solidFill>
                   <a:srgbClr val="D4D4D4"/>
                 </a:solidFill>
@@ -14786,7 +14921,7 @@
               <a:t>(</a:t>
             </a:r>
             <a:r>
-              <a:rPr sz="1900" i="0" b="0">
+              <a:rPr sz="1800" i="0" b="0">
                 <a:solidFill>
                   <a:srgbClr val="D4D4D4"/>
                 </a:solidFill>
@@ -14795,7 +14930,7 @@
               <a:t>Turno</a:t>
             </a:r>
             <a:r>
-              <a:rPr sz="1900" i="0" b="0">
+              <a:rPr sz="1800" i="0" b="0">
                 <a:solidFill>
                   <a:srgbClr val="D4D4D4"/>
                 </a:solidFill>
@@ -14804,7 +14939,7 @@
               <a:t> </a:t>
             </a:r>
             <a:r>
-              <a:rPr sz="1900" i="0" b="0">
+              <a:rPr sz="1800" i="0" b="0">
                 <a:solidFill>
                   <a:srgbClr val="D4D4D4"/>
                 </a:solidFill>
@@ -14813,7 +14948,7 @@
               <a:t>t</a:t>
             </a:r>
             <a:r>
-              <a:rPr sz="1900" i="0" b="0">
+              <a:rPr sz="1800" i="0" b="0">
                 <a:solidFill>
                   <a:srgbClr val="D4D4D4"/>
                 </a:solidFill>
@@ -14825,11 +14960,11 @@
           <a:p>
             <a:pPr>
               <a:spcAft>
-                <a:spcPts val="407"/>
+                <a:spcPts val="385"/>
               </a:spcAft>
             </a:pPr>
             <a:r>
-              <a:rPr sz="1900" i="0" b="0">
+              <a:rPr sz="1800" i="0" b="0">
                 <a:solidFill>
                   <a:srgbClr val="D4D4D4"/>
                 </a:solidFill>
@@ -14838,7 +14973,7 @@
               <a:t>    </a:t>
             </a:r>
             <a:r>
-              <a:rPr sz="1900" i="0" b="0">
+              <a:rPr sz="1800" i="0" b="0">
                 <a:solidFill>
                   <a:srgbClr val="DCDCAA"/>
                 </a:solidFill>
@@ -14847,7 +14982,7 @@
               <a:t>cola.offer</a:t>
             </a:r>
             <a:r>
-              <a:rPr sz="1900" i="0" b="0">
+              <a:rPr sz="1800" i="0" b="0">
                 <a:solidFill>
                   <a:srgbClr val="D4D4D4"/>
                 </a:solidFill>
@@ -14856,7 +14991,7 @@
               <a:t>(</a:t>
             </a:r>
             <a:r>
-              <a:rPr sz="1900" i="0" b="0">
+              <a:rPr sz="1800" i="0" b="0">
                 <a:solidFill>
                   <a:srgbClr val="D4D4D4"/>
                 </a:solidFill>
@@ -14865,7 +15000,7 @@
               <a:t>t</a:t>
             </a:r>
             <a:r>
-              <a:rPr sz="1900" i="0" b="0">
+              <a:rPr sz="1800" i="0" b="0">
                 <a:solidFill>
                   <a:srgbClr val="D4D4D4"/>
                 </a:solidFill>
@@ -14874,7 +15009,7 @@
               <a:t>); </a:t>
             </a:r>
             <a:r>
-              <a:rPr sz="1900" i="1" b="0">
+              <a:rPr sz="1800" i="1" b="0">
                 <a:solidFill>
                   <a:srgbClr val="6A9955"/>
                 </a:solidFill>
@@ -14886,11 +15021,11 @@
           <a:p>
             <a:pPr>
               <a:spcAft>
-                <a:spcPts val="407"/>
+                <a:spcPts val="385"/>
               </a:spcAft>
             </a:pPr>
             <a:r>
-              <a:rPr sz="1900" i="0" b="0">
+              <a:rPr sz="1800" i="0" b="0">
                 <a:solidFill>
                   <a:srgbClr val="D4D4D4"/>
                 </a:solidFill>
@@ -14899,7 +15034,7 @@
               <a:t>    </a:t>
             </a:r>
             <a:r>
-              <a:rPr sz="1900" i="1" b="0">
+              <a:rPr sz="1800" i="1" b="0">
                 <a:solidFill>
                   <a:srgbClr val="6A9955"/>
                 </a:solidFill>
@@ -14911,11 +15046,11 @@
           <a:p>
             <a:pPr>
               <a:spcAft>
-                <a:spcPts val="407"/>
+                <a:spcPts val="385"/>
               </a:spcAft>
             </a:pPr>
             <a:r>
-              <a:rPr sz="1900" i="0" b="0">
+              <a:rPr sz="1800" i="0" b="0">
                 <a:solidFill>
                   <a:srgbClr val="D4D4D4"/>
                 </a:solidFill>
@@ -14924,7 +15059,7 @@
               <a:t>    </a:t>
             </a:r>
             <a:r>
-              <a:rPr sz="1900" i="0" b="0">
+              <a:rPr sz="1800" i="0" b="0">
                 <a:solidFill>
                   <a:srgbClr val="569CD6"/>
                 </a:solidFill>
@@ -14933,7 +15068,7 @@
               <a:t>return</a:t>
             </a:r>
             <a:r>
-              <a:rPr sz="1900" i="0" b="0">
+              <a:rPr sz="1800" i="0" b="0">
                 <a:solidFill>
                   <a:srgbClr val="D4D4D4"/>
                 </a:solidFill>
@@ -14942,7 +15077,7 @@
               <a:t> </a:t>
             </a:r>
             <a:r>
-              <a:rPr sz="1900" i="0" b="0">
+              <a:rPr sz="1800" i="0" b="0">
                 <a:solidFill>
                   <a:srgbClr val="DCDCAA"/>
                 </a:solidFill>
@@ -14951,7 +15086,7 @@
               <a:t>cola.size</a:t>
             </a:r>
             <a:r>
-              <a:rPr sz="1900" i="0" b="0">
+              <a:rPr sz="1800" i="0" b="0">
                 <a:solidFill>
                   <a:srgbClr val="D4D4D4"/>
                 </a:solidFill>
@@ -14963,11 +15098,11 @@
           <a:p>
             <a:pPr>
               <a:spcAft>
-                <a:spcPts val="407"/>
+                <a:spcPts val="385"/>
               </a:spcAft>
             </a:pPr>
             <a:r>
-              <a:rPr sz="1900" i="0" b="0">
+              <a:rPr sz="1800" i="0" b="0">
                 <a:solidFill>
                   <a:srgbClr val="D4D4D4"/>
                 </a:solidFill>
@@ -14979,11 +15114,11 @@
           <a:p>
             <a:pPr>
               <a:spcAft>
-                <a:spcPts val="407"/>
+                <a:spcPts val="385"/>
               </a:spcAft>
             </a:pPr>
             <a:r>
-              <a:rPr sz="1900" i="0" b="0">
+              <a:rPr sz="1800" i="0" b="0">
                 <a:solidFill>
                   <a:srgbClr val="D4D4D4"/>
                 </a:solidFill>
@@ -14995,11 +15130,11 @@
           <a:p>
             <a:pPr>
               <a:spcAft>
-                <a:spcPts val="407"/>
+                <a:spcPts val="385"/>
               </a:spcAft>
             </a:pPr>
             <a:r>
-              <a:rPr sz="1900" i="0" b="0">
+              <a:rPr sz="1800" i="0" b="0">
                 <a:solidFill>
                   <a:srgbClr val="569CD6"/>
                 </a:solidFill>
@@ -15008,7 +15143,7 @@
               <a:t>public</a:t>
             </a:r>
             <a:r>
-              <a:rPr sz="1900" i="0" b="0">
+              <a:rPr sz="1800" i="0" b="0">
                 <a:solidFill>
                   <a:srgbClr val="D4D4D4"/>
                 </a:solidFill>
@@ -15017,7 +15152,7 @@
               <a:t> </a:t>
             </a:r>
             <a:r>
-              <a:rPr sz="1900" i="0" b="0">
+              <a:rPr sz="1800" i="0" b="0">
                 <a:solidFill>
                   <a:srgbClr val="D4D4D4"/>
                 </a:solidFill>
@@ -15026,7 +15161,7 @@
               <a:t>Turno</a:t>
             </a:r>
             <a:r>
-              <a:rPr sz="1900" i="0" b="0">
+              <a:rPr sz="1800" i="0" b="0">
                 <a:solidFill>
                   <a:srgbClr val="D4D4D4"/>
                 </a:solidFill>
@@ -15035,7 +15170,7 @@
               <a:t> </a:t>
             </a:r>
             <a:r>
-              <a:rPr sz="1900" i="0" b="0">
+              <a:rPr sz="1800" i="0" b="0">
                 <a:solidFill>
                   <a:srgbClr val="DCDCAA"/>
                 </a:solidFill>
@@ -15044,7 +15179,7 @@
               <a:t>siguienteEnPantalla</a:t>
             </a:r>
             <a:r>
-              <a:rPr sz="1900" i="0" b="0">
+              <a:rPr sz="1800" i="0" b="0">
                 <a:solidFill>
                   <a:srgbClr val="D4D4D4"/>
                 </a:solidFill>
@@ -15056,11 +15191,11 @@
           <a:p>
             <a:pPr>
               <a:spcAft>
-                <a:spcPts val="407"/>
+                <a:spcPts val="385"/>
               </a:spcAft>
             </a:pPr>
             <a:r>
-              <a:rPr sz="1900" i="0" b="0">
+              <a:rPr sz="1800" i="0" b="0">
                 <a:solidFill>
                   <a:srgbClr val="D4D4D4"/>
                 </a:solidFill>
@@ -15069,7 +15204,7 @@
               <a:t>    </a:t>
             </a:r>
             <a:r>
-              <a:rPr sz="1900" i="0" b="0">
+              <a:rPr sz="1800" i="0" b="0">
                 <a:solidFill>
                   <a:srgbClr val="569CD6"/>
                 </a:solidFill>
@@ -15078,7 +15213,7 @@
               <a:t>return</a:t>
             </a:r>
             <a:r>
-              <a:rPr sz="1900" i="0" b="0">
+              <a:rPr sz="1800" i="0" b="0">
                 <a:solidFill>
                   <a:srgbClr val="D4D4D4"/>
                 </a:solidFill>
@@ -15087,7 +15222,7 @@
               <a:t> </a:t>
             </a:r>
             <a:r>
-              <a:rPr sz="1900" i="0" b="0">
+              <a:rPr sz="1800" i="0" b="0">
                 <a:solidFill>
                   <a:srgbClr val="DCDCAA"/>
                 </a:solidFill>
@@ -15096,7 +15231,7 @@
               <a:t>cola.peek</a:t>
             </a:r>
             <a:r>
-              <a:rPr sz="1900" i="0" b="0">
+              <a:rPr sz="1800" i="0" b="0">
                 <a:solidFill>
                   <a:srgbClr val="D4D4D4"/>
                 </a:solidFill>
@@ -15105,7 +15240,7 @@
               <a:t>(); </a:t>
             </a:r>
             <a:r>
-              <a:rPr sz="1900" i="1" b="0">
+              <a:rPr sz="1800" i="1" b="0">
                 <a:solidFill>
                   <a:srgbClr val="6A9955"/>
                 </a:solidFill>
@@ -15117,11 +15252,11 @@
           <a:p>
             <a:pPr>
               <a:spcAft>
-                <a:spcPts val="407"/>
+                <a:spcPts val="385"/>
               </a:spcAft>
             </a:pPr>
             <a:r>
-              <a:rPr sz="1900" i="0" b="0">
+              <a:rPr sz="1800" i="0" b="0">
                 <a:solidFill>
                   <a:srgbClr val="D4D4D4"/>
                 </a:solidFill>
